--- a/Presentations/26_05_26_Seminar.pptx
+++ b/Presentations/26_05_26_Seminar.pptx
@@ -5,7 +5,7 @@
     <p:sldMasterId id="2147483648" r:id="rId1"/>
   </p:sldMasterIdLst>
   <p:notesMasterIdLst>
-    <p:notesMasterId r:id="rId15"/>
+    <p:notesMasterId r:id="rId21"/>
   </p:notesMasterIdLst>
   <p:sldIdLst>
     <p:sldId id="256" r:id="rId2"/>
@@ -14,13 +14,19 @@
     <p:sldId id="259" r:id="rId5"/>
     <p:sldId id="260" r:id="rId6"/>
     <p:sldId id="267" r:id="rId7"/>
-    <p:sldId id="268" r:id="rId8"/>
-    <p:sldId id="271" r:id="rId9"/>
-    <p:sldId id="262" r:id="rId10"/>
-    <p:sldId id="269" r:id="rId11"/>
-    <p:sldId id="270" r:id="rId12"/>
-    <p:sldId id="266" r:id="rId13"/>
-    <p:sldId id="272" r:id="rId14"/>
+    <p:sldId id="273" r:id="rId8"/>
+    <p:sldId id="274" r:id="rId9"/>
+    <p:sldId id="268" r:id="rId10"/>
+    <p:sldId id="271" r:id="rId11"/>
+    <p:sldId id="262" r:id="rId12"/>
+    <p:sldId id="269" r:id="rId13"/>
+    <p:sldId id="270" r:id="rId14"/>
+    <p:sldId id="266" r:id="rId15"/>
+    <p:sldId id="275" r:id="rId16"/>
+    <p:sldId id="272" r:id="rId17"/>
+    <p:sldId id="276" r:id="rId18"/>
+    <p:sldId id="277" r:id="rId19"/>
+    <p:sldId id="278" r:id="rId20"/>
   </p:sldIdLst>
   <p:sldSz cx="9144000" cy="5143500" type="screen16x9"/>
   <p:notesSz cx="6858000" cy="9144000"/>
@@ -330,6 +336,787 @@
 </p:presentation>
 </file>
 
+<file path=ppt/charts/chart1.xml><?xml version="1.0" encoding="utf-8"?>
+<c:chartSpace xmlns:c="http://schemas.openxmlformats.org/drawingml/2006/chart" xmlns:a="http://schemas.openxmlformats.org/drawingml/2006/main" xmlns:r="http://schemas.openxmlformats.org/officeDocument/2006/relationships" xmlns:c16r2="http://schemas.microsoft.com/office/drawing/2015/06/chart">
+  <c:date1904 val="0"/>
+  <c:lang val="de-DE"/>
+  <c:roundedCorners val="0"/>
+  <mc:AlternateContent xmlns:mc="http://schemas.openxmlformats.org/markup-compatibility/2006">
+    <mc:Choice xmlns:c14="http://schemas.microsoft.com/office/drawing/2007/8/2/chart" Requires="c14">
+      <c14:style val="102"/>
+    </mc:Choice>
+    <mc:Fallback>
+      <c:style val="2"/>
+    </mc:Fallback>
+  </mc:AlternateContent>
+  <c:chart>
+    <c:title>
+      <c:overlay val="0"/>
+      <c:spPr>
+        <a:noFill/>
+        <a:ln>
+          <a:noFill/>
+        </a:ln>
+        <a:effectLst/>
+      </c:spPr>
+      <c:txPr>
+        <a:bodyPr rot="0" spcFirstLastPara="1" vertOverflow="ellipsis" vert="horz" wrap="square" anchor="ctr" anchorCtr="1"/>
+        <a:lstStyle/>
+        <a:p>
+          <a:pPr>
+            <a:defRPr sz="1862" b="0" i="0" u="none" strike="noStrike" kern="1200" spc="0" baseline="0">
+              <a:solidFill>
+                <a:schemeClr val="tx1">
+                  <a:lumMod val="65000"/>
+                  <a:lumOff val="35000"/>
+                </a:schemeClr>
+              </a:solidFill>
+              <a:latin typeface="+mn-lt"/>
+              <a:ea typeface="+mn-ea"/>
+              <a:cs typeface="+mn-cs"/>
+            </a:defRPr>
+          </a:pPr>
+          <a:endParaRPr lang="de-DE"/>
+        </a:p>
+      </c:txPr>
+    </c:title>
+    <c:autoTitleDeleted val="0"/>
+    <c:plotArea>
+      <c:layout/>
+      <c:pieChart>
+        <c:varyColors val="1"/>
+        <c:ser>
+          <c:idx val="0"/>
+          <c:order val="0"/>
+          <c:tx>
+            <c:strRef>
+              <c:f>Tabelle1!$B$1</c:f>
+              <c:strCache>
+                <c:ptCount val="1"/>
+                <c:pt idx="0">
+                  <c:v>App Code</c:v>
+                </c:pt>
+              </c:strCache>
+            </c:strRef>
+          </c:tx>
+          <c:dPt>
+            <c:idx val="0"/>
+            <c:bubble3D val="0"/>
+            <c:spPr>
+              <a:solidFill>
+                <a:schemeClr val="accent1"/>
+              </a:solidFill>
+              <a:ln w="19050">
+                <a:solidFill>
+                  <a:schemeClr val="lt1"/>
+                </a:solidFill>
+              </a:ln>
+              <a:effectLst/>
+            </c:spPr>
+            <c:extLst>
+              <c:ext xmlns:c16="http://schemas.microsoft.com/office/drawing/2014/chart" uri="{C3380CC4-5D6E-409C-BE32-E72D297353CC}">
+                <c16:uniqueId val="{00000001-CA88-4B92-BB65-D37342C02796}"/>
+              </c:ext>
+            </c:extLst>
+          </c:dPt>
+          <c:dPt>
+            <c:idx val="1"/>
+            <c:bubble3D val="0"/>
+            <c:spPr>
+              <a:solidFill>
+                <a:schemeClr val="accent2"/>
+              </a:solidFill>
+              <a:ln w="19050">
+                <a:solidFill>
+                  <a:schemeClr val="lt1"/>
+                </a:solidFill>
+              </a:ln>
+              <a:effectLst/>
+            </c:spPr>
+            <c:extLst>
+              <c:ext xmlns:c16="http://schemas.microsoft.com/office/drawing/2014/chart" uri="{C3380CC4-5D6E-409C-BE32-E72D297353CC}">
+                <c16:uniqueId val="{00000001-36D6-41FB-8562-19EF626D930C}"/>
+              </c:ext>
+            </c:extLst>
+          </c:dPt>
+          <c:cat>
+            <c:strRef>
+              <c:f>Tabelle1!$A$2:$A$3</c:f>
+              <c:strCache>
+                <c:ptCount val="2"/>
+                <c:pt idx="0">
+                  <c:v>Libraries</c:v>
+                </c:pt>
+                <c:pt idx="1">
+                  <c:v>Logic</c:v>
+                </c:pt>
+              </c:strCache>
+            </c:strRef>
+          </c:cat>
+          <c:val>
+            <c:numRef>
+              <c:f>Tabelle1!$B$2:$B$3</c:f>
+              <c:numCache>
+                <c:formatCode>General</c:formatCode>
+                <c:ptCount val="2"/>
+                <c:pt idx="0">
+                  <c:v>60</c:v>
+                </c:pt>
+                <c:pt idx="1">
+                  <c:v>40</c:v>
+                </c:pt>
+              </c:numCache>
+            </c:numRef>
+          </c:val>
+          <c:extLst>
+            <c:ext xmlns:c16="http://schemas.microsoft.com/office/drawing/2014/chart" uri="{C3380CC4-5D6E-409C-BE32-E72D297353CC}">
+              <c16:uniqueId val="{00000000-36D6-41FB-8562-19EF626D930C}"/>
+            </c:ext>
+          </c:extLst>
+        </c:ser>
+        <c:dLbls>
+          <c:showLegendKey val="0"/>
+          <c:showVal val="0"/>
+          <c:showCatName val="0"/>
+          <c:showSerName val="0"/>
+          <c:showPercent val="0"/>
+          <c:showBubbleSize val="0"/>
+          <c:showLeaderLines val="1"/>
+        </c:dLbls>
+        <c:firstSliceAng val="0"/>
+      </c:pieChart>
+      <c:spPr>
+        <a:noFill/>
+        <a:ln>
+          <a:noFill/>
+        </a:ln>
+        <a:effectLst/>
+      </c:spPr>
+    </c:plotArea>
+    <c:legend>
+      <c:legendPos val="b"/>
+      <c:overlay val="0"/>
+      <c:spPr>
+        <a:noFill/>
+        <a:ln>
+          <a:noFill/>
+        </a:ln>
+        <a:effectLst/>
+      </c:spPr>
+      <c:txPr>
+        <a:bodyPr rot="0" spcFirstLastPara="1" vertOverflow="ellipsis" vert="horz" wrap="square" anchor="ctr" anchorCtr="1"/>
+        <a:lstStyle/>
+        <a:p>
+          <a:pPr>
+            <a:defRPr sz="1197" b="0" i="0" u="none" strike="noStrike" kern="1200" baseline="0">
+              <a:solidFill>
+                <a:schemeClr val="tx1">
+                  <a:lumMod val="65000"/>
+                  <a:lumOff val="35000"/>
+                </a:schemeClr>
+              </a:solidFill>
+              <a:latin typeface="+mn-lt"/>
+              <a:ea typeface="+mn-ea"/>
+              <a:cs typeface="+mn-cs"/>
+            </a:defRPr>
+          </a:pPr>
+          <a:endParaRPr lang="de-DE"/>
+        </a:p>
+      </c:txPr>
+    </c:legend>
+    <c:plotVisOnly val="1"/>
+    <c:dispBlanksAs val="gap"/>
+    <c:showDLblsOverMax val="0"/>
+    <c:extLst>
+      <c:ext xmlns:c16r3="http://schemas.microsoft.com/office/drawing/2017/03/chart" uri="{56B9EC1D-385E-4148-901F-78D8002777C0}">
+        <c16r3:dataDisplayOptions16>
+          <c16r3:dispNaAsBlank val="1"/>
+        </c16r3:dataDisplayOptions16>
+      </c:ext>
+    </c:extLst>
+  </c:chart>
+  <c:spPr>
+    <a:noFill/>
+    <a:ln>
+      <a:noFill/>
+    </a:ln>
+    <a:effectLst/>
+  </c:spPr>
+  <c:txPr>
+    <a:bodyPr/>
+    <a:lstStyle/>
+    <a:p>
+      <a:pPr>
+        <a:defRPr/>
+      </a:pPr>
+      <a:endParaRPr lang="de-DE"/>
+    </a:p>
+  </c:txPr>
+  <c:externalData r:id="rId3">
+    <c:autoUpdate val="0"/>
+  </c:externalData>
+</c:chartSpace>
+</file>
+
+<file path=ppt/charts/colors1.xml><?xml version="1.0" encoding="utf-8"?>
+<cs:colorStyle xmlns:cs="http://schemas.microsoft.com/office/drawing/2012/chartStyle" xmlns:a="http://schemas.openxmlformats.org/drawingml/2006/main" meth="cycle" id="10">
+  <a:schemeClr val="accent1"/>
+  <a:schemeClr val="accent2"/>
+  <a:schemeClr val="accent3"/>
+  <a:schemeClr val="accent4"/>
+  <a:schemeClr val="accent5"/>
+  <a:schemeClr val="accent6"/>
+  <cs:variation/>
+  <cs:variation>
+    <a:lumMod val="60000"/>
+  </cs:variation>
+  <cs:variation>
+    <a:lumMod val="80000"/>
+    <a:lumOff val="20000"/>
+  </cs:variation>
+  <cs:variation>
+    <a:lumMod val="80000"/>
+  </cs:variation>
+  <cs:variation>
+    <a:lumMod val="60000"/>
+    <a:lumOff val="40000"/>
+  </cs:variation>
+  <cs:variation>
+    <a:lumMod val="50000"/>
+  </cs:variation>
+  <cs:variation>
+    <a:lumMod val="70000"/>
+    <a:lumOff val="30000"/>
+  </cs:variation>
+  <cs:variation>
+    <a:lumMod val="70000"/>
+  </cs:variation>
+  <cs:variation>
+    <a:lumMod val="50000"/>
+    <a:lumOff val="50000"/>
+  </cs:variation>
+</cs:colorStyle>
+</file>
+
+<file path=ppt/charts/style1.xml><?xml version="1.0" encoding="utf-8"?>
+<cs:chartStyle xmlns:cs="http://schemas.microsoft.com/office/drawing/2012/chartStyle" xmlns:a="http://schemas.openxmlformats.org/drawingml/2006/main" id="251">
+  <cs:axisTitle>
+    <cs:lnRef idx="0"/>
+    <cs:fillRef idx="0"/>
+    <cs:effectRef idx="0"/>
+    <cs:fontRef idx="minor">
+      <a:schemeClr val="tx1">
+        <a:lumMod val="65000"/>
+        <a:lumOff val="35000"/>
+      </a:schemeClr>
+    </cs:fontRef>
+    <cs:defRPr sz="1330" kern="1200"/>
+  </cs:axisTitle>
+  <cs:categoryAxis>
+    <cs:lnRef idx="0"/>
+    <cs:fillRef idx="0"/>
+    <cs:effectRef idx="0"/>
+    <cs:fontRef idx="minor">
+      <a:schemeClr val="tx1">
+        <a:lumMod val="65000"/>
+        <a:lumOff val="35000"/>
+      </a:schemeClr>
+    </cs:fontRef>
+    <cs:spPr>
+      <a:ln w="9525" cap="flat" cmpd="sng" algn="ctr">
+        <a:solidFill>
+          <a:schemeClr val="tx1">
+            <a:lumMod val="15000"/>
+            <a:lumOff val="85000"/>
+          </a:schemeClr>
+        </a:solidFill>
+        <a:round/>
+      </a:ln>
+    </cs:spPr>
+    <cs:defRPr sz="1197" kern="1200"/>
+  </cs:categoryAxis>
+  <cs:chartArea mods="allowNoFillOverride allowNoLineOverride">
+    <cs:lnRef idx="0"/>
+    <cs:fillRef idx="0"/>
+    <cs:effectRef idx="0"/>
+    <cs:fontRef idx="minor">
+      <a:schemeClr val="tx1"/>
+    </cs:fontRef>
+    <cs:spPr>
+      <a:solidFill>
+        <a:schemeClr val="bg1"/>
+      </a:solidFill>
+      <a:ln w="9525" cap="flat" cmpd="sng" algn="ctr">
+        <a:solidFill>
+          <a:schemeClr val="tx1">
+            <a:lumMod val="15000"/>
+            <a:lumOff val="85000"/>
+          </a:schemeClr>
+        </a:solidFill>
+        <a:round/>
+      </a:ln>
+    </cs:spPr>
+    <cs:defRPr sz="1197" kern="1200"/>
+  </cs:chartArea>
+  <cs:dataLabel>
+    <cs:lnRef idx="0"/>
+    <cs:fillRef idx="0"/>
+    <cs:effectRef idx="0"/>
+    <cs:fontRef idx="minor">
+      <a:schemeClr val="tx1">
+        <a:lumMod val="75000"/>
+        <a:lumOff val="25000"/>
+      </a:schemeClr>
+    </cs:fontRef>
+    <cs:defRPr sz="1197" kern="1200"/>
+  </cs:dataLabel>
+  <cs:dataLabelCallout>
+    <cs:lnRef idx="0"/>
+    <cs:fillRef idx="0"/>
+    <cs:effectRef idx="0"/>
+    <cs:fontRef idx="minor">
+      <a:schemeClr val="dk1">
+        <a:lumMod val="65000"/>
+        <a:lumOff val="35000"/>
+      </a:schemeClr>
+    </cs:fontRef>
+    <cs:spPr>
+      <a:solidFill>
+        <a:schemeClr val="lt1"/>
+      </a:solidFill>
+      <a:ln>
+        <a:solidFill>
+          <a:schemeClr val="dk1">
+            <a:lumMod val="25000"/>
+            <a:lumOff val="75000"/>
+          </a:schemeClr>
+        </a:solidFill>
+      </a:ln>
+    </cs:spPr>
+    <cs:defRPr sz="1197" kern="1200"/>
+    <cs:bodyPr rot="0" spcFirstLastPara="1" vertOverflow="clip" horzOverflow="clip" vert="horz" wrap="square" lIns="36576" tIns="18288" rIns="36576" bIns="18288" anchor="ctr" anchorCtr="1">
+      <a:spAutoFit/>
+    </cs:bodyPr>
+  </cs:dataLabelCallout>
+  <cs:dataPoint>
+    <cs:lnRef idx="0"/>
+    <cs:fillRef idx="1">
+      <cs:styleClr val="auto"/>
+    </cs:fillRef>
+    <cs:effectRef idx="0"/>
+    <cs:fontRef idx="minor">
+      <a:schemeClr val="tx1"/>
+    </cs:fontRef>
+    <cs:spPr>
+      <a:ln w="19050">
+        <a:solidFill>
+          <a:schemeClr val="lt1"/>
+        </a:solidFill>
+      </a:ln>
+    </cs:spPr>
+  </cs:dataPoint>
+  <cs:dataPoint3D>
+    <cs:lnRef idx="0"/>
+    <cs:fillRef idx="1">
+      <cs:styleClr val="auto"/>
+    </cs:fillRef>
+    <cs:effectRef idx="0"/>
+    <cs:fontRef idx="minor">
+      <a:schemeClr val="tx1"/>
+    </cs:fontRef>
+    <cs:spPr>
+      <a:ln w="25400">
+        <a:solidFill>
+          <a:schemeClr val="lt1"/>
+        </a:solidFill>
+      </a:ln>
+    </cs:spPr>
+  </cs:dataPoint3D>
+  <cs:dataPointLine>
+    <cs:lnRef idx="0">
+      <cs:styleClr val="auto"/>
+    </cs:lnRef>
+    <cs:fillRef idx="0"/>
+    <cs:effectRef idx="0"/>
+    <cs:fontRef idx="minor">
+      <a:schemeClr val="tx1"/>
+    </cs:fontRef>
+    <cs:spPr>
+      <a:ln w="28575" cap="rnd">
+        <a:solidFill>
+          <a:schemeClr val="phClr"/>
+        </a:solidFill>
+        <a:round/>
+      </a:ln>
+    </cs:spPr>
+  </cs:dataPointLine>
+  <cs:dataPointMarker>
+    <cs:lnRef idx="0">
+      <cs:styleClr val="auto"/>
+    </cs:lnRef>
+    <cs:fillRef idx="1">
+      <cs:styleClr val="auto"/>
+    </cs:fillRef>
+    <cs:effectRef idx="0"/>
+    <cs:fontRef idx="minor">
+      <a:schemeClr val="tx1"/>
+    </cs:fontRef>
+    <cs:spPr>
+      <a:ln w="9525">
+        <a:solidFill>
+          <a:schemeClr val="phClr"/>
+        </a:solidFill>
+      </a:ln>
+    </cs:spPr>
+  </cs:dataPointMarker>
+  <cs:dataPointMarkerLayout symbol="circle" size="5"/>
+  <cs:dataPointWireframe>
+    <cs:lnRef idx="0">
+      <cs:styleClr val="auto"/>
+    </cs:lnRef>
+    <cs:fillRef idx="0"/>
+    <cs:effectRef idx="0"/>
+    <cs:fontRef idx="minor">
+      <a:schemeClr val="tx1"/>
+    </cs:fontRef>
+    <cs:spPr>
+      <a:ln w="9525" cap="rnd">
+        <a:solidFill>
+          <a:schemeClr val="phClr"/>
+        </a:solidFill>
+        <a:round/>
+      </a:ln>
+    </cs:spPr>
+  </cs:dataPointWireframe>
+  <cs:dataTable>
+    <cs:lnRef idx="0"/>
+    <cs:fillRef idx="0"/>
+    <cs:effectRef idx="0"/>
+    <cs:fontRef idx="minor">
+      <a:schemeClr val="tx1">
+        <a:lumMod val="65000"/>
+        <a:lumOff val="35000"/>
+      </a:schemeClr>
+    </cs:fontRef>
+    <cs:spPr>
+      <a:noFill/>
+      <a:ln w="9525" cap="flat" cmpd="sng" algn="ctr">
+        <a:solidFill>
+          <a:schemeClr val="tx1">
+            <a:lumMod val="15000"/>
+            <a:lumOff val="85000"/>
+          </a:schemeClr>
+        </a:solidFill>
+        <a:round/>
+      </a:ln>
+    </cs:spPr>
+    <cs:defRPr sz="1197" kern="1200"/>
+  </cs:dataTable>
+  <cs:downBar>
+    <cs:lnRef idx="0"/>
+    <cs:fillRef idx="0"/>
+    <cs:effectRef idx="0"/>
+    <cs:fontRef idx="minor">
+      <a:schemeClr val="tx1"/>
+    </cs:fontRef>
+    <cs:spPr>
+      <a:solidFill>
+        <a:schemeClr val="dk1">
+          <a:lumMod val="75000"/>
+          <a:lumOff val="25000"/>
+        </a:schemeClr>
+      </a:solidFill>
+      <a:ln w="9525" cap="flat" cmpd="sng" algn="ctr">
+        <a:solidFill>
+          <a:schemeClr val="tx1">
+            <a:lumMod val="65000"/>
+            <a:lumOff val="35000"/>
+          </a:schemeClr>
+        </a:solidFill>
+        <a:round/>
+      </a:ln>
+    </cs:spPr>
+  </cs:downBar>
+  <cs:dropLine>
+    <cs:lnRef idx="0"/>
+    <cs:fillRef idx="0"/>
+    <cs:effectRef idx="0"/>
+    <cs:fontRef idx="minor">
+      <a:schemeClr val="tx1"/>
+    </cs:fontRef>
+    <cs:spPr>
+      <a:ln w="9525" cap="flat" cmpd="sng" algn="ctr">
+        <a:solidFill>
+          <a:schemeClr val="tx1">
+            <a:lumMod val="35000"/>
+            <a:lumOff val="65000"/>
+          </a:schemeClr>
+        </a:solidFill>
+        <a:round/>
+      </a:ln>
+    </cs:spPr>
+  </cs:dropLine>
+  <cs:errorBar>
+    <cs:lnRef idx="0"/>
+    <cs:fillRef idx="0"/>
+    <cs:effectRef idx="0"/>
+    <cs:fontRef idx="minor">
+      <a:schemeClr val="tx1"/>
+    </cs:fontRef>
+    <cs:spPr>
+      <a:ln w="9525" cap="flat" cmpd="sng" algn="ctr">
+        <a:solidFill>
+          <a:schemeClr val="tx1">
+            <a:lumMod val="65000"/>
+            <a:lumOff val="35000"/>
+          </a:schemeClr>
+        </a:solidFill>
+        <a:round/>
+      </a:ln>
+    </cs:spPr>
+  </cs:errorBar>
+  <cs:floor>
+    <cs:lnRef idx="0"/>
+    <cs:fillRef idx="0"/>
+    <cs:effectRef idx="0"/>
+    <cs:fontRef idx="minor">
+      <a:schemeClr val="tx1"/>
+    </cs:fontRef>
+    <cs:spPr>
+      <a:noFill/>
+      <a:ln>
+        <a:noFill/>
+      </a:ln>
+    </cs:spPr>
+  </cs:floor>
+  <cs:gridlineMajor>
+    <cs:lnRef idx="0"/>
+    <cs:fillRef idx="0"/>
+    <cs:effectRef idx="0"/>
+    <cs:fontRef idx="minor">
+      <a:schemeClr val="tx1"/>
+    </cs:fontRef>
+    <cs:spPr>
+      <a:ln w="9525" cap="flat" cmpd="sng" algn="ctr">
+        <a:solidFill>
+          <a:schemeClr val="tx1">
+            <a:lumMod val="15000"/>
+            <a:lumOff val="85000"/>
+          </a:schemeClr>
+        </a:solidFill>
+        <a:round/>
+      </a:ln>
+    </cs:spPr>
+  </cs:gridlineMajor>
+  <cs:gridlineMinor>
+    <cs:lnRef idx="0"/>
+    <cs:fillRef idx="0"/>
+    <cs:effectRef idx="0"/>
+    <cs:fontRef idx="minor">
+      <a:schemeClr val="tx1"/>
+    </cs:fontRef>
+    <cs:spPr>
+      <a:ln w="9525" cap="flat" cmpd="sng" algn="ctr">
+        <a:solidFill>
+          <a:schemeClr val="tx1">
+            <a:lumMod val="5000"/>
+            <a:lumOff val="95000"/>
+          </a:schemeClr>
+        </a:solidFill>
+        <a:round/>
+      </a:ln>
+    </cs:spPr>
+  </cs:gridlineMinor>
+  <cs:hiLoLine>
+    <cs:lnRef idx="0"/>
+    <cs:fillRef idx="0"/>
+    <cs:effectRef idx="0"/>
+    <cs:fontRef idx="minor">
+      <a:schemeClr val="tx1"/>
+    </cs:fontRef>
+    <cs:spPr>
+      <a:ln w="9525" cap="flat" cmpd="sng" algn="ctr">
+        <a:solidFill>
+          <a:schemeClr val="tx1">
+            <a:lumMod val="50000"/>
+            <a:lumOff val="50000"/>
+          </a:schemeClr>
+        </a:solidFill>
+        <a:round/>
+      </a:ln>
+    </cs:spPr>
+  </cs:hiLoLine>
+  <cs:leaderLine>
+    <cs:lnRef idx="0"/>
+    <cs:fillRef idx="0"/>
+    <cs:effectRef idx="0"/>
+    <cs:fontRef idx="minor">
+      <a:schemeClr val="tx1"/>
+    </cs:fontRef>
+    <cs:spPr>
+      <a:ln w="9525" cap="flat" cmpd="sng" algn="ctr">
+        <a:solidFill>
+          <a:schemeClr val="tx1">
+            <a:lumMod val="35000"/>
+            <a:lumOff val="65000"/>
+          </a:schemeClr>
+        </a:solidFill>
+        <a:round/>
+      </a:ln>
+    </cs:spPr>
+  </cs:leaderLine>
+  <cs:legend>
+    <cs:lnRef idx="0"/>
+    <cs:fillRef idx="0"/>
+    <cs:effectRef idx="0"/>
+    <cs:fontRef idx="minor">
+      <a:schemeClr val="tx1">
+        <a:lumMod val="65000"/>
+        <a:lumOff val="35000"/>
+      </a:schemeClr>
+    </cs:fontRef>
+    <cs:defRPr sz="1197" kern="1200"/>
+  </cs:legend>
+  <cs:plotArea mods="allowNoFillOverride allowNoLineOverride">
+    <cs:lnRef idx="0"/>
+    <cs:fillRef idx="0"/>
+    <cs:effectRef idx="0"/>
+    <cs:fontRef idx="minor">
+      <a:schemeClr val="tx1"/>
+    </cs:fontRef>
+  </cs:plotArea>
+  <cs:plotArea3D mods="allowNoFillOverride allowNoLineOverride">
+    <cs:lnRef idx="0"/>
+    <cs:fillRef idx="0"/>
+    <cs:effectRef idx="0"/>
+    <cs:fontRef idx="minor">
+      <a:schemeClr val="tx1"/>
+    </cs:fontRef>
+  </cs:plotArea3D>
+  <cs:seriesAxis>
+    <cs:lnRef idx="0"/>
+    <cs:fillRef idx="0"/>
+    <cs:effectRef idx="0"/>
+    <cs:fontRef idx="minor">
+      <a:schemeClr val="tx1">
+        <a:lumMod val="65000"/>
+        <a:lumOff val="35000"/>
+      </a:schemeClr>
+    </cs:fontRef>
+    <cs:defRPr sz="1197" kern="1200"/>
+  </cs:seriesAxis>
+  <cs:seriesLine>
+    <cs:lnRef idx="0"/>
+    <cs:fillRef idx="0"/>
+    <cs:effectRef idx="0"/>
+    <cs:fontRef idx="minor">
+      <a:schemeClr val="tx1"/>
+    </cs:fontRef>
+    <cs:spPr>
+      <a:ln w="9525" cap="flat" cmpd="sng" algn="ctr">
+        <a:solidFill>
+          <a:schemeClr val="tx1">
+            <a:lumMod val="35000"/>
+            <a:lumOff val="65000"/>
+          </a:schemeClr>
+        </a:solidFill>
+        <a:round/>
+      </a:ln>
+    </cs:spPr>
+  </cs:seriesLine>
+  <cs:title>
+    <cs:lnRef idx="0"/>
+    <cs:fillRef idx="0"/>
+    <cs:effectRef idx="0"/>
+    <cs:fontRef idx="minor">
+      <a:schemeClr val="tx1">
+        <a:lumMod val="65000"/>
+        <a:lumOff val="35000"/>
+      </a:schemeClr>
+    </cs:fontRef>
+    <cs:defRPr sz="1862" b="0" kern="1200" spc="0" baseline="0"/>
+  </cs:title>
+  <cs:trendline>
+    <cs:lnRef idx="0">
+      <cs:styleClr val="auto"/>
+    </cs:lnRef>
+    <cs:fillRef idx="0"/>
+    <cs:effectRef idx="0"/>
+    <cs:fontRef idx="minor">
+      <a:schemeClr val="tx1"/>
+    </cs:fontRef>
+    <cs:spPr>
+      <a:ln w="19050" cap="rnd">
+        <a:solidFill>
+          <a:schemeClr val="phClr"/>
+        </a:solidFill>
+        <a:prstDash val="sysDot"/>
+      </a:ln>
+    </cs:spPr>
+  </cs:trendline>
+  <cs:trendlineLabel>
+    <cs:lnRef idx="0"/>
+    <cs:fillRef idx="0"/>
+    <cs:effectRef idx="0"/>
+    <cs:fontRef idx="minor">
+      <a:schemeClr val="tx1">
+        <a:lumMod val="65000"/>
+        <a:lumOff val="35000"/>
+      </a:schemeClr>
+    </cs:fontRef>
+    <cs:defRPr sz="1197" kern="1200"/>
+  </cs:trendlineLabel>
+  <cs:upBar>
+    <cs:lnRef idx="0"/>
+    <cs:fillRef idx="0"/>
+    <cs:effectRef idx="0"/>
+    <cs:fontRef idx="minor">
+      <a:schemeClr val="tx1"/>
+    </cs:fontRef>
+    <cs:spPr>
+      <a:solidFill>
+        <a:schemeClr val="lt1"/>
+      </a:solidFill>
+      <a:ln w="9525" cap="flat" cmpd="sng" algn="ctr">
+        <a:solidFill>
+          <a:schemeClr val="tx1">
+            <a:lumMod val="65000"/>
+            <a:lumOff val="35000"/>
+          </a:schemeClr>
+        </a:solidFill>
+        <a:round/>
+      </a:ln>
+    </cs:spPr>
+  </cs:upBar>
+  <cs:valueAxis>
+    <cs:lnRef idx="0"/>
+    <cs:fillRef idx="0"/>
+    <cs:effectRef idx="0"/>
+    <cs:fontRef idx="minor">
+      <a:schemeClr val="tx1">
+        <a:lumMod val="65000"/>
+        <a:lumOff val="35000"/>
+      </a:schemeClr>
+    </cs:fontRef>
+    <cs:defRPr sz="1197" kern="1200"/>
+  </cs:valueAxis>
+  <cs:wall>
+    <cs:lnRef idx="0"/>
+    <cs:fillRef idx="0"/>
+    <cs:effectRef idx="0"/>
+    <cs:fontRef idx="minor">
+      <a:schemeClr val="tx1"/>
+    </cs:fontRef>
+    <cs:spPr>
+      <a:noFill/>
+      <a:ln>
+        <a:noFill/>
+      </a:ln>
+    </cs:spPr>
+  </cs:wall>
+</cs:chartStyle>
+</file>
+
 <file path=ppt/notesMasters/notesMaster1.xml><?xml version="1.0" encoding="utf-8"?>
 <p:notesMaster xmlns:a="http://schemas.openxmlformats.org/drawingml/2006/main" xmlns:r="http://schemas.openxmlformats.org/officeDocument/2006/relationships" xmlns:p="http://schemas.openxmlformats.org/presentationml/2006/main">
   <p:cSld>
@@ -552,6 +1339,545 @@
 </p:notes>
 </file>
 
+<file path=ppt/notesSlides/notesSlide10.xml><?xml version="1.0" encoding="utf-8"?>
+<p:notes xmlns:a="http://schemas.openxmlformats.org/drawingml/2006/main" xmlns:r="http://schemas.openxmlformats.org/officeDocument/2006/relationships" xmlns:p="http://schemas.openxmlformats.org/presentationml/2006/main">
+  <p:cSld>
+    <p:spTree>
+      <p:nvGrpSpPr>
+        <p:cNvPr id="1" name=""/>
+        <p:cNvGrpSpPr/>
+        <p:nvPr/>
+      </p:nvGrpSpPr>
+      <p:grpSpPr>
+        <a:xfrm>
+          <a:off x="0" y="0"/>
+          <a:ext cx="0" cy="0"/>
+          <a:chOff x="0" y="0"/>
+          <a:chExt cx="0" cy="0"/>
+        </a:xfrm>
+      </p:grpSpPr>
+      <p:sp>
+        <p:nvSpPr>
+          <p:cNvPr id="2" name="Folienbildplatzhalter 1"/>
+          <p:cNvSpPr>
+            <a:spLocks noGrp="1" noRot="1" noChangeAspect="1"/>
+          </p:cNvSpPr>
+          <p:nvPr>
+            <p:ph type="sldImg"/>
+          </p:nvPr>
+        </p:nvSpPr>
+        <p:spPr>
+          <a:xfrm>
+            <a:off x="381000" y="685800"/>
+            <a:ext cx="6096000" cy="3429000"/>
+          </a:xfrm>
+        </p:spPr>
+      </p:sp>
+      <p:sp>
+        <p:nvSpPr>
+          <p:cNvPr id="3" name="Notizenplatzhalter 2"/>
+          <p:cNvSpPr>
+            <a:spLocks noGrp="1"/>
+          </p:cNvSpPr>
+          <p:nvPr>
+            <p:ph type="body" idx="1"/>
+          </p:nvPr>
+        </p:nvSpPr>
+        <p:spPr/>
+        <p:txBody>
+          <a:bodyPr/>
+          <a:lstStyle/>
+          <a:p>
+            <a:r>
+              <a:rPr lang="en-GB" noProof="0" dirty="0"/>
+              <a:t>Language Model</a:t>
+            </a:r>
+          </a:p>
+          <a:p>
+            <a:r>
+              <a:rPr lang="en-GB" noProof="0" dirty="0"/>
+              <a:t>Pretrained on unlabelled data</a:t>
+            </a:r>
+          </a:p>
+          <a:p>
+            <a:r>
+              <a:rPr lang="en-GB" dirty="0"/>
+              <a:t>Hard to find data set</a:t>
+            </a:r>
+            <a:endParaRPr lang="en-GB" noProof="0" dirty="0"/>
+          </a:p>
+          <a:p>
+            <a:r>
+              <a:rPr lang="en-GB" noProof="0" dirty="0" err="1"/>
+              <a:t>LibAttention</a:t>
+            </a:r>
+            <a:endParaRPr lang="en-GB" noProof="0" dirty="0"/>
+          </a:p>
+          <a:p>
+            <a:endParaRPr lang="de-CH" dirty="0"/>
+          </a:p>
+        </p:txBody>
+      </p:sp>
+    </p:spTree>
+    <p:extLst>
+      <p:ext uri="{BB962C8B-B14F-4D97-AF65-F5344CB8AC3E}">
+        <p14:creationId xmlns:p14="http://schemas.microsoft.com/office/powerpoint/2010/main" val="3643931675"/>
+      </p:ext>
+    </p:extLst>
+  </p:cSld>
+  <p:clrMapOvr>
+    <a:masterClrMapping/>
+  </p:clrMapOvr>
+</p:notes>
+</file>
+
+<file path=ppt/notesSlides/notesSlide11.xml><?xml version="1.0" encoding="utf-8"?>
+<p:notes xmlns:a="http://schemas.openxmlformats.org/drawingml/2006/main" xmlns:r="http://schemas.openxmlformats.org/officeDocument/2006/relationships" xmlns:p="http://schemas.openxmlformats.org/presentationml/2006/main">
+  <p:cSld>
+    <p:spTree>
+      <p:nvGrpSpPr>
+        <p:cNvPr id="1" name=""/>
+        <p:cNvGrpSpPr/>
+        <p:nvPr/>
+      </p:nvGrpSpPr>
+      <p:grpSpPr>
+        <a:xfrm>
+          <a:off x="0" y="0"/>
+          <a:ext cx="0" cy="0"/>
+          <a:chOff x="0" y="0"/>
+          <a:chExt cx="0" cy="0"/>
+        </a:xfrm>
+      </p:grpSpPr>
+      <p:sp>
+        <p:nvSpPr>
+          <p:cNvPr id="2" name="Folienbildplatzhalter 1"/>
+          <p:cNvSpPr>
+            <a:spLocks noGrp="1" noRot="1" noChangeAspect="1"/>
+          </p:cNvSpPr>
+          <p:nvPr>
+            <p:ph type="sldImg"/>
+          </p:nvPr>
+        </p:nvSpPr>
+        <p:spPr>
+          <a:xfrm>
+            <a:off x="381000" y="685800"/>
+            <a:ext cx="6096000" cy="3429000"/>
+          </a:xfrm>
+        </p:spPr>
+      </p:sp>
+      <p:sp>
+        <p:nvSpPr>
+          <p:cNvPr id="3" name="Notizenplatzhalter 2"/>
+          <p:cNvSpPr>
+            <a:spLocks noGrp="1"/>
+          </p:cNvSpPr>
+          <p:nvPr>
+            <p:ph type="body" idx="1"/>
+          </p:nvPr>
+        </p:nvSpPr>
+        <p:spPr/>
+        <p:txBody>
+          <a:bodyPr/>
+          <a:lstStyle/>
+          <a:p>
+            <a:r>
+              <a:rPr lang="de-CH" dirty="0"/>
+              <a:t>Sources: </a:t>
+            </a:r>
+            <a:r>
+              <a:rPr lang="de-CH" dirty="0" err="1"/>
+              <a:t>Github</a:t>
+            </a:r>
+            <a:r>
+              <a:rPr lang="de-CH" dirty="0"/>
+              <a:t>, </a:t>
+            </a:r>
+            <a:r>
+              <a:rPr lang="de-CH" dirty="0" err="1"/>
+              <a:t>Fdroid</a:t>
+            </a:r>
+            <a:endParaRPr lang="de-CH" dirty="0"/>
+          </a:p>
+          <a:p>
+            <a:r>
+              <a:rPr lang="en-GB" noProof="0" dirty="0"/>
+              <a:t>Only one independent benchmark (2025)</a:t>
+            </a:r>
+          </a:p>
+          <a:p>
+            <a:r>
+              <a:rPr lang="en-GB" noProof="0" dirty="0"/>
+              <a:t>Find APKs on GitHub &amp; F-Droid</a:t>
+            </a:r>
+          </a:p>
+          <a:p>
+            <a:r>
+              <a:rPr lang="en-GB" noProof="0" dirty="0"/>
+              <a:t>Extract TPLs</a:t>
+            </a:r>
+          </a:p>
+          <a:p>
+            <a:r>
+              <a:rPr lang="en-GB" noProof="0" dirty="0"/>
+              <a:t>Test selected tools</a:t>
+            </a:r>
+          </a:p>
+          <a:p>
+            <a:r>
+              <a:rPr lang="en-GB" noProof="0" dirty="0"/>
+              <a:t>Hybrid Frameworks excluded</a:t>
+            </a:r>
+          </a:p>
+          <a:p>
+            <a:endParaRPr lang="de-CH" dirty="0"/>
+          </a:p>
+        </p:txBody>
+      </p:sp>
+    </p:spTree>
+    <p:extLst>
+      <p:ext uri="{BB962C8B-B14F-4D97-AF65-F5344CB8AC3E}">
+        <p14:creationId xmlns:p14="http://schemas.microsoft.com/office/powerpoint/2010/main" val="2985197927"/>
+      </p:ext>
+    </p:extLst>
+  </p:cSld>
+  <p:clrMapOvr>
+    <a:masterClrMapping/>
+  </p:clrMapOvr>
+</p:notes>
+</file>
+
+<file path=ppt/notesSlides/notesSlide12.xml><?xml version="1.0" encoding="utf-8"?>
+<p:notes xmlns:a="http://schemas.openxmlformats.org/drawingml/2006/main" xmlns:r="http://schemas.openxmlformats.org/officeDocument/2006/relationships" xmlns:p="http://schemas.openxmlformats.org/presentationml/2006/main">
+  <p:cSld>
+    <p:spTree>
+      <p:nvGrpSpPr>
+        <p:cNvPr id="1" name=""/>
+        <p:cNvGrpSpPr/>
+        <p:nvPr/>
+      </p:nvGrpSpPr>
+      <p:grpSpPr>
+        <a:xfrm>
+          <a:off x="0" y="0"/>
+          <a:ext cx="0" cy="0"/>
+          <a:chOff x="0" y="0"/>
+          <a:chExt cx="0" cy="0"/>
+        </a:xfrm>
+      </p:grpSpPr>
+      <p:sp>
+        <p:nvSpPr>
+          <p:cNvPr id="2" name="Folienbildplatzhalter 1"/>
+          <p:cNvSpPr>
+            <a:spLocks noGrp="1" noRot="1" noChangeAspect="1"/>
+          </p:cNvSpPr>
+          <p:nvPr>
+            <p:ph type="sldImg"/>
+          </p:nvPr>
+        </p:nvSpPr>
+        <p:spPr>
+          <a:xfrm>
+            <a:off x="381000" y="685800"/>
+            <a:ext cx="6096000" cy="3429000"/>
+          </a:xfrm>
+        </p:spPr>
+      </p:sp>
+      <p:sp>
+        <p:nvSpPr>
+          <p:cNvPr id="3" name="Notizenplatzhalter 2"/>
+          <p:cNvSpPr>
+            <a:spLocks noGrp="1"/>
+          </p:cNvSpPr>
+          <p:nvPr>
+            <p:ph type="body" idx="1"/>
+          </p:nvPr>
+        </p:nvSpPr>
+        <p:spPr/>
+        <p:txBody>
+          <a:bodyPr/>
+          <a:lstStyle/>
+          <a:p>
+            <a:r>
+              <a:rPr lang="de-CH" dirty="0"/>
+              <a:t>=&gt; People </a:t>
+            </a:r>
+            <a:r>
+              <a:rPr lang="de-CH" dirty="0" err="1"/>
+              <a:t>overrate</a:t>
+            </a:r>
+            <a:r>
+              <a:rPr lang="de-CH" dirty="0"/>
+              <a:t> </a:t>
+            </a:r>
+            <a:r>
+              <a:rPr lang="de-CH" dirty="0" err="1"/>
+              <a:t>their</a:t>
+            </a:r>
+            <a:r>
+              <a:rPr lang="de-CH" dirty="0"/>
+              <a:t> </a:t>
+            </a:r>
+            <a:r>
+              <a:rPr lang="de-CH" dirty="0" err="1"/>
+              <a:t>tools</a:t>
+            </a:r>
+            <a:r>
+              <a:rPr lang="de-CH" dirty="0"/>
+              <a:t> in </a:t>
+            </a:r>
+            <a:r>
+              <a:rPr lang="de-CH" dirty="0" err="1"/>
+              <a:t>papers</a:t>
+            </a:r>
+            <a:endParaRPr lang="de-CH" dirty="0"/>
+          </a:p>
+          <a:p>
+            <a:r>
+              <a:rPr lang="de-CH" dirty="0"/>
+              <a:t>TP: </a:t>
+            </a:r>
+            <a:r>
+              <a:rPr lang="de-CH" dirty="0" err="1"/>
+              <a:t>correctly</a:t>
+            </a:r>
+            <a:r>
+              <a:rPr lang="de-CH" dirty="0"/>
+              <a:t> </a:t>
+            </a:r>
+            <a:r>
+              <a:rPr lang="de-CH" dirty="0" err="1"/>
+              <a:t>identified</a:t>
+            </a:r>
+            <a:br>
+              <a:rPr lang="de-CH" dirty="0"/>
+            </a:br>
+            <a:r>
+              <a:rPr lang="de-CH" dirty="0"/>
+              <a:t>FP: </a:t>
+            </a:r>
+            <a:r>
+              <a:rPr lang="de-CH" dirty="0" err="1"/>
+              <a:t>incorrectly</a:t>
+            </a:r>
+            <a:r>
+              <a:rPr lang="de-CH" dirty="0"/>
+              <a:t> </a:t>
+            </a:r>
+            <a:r>
+              <a:rPr lang="de-CH" dirty="0" err="1"/>
+              <a:t>identified</a:t>
+            </a:r>
+            <a:r>
+              <a:rPr lang="de-CH" dirty="0"/>
+              <a:t> </a:t>
+            </a:r>
+            <a:r>
+              <a:rPr lang="de-CH" dirty="0" err="1"/>
+              <a:t>as</a:t>
+            </a:r>
+            <a:r>
+              <a:rPr lang="de-CH" dirty="0"/>
+              <a:t> </a:t>
+            </a:r>
+            <a:r>
+              <a:rPr lang="de-CH" dirty="0" err="1"/>
+              <a:t>present</a:t>
+            </a:r>
+            <a:r>
+              <a:rPr lang="de-CH" dirty="0"/>
+              <a:t> </a:t>
+            </a:r>
+            <a:r>
+              <a:rPr lang="de-CH" dirty="0" err="1"/>
+              <a:t>when</a:t>
+            </a:r>
+            <a:r>
+              <a:rPr lang="de-CH" dirty="0"/>
+              <a:t> </a:t>
+            </a:r>
+            <a:r>
+              <a:rPr lang="de-CH" dirty="0" err="1"/>
+              <a:t>they</a:t>
+            </a:r>
+            <a:r>
+              <a:rPr lang="de-CH" dirty="0"/>
+              <a:t> </a:t>
+            </a:r>
+            <a:r>
+              <a:rPr lang="de-CH" dirty="0" err="1"/>
+              <a:t>are</a:t>
+            </a:r>
+            <a:r>
+              <a:rPr lang="de-CH" dirty="0"/>
+              <a:t> not</a:t>
+            </a:r>
+          </a:p>
+          <a:p>
+            <a:r>
+              <a:rPr lang="de-CH" dirty="0"/>
+              <a:t>FN: </a:t>
+            </a:r>
+            <a:r>
+              <a:rPr lang="de-CH" dirty="0" err="1"/>
+              <a:t>incorrectly</a:t>
+            </a:r>
+            <a:r>
+              <a:rPr lang="de-CH" dirty="0"/>
+              <a:t> </a:t>
+            </a:r>
+            <a:r>
+              <a:rPr lang="de-CH" dirty="0" err="1"/>
+              <a:t>identified</a:t>
+            </a:r>
+            <a:r>
+              <a:rPr lang="de-CH" dirty="0"/>
+              <a:t> </a:t>
+            </a:r>
+            <a:r>
+              <a:rPr lang="de-CH" dirty="0" err="1"/>
+              <a:t>as</a:t>
+            </a:r>
+            <a:r>
+              <a:rPr lang="de-CH" dirty="0"/>
+              <a:t> absent </a:t>
+            </a:r>
+            <a:r>
+              <a:rPr lang="de-CH" dirty="0" err="1"/>
+              <a:t>when</a:t>
+            </a:r>
+            <a:r>
+              <a:rPr lang="de-CH" dirty="0"/>
+              <a:t> </a:t>
+            </a:r>
+            <a:r>
+              <a:rPr lang="de-CH" dirty="0" err="1"/>
+              <a:t>they</a:t>
+            </a:r>
+            <a:r>
+              <a:rPr lang="de-CH" dirty="0"/>
+              <a:t> </a:t>
+            </a:r>
+            <a:r>
+              <a:rPr lang="de-CH" dirty="0" err="1"/>
+              <a:t>are</a:t>
+            </a:r>
+            <a:r>
+              <a:rPr lang="de-CH" dirty="0"/>
+              <a:t> </a:t>
+            </a:r>
+            <a:r>
+              <a:rPr lang="de-CH" dirty="0" err="1"/>
+              <a:t>present</a:t>
+            </a:r>
+            <a:endParaRPr lang="de-CH" dirty="0"/>
+          </a:p>
+        </p:txBody>
+      </p:sp>
+    </p:spTree>
+    <p:extLst>
+      <p:ext uri="{BB962C8B-B14F-4D97-AF65-F5344CB8AC3E}">
+        <p14:creationId xmlns:p14="http://schemas.microsoft.com/office/powerpoint/2010/main" val="2724139584"/>
+      </p:ext>
+    </p:extLst>
+  </p:cSld>
+  <p:clrMapOvr>
+    <a:masterClrMapping/>
+  </p:clrMapOvr>
+</p:notes>
+</file>
+
+<file path=ppt/notesSlides/notesSlide13.xml><?xml version="1.0" encoding="utf-8"?>
+<p:notes xmlns:a="http://schemas.openxmlformats.org/drawingml/2006/main" xmlns:r="http://schemas.openxmlformats.org/officeDocument/2006/relationships" xmlns:p="http://schemas.openxmlformats.org/presentationml/2006/main">
+  <p:cSld>
+    <p:spTree>
+      <p:nvGrpSpPr>
+        <p:cNvPr id="1" name=""/>
+        <p:cNvGrpSpPr/>
+        <p:nvPr/>
+      </p:nvGrpSpPr>
+      <p:grpSpPr>
+        <a:xfrm>
+          <a:off x="0" y="0"/>
+          <a:ext cx="0" cy="0"/>
+          <a:chOff x="0" y="0"/>
+          <a:chExt cx="0" cy="0"/>
+        </a:xfrm>
+      </p:grpSpPr>
+      <p:sp>
+        <p:nvSpPr>
+          <p:cNvPr id="2" name="Folienbildplatzhalter 1"/>
+          <p:cNvSpPr>
+            <a:spLocks noGrp="1" noRot="1" noChangeAspect="1"/>
+          </p:cNvSpPr>
+          <p:nvPr>
+            <p:ph type="sldImg"/>
+          </p:nvPr>
+        </p:nvSpPr>
+        <p:spPr>
+          <a:xfrm>
+            <a:off x="381000" y="685800"/>
+            <a:ext cx="6096000" cy="3429000"/>
+          </a:xfrm>
+        </p:spPr>
+      </p:sp>
+      <p:sp>
+        <p:nvSpPr>
+          <p:cNvPr id="3" name="Notizenplatzhalter 2"/>
+          <p:cNvSpPr>
+            <a:spLocks noGrp="1"/>
+          </p:cNvSpPr>
+          <p:nvPr>
+            <p:ph type="body" idx="1"/>
+          </p:nvPr>
+        </p:nvSpPr>
+        <p:spPr/>
+        <p:txBody>
+          <a:bodyPr/>
+          <a:lstStyle/>
+          <a:p>
+            <a:r>
+              <a:rPr lang="en-GB" noProof="0" dirty="0"/>
+              <a:t>Featuring: </a:t>
+            </a:r>
+          </a:p>
+          <a:p>
+            <a:pPr lvl="1"/>
+            <a:r>
+              <a:rPr lang="en-GB" dirty="0"/>
+              <a:t>Obfuscated apps</a:t>
+            </a:r>
+          </a:p>
+          <a:p>
+            <a:pPr lvl="1"/>
+            <a:r>
+              <a:rPr lang="en-GB" noProof="0" dirty="0"/>
+              <a:t>Native apps</a:t>
+            </a:r>
+          </a:p>
+          <a:p>
+            <a:pPr lvl="1"/>
+            <a:r>
+              <a:rPr lang="en-GB" dirty="0"/>
+              <a:t>Hybrid apps</a:t>
+            </a:r>
+            <a:endParaRPr lang="en-GB" noProof="0" dirty="0"/>
+          </a:p>
+          <a:p>
+            <a:endParaRPr lang="de-CH" dirty="0"/>
+          </a:p>
+        </p:txBody>
+      </p:sp>
+    </p:spTree>
+    <p:extLst>
+      <p:ext uri="{BB962C8B-B14F-4D97-AF65-F5344CB8AC3E}">
+        <p14:creationId xmlns:p14="http://schemas.microsoft.com/office/powerpoint/2010/main" val="1599496441"/>
+      </p:ext>
+    </p:extLst>
+  </p:cSld>
+  <p:clrMapOvr>
+    <a:masterClrMapping/>
+  </p:clrMapOvr>
+</p:notes>
+</file>
+
 <file path=ppt/notesSlides/notesSlide2.xml><?xml version="1.0" encoding="utf-8"?>
 <p:notes xmlns:a="http://schemas.openxmlformats.org/drawingml/2006/main" xmlns:r="http://schemas.openxmlformats.org/officeDocument/2006/relationships" xmlns:p="http://schemas.openxmlformats.org/presentationml/2006/main">
   <p:cSld>
@@ -667,6 +1993,24 @@
           <a:bodyPr/>
           <a:lstStyle/>
           <a:p>
+            <a:r>
+              <a:rPr lang="en-GB" noProof="0" dirty="0"/>
+              <a:t>Building Pipeline</a:t>
+            </a:r>
+          </a:p>
+          <a:p>
+            <a:r>
+              <a:rPr lang="en-GB" noProof="0" dirty="0"/>
+              <a:t>Hybrid Frameworks (Flutter, Apache Cordova, React Native,…)</a:t>
+            </a:r>
+          </a:p>
+          <a:p>
+            <a:r>
+              <a:rPr lang="en-GB" noProof="0" dirty="0"/>
+              <a:t>Goal: Ground Truth Dataset</a:t>
+            </a:r>
+          </a:p>
+          <a:p>
             <a:endParaRPr lang="de-CH" dirty="0"/>
           </a:p>
         </p:txBody>
@@ -734,6 +2078,25 @@
           <a:lstStyle/>
           <a:p>
             <a:r>
+              <a:rPr lang="en-GB" noProof="0" dirty="0"/>
+              <a:t>Libraries become more important</a:t>
+            </a:r>
+          </a:p>
+          <a:p>
+            <a:r>
+              <a:rPr lang="en-GB" noProof="0" dirty="0"/>
+              <a:t>Interest in knowing libraries</a:t>
+            </a:r>
+          </a:p>
+          <a:p>
+            <a:r>
+              <a:rPr lang="en-GB" noProof="0" dirty="0"/>
+              <a:t>Open-source vs. proprietary apps</a:t>
+            </a:r>
+            <a:endParaRPr lang="de-CH" dirty="0"/>
+          </a:p>
+          <a:p>
+            <a:r>
               <a:rPr lang="de-CH" dirty="0"/>
               <a:t>Up </a:t>
             </a:r>
@@ -831,6 +2194,30 @@
           <a:bodyPr/>
           <a:lstStyle/>
           <a:p>
+            <a:r>
+              <a:rPr lang="en-GB" noProof="0" dirty="0"/>
+              <a:t>Recent research topic</a:t>
+            </a:r>
+          </a:p>
+          <a:p>
+            <a:r>
+              <a:rPr lang="en-GB" noProof="0" dirty="0"/>
+              <a:t>3 Categories: learning-based, similarity-based and clustering-based</a:t>
+            </a:r>
+          </a:p>
+          <a:p>
+            <a:r>
+              <a:rPr lang="en-GB" noProof="0" dirty="0"/>
+              <a:t>Many different approaches</a:t>
+            </a:r>
+          </a:p>
+          <a:p>
+            <a:r>
+              <a:rPr lang="en-GB" noProof="0" dirty="0"/>
+              <a:t>Same goal</a:t>
+            </a:r>
+          </a:p>
+          <a:p>
             <a:endParaRPr lang="de-CH" dirty="0"/>
           </a:p>
         </p:txBody>
@@ -897,6 +2284,95 @@
           <a:bodyPr/>
           <a:lstStyle/>
           <a:p>
+            <a:pPr>
+              <a:buFontTx/>
+              <a:buChar char="-"/>
+            </a:pPr>
+            <a:r>
+              <a:rPr lang="en-GB" noProof="0" dirty="0"/>
+              <a:t>Extract Features (relationships, hierarchy, signatures)</a:t>
+            </a:r>
+          </a:p>
+          <a:p>
+            <a:pPr>
+              <a:buFontTx/>
+              <a:buChar char="-"/>
+            </a:pPr>
+            <a:r>
+              <a:rPr lang="en-GB" noProof="0" dirty="0"/>
+              <a:t>Hash </a:t>
+            </a:r>
+          </a:p>
+          <a:p>
+            <a:pPr>
+              <a:buFontTx/>
+              <a:buChar char="-"/>
+            </a:pPr>
+            <a:r>
+              <a:rPr lang="en-GB" noProof="0" dirty="0"/>
+              <a:t>Cluster on apps</a:t>
+            </a:r>
+          </a:p>
+          <a:p>
+            <a:pPr>
+              <a:buFontTx/>
+              <a:buChar char="-"/>
+            </a:pPr>
+            <a:r>
+              <a:rPr lang="en-GB" noProof="0" dirty="0"/>
+              <a:t>Label Clusters</a:t>
+            </a:r>
+          </a:p>
+          <a:p>
+            <a:pPr>
+              <a:buFontTx/>
+              <a:buChar char="-"/>
+            </a:pPr>
+            <a:r>
+              <a:rPr lang="en-GB" noProof="0" dirty="0"/>
+              <a:t>Compare Fingerprints</a:t>
+            </a:r>
+          </a:p>
+          <a:p>
+            <a:pPr>
+              <a:buFontTx/>
+              <a:buChar char="-"/>
+            </a:pPr>
+            <a:r>
+              <a:rPr lang="en-GB" noProof="0" dirty="0"/>
+              <a:t>No Database needed</a:t>
+            </a:r>
+          </a:p>
+          <a:p>
+            <a:pPr>
+              <a:buFontTx/>
+              <a:buChar char="-"/>
+            </a:pPr>
+            <a:r>
+              <a:rPr lang="en-GB" noProof="0" dirty="0"/>
+              <a:t>Faster after clustering, less accurate</a:t>
+            </a:r>
+          </a:p>
+          <a:p>
+            <a:pPr>
+              <a:buFontTx/>
+              <a:buChar char="-"/>
+            </a:pPr>
+            <a:r>
+              <a:rPr lang="en-GB" noProof="0" dirty="0" err="1"/>
+              <a:t>LibRadar</a:t>
+            </a:r>
+            <a:r>
+              <a:rPr lang="en-GB" noProof="0" dirty="0"/>
+              <a:t>, </a:t>
+            </a:r>
+            <a:r>
+              <a:rPr lang="en-GB" noProof="0" dirty="0" err="1"/>
+              <a:t>LibD</a:t>
+            </a:r>
+            <a:endParaRPr lang="en-GB" noProof="0" dirty="0"/>
+          </a:p>
+          <a:p>
             <a:endParaRPr lang="de-CH" dirty="0"/>
           </a:p>
         </p:txBody>
@@ -964,20 +2440,24 @@
           <a:lstStyle/>
           <a:p>
             <a:r>
+              <a:rPr lang="de-CH" dirty="0" err="1"/>
+              <a:t>Similarity</a:t>
+            </a:r>
+            <a:r>
               <a:rPr lang="de-CH" dirty="0"/>
-              <a:t>Sources: </a:t>
+              <a:t> </a:t>
             </a:r>
             <a:r>
               <a:rPr lang="de-CH" dirty="0" err="1"/>
-              <a:t>Github</a:t>
+              <a:t>based</a:t>
             </a:r>
             <a:r>
               <a:rPr lang="de-CH" dirty="0"/>
-              <a:t>, </a:t>
+              <a:t> </a:t>
             </a:r>
             <a:r>
               <a:rPr lang="de-CH" dirty="0" err="1"/>
-              <a:t>FDroid</a:t>
+              <a:t>hashing</a:t>
             </a:r>
             <a:endParaRPr lang="de-CH" dirty="0"/>
           </a:p>
@@ -986,7 +2466,7 @@
     </p:spTree>
     <p:extLst>
       <p:ext uri="{BB962C8B-B14F-4D97-AF65-F5344CB8AC3E}">
-        <p14:creationId xmlns:p14="http://schemas.microsoft.com/office/powerpoint/2010/main" val="2985197927"/>
+        <p14:creationId xmlns:p14="http://schemas.microsoft.com/office/powerpoint/2010/main" val="3409589282"/>
       </p:ext>
     </p:extLst>
   </p:cSld>
@@ -1045,143 +2525,6 @@
           <a:bodyPr/>
           <a:lstStyle/>
           <a:p>
-            <a:r>
-              <a:rPr lang="de-CH" dirty="0"/>
-              <a:t>TP: </a:t>
-            </a:r>
-            <a:r>
-              <a:rPr lang="de-CH" dirty="0" err="1"/>
-              <a:t>correctly</a:t>
-            </a:r>
-            <a:r>
-              <a:rPr lang="de-CH" dirty="0"/>
-              <a:t> </a:t>
-            </a:r>
-            <a:r>
-              <a:rPr lang="de-CH" dirty="0" err="1"/>
-              <a:t>identified</a:t>
-            </a:r>
-            <a:br>
-              <a:rPr lang="de-CH" dirty="0"/>
-            </a:br>
-            <a:r>
-              <a:rPr lang="de-CH" dirty="0"/>
-              <a:t>FP: </a:t>
-            </a:r>
-            <a:r>
-              <a:rPr lang="de-CH" dirty="0" err="1"/>
-              <a:t>incorrectly</a:t>
-            </a:r>
-            <a:r>
-              <a:rPr lang="de-CH" dirty="0"/>
-              <a:t> </a:t>
-            </a:r>
-            <a:r>
-              <a:rPr lang="de-CH" dirty="0" err="1"/>
-              <a:t>identified</a:t>
-            </a:r>
-            <a:r>
-              <a:rPr lang="de-CH" dirty="0"/>
-              <a:t> </a:t>
-            </a:r>
-            <a:r>
-              <a:rPr lang="de-CH" dirty="0" err="1"/>
-              <a:t>as</a:t>
-            </a:r>
-            <a:r>
-              <a:rPr lang="de-CH" dirty="0"/>
-              <a:t> </a:t>
-            </a:r>
-            <a:r>
-              <a:rPr lang="de-CH" dirty="0" err="1"/>
-              <a:t>present</a:t>
-            </a:r>
-            <a:r>
-              <a:rPr lang="de-CH" dirty="0"/>
-              <a:t> </a:t>
-            </a:r>
-            <a:r>
-              <a:rPr lang="de-CH" dirty="0" err="1"/>
-              <a:t>when</a:t>
-            </a:r>
-            <a:r>
-              <a:rPr lang="de-CH" dirty="0"/>
-              <a:t> </a:t>
-            </a:r>
-            <a:r>
-              <a:rPr lang="de-CH" dirty="0" err="1"/>
-              <a:t>they</a:t>
-            </a:r>
-            <a:r>
-              <a:rPr lang="de-CH" dirty="0"/>
-              <a:t> </a:t>
-            </a:r>
-            <a:r>
-              <a:rPr lang="de-CH" dirty="0" err="1"/>
-              <a:t>are</a:t>
-            </a:r>
-            <a:r>
-              <a:rPr lang="de-CH" dirty="0"/>
-              <a:t> not</a:t>
-            </a:r>
-          </a:p>
-          <a:p>
-            <a:r>
-              <a:rPr lang="de-CH" dirty="0"/>
-              <a:t>FN: </a:t>
-            </a:r>
-            <a:r>
-              <a:rPr lang="de-CH" dirty="0" err="1"/>
-              <a:t>incorrectly</a:t>
-            </a:r>
-            <a:r>
-              <a:rPr lang="de-CH" dirty="0"/>
-              <a:t> </a:t>
-            </a:r>
-            <a:r>
-              <a:rPr lang="de-CH" dirty="0" err="1"/>
-              <a:t>identified</a:t>
-            </a:r>
-            <a:r>
-              <a:rPr lang="de-CH" dirty="0"/>
-              <a:t> </a:t>
-            </a:r>
-            <a:r>
-              <a:rPr lang="de-CH" dirty="0" err="1"/>
-              <a:t>as</a:t>
-            </a:r>
-            <a:r>
-              <a:rPr lang="de-CH" dirty="0"/>
-              <a:t> absent </a:t>
-            </a:r>
-            <a:r>
-              <a:rPr lang="de-CH" dirty="0" err="1"/>
-              <a:t>when</a:t>
-            </a:r>
-            <a:r>
-              <a:rPr lang="de-CH" dirty="0"/>
-              <a:t> </a:t>
-            </a:r>
-            <a:r>
-              <a:rPr lang="de-CH" dirty="0" err="1"/>
-              <a:t>they</a:t>
-            </a:r>
-            <a:r>
-              <a:rPr lang="de-CH" dirty="0"/>
-              <a:t> </a:t>
-            </a:r>
-            <a:r>
-              <a:rPr lang="de-CH" dirty="0" err="1"/>
-              <a:t>are</a:t>
-            </a:r>
-            <a:r>
-              <a:rPr lang="de-CH" dirty="0"/>
-              <a:t> </a:t>
-            </a:r>
-            <a:r>
-              <a:rPr lang="de-CH" dirty="0" err="1"/>
-              <a:t>present</a:t>
-            </a:r>
             <a:endParaRPr lang="de-CH" dirty="0"/>
           </a:p>
         </p:txBody>
@@ -1189,7 +2532,7 @@
     </p:spTree>
     <p:extLst>
       <p:ext uri="{BB962C8B-B14F-4D97-AF65-F5344CB8AC3E}">
-        <p14:creationId xmlns:p14="http://schemas.microsoft.com/office/powerpoint/2010/main" val="2724139584"/>
+        <p14:creationId xmlns:p14="http://schemas.microsoft.com/office/powerpoint/2010/main" val="689321824"/>
       </p:ext>
     </p:extLst>
   </p:cSld>
@@ -1248,6 +2591,85 @@
           <a:bodyPr/>
           <a:lstStyle/>
           <a:p>
+            <a:pPr>
+              <a:buFontTx/>
+              <a:buChar char="-"/>
+            </a:pPr>
+            <a:r>
+              <a:rPr lang="en-GB" noProof="0" dirty="0"/>
+              <a:t>Build profile from Library</a:t>
+            </a:r>
+          </a:p>
+          <a:p>
+            <a:pPr>
+              <a:buFontTx/>
+              <a:buChar char="-"/>
+            </a:pPr>
+            <a:r>
+              <a:rPr lang="en-GB" noProof="0" dirty="0"/>
+              <a:t>Build profile from App</a:t>
+            </a:r>
+          </a:p>
+          <a:p>
+            <a:pPr>
+              <a:buFontTx/>
+              <a:buChar char="-"/>
+            </a:pPr>
+            <a:r>
+              <a:rPr lang="en-GB" noProof="0" dirty="0"/>
+              <a:t>Compare with probability</a:t>
+            </a:r>
+          </a:p>
+          <a:p>
+            <a:pPr>
+              <a:buFontTx/>
+              <a:buChar char="-"/>
+            </a:pPr>
+            <a:r>
+              <a:rPr lang="en-GB" noProof="0" dirty="0"/>
+              <a:t>Profile consist of class hierarchy, fuzzy hashes of bytecode, Control Flow Graphs, Class dependency signatures…</a:t>
+            </a:r>
+          </a:p>
+          <a:p>
+            <a:pPr>
+              <a:buFontTx/>
+              <a:buChar char="-"/>
+            </a:pPr>
+            <a:r>
+              <a:rPr lang="en-GB" noProof="0" dirty="0"/>
+              <a:t>Prone to obfuscation</a:t>
+            </a:r>
+          </a:p>
+          <a:p>
+            <a:pPr>
+              <a:buFontTx/>
+              <a:buChar char="-"/>
+            </a:pPr>
+            <a:r>
+              <a:rPr lang="en-GB" noProof="0" dirty="0"/>
+              <a:t>More accurate, but usually slower</a:t>
+            </a:r>
+          </a:p>
+          <a:p>
+            <a:pPr>
+              <a:buFontTx/>
+              <a:buChar char="-"/>
+            </a:pPr>
+            <a:r>
+              <a:rPr lang="en-GB" noProof="0" dirty="0" err="1"/>
+              <a:t>LibScout</a:t>
+            </a:r>
+            <a:r>
+              <a:rPr lang="en-GB" noProof="0" dirty="0"/>
+              <a:t>, ORLIS, </a:t>
+            </a:r>
+            <a:r>
+              <a:rPr lang="en-GB" noProof="0" dirty="0" err="1"/>
+              <a:t>LibPecker</a:t>
+            </a:r>
+            <a:endParaRPr lang="en-GB" noProof="0" dirty="0"/>
+          </a:p>
+          <a:p>
             <a:endParaRPr lang="de-CH" dirty="0"/>
           </a:p>
         </p:txBody>
@@ -1255,7 +2677,7 @@
     </p:spTree>
     <p:extLst>
       <p:ext uri="{BB962C8B-B14F-4D97-AF65-F5344CB8AC3E}">
-        <p14:creationId xmlns:p14="http://schemas.microsoft.com/office/powerpoint/2010/main" val="1599496441"/>
+        <p14:creationId xmlns:p14="http://schemas.microsoft.com/office/powerpoint/2010/main" val="2404977055"/>
       </p:ext>
     </p:extLst>
   </p:cSld>
@@ -1266,7 +2688,7 @@
 </file>
 
 <file path=ppt/slideLayouts/slideLayout1.xml><?xml version="1.0" encoding="utf-8"?>
-<p:sldLayout xmlns:a="http://schemas.openxmlformats.org/drawingml/2006/main" xmlns:r="http://schemas.openxmlformats.org/officeDocument/2006/relationships" xmlns:p="http://schemas.openxmlformats.org/presentationml/2006/main" showMasterSp="0" type="tx">
+<p:sldLayout xmlns:a="http://schemas.openxmlformats.org/drawingml/2006/main" xmlns:r="http://schemas.openxmlformats.org/officeDocument/2006/relationships" xmlns:p="http://schemas.openxmlformats.org/presentationml/2006/main" showMasterSp="0" userDrawn="1">
   <p:cSld name="Titel-Folie">
     <p:spTree>
       <p:nvGrpSpPr>
@@ -1282,42 +2704,6 @@
           <a:chExt cx="0" cy="0"/>
         </a:xfrm>
       </p:grpSpPr>
-      <p:sp>
-        <p:nvSpPr>
-          <p:cNvPr id="15" name="Rechteck 4"/>
-          <p:cNvSpPr/>
-          <p:nvPr/>
-        </p:nvSpPr>
-        <p:spPr>
-          <a:xfrm>
-            <a:off x="0" y="1925997"/>
-            <a:ext cx="9144000" cy="3060001"/>
-          </a:xfrm>
-          <a:prstGeom prst="rect">
-            <a:avLst/>
-          </a:prstGeom>
-          <a:solidFill>
-            <a:srgbClr val="D9D9D9"/>
-          </a:solidFill>
-          <a:ln w="12700">
-            <a:miter lim="400000"/>
-          </a:ln>
-        </p:spPr>
-        <p:txBody>
-          <a:bodyPr lIns="45719" rIns="45719" anchor="ctr"/>
-          <a:lstStyle/>
-          <a:p>
-            <a:pPr algn="ctr">
-              <a:defRPr>
-                <a:solidFill>
-                  <a:srgbClr val="D9D9D9"/>
-                </a:solidFill>
-              </a:defRPr>
-            </a:pPr>
-            <a:endParaRPr/>
-          </a:p>
-        </p:txBody>
-      </p:sp>
       <p:pic>
         <p:nvPicPr>
           <p:cNvPr id="16" name="Bild 5" descr="Bild 5"/>
@@ -1415,72 +2801,6 @@
       </p:sp>
       <p:sp>
         <p:nvSpPr>
-          <p:cNvPr id="19" name="Body Level One…"/>
-          <p:cNvSpPr txBox="1">
-            <a:spLocks noGrp="1"/>
-          </p:cNvSpPr>
-          <p:nvPr>
-            <p:ph type="body" sz="half" idx="1" hasCustomPrompt="1"/>
-          </p:nvPr>
-        </p:nvSpPr>
-        <p:spPr>
-          <a:xfrm>
-            <a:off x="4572000" y="1925997"/>
-            <a:ext cx="4572000" cy="3060001"/>
-          </a:xfrm>
-          <a:prstGeom prst="rect">
-            <a:avLst/>
-          </a:prstGeom>
-          <a:solidFill>
-            <a:srgbClr val="BFBFBF"/>
-          </a:solidFill>
-        </p:spPr>
-        <p:txBody>
-          <a:bodyPr lIns="0" tIns="0" rIns="0" bIns="0">
-            <a:normAutofit/>
-          </a:bodyPr>
-          <a:lstStyle>
-            <a:lvl1pPr>
-              <a:defRPr sz="2000"/>
-            </a:lvl1pPr>
-            <a:lvl2pPr marL="647684" indent="-190495">
-              <a:defRPr sz="2000"/>
-            </a:lvl2pPr>
-            <a:lvl3pPr marL="1142971" indent="-228593">
-              <a:defRPr sz="2000"/>
-            </a:lvl3pPr>
-            <a:lvl4pPr marL="1625559" indent="-253993">
-              <a:defRPr sz="2000"/>
-            </a:lvl4pPr>
-            <a:lvl5pPr marL="2082748" indent="-253993">
-              <a:defRPr sz="2000"/>
-            </a:lvl5pPr>
-          </a:lstStyle>
-          <a:p>
-            <a:r>
-              <a:t> Media Platzhalter: 12.7 (b) x 8.5 (h) cm </a:t>
-            </a:r>
-          </a:p>
-          <a:p>
-            <a:pPr lvl="1"/>
-            <a:endParaRPr/>
-          </a:p>
-          <a:p>
-            <a:pPr lvl="2"/>
-            <a:endParaRPr/>
-          </a:p>
-          <a:p>
-            <a:pPr lvl="3"/>
-            <a:endParaRPr/>
-          </a:p>
-          <a:p>
-            <a:pPr lvl="4"/>
-            <a:endParaRPr/>
-          </a:p>
-        </p:txBody>
-      </p:sp>
-      <p:sp>
-        <p:nvSpPr>
           <p:cNvPr id="20" name="Textplatzhalter 2"/>
           <p:cNvSpPr>
             <a:spLocks noGrp="1"/>
@@ -1514,6 +2834,7 @@
           </a:lstStyle>
           <a:p>
             <a:r>
+              <a:rPr dirty="0"/>
               <a:t>Titel B (Arial 28pt., schwarz, max. 1 Zeile) </a:t>
             </a:r>
           </a:p>
@@ -1533,6 +2854,48 @@
           <a:xfrm>
             <a:off x="539999" y="2159999"/>
             <a:ext cx="3726002" cy="843799"/>
+          </a:xfrm>
+          <a:prstGeom prst="rect">
+            <a:avLst/>
+          </a:prstGeom>
+        </p:spPr>
+        <p:txBody>
+          <a:bodyPr lIns="0" tIns="0" rIns="0" bIns="0">
+            <a:normAutofit/>
+          </a:bodyPr>
+          <a:lstStyle>
+            <a:lvl1pPr>
+              <a:lnSpc>
+                <a:spcPct val="100000"/>
+              </a:lnSpc>
+              <a:spcBef>
+                <a:spcPts val="0"/>
+              </a:spcBef>
+              <a:defRPr sz="1600" b="0"/>
+            </a:lvl1pPr>
+          </a:lstStyle>
+          <a:p>
+            <a:r>
+              <a:rPr dirty="0"/>
+              <a:t>Arial Fett 16pt.</a:t>
+            </a:r>
+          </a:p>
+        </p:txBody>
+      </p:sp>
+      <p:sp>
+        <p:nvSpPr>
+          <p:cNvPr id="22" name="Textplatzhalter 16"/>
+          <p:cNvSpPr>
+            <a:spLocks noGrp="1"/>
+          </p:cNvSpPr>
+          <p:nvPr>
+            <p:ph type="body" sz="quarter" idx="23" hasCustomPrompt="1"/>
+          </p:nvPr>
+        </p:nvSpPr>
+        <p:spPr>
+          <a:xfrm>
+            <a:off x="539999" y="3147814"/>
+            <a:ext cx="3726002" cy="1622187"/>
           </a:xfrm>
           <a:prstGeom prst="rect">
             <a:avLst/>
@@ -1555,47 +2918,7 @@
           </a:lstStyle>
           <a:p>
             <a:r>
-              <a:t>Arial Fett 16pt.</a:t>
-            </a:r>
-          </a:p>
-        </p:txBody>
-      </p:sp>
-      <p:sp>
-        <p:nvSpPr>
-          <p:cNvPr id="22" name="Textplatzhalter 16"/>
-          <p:cNvSpPr>
-            <a:spLocks noGrp="1"/>
-          </p:cNvSpPr>
-          <p:nvPr>
-            <p:ph type="body" sz="quarter" idx="23" hasCustomPrompt="1"/>
-          </p:nvPr>
-        </p:nvSpPr>
-        <p:spPr>
-          <a:xfrm>
-            <a:off x="539999" y="3147814"/>
-            <a:ext cx="3726002" cy="1622187"/>
-          </a:xfrm>
-          <a:prstGeom prst="rect">
-            <a:avLst/>
-          </a:prstGeom>
-        </p:spPr>
-        <p:txBody>
-          <a:bodyPr lIns="0" tIns="0" rIns="0" bIns="0">
-            <a:normAutofit/>
-          </a:bodyPr>
-          <a:lstStyle>
-            <a:lvl1pPr>
-              <a:lnSpc>
-                <a:spcPct val="100000"/>
-              </a:lnSpc>
-              <a:spcBef>
-                <a:spcPts val="0"/>
-              </a:spcBef>
-              <a:defRPr sz="1600"/>
-            </a:lvl1pPr>
-          </a:lstStyle>
-          <a:p>
-            <a:r>
+              <a:rPr dirty="0"/>
               <a:t>Arial 16/20pt.</a:t>
             </a:r>
           </a:p>
@@ -1627,6 +2950,7 @@
           <a:lstStyle/>
           <a:p>
             <a:r>
+              <a:rPr dirty="0"/>
               <a:t>Titel A (Arial 28pt., rot, max. 1 Zeile) </a:t>
             </a:r>
           </a:p>
@@ -1694,42 +3018,6 @@
           <a:chExt cx="0" cy="0"/>
         </a:xfrm>
       </p:grpSpPr>
-      <p:sp>
-        <p:nvSpPr>
-          <p:cNvPr id="157" name="Rechteck 4"/>
-          <p:cNvSpPr/>
-          <p:nvPr/>
-        </p:nvSpPr>
-        <p:spPr>
-          <a:xfrm>
-            <a:off x="0" y="1925997"/>
-            <a:ext cx="9144000" cy="3060001"/>
-          </a:xfrm>
-          <a:prstGeom prst="rect">
-            <a:avLst/>
-          </a:prstGeom>
-          <a:solidFill>
-            <a:srgbClr val="D9D9D9"/>
-          </a:solidFill>
-          <a:ln w="12700">
-            <a:miter lim="400000"/>
-          </a:ln>
-        </p:spPr>
-        <p:txBody>
-          <a:bodyPr lIns="45719" rIns="45719" anchor="ctr"/>
-          <a:lstStyle/>
-          <a:p>
-            <a:pPr algn="ctr">
-              <a:defRPr>
-                <a:solidFill>
-                  <a:srgbClr val="D9D9D9"/>
-                </a:solidFill>
-              </a:defRPr>
-            </a:pPr>
-            <a:endParaRPr/>
-          </a:p>
-        </p:txBody>
-      </p:sp>
       <p:pic>
         <p:nvPicPr>
           <p:cNvPr id="158" name="Bild 5" descr="Bild 5"/>
@@ -2372,42 +3660,6 @@
           <a:chExt cx="0" cy="0"/>
         </a:xfrm>
       </p:grpSpPr>
-      <p:sp>
-        <p:nvSpPr>
-          <p:cNvPr id="31" name="Rechteck 4"/>
-          <p:cNvSpPr/>
-          <p:nvPr/>
-        </p:nvSpPr>
-        <p:spPr>
-          <a:xfrm>
-            <a:off x="0" y="1925997"/>
-            <a:ext cx="9144000" cy="3060001"/>
-          </a:xfrm>
-          <a:prstGeom prst="rect">
-            <a:avLst/>
-          </a:prstGeom>
-          <a:solidFill>
-            <a:srgbClr val="D9D9D9"/>
-          </a:solidFill>
-          <a:ln w="12700">
-            <a:miter lim="400000"/>
-          </a:ln>
-        </p:spPr>
-        <p:txBody>
-          <a:bodyPr lIns="45719" rIns="45719" anchor="ctr"/>
-          <a:lstStyle/>
-          <a:p>
-            <a:pPr algn="ctr">
-              <a:defRPr>
-                <a:solidFill>
-                  <a:srgbClr val="D9D9D9"/>
-                </a:solidFill>
-              </a:defRPr>
-            </a:pPr>
-            <a:endParaRPr/>
-          </a:p>
-        </p:txBody>
-      </p:sp>
       <p:pic>
         <p:nvPicPr>
           <p:cNvPr id="32" name="Bild 5" descr="Bild 5"/>
@@ -2489,42 +3741,6 @@
             <a:r>
               <a:t>Title Text</a:t>
             </a:r>
-          </a:p>
-        </p:txBody>
-      </p:sp>
-      <p:sp>
-        <p:nvSpPr>
-          <p:cNvPr id="36" name="Rechteck 3"/>
-          <p:cNvSpPr/>
-          <p:nvPr/>
-        </p:nvSpPr>
-        <p:spPr>
-          <a:xfrm>
-            <a:off x="0" y="1238250"/>
-            <a:ext cx="9144000" cy="3747748"/>
-          </a:xfrm>
-          <a:prstGeom prst="rect">
-            <a:avLst/>
-          </a:prstGeom>
-          <a:solidFill>
-            <a:srgbClr val="D9D9D9"/>
-          </a:solidFill>
-          <a:ln w="12700">
-            <a:miter lim="400000"/>
-          </a:ln>
-        </p:spPr>
-        <p:txBody>
-          <a:bodyPr lIns="45719" rIns="45719" anchor="ctr"/>
-          <a:lstStyle/>
-          <a:p>
-            <a:pPr algn="ctr">
-              <a:defRPr>
-                <a:solidFill>
-                  <a:srgbClr val="D9D9D9"/>
-                </a:solidFill>
-              </a:defRPr>
-            </a:pPr>
-            <a:endParaRPr/>
           </a:p>
         </p:txBody>
       </p:sp>
@@ -2612,24 +3828,25 @@
           </a:lstStyle>
           <a:p>
             <a:r>
+              <a:rPr dirty="0"/>
               <a:t>1. Ebene 20pt.</a:t>
             </a:r>
           </a:p>
           <a:p>
             <a:pPr lvl="1"/>
-            <a:endParaRPr/>
+            <a:endParaRPr dirty="0"/>
           </a:p>
           <a:p>
             <a:pPr lvl="2"/>
-            <a:endParaRPr/>
+            <a:endParaRPr dirty="0"/>
           </a:p>
           <a:p>
             <a:pPr lvl="3"/>
-            <a:endParaRPr/>
+            <a:endParaRPr dirty="0"/>
           </a:p>
           <a:p>
             <a:pPr lvl="4"/>
-            <a:endParaRPr/>
+            <a:endParaRPr dirty="0"/>
           </a:p>
         </p:txBody>
       </p:sp>
@@ -2659,42 +3876,6 @@
           <a:chExt cx="0" cy="0"/>
         </a:xfrm>
       </p:grpSpPr>
-      <p:sp>
-        <p:nvSpPr>
-          <p:cNvPr id="57" name="Rechteck 4"/>
-          <p:cNvSpPr/>
-          <p:nvPr/>
-        </p:nvSpPr>
-        <p:spPr>
-          <a:xfrm>
-            <a:off x="0" y="1925997"/>
-            <a:ext cx="9144000" cy="3060001"/>
-          </a:xfrm>
-          <a:prstGeom prst="rect">
-            <a:avLst/>
-          </a:prstGeom>
-          <a:solidFill>
-            <a:srgbClr val="D9D9D9"/>
-          </a:solidFill>
-          <a:ln w="12700">
-            <a:miter lim="400000"/>
-          </a:ln>
-        </p:spPr>
-        <p:txBody>
-          <a:bodyPr lIns="45719" rIns="45719" anchor="ctr"/>
-          <a:lstStyle/>
-          <a:p>
-            <a:pPr algn="ctr">
-              <a:defRPr>
-                <a:solidFill>
-                  <a:srgbClr val="D9D9D9"/>
-                </a:solidFill>
-              </a:defRPr>
-            </a:pPr>
-            <a:endParaRPr/>
-          </a:p>
-        </p:txBody>
-      </p:sp>
       <p:pic>
         <p:nvPicPr>
           <p:cNvPr id="58" name="Bild 5" descr="Bild 5"/>
@@ -2776,42 +3957,6 @@
             <a:r>
               <a:t>Title Text</a:t>
             </a:r>
-          </a:p>
-        </p:txBody>
-      </p:sp>
-      <p:sp>
-        <p:nvSpPr>
-          <p:cNvPr id="62" name="Rechteck 3"/>
-          <p:cNvSpPr/>
-          <p:nvPr/>
-        </p:nvSpPr>
-        <p:spPr>
-          <a:xfrm>
-            <a:off x="0" y="1238250"/>
-            <a:ext cx="9144000" cy="3747748"/>
-          </a:xfrm>
-          <a:prstGeom prst="rect">
-            <a:avLst/>
-          </a:prstGeom>
-          <a:solidFill>
-            <a:srgbClr val="D9D9D9"/>
-          </a:solidFill>
-          <a:ln w="12700">
-            <a:miter lim="400000"/>
-          </a:ln>
-        </p:spPr>
-        <p:txBody>
-          <a:bodyPr lIns="45719" rIns="45719" anchor="ctr"/>
-          <a:lstStyle/>
-          <a:p>
-            <a:pPr algn="ctr">
-              <a:defRPr>
-                <a:solidFill>
-                  <a:srgbClr val="D9D9D9"/>
-                </a:solidFill>
-              </a:defRPr>
-            </a:pPr>
-            <a:endParaRPr/>
           </a:p>
         </p:txBody>
       </p:sp>
@@ -3057,42 +4202,6 @@
           <a:chExt cx="0" cy="0"/>
         </a:xfrm>
       </p:grpSpPr>
-      <p:sp>
-        <p:nvSpPr>
-          <p:cNvPr id="73" name="Rechteck 4"/>
-          <p:cNvSpPr/>
-          <p:nvPr/>
-        </p:nvSpPr>
-        <p:spPr>
-          <a:xfrm>
-            <a:off x="0" y="1925997"/>
-            <a:ext cx="9144000" cy="3060001"/>
-          </a:xfrm>
-          <a:prstGeom prst="rect">
-            <a:avLst/>
-          </a:prstGeom>
-          <a:solidFill>
-            <a:srgbClr val="D9D9D9"/>
-          </a:solidFill>
-          <a:ln w="12700">
-            <a:miter lim="400000"/>
-          </a:ln>
-        </p:spPr>
-        <p:txBody>
-          <a:bodyPr lIns="45719" rIns="45719" anchor="ctr"/>
-          <a:lstStyle/>
-          <a:p>
-            <a:pPr algn="ctr">
-              <a:defRPr>
-                <a:solidFill>
-                  <a:srgbClr val="D9D9D9"/>
-                </a:solidFill>
-              </a:defRPr>
-            </a:pPr>
-            <a:endParaRPr/>
-          </a:p>
-        </p:txBody>
-      </p:sp>
       <p:pic>
         <p:nvPicPr>
           <p:cNvPr id="74" name="Bild 5" descr="Bild 5"/>
@@ -3174,42 +4283,6 @@
             <a:r>
               <a:t>Title Text</a:t>
             </a:r>
-          </a:p>
-        </p:txBody>
-      </p:sp>
-      <p:sp>
-        <p:nvSpPr>
-          <p:cNvPr id="78" name="Rechteck 3"/>
-          <p:cNvSpPr/>
-          <p:nvPr/>
-        </p:nvSpPr>
-        <p:spPr>
-          <a:xfrm>
-            <a:off x="-1" y="1238250"/>
-            <a:ext cx="6876258" cy="3747748"/>
-          </a:xfrm>
-          <a:prstGeom prst="rect">
-            <a:avLst/>
-          </a:prstGeom>
-          <a:solidFill>
-            <a:srgbClr val="D9D9D9"/>
-          </a:solidFill>
-          <a:ln w="12700">
-            <a:miter lim="400000"/>
-          </a:ln>
-        </p:spPr>
-        <p:txBody>
-          <a:bodyPr lIns="45719" rIns="45719" anchor="ctr"/>
-          <a:lstStyle/>
-          <a:p>
-            <a:pPr algn="ctr">
-              <a:defRPr>
-                <a:solidFill>
-                  <a:srgbClr val="D9D9D9"/>
-                </a:solidFill>
-              </a:defRPr>
-            </a:pPr>
-            <a:endParaRPr/>
           </a:p>
         </p:txBody>
       </p:sp>
@@ -3380,42 +4453,6 @@
           <a:chExt cx="0" cy="0"/>
         </a:xfrm>
       </p:grpSpPr>
-      <p:sp>
-        <p:nvSpPr>
-          <p:cNvPr id="87" name="Rechteck 4"/>
-          <p:cNvSpPr/>
-          <p:nvPr/>
-        </p:nvSpPr>
-        <p:spPr>
-          <a:xfrm>
-            <a:off x="0" y="1925997"/>
-            <a:ext cx="9144000" cy="3060001"/>
-          </a:xfrm>
-          <a:prstGeom prst="rect">
-            <a:avLst/>
-          </a:prstGeom>
-          <a:solidFill>
-            <a:srgbClr val="D9D9D9"/>
-          </a:solidFill>
-          <a:ln w="12700">
-            <a:miter lim="400000"/>
-          </a:ln>
-        </p:spPr>
-        <p:txBody>
-          <a:bodyPr lIns="45719" rIns="45719" anchor="ctr"/>
-          <a:lstStyle/>
-          <a:p>
-            <a:pPr algn="ctr">
-              <a:defRPr>
-                <a:solidFill>
-                  <a:srgbClr val="D9D9D9"/>
-                </a:solidFill>
-              </a:defRPr>
-            </a:pPr>
-            <a:endParaRPr/>
-          </a:p>
-        </p:txBody>
-      </p:sp>
       <p:pic>
         <p:nvPicPr>
           <p:cNvPr id="88" name="Bild 5" descr="Bild 5"/>
@@ -3497,42 +4534,6 @@
             <a:r>
               <a:t>Title Text</a:t>
             </a:r>
-          </a:p>
-        </p:txBody>
-      </p:sp>
-      <p:sp>
-        <p:nvSpPr>
-          <p:cNvPr id="92" name="Rechteck 3"/>
-          <p:cNvSpPr/>
-          <p:nvPr/>
-        </p:nvSpPr>
-        <p:spPr>
-          <a:xfrm>
-            <a:off x="0" y="1238250"/>
-            <a:ext cx="5652000" cy="3747748"/>
-          </a:xfrm>
-          <a:prstGeom prst="rect">
-            <a:avLst/>
-          </a:prstGeom>
-          <a:solidFill>
-            <a:srgbClr val="D9D9D9"/>
-          </a:solidFill>
-          <a:ln w="12700">
-            <a:miter lim="400000"/>
-          </a:ln>
-        </p:spPr>
-        <p:txBody>
-          <a:bodyPr lIns="45719" rIns="45719" anchor="ctr"/>
-          <a:lstStyle/>
-          <a:p>
-            <a:pPr algn="ctr">
-              <a:defRPr>
-                <a:solidFill>
-                  <a:srgbClr val="D9D9D9"/>
-                </a:solidFill>
-              </a:defRPr>
-            </a:pPr>
-            <a:endParaRPr/>
           </a:p>
         </p:txBody>
       </p:sp>
@@ -3703,42 +4704,6 @@
           <a:chExt cx="0" cy="0"/>
         </a:xfrm>
       </p:grpSpPr>
-      <p:sp>
-        <p:nvSpPr>
-          <p:cNvPr id="101" name="Rechteck 4"/>
-          <p:cNvSpPr/>
-          <p:nvPr/>
-        </p:nvSpPr>
-        <p:spPr>
-          <a:xfrm>
-            <a:off x="0" y="1925997"/>
-            <a:ext cx="9144000" cy="3060001"/>
-          </a:xfrm>
-          <a:prstGeom prst="rect">
-            <a:avLst/>
-          </a:prstGeom>
-          <a:solidFill>
-            <a:srgbClr val="D9D9D9"/>
-          </a:solidFill>
-          <a:ln w="12700">
-            <a:miter lim="400000"/>
-          </a:ln>
-        </p:spPr>
-        <p:txBody>
-          <a:bodyPr lIns="45719" rIns="45719" anchor="ctr"/>
-          <a:lstStyle/>
-          <a:p>
-            <a:pPr algn="ctr">
-              <a:defRPr>
-                <a:solidFill>
-                  <a:srgbClr val="D9D9D9"/>
-                </a:solidFill>
-              </a:defRPr>
-            </a:pPr>
-            <a:endParaRPr/>
-          </a:p>
-        </p:txBody>
-      </p:sp>
       <p:pic>
         <p:nvPicPr>
           <p:cNvPr id="102" name="Bild 5" descr="Bild 5"/>
@@ -3820,42 +4785,6 @@
             <a:r>
               <a:t>Title Text</a:t>
             </a:r>
-          </a:p>
-        </p:txBody>
-      </p:sp>
-      <p:sp>
-        <p:nvSpPr>
-          <p:cNvPr id="106" name="Rechteck 3"/>
-          <p:cNvSpPr/>
-          <p:nvPr/>
-        </p:nvSpPr>
-        <p:spPr>
-          <a:xfrm>
-            <a:off x="0" y="1238250"/>
-            <a:ext cx="4572000" cy="3747748"/>
-          </a:xfrm>
-          <a:prstGeom prst="rect">
-            <a:avLst/>
-          </a:prstGeom>
-          <a:solidFill>
-            <a:srgbClr val="D9D9D9"/>
-          </a:solidFill>
-          <a:ln w="12700">
-            <a:miter lim="400000"/>
-          </a:ln>
-        </p:spPr>
-        <p:txBody>
-          <a:bodyPr lIns="45719" rIns="45719" anchor="ctr"/>
-          <a:lstStyle/>
-          <a:p>
-            <a:pPr algn="ctr">
-              <a:defRPr>
-                <a:solidFill>
-                  <a:srgbClr val="D9D9D9"/>
-                </a:solidFill>
-              </a:defRPr>
-            </a:pPr>
-            <a:endParaRPr/>
           </a:p>
         </p:txBody>
       </p:sp>
@@ -4349,42 +5278,6 @@
           <a:chExt cx="0" cy="0"/>
         </a:xfrm>
       </p:grpSpPr>
-      <p:sp>
-        <p:nvSpPr>
-          <p:cNvPr id="129" name="Rechteck 4"/>
-          <p:cNvSpPr/>
-          <p:nvPr/>
-        </p:nvSpPr>
-        <p:spPr>
-          <a:xfrm>
-            <a:off x="0" y="1925997"/>
-            <a:ext cx="9144000" cy="3060001"/>
-          </a:xfrm>
-          <a:prstGeom prst="rect">
-            <a:avLst/>
-          </a:prstGeom>
-          <a:solidFill>
-            <a:srgbClr val="D9D9D9"/>
-          </a:solidFill>
-          <a:ln w="12700">
-            <a:miter lim="400000"/>
-          </a:ln>
-        </p:spPr>
-        <p:txBody>
-          <a:bodyPr lIns="45719" rIns="45719" anchor="ctr"/>
-          <a:lstStyle/>
-          <a:p>
-            <a:pPr algn="ctr">
-              <a:defRPr>
-                <a:solidFill>
-                  <a:srgbClr val="D9D9D9"/>
-                </a:solidFill>
-              </a:defRPr>
-            </a:pPr>
-            <a:endParaRPr/>
-          </a:p>
-        </p:txBody>
-      </p:sp>
       <p:pic>
         <p:nvPicPr>
           <p:cNvPr id="130" name="Bild 5" descr="Bild 5"/>
@@ -4502,42 +5395,6 @@
             <a:r>
               <a:t>Title Text</a:t>
             </a:r>
-          </a:p>
-        </p:txBody>
-      </p:sp>
-      <p:sp>
-        <p:nvSpPr>
-          <p:cNvPr id="135" name="Rechteck 3"/>
-          <p:cNvSpPr/>
-          <p:nvPr/>
-        </p:nvSpPr>
-        <p:spPr>
-          <a:xfrm>
-            <a:off x="0" y="1238250"/>
-            <a:ext cx="9144000" cy="1981574"/>
-          </a:xfrm>
-          <a:prstGeom prst="rect">
-            <a:avLst/>
-          </a:prstGeom>
-          <a:solidFill>
-            <a:srgbClr val="D9D9D9"/>
-          </a:solidFill>
-          <a:ln w="12700">
-            <a:miter lim="400000"/>
-          </a:ln>
-        </p:spPr>
-        <p:txBody>
-          <a:bodyPr lIns="45719" rIns="45719" anchor="ctr"/>
-          <a:lstStyle/>
-          <a:p>
-            <a:pPr algn="ctr">
-              <a:defRPr>
-                <a:solidFill>
-                  <a:srgbClr val="D9D9D9"/>
-                </a:solidFill>
-              </a:defRPr>
-            </a:pPr>
-            <a:endParaRPr/>
           </a:p>
         </p:txBody>
       </p:sp>
@@ -5261,30 +6118,35 @@
           <a:lstStyle/>
           <a:p>
             <a:r>
+              <a:rPr dirty="0"/>
               <a:t>Body Level One</a:t>
             </a:r>
           </a:p>
           <a:p>
             <a:pPr lvl="1"/>
             <a:r>
+              <a:rPr dirty="0"/>
               <a:t>Body Level Two</a:t>
             </a:r>
           </a:p>
           <a:p>
             <a:pPr lvl="2"/>
             <a:r>
+              <a:rPr dirty="0"/>
               <a:t>Body Level Three</a:t>
             </a:r>
           </a:p>
           <a:p>
             <a:pPr lvl="3"/>
             <a:r>
+              <a:rPr dirty="0"/>
               <a:t>Body Level Four</a:t>
             </a:r>
           </a:p>
           <a:p>
             <a:pPr lvl="4"/>
             <a:r>
+              <a:rPr dirty="0"/>
               <a:t>Body Level Five</a:t>
             </a:r>
           </a:p>
@@ -6046,7 +6908,7 @@
             <a:spLocks noGrp="1"/>
           </p:cNvSpPr>
           <p:nvPr>
-            <p:ph type="body" sz="quarter" idx="1"/>
+            <p:ph type="body" sz="quarter" idx="4294967295"/>
           </p:nvPr>
         </p:nvSpPr>
         <p:spPr>
@@ -6133,8 +6995,8 @@
         </p:nvSpPr>
         <p:spPr>
           <a:xfrm>
-            <a:off x="539999" y="3237800"/>
-            <a:ext cx="3726002" cy="1532201"/>
+            <a:off x="539999" y="2872740"/>
+            <a:ext cx="3726002" cy="1897262"/>
           </a:xfrm>
           <a:prstGeom prst="rect">
             <a:avLst/>
@@ -6147,7 +7009,7 @@
         </p:spPr>
         <p:txBody>
           <a:bodyPr>
-            <a:normAutofit/>
+            <a:normAutofit lnSpcReduction="10000"/>
           </a:bodyPr>
           <a:lstStyle/>
           <a:p>
@@ -6157,6 +7019,33 @@
             <a:r>
               <a:rPr lang="en-GB" noProof="0" dirty="0"/>
               <a:t>Tim Jordi</a:t>
+            </a:r>
+          </a:p>
+          <a:p>
+            <a:pPr defTabSz="868658">
+              <a:defRPr sz="1520" b="1"/>
+            </a:pPr>
+            <a:r>
+              <a:rPr lang="en-GB" b="0" i="1" noProof="0" dirty="0"/>
+              <a:t>Supervised by:</a:t>
+            </a:r>
+          </a:p>
+          <a:p>
+            <a:pPr defTabSz="868658">
+              <a:defRPr sz="1520" b="1"/>
+            </a:pPr>
+            <a:r>
+              <a:rPr lang="en-GB" dirty="0"/>
+              <a:t>Prof. Dr. Timo Kehrer</a:t>
+            </a:r>
+          </a:p>
+          <a:p>
+            <a:pPr defTabSz="868658">
+              <a:defRPr sz="1520" b="1"/>
+            </a:pPr>
+            <a:r>
+              <a:rPr lang="en-GB" noProof="0" dirty="0"/>
+              <a:t>Thomas Sutter</a:t>
             </a:r>
           </a:p>
           <a:p>
@@ -6176,7 +7065,7 @@
               <a:defRPr sz="1520"/>
             </a:pPr>
             <a:r>
-              <a:rPr lang="en-GB" noProof="0" dirty="0"/>
+              <a:rPr lang="en-GB" b="0" noProof="0" dirty="0"/>
               <a:t>Software Engineering Group</a:t>
             </a:r>
           </a:p>
@@ -6185,13 +7074,13 @@
               <a:defRPr sz="1520"/>
             </a:pPr>
             <a:r>
-              <a:rPr lang="en-GB" noProof="0" dirty="0"/>
+              <a:rPr lang="en-GB" b="0" noProof="0" dirty="0"/>
               <a:t>Institute of Computer Science</a:t>
             </a:r>
           </a:p>
           <a:p>
             <a:r>
-              <a:rPr lang="en-GB" noProof="0" dirty="0"/>
+              <a:rPr lang="en-GB" b="0" noProof="0" dirty="0"/>
               <a:t>University of Bern</a:t>
             </a:r>
           </a:p>
@@ -6258,6 +7147,1067 @@
           <p:cNvPr id="2" name="Titel 1">
             <a:extLst>
               <a:ext uri="{FF2B5EF4-FFF2-40B4-BE49-F238E27FC236}">
+                <a16:creationId xmlns:a16="http://schemas.microsoft.com/office/drawing/2014/main" id="{4FBF0903-937F-DA4F-B55B-04633D576A2B}"/>
+              </a:ext>
+            </a:extLst>
+          </p:cNvPr>
+          <p:cNvSpPr>
+            <a:spLocks noGrp="1"/>
+          </p:cNvSpPr>
+          <p:nvPr>
+            <p:ph type="title"/>
+          </p:nvPr>
+        </p:nvSpPr>
+        <p:spPr/>
+        <p:txBody>
+          <a:bodyPr/>
+          <a:lstStyle/>
+          <a:p>
+            <a:r>
+              <a:rPr lang="en-GB" noProof="0" dirty="0"/>
+              <a:t>Learning-based Detection</a:t>
+            </a:r>
+          </a:p>
+        </p:txBody>
+      </p:sp>
+      <p:sp>
+        <p:nvSpPr>
+          <p:cNvPr id="3" name="Textplatzhalter 2">
+            <a:extLst>
+              <a:ext uri="{FF2B5EF4-FFF2-40B4-BE49-F238E27FC236}">
+                <a16:creationId xmlns:a16="http://schemas.microsoft.com/office/drawing/2014/main" id="{82F4C04A-85DE-8DD8-5A52-A71B9555258F}"/>
+              </a:ext>
+            </a:extLst>
+          </p:cNvPr>
+          <p:cNvSpPr>
+            <a:spLocks noGrp="1"/>
+          </p:cNvSpPr>
+          <p:nvPr>
+            <p:ph type="body" idx="1"/>
+          </p:nvPr>
+        </p:nvSpPr>
+        <p:spPr/>
+        <p:txBody>
+          <a:bodyPr/>
+          <a:lstStyle/>
+          <a:p>
+            <a:pPr marL="6350" indent="0">
+              <a:buNone/>
+            </a:pPr>
+            <a:endParaRPr lang="en-GB" noProof="0" dirty="0"/>
+          </a:p>
+        </p:txBody>
+      </p:sp>
+      <p:sp>
+        <p:nvSpPr>
+          <p:cNvPr id="4" name="Rechteck 4">
+            <a:extLst>
+              <a:ext uri="{FF2B5EF4-FFF2-40B4-BE49-F238E27FC236}">
+                <a16:creationId xmlns:a16="http://schemas.microsoft.com/office/drawing/2014/main" id="{1C4B04A5-F05F-0D9E-859D-E1CE40CEB33E}"/>
+              </a:ext>
+            </a:extLst>
+          </p:cNvPr>
+          <p:cNvSpPr txBox="1"/>
+          <p:nvPr/>
+        </p:nvSpPr>
+        <p:spPr>
+          <a:xfrm>
+            <a:off x="990648" y="5007008"/>
+            <a:ext cx="8082331" cy="123111"/>
+          </a:xfrm>
+          <a:prstGeom prst="rect">
+            <a:avLst/>
+          </a:prstGeom>
+          <a:ln w="12700">
+            <a:miter lim="400000"/>
+          </a:ln>
+          <a:extLst>
+            <a:ext uri="{C572A759-6A51-4108-AA02-DFA0A04FC94B}">
+              <ma14:wrappingTextBoxFlag xmlns="" xmlns:m="http://schemas.openxmlformats.org/officeDocument/2006/math" xmlns:a14="http://schemas.microsoft.com/office/drawing/2010/main" xmlns:ma14="http://schemas.microsoft.com/office/mac/drawingml/2011/main" val="1"/>
+            </a:ext>
+          </a:extLst>
+        </p:spPr>
+        <p:txBody>
+          <a:bodyPr wrap="square" lIns="0" tIns="0" rIns="0" bIns="0">
+            <a:spAutoFit/>
+          </a:bodyPr>
+          <a:lstStyle>
+            <a:lvl1pPr>
+              <a:defRPr sz="800"/>
+            </a:lvl1pPr>
+          </a:lstStyle>
+          <a:p>
+            <a:r>
+              <a:rPr lang="en-US" dirty="0"/>
+              <a:t>Pan et al: Pay Your Attention on Lib! Android Third-Party Library Detection via Feature Language Model, 2025</a:t>
+            </a:r>
+            <a:endParaRPr lang="en-GB" noProof="0" dirty="0"/>
+          </a:p>
+        </p:txBody>
+      </p:sp>
+      <p:pic>
+        <p:nvPicPr>
+          <p:cNvPr id="6" name="Grafik 5">
+            <a:extLst>
+              <a:ext uri="{FF2B5EF4-FFF2-40B4-BE49-F238E27FC236}">
+                <a16:creationId xmlns:a16="http://schemas.microsoft.com/office/drawing/2014/main" id="{F11A90B6-E89C-FB15-2C49-DD956ACC3476}"/>
+              </a:ext>
+            </a:extLst>
+          </p:cNvPr>
+          <p:cNvPicPr>
+            <a:picLocks noChangeAspect="1"/>
+          </p:cNvPicPr>
+          <p:nvPr/>
+        </p:nvPicPr>
+        <p:blipFill>
+          <a:blip r:embed="rId3"/>
+          <a:stretch>
+            <a:fillRect/>
+          </a:stretch>
+        </p:blipFill>
+        <p:spPr>
+          <a:xfrm>
+            <a:off x="0" y="1518375"/>
+            <a:ext cx="9144000" cy="3335042"/>
+          </a:xfrm>
+          <a:prstGeom prst="rect">
+            <a:avLst/>
+          </a:prstGeom>
+        </p:spPr>
+      </p:pic>
+      <p:sp>
+        <p:nvSpPr>
+          <p:cNvPr id="5" name="Rechteck 4">
+            <a:extLst>
+              <a:ext uri="{FF2B5EF4-FFF2-40B4-BE49-F238E27FC236}">
+                <a16:creationId xmlns:a16="http://schemas.microsoft.com/office/drawing/2014/main" id="{568030FC-8EA1-1F63-EBD8-018EDF7E422B}"/>
+              </a:ext>
+            </a:extLst>
+          </p:cNvPr>
+          <p:cNvSpPr/>
+          <p:nvPr/>
+        </p:nvSpPr>
+        <p:spPr>
+          <a:xfrm>
+            <a:off x="3802380" y="1272540"/>
+            <a:ext cx="3375660" cy="3611357"/>
+          </a:xfrm>
+          <a:prstGeom prst="rect">
+            <a:avLst/>
+          </a:prstGeom>
+          <a:solidFill>
+            <a:srgbClr val="FFFFFF"/>
+          </a:solidFill>
+          <a:ln w="12700" cap="flat">
+            <a:solidFill>
+              <a:schemeClr val="bg1"/>
+            </a:solidFill>
+            <a:prstDash val="solid"/>
+            <a:miter lim="800000"/>
+          </a:ln>
+          <a:effectLst/>
+          <a:sp3d/>
+        </p:spPr>
+        <p:style>
+          <a:lnRef idx="0">
+            <a:scrgbClr r="0" g="0" b="0"/>
+          </a:lnRef>
+          <a:fillRef idx="0">
+            <a:scrgbClr r="0" g="0" b="0"/>
+          </a:fillRef>
+          <a:effectRef idx="0">
+            <a:scrgbClr r="0" g="0" b="0"/>
+          </a:effectRef>
+          <a:fontRef idx="none"/>
+        </p:style>
+        <p:txBody>
+          <a:bodyPr rot="0" spcFirstLastPara="1" vertOverflow="overflow" horzOverflow="overflow" vert="horz" wrap="square" lIns="45719" tIns="45719" rIns="45719" bIns="45719" numCol="1" spcCol="38100" rtlCol="0" anchor="ctr">
+            <a:spAutoFit/>
+          </a:bodyPr>
+          <a:lstStyle/>
+          <a:p>
+            <a:pPr marL="0" marR="0" indent="0" algn="l" defTabSz="914400" rtl="0" fontAlgn="auto" latinLnBrk="0" hangingPunct="0">
+              <a:lnSpc>
+                <a:spcPct val="100000"/>
+              </a:lnSpc>
+              <a:spcBef>
+                <a:spcPts val="0"/>
+              </a:spcBef>
+              <a:spcAft>
+                <a:spcPts val="0"/>
+              </a:spcAft>
+              <a:buClrTx/>
+              <a:buSzTx/>
+              <a:buFontTx/>
+              <a:buNone/>
+              <a:tabLst/>
+            </a:pPr>
+            <a:endParaRPr kumimoji="0" lang="de-CH" sz="1800" b="0" i="0" u="none" strike="noStrike" cap="none" spc="0" normalizeH="0" baseline="0">
+              <a:ln>
+                <a:noFill/>
+              </a:ln>
+              <a:solidFill>
+                <a:srgbClr val="000000"/>
+              </a:solidFill>
+              <a:effectLst/>
+              <a:uFillTx/>
+              <a:latin typeface="Arial"/>
+              <a:ea typeface="Arial"/>
+              <a:cs typeface="Arial"/>
+              <a:sym typeface="Arial"/>
+            </a:endParaRPr>
+          </a:p>
+        </p:txBody>
+      </p:sp>
+      <p:sp>
+        <p:nvSpPr>
+          <p:cNvPr id="7" name="Rechteck 6">
+            <a:extLst>
+              <a:ext uri="{FF2B5EF4-FFF2-40B4-BE49-F238E27FC236}">
+                <a16:creationId xmlns:a16="http://schemas.microsoft.com/office/drawing/2014/main" id="{B93D4065-6C65-CB12-3330-00BC7D0EA7C9}"/>
+              </a:ext>
+            </a:extLst>
+          </p:cNvPr>
+          <p:cNvSpPr/>
+          <p:nvPr/>
+        </p:nvSpPr>
+        <p:spPr>
+          <a:xfrm>
+            <a:off x="7178040" y="1211580"/>
+            <a:ext cx="1894400" cy="3611357"/>
+          </a:xfrm>
+          <a:prstGeom prst="rect">
+            <a:avLst/>
+          </a:prstGeom>
+          <a:solidFill>
+            <a:srgbClr val="FFFFFF"/>
+          </a:solidFill>
+          <a:ln w="12700" cap="flat">
+            <a:solidFill>
+              <a:schemeClr val="bg1"/>
+            </a:solidFill>
+            <a:prstDash val="solid"/>
+            <a:miter lim="800000"/>
+          </a:ln>
+          <a:effectLst/>
+          <a:sp3d/>
+        </p:spPr>
+        <p:style>
+          <a:lnRef idx="0">
+            <a:scrgbClr r="0" g="0" b="0"/>
+          </a:lnRef>
+          <a:fillRef idx="0">
+            <a:scrgbClr r="0" g="0" b="0"/>
+          </a:fillRef>
+          <a:effectRef idx="0">
+            <a:scrgbClr r="0" g="0" b="0"/>
+          </a:effectRef>
+          <a:fontRef idx="none"/>
+        </p:style>
+        <p:txBody>
+          <a:bodyPr rot="0" spcFirstLastPara="1" vertOverflow="overflow" horzOverflow="overflow" vert="horz" wrap="square" lIns="45719" tIns="45719" rIns="45719" bIns="45719" numCol="1" spcCol="38100" rtlCol="0" anchor="ctr">
+            <a:spAutoFit/>
+          </a:bodyPr>
+          <a:lstStyle/>
+          <a:p>
+            <a:pPr marL="0" marR="0" indent="0" algn="l" defTabSz="914400" rtl="0" fontAlgn="auto" latinLnBrk="0" hangingPunct="0">
+              <a:lnSpc>
+                <a:spcPct val="100000"/>
+              </a:lnSpc>
+              <a:spcBef>
+                <a:spcPts val="0"/>
+              </a:spcBef>
+              <a:spcAft>
+                <a:spcPts val="0"/>
+              </a:spcAft>
+              <a:buClrTx/>
+              <a:buSzTx/>
+              <a:buFontTx/>
+              <a:buNone/>
+              <a:tabLst/>
+            </a:pPr>
+            <a:endParaRPr kumimoji="0" lang="de-CH" sz="1800" b="0" i="0" u="none" strike="noStrike" cap="none" spc="0" normalizeH="0" baseline="0">
+              <a:ln>
+                <a:noFill/>
+              </a:ln>
+              <a:solidFill>
+                <a:srgbClr val="000000"/>
+              </a:solidFill>
+              <a:effectLst/>
+              <a:uFillTx/>
+              <a:latin typeface="Arial"/>
+              <a:ea typeface="Arial"/>
+              <a:cs typeface="Arial"/>
+              <a:sym typeface="Arial"/>
+            </a:endParaRPr>
+          </a:p>
+        </p:txBody>
+      </p:sp>
+    </p:spTree>
+    <p:extLst>
+      <p:ext uri="{BB962C8B-B14F-4D97-AF65-F5344CB8AC3E}">
+        <p14:creationId xmlns:p14="http://schemas.microsoft.com/office/powerpoint/2010/main" val="2677606480"/>
+      </p:ext>
+    </p:extLst>
+  </p:cSld>
+  <p:clrMapOvr>
+    <a:masterClrMapping/>
+  </p:clrMapOvr>
+  <p:transition spd="med"/>
+  <p:timing>
+    <p:tnLst>
+      <p:par>
+        <p:cTn id="1" dur="indefinite" restart="never" nodeType="tmRoot">
+          <p:childTnLst>
+            <p:seq concurrent="1" nextAc="seek">
+              <p:cTn id="2" dur="indefinite" nodeType="mainSeq">
+                <p:childTnLst>
+                  <p:par>
+                    <p:cTn id="3" fill="hold">
+                      <p:stCondLst>
+                        <p:cond delay="indefinite"/>
+                      </p:stCondLst>
+                      <p:childTnLst>
+                        <p:par>
+                          <p:cTn id="4" fill="hold">
+                            <p:stCondLst>
+                              <p:cond delay="0"/>
+                            </p:stCondLst>
+                            <p:childTnLst>
+                              <p:par>
+                                <p:cTn id="5" presetID="1" presetClass="exit" presetSubtype="0" fill="hold" grpId="0" nodeType="clickEffect">
+                                  <p:stCondLst>
+                                    <p:cond delay="0"/>
+                                  </p:stCondLst>
+                                  <p:childTnLst>
+                                    <p:set>
+                                      <p:cBhvr>
+                                        <p:cTn id="6" dur="1" fill="hold">
+                                          <p:stCondLst>
+                                            <p:cond delay="0"/>
+                                          </p:stCondLst>
+                                        </p:cTn>
+                                        <p:tgtEl>
+                                          <p:spTgt spid="5"/>
+                                        </p:tgtEl>
+                                        <p:attrNameLst>
+                                          <p:attrName>style.visibility</p:attrName>
+                                        </p:attrNameLst>
+                                      </p:cBhvr>
+                                      <p:to>
+                                        <p:strVal val="hidden"/>
+                                      </p:to>
+                                    </p:set>
+                                  </p:childTnLst>
+                                </p:cTn>
+                              </p:par>
+                            </p:childTnLst>
+                          </p:cTn>
+                        </p:par>
+                      </p:childTnLst>
+                    </p:cTn>
+                  </p:par>
+                  <p:par>
+                    <p:cTn id="7" fill="hold">
+                      <p:stCondLst>
+                        <p:cond delay="indefinite"/>
+                      </p:stCondLst>
+                      <p:childTnLst>
+                        <p:par>
+                          <p:cTn id="8" fill="hold">
+                            <p:stCondLst>
+                              <p:cond delay="0"/>
+                            </p:stCondLst>
+                            <p:childTnLst>
+                              <p:par>
+                                <p:cTn id="9" presetID="1" presetClass="exit" presetSubtype="0" fill="hold" grpId="0" nodeType="clickEffect">
+                                  <p:stCondLst>
+                                    <p:cond delay="0"/>
+                                  </p:stCondLst>
+                                  <p:childTnLst>
+                                    <p:set>
+                                      <p:cBhvr>
+                                        <p:cTn id="10" dur="1" fill="hold">
+                                          <p:stCondLst>
+                                            <p:cond delay="0"/>
+                                          </p:stCondLst>
+                                        </p:cTn>
+                                        <p:tgtEl>
+                                          <p:spTgt spid="7"/>
+                                        </p:tgtEl>
+                                        <p:attrNameLst>
+                                          <p:attrName>style.visibility</p:attrName>
+                                        </p:attrNameLst>
+                                      </p:cBhvr>
+                                      <p:to>
+                                        <p:strVal val="hidden"/>
+                                      </p:to>
+                                    </p:set>
+                                  </p:childTnLst>
+                                </p:cTn>
+                              </p:par>
+                            </p:childTnLst>
+                          </p:cTn>
+                        </p:par>
+                      </p:childTnLst>
+                    </p:cTn>
+                  </p:par>
+                </p:childTnLst>
+              </p:cTn>
+              <p:prevCondLst>
+                <p:cond evt="onPrev" delay="0">
+                  <p:tgtEl>
+                    <p:sldTgt/>
+                  </p:tgtEl>
+                </p:cond>
+              </p:prevCondLst>
+              <p:nextCondLst>
+                <p:cond evt="onNext" delay="0">
+                  <p:tgtEl>
+                    <p:sldTgt/>
+                  </p:tgtEl>
+                </p:cond>
+              </p:nextCondLst>
+            </p:seq>
+          </p:childTnLst>
+        </p:cTn>
+      </p:par>
+    </p:tnLst>
+    <p:bldLst>
+      <p:bldP spid="5" grpId="0" animBg="1"/>
+      <p:bldP spid="7" grpId="0" animBg="1"/>
+    </p:bldLst>
+  </p:timing>
+</p:sld>
+</file>
+
+<file path=ppt/slides/slide11.xml><?xml version="1.0" encoding="utf-8"?>
+<p:sld xmlns:a="http://schemas.openxmlformats.org/drawingml/2006/main" xmlns:r="http://schemas.openxmlformats.org/officeDocument/2006/relationships" xmlns:p="http://schemas.openxmlformats.org/presentationml/2006/main">
+  <p:cSld>
+    <p:spTree>
+      <p:nvGrpSpPr>
+        <p:cNvPr id="1" name=""/>
+        <p:cNvGrpSpPr/>
+        <p:nvPr/>
+      </p:nvGrpSpPr>
+      <p:grpSpPr>
+        <a:xfrm>
+          <a:off x="0" y="0"/>
+          <a:ext cx="0" cy="0"/>
+          <a:chOff x="0" y="0"/>
+          <a:chExt cx="0" cy="0"/>
+        </a:xfrm>
+      </p:grpSpPr>
+      <p:sp>
+        <p:nvSpPr>
+          <p:cNvPr id="249" name="Foliennummernplatzhalter 5"/>
+          <p:cNvSpPr txBox="1">
+            <a:spLocks noGrp="1"/>
+          </p:cNvSpPr>
+          <p:nvPr>
+            <p:ph type="sldNum" sz="quarter" idx="2"/>
+          </p:nvPr>
+        </p:nvSpPr>
+        <p:spPr>
+          <a:prstGeom prst="rect">
+            <a:avLst/>
+          </a:prstGeom>
+          <a:extLst>
+            <a:ext uri="{C572A759-6A51-4108-AA02-DFA0A04FC94B}">
+              <ma14:wrappingTextBoxFlag xmlns="" xmlns:m="http://schemas.openxmlformats.org/officeDocument/2006/math" xmlns:a14="http://schemas.microsoft.com/office/drawing/2010/main" xmlns:ma14="http://schemas.microsoft.com/office/mac/drawingml/2011/main" val="1"/>
+            </a:ext>
+          </a:extLst>
+        </p:spPr>
+        <p:txBody>
+          <a:bodyPr/>
+          <a:lstStyle/>
+          <a:p>
+            <a:fld id="{86CB4B4D-7CA3-9044-876B-883B54F8677D}" type="slidenum">
+              <a:rPr lang="en-GB" noProof="0" smtClean="0"/>
+              <a:t>11</a:t>
+            </a:fld>
+            <a:endParaRPr lang="en-GB" noProof="0" dirty="0"/>
+          </a:p>
+        </p:txBody>
+      </p:sp>
+      <p:sp>
+        <p:nvSpPr>
+          <p:cNvPr id="250" name="Titel 5"/>
+          <p:cNvSpPr txBox="1">
+            <a:spLocks noGrp="1"/>
+          </p:cNvSpPr>
+          <p:nvPr>
+            <p:ph type="title"/>
+          </p:nvPr>
+        </p:nvSpPr>
+        <p:spPr>
+          <a:prstGeom prst="rect">
+            <a:avLst/>
+          </a:prstGeom>
+        </p:spPr>
+        <p:txBody>
+          <a:bodyPr/>
+          <a:lstStyle/>
+          <a:p>
+            <a:r>
+              <a:rPr lang="en-GB" noProof="0" dirty="0"/>
+              <a:t>Benchmarking</a:t>
+            </a:r>
+          </a:p>
+        </p:txBody>
+      </p:sp>
+      <p:sp>
+        <p:nvSpPr>
+          <p:cNvPr id="251" name="Inhaltsplatzhalter 6"/>
+          <p:cNvSpPr txBox="1">
+            <a:spLocks noGrp="1"/>
+          </p:cNvSpPr>
+          <p:nvPr>
+            <p:ph type="body" idx="1"/>
+          </p:nvPr>
+        </p:nvSpPr>
+        <p:spPr>
+          <a:prstGeom prst="rect">
+            <a:avLst/>
+          </a:prstGeom>
+        </p:spPr>
+        <p:txBody>
+          <a:bodyPr/>
+          <a:lstStyle/>
+          <a:p>
+            <a:pPr marL="6350" indent="0">
+              <a:buNone/>
+            </a:pPr>
+            <a:endParaRPr lang="en-GB" noProof="0" dirty="0"/>
+          </a:p>
+          <a:p>
+            <a:endParaRPr lang="en-GB" noProof="0" dirty="0"/>
+          </a:p>
+        </p:txBody>
+      </p:sp>
+      <p:sp>
+        <p:nvSpPr>
+          <p:cNvPr id="252" name="Rechteck 4"/>
+          <p:cNvSpPr txBox="1"/>
+          <p:nvPr/>
+        </p:nvSpPr>
+        <p:spPr>
+          <a:xfrm>
+            <a:off x="990648" y="5007008"/>
+            <a:ext cx="8082331" cy="123111"/>
+          </a:xfrm>
+          <a:prstGeom prst="rect">
+            <a:avLst/>
+          </a:prstGeom>
+          <a:ln w="12700">
+            <a:miter lim="400000"/>
+          </a:ln>
+          <a:extLst>
+            <a:ext uri="{C572A759-6A51-4108-AA02-DFA0A04FC94B}">
+              <ma14:wrappingTextBoxFlag xmlns="" xmlns:m="http://schemas.openxmlformats.org/officeDocument/2006/math" xmlns:a14="http://schemas.microsoft.com/office/drawing/2010/main" xmlns:ma14="http://schemas.microsoft.com/office/mac/drawingml/2011/main" val="1"/>
+            </a:ext>
+          </a:extLst>
+        </p:spPr>
+        <p:txBody>
+          <a:bodyPr wrap="square" lIns="0" tIns="0" rIns="0" bIns="0">
+            <a:spAutoFit/>
+          </a:bodyPr>
+          <a:lstStyle>
+            <a:lvl1pPr>
+              <a:defRPr sz="800"/>
+            </a:lvl1pPr>
+          </a:lstStyle>
+          <a:p>
+            <a:r>
+              <a:rPr lang="en-GB" noProof="0" dirty="0"/>
+              <a:t>Gu et al. : Revisiting Third-Party Library Detection: A Ground Truth Dataset and Its Implications Across Security Tasks, 2025</a:t>
+            </a:r>
+          </a:p>
+        </p:txBody>
+      </p:sp>
+      <p:pic>
+        <p:nvPicPr>
+          <p:cNvPr id="5" name="Grafik 4">
+            <a:extLst>
+              <a:ext uri="{FF2B5EF4-FFF2-40B4-BE49-F238E27FC236}">
+                <a16:creationId xmlns:a16="http://schemas.microsoft.com/office/drawing/2014/main" id="{DBBF837B-8E06-A487-48B1-0AF467E36FFB}"/>
+              </a:ext>
+            </a:extLst>
+          </p:cNvPr>
+          <p:cNvPicPr>
+            <a:picLocks noChangeAspect="1"/>
+          </p:cNvPicPr>
+          <p:nvPr/>
+        </p:nvPicPr>
+        <p:blipFill>
+          <a:blip r:embed="rId3"/>
+          <a:stretch>
+            <a:fillRect/>
+          </a:stretch>
+        </p:blipFill>
+        <p:spPr>
+          <a:xfrm>
+            <a:off x="0" y="1409125"/>
+            <a:ext cx="9144000" cy="3591499"/>
+          </a:xfrm>
+          <a:prstGeom prst="rect">
+            <a:avLst/>
+          </a:prstGeom>
+        </p:spPr>
+      </p:pic>
+      <p:sp>
+        <p:nvSpPr>
+          <p:cNvPr id="2" name="Rechteck 1">
+            <a:extLst>
+              <a:ext uri="{FF2B5EF4-FFF2-40B4-BE49-F238E27FC236}">
+                <a16:creationId xmlns:a16="http://schemas.microsoft.com/office/drawing/2014/main" id="{DB058732-8F3D-4431-8094-08D9F37B12DA}"/>
+              </a:ext>
+            </a:extLst>
+          </p:cNvPr>
+          <p:cNvSpPr/>
+          <p:nvPr/>
+        </p:nvSpPr>
+        <p:spPr>
+          <a:xfrm>
+            <a:off x="2758440" y="1409125"/>
+            <a:ext cx="4869180" cy="3591499"/>
+          </a:xfrm>
+          <a:prstGeom prst="rect">
+            <a:avLst/>
+          </a:prstGeom>
+          <a:solidFill>
+            <a:srgbClr val="FFFFFF"/>
+          </a:solidFill>
+          <a:ln w="12700" cap="flat">
+            <a:solidFill>
+              <a:schemeClr val="bg1"/>
+            </a:solidFill>
+            <a:prstDash val="solid"/>
+            <a:miter lim="800000"/>
+          </a:ln>
+          <a:effectLst/>
+          <a:sp3d/>
+        </p:spPr>
+        <p:style>
+          <a:lnRef idx="0">
+            <a:scrgbClr r="0" g="0" b="0"/>
+          </a:lnRef>
+          <a:fillRef idx="0">
+            <a:scrgbClr r="0" g="0" b="0"/>
+          </a:fillRef>
+          <a:effectRef idx="0">
+            <a:scrgbClr r="0" g="0" b="0"/>
+          </a:effectRef>
+          <a:fontRef idx="none"/>
+        </p:style>
+        <p:txBody>
+          <a:bodyPr rot="0" spcFirstLastPara="1" vertOverflow="overflow" horzOverflow="overflow" vert="horz" wrap="square" lIns="45719" tIns="45719" rIns="45719" bIns="45719" numCol="1" spcCol="38100" rtlCol="0" anchor="ctr">
+            <a:spAutoFit/>
+          </a:bodyPr>
+          <a:lstStyle/>
+          <a:p>
+            <a:pPr marL="0" marR="0" indent="0" algn="l" defTabSz="914400" rtl="0" fontAlgn="auto" latinLnBrk="0" hangingPunct="0">
+              <a:lnSpc>
+                <a:spcPct val="100000"/>
+              </a:lnSpc>
+              <a:spcBef>
+                <a:spcPts val="0"/>
+              </a:spcBef>
+              <a:spcAft>
+                <a:spcPts val="0"/>
+              </a:spcAft>
+              <a:buClrTx/>
+              <a:buSzTx/>
+              <a:buFontTx/>
+              <a:buNone/>
+              <a:tabLst/>
+            </a:pPr>
+            <a:endParaRPr kumimoji="0" lang="de-CH" sz="1800" b="0" i="0" u="none" strike="noStrike" cap="none" spc="0" normalizeH="0" baseline="0">
+              <a:ln>
+                <a:noFill/>
+              </a:ln>
+              <a:solidFill>
+                <a:srgbClr val="000000"/>
+              </a:solidFill>
+              <a:effectLst/>
+              <a:uFillTx/>
+              <a:latin typeface="Arial"/>
+              <a:ea typeface="Arial"/>
+              <a:cs typeface="Arial"/>
+              <a:sym typeface="Arial"/>
+            </a:endParaRPr>
+          </a:p>
+        </p:txBody>
+      </p:sp>
+      <p:sp>
+        <p:nvSpPr>
+          <p:cNvPr id="3" name="Rechteck 2">
+            <a:extLst>
+              <a:ext uri="{FF2B5EF4-FFF2-40B4-BE49-F238E27FC236}">
+                <a16:creationId xmlns:a16="http://schemas.microsoft.com/office/drawing/2014/main" id="{243E8419-4AE7-FDF8-CA2E-3711B014637C}"/>
+              </a:ext>
+            </a:extLst>
+          </p:cNvPr>
+          <p:cNvSpPr/>
+          <p:nvPr/>
+        </p:nvSpPr>
+        <p:spPr>
+          <a:xfrm>
+            <a:off x="7627620" y="1318260"/>
+            <a:ext cx="1516380" cy="2103120"/>
+          </a:xfrm>
+          <a:prstGeom prst="rect">
+            <a:avLst/>
+          </a:prstGeom>
+          <a:solidFill>
+            <a:srgbClr val="FFFFFF"/>
+          </a:solidFill>
+          <a:ln w="12700" cap="flat">
+            <a:solidFill>
+              <a:schemeClr val="bg1"/>
+            </a:solidFill>
+            <a:prstDash val="solid"/>
+            <a:miter lim="800000"/>
+          </a:ln>
+          <a:effectLst/>
+          <a:sp3d/>
+        </p:spPr>
+        <p:style>
+          <a:lnRef idx="0">
+            <a:scrgbClr r="0" g="0" b="0"/>
+          </a:lnRef>
+          <a:fillRef idx="0">
+            <a:scrgbClr r="0" g="0" b="0"/>
+          </a:fillRef>
+          <a:effectRef idx="0">
+            <a:scrgbClr r="0" g="0" b="0"/>
+          </a:effectRef>
+          <a:fontRef idx="none"/>
+        </p:style>
+        <p:txBody>
+          <a:bodyPr rot="0" spcFirstLastPara="1" vertOverflow="overflow" horzOverflow="overflow" vert="horz" wrap="square" lIns="45719" tIns="45719" rIns="45719" bIns="45719" numCol="1" spcCol="38100" rtlCol="0" anchor="ctr">
+            <a:spAutoFit/>
+          </a:bodyPr>
+          <a:lstStyle/>
+          <a:p>
+            <a:pPr marL="0" marR="0" indent="0" algn="l" defTabSz="914400" rtl="0" fontAlgn="auto" latinLnBrk="0" hangingPunct="0">
+              <a:lnSpc>
+                <a:spcPct val="100000"/>
+              </a:lnSpc>
+              <a:spcBef>
+                <a:spcPts val="0"/>
+              </a:spcBef>
+              <a:spcAft>
+                <a:spcPts val="0"/>
+              </a:spcAft>
+              <a:buClrTx/>
+              <a:buSzTx/>
+              <a:buFontTx/>
+              <a:buNone/>
+              <a:tabLst/>
+            </a:pPr>
+            <a:endParaRPr kumimoji="0" lang="de-CH" sz="1800" b="0" i="0" u="none" strike="noStrike" cap="none" spc="0" normalizeH="0" baseline="0">
+              <a:ln>
+                <a:noFill/>
+              </a:ln>
+              <a:solidFill>
+                <a:srgbClr val="000000"/>
+              </a:solidFill>
+              <a:effectLst/>
+              <a:uFillTx/>
+              <a:latin typeface="Arial"/>
+              <a:ea typeface="Arial"/>
+              <a:cs typeface="Arial"/>
+              <a:sym typeface="Arial"/>
+            </a:endParaRPr>
+          </a:p>
+        </p:txBody>
+      </p:sp>
+      <p:sp>
+        <p:nvSpPr>
+          <p:cNvPr id="4" name="Rechteck 3">
+            <a:extLst>
+              <a:ext uri="{FF2B5EF4-FFF2-40B4-BE49-F238E27FC236}">
+                <a16:creationId xmlns:a16="http://schemas.microsoft.com/office/drawing/2014/main" id="{A0FC864D-6963-071A-ED99-A64C48276D23}"/>
+              </a:ext>
+            </a:extLst>
+          </p:cNvPr>
+          <p:cNvSpPr/>
+          <p:nvPr/>
+        </p:nvSpPr>
+        <p:spPr>
+          <a:xfrm>
+            <a:off x="7627620" y="3421380"/>
+            <a:ext cx="1516380" cy="1579244"/>
+          </a:xfrm>
+          <a:prstGeom prst="rect">
+            <a:avLst/>
+          </a:prstGeom>
+          <a:solidFill>
+            <a:srgbClr val="FFFFFF"/>
+          </a:solidFill>
+          <a:ln w="12700" cap="flat">
+            <a:solidFill>
+              <a:schemeClr val="bg1"/>
+            </a:solidFill>
+            <a:prstDash val="solid"/>
+            <a:miter lim="800000"/>
+          </a:ln>
+          <a:effectLst/>
+          <a:sp3d/>
+        </p:spPr>
+        <p:style>
+          <a:lnRef idx="0">
+            <a:scrgbClr r="0" g="0" b="0"/>
+          </a:lnRef>
+          <a:fillRef idx="0">
+            <a:scrgbClr r="0" g="0" b="0"/>
+          </a:fillRef>
+          <a:effectRef idx="0">
+            <a:scrgbClr r="0" g="0" b="0"/>
+          </a:effectRef>
+          <a:fontRef idx="none"/>
+        </p:style>
+        <p:txBody>
+          <a:bodyPr rot="0" spcFirstLastPara="1" vertOverflow="overflow" horzOverflow="overflow" vert="horz" wrap="square" lIns="45719" tIns="45719" rIns="45719" bIns="45719" numCol="1" spcCol="38100" rtlCol="0" anchor="ctr">
+            <a:spAutoFit/>
+          </a:bodyPr>
+          <a:lstStyle/>
+          <a:p>
+            <a:pPr marL="0" marR="0" indent="0" algn="l" defTabSz="914400" rtl="0" fontAlgn="auto" latinLnBrk="0" hangingPunct="0">
+              <a:lnSpc>
+                <a:spcPct val="100000"/>
+              </a:lnSpc>
+              <a:spcBef>
+                <a:spcPts val="0"/>
+              </a:spcBef>
+              <a:spcAft>
+                <a:spcPts val="0"/>
+              </a:spcAft>
+              <a:buClrTx/>
+              <a:buSzTx/>
+              <a:buFontTx/>
+              <a:buNone/>
+              <a:tabLst/>
+            </a:pPr>
+            <a:endParaRPr kumimoji="0" lang="de-CH" sz="1800" b="0" i="0" u="none" strike="noStrike" cap="none" spc="0" normalizeH="0" baseline="0">
+              <a:ln>
+                <a:noFill/>
+              </a:ln>
+              <a:solidFill>
+                <a:srgbClr val="000000"/>
+              </a:solidFill>
+              <a:effectLst/>
+              <a:uFillTx/>
+              <a:latin typeface="Arial"/>
+              <a:ea typeface="Arial"/>
+              <a:cs typeface="Arial"/>
+              <a:sym typeface="Arial"/>
+            </a:endParaRPr>
+          </a:p>
+        </p:txBody>
+      </p:sp>
+    </p:spTree>
+  </p:cSld>
+  <p:clrMapOvr>
+    <a:masterClrMapping/>
+  </p:clrMapOvr>
+  <p:transition spd="med"/>
+  <p:timing>
+    <p:tnLst>
+      <p:par>
+        <p:cTn id="1" dur="indefinite" restart="never" nodeType="tmRoot">
+          <p:childTnLst>
+            <p:seq concurrent="1" nextAc="seek">
+              <p:cTn id="2" dur="indefinite" nodeType="mainSeq">
+                <p:childTnLst>
+                  <p:par>
+                    <p:cTn id="3" fill="hold">
+                      <p:stCondLst>
+                        <p:cond delay="indefinite"/>
+                      </p:stCondLst>
+                      <p:childTnLst>
+                        <p:par>
+                          <p:cTn id="4" fill="hold">
+                            <p:stCondLst>
+                              <p:cond delay="0"/>
+                            </p:stCondLst>
+                            <p:childTnLst>
+                              <p:par>
+                                <p:cTn id="5" presetID="1" presetClass="exit" presetSubtype="0" fill="hold" grpId="0" nodeType="clickEffect">
+                                  <p:stCondLst>
+                                    <p:cond delay="0"/>
+                                  </p:stCondLst>
+                                  <p:childTnLst>
+                                    <p:set>
+                                      <p:cBhvr>
+                                        <p:cTn id="6" dur="1" fill="hold">
+                                          <p:stCondLst>
+                                            <p:cond delay="0"/>
+                                          </p:stCondLst>
+                                        </p:cTn>
+                                        <p:tgtEl>
+                                          <p:spTgt spid="2"/>
+                                        </p:tgtEl>
+                                        <p:attrNameLst>
+                                          <p:attrName>style.visibility</p:attrName>
+                                        </p:attrNameLst>
+                                      </p:cBhvr>
+                                      <p:to>
+                                        <p:strVal val="hidden"/>
+                                      </p:to>
+                                    </p:set>
+                                  </p:childTnLst>
+                                </p:cTn>
+                              </p:par>
+                            </p:childTnLst>
+                          </p:cTn>
+                        </p:par>
+                      </p:childTnLst>
+                    </p:cTn>
+                  </p:par>
+                  <p:par>
+                    <p:cTn id="7" fill="hold">
+                      <p:stCondLst>
+                        <p:cond delay="indefinite"/>
+                      </p:stCondLst>
+                      <p:childTnLst>
+                        <p:par>
+                          <p:cTn id="8" fill="hold">
+                            <p:stCondLst>
+                              <p:cond delay="0"/>
+                            </p:stCondLst>
+                            <p:childTnLst>
+                              <p:par>
+                                <p:cTn id="9" presetID="1" presetClass="exit" presetSubtype="0" fill="hold" grpId="0" nodeType="clickEffect">
+                                  <p:stCondLst>
+                                    <p:cond delay="0"/>
+                                  </p:stCondLst>
+                                  <p:childTnLst>
+                                    <p:set>
+                                      <p:cBhvr>
+                                        <p:cTn id="10" dur="1" fill="hold">
+                                          <p:stCondLst>
+                                            <p:cond delay="0"/>
+                                          </p:stCondLst>
+                                        </p:cTn>
+                                        <p:tgtEl>
+                                          <p:spTgt spid="3"/>
+                                        </p:tgtEl>
+                                        <p:attrNameLst>
+                                          <p:attrName>style.visibility</p:attrName>
+                                        </p:attrNameLst>
+                                      </p:cBhvr>
+                                      <p:to>
+                                        <p:strVal val="hidden"/>
+                                      </p:to>
+                                    </p:set>
+                                  </p:childTnLst>
+                                </p:cTn>
+                              </p:par>
+                            </p:childTnLst>
+                          </p:cTn>
+                        </p:par>
+                      </p:childTnLst>
+                    </p:cTn>
+                  </p:par>
+                  <p:par>
+                    <p:cTn id="11" fill="hold">
+                      <p:stCondLst>
+                        <p:cond delay="indefinite"/>
+                      </p:stCondLst>
+                      <p:childTnLst>
+                        <p:par>
+                          <p:cTn id="12" fill="hold">
+                            <p:stCondLst>
+                              <p:cond delay="0"/>
+                            </p:stCondLst>
+                            <p:childTnLst>
+                              <p:par>
+                                <p:cTn id="13" presetID="1" presetClass="exit" presetSubtype="0" fill="hold" grpId="0" nodeType="clickEffect">
+                                  <p:stCondLst>
+                                    <p:cond delay="0"/>
+                                  </p:stCondLst>
+                                  <p:childTnLst>
+                                    <p:set>
+                                      <p:cBhvr>
+                                        <p:cTn id="14" dur="1" fill="hold">
+                                          <p:stCondLst>
+                                            <p:cond delay="0"/>
+                                          </p:stCondLst>
+                                        </p:cTn>
+                                        <p:tgtEl>
+                                          <p:spTgt spid="4"/>
+                                        </p:tgtEl>
+                                        <p:attrNameLst>
+                                          <p:attrName>style.visibility</p:attrName>
+                                        </p:attrNameLst>
+                                      </p:cBhvr>
+                                      <p:to>
+                                        <p:strVal val="hidden"/>
+                                      </p:to>
+                                    </p:set>
+                                  </p:childTnLst>
+                                </p:cTn>
+                              </p:par>
+                            </p:childTnLst>
+                          </p:cTn>
+                        </p:par>
+                      </p:childTnLst>
+                    </p:cTn>
+                  </p:par>
+                </p:childTnLst>
+              </p:cTn>
+              <p:prevCondLst>
+                <p:cond evt="onPrev" delay="0">
+                  <p:tgtEl>
+                    <p:sldTgt/>
+                  </p:tgtEl>
+                </p:cond>
+              </p:prevCondLst>
+              <p:nextCondLst>
+                <p:cond evt="onNext" delay="0">
+                  <p:tgtEl>
+                    <p:sldTgt/>
+                  </p:tgtEl>
+                </p:cond>
+              </p:nextCondLst>
+            </p:seq>
+          </p:childTnLst>
+        </p:cTn>
+      </p:par>
+    </p:tnLst>
+    <p:bldLst>
+      <p:bldP spid="2" grpId="0" animBg="1"/>
+      <p:bldP spid="3" grpId="0" animBg="1"/>
+      <p:bldP spid="4" grpId="0" animBg="1"/>
+    </p:bldLst>
+  </p:timing>
+</p:sld>
+</file>
+
+<file path=ppt/slides/slide12.xml><?xml version="1.0" encoding="utf-8"?>
+<p:sld xmlns:a="http://schemas.openxmlformats.org/drawingml/2006/main" xmlns:r="http://schemas.openxmlformats.org/officeDocument/2006/relationships" xmlns:p="http://schemas.openxmlformats.org/presentationml/2006/main">
+  <p:cSld>
+    <p:spTree>
+      <p:nvGrpSpPr>
+        <p:cNvPr id="1" name=""/>
+        <p:cNvGrpSpPr/>
+        <p:nvPr/>
+      </p:nvGrpSpPr>
+      <p:grpSpPr>
+        <a:xfrm>
+          <a:off x="0" y="0"/>
+          <a:ext cx="0" cy="0"/>
+          <a:chOff x="0" y="0"/>
+          <a:chExt cx="0" cy="0"/>
+        </a:xfrm>
+      </p:grpSpPr>
+      <p:sp>
+        <p:nvSpPr>
+          <p:cNvPr id="2" name="Titel 1">
+            <a:extLst>
+              <a:ext uri="{FF2B5EF4-FFF2-40B4-BE49-F238E27FC236}">
                 <a16:creationId xmlns:a16="http://schemas.microsoft.com/office/drawing/2014/main" id="{57D6814B-2D04-1F0E-EA9F-45E769D257A4}"/>
               </a:ext>
             </a:extLst>
@@ -6342,249 +8292,6 @@
         <p14:creationId xmlns:p14="http://schemas.microsoft.com/office/powerpoint/2010/main" val="1135385790"/>
       </p:ext>
     </p:extLst>
-  </p:cSld>
-  <p:clrMapOvr>
-    <a:masterClrMapping/>
-  </p:clrMapOvr>
-  <p:transition spd="med"/>
-</p:sld>
-</file>
-
-<file path=ppt/slides/slide11.xml><?xml version="1.0" encoding="utf-8"?>
-<p:sld xmlns:a="http://schemas.openxmlformats.org/drawingml/2006/main" xmlns:r="http://schemas.openxmlformats.org/officeDocument/2006/relationships" xmlns:p="http://schemas.openxmlformats.org/presentationml/2006/main">
-  <p:cSld>
-    <p:spTree>
-      <p:nvGrpSpPr>
-        <p:cNvPr id="1" name=""/>
-        <p:cNvGrpSpPr/>
-        <p:nvPr/>
-      </p:nvGrpSpPr>
-      <p:grpSpPr>
-        <a:xfrm>
-          <a:off x="0" y="0"/>
-          <a:ext cx="0" cy="0"/>
-          <a:chOff x="0" y="0"/>
-          <a:chExt cx="0" cy="0"/>
-        </a:xfrm>
-      </p:grpSpPr>
-      <p:sp>
-        <p:nvSpPr>
-          <p:cNvPr id="2" name="Titel 1">
-            <a:extLst>
-              <a:ext uri="{FF2B5EF4-FFF2-40B4-BE49-F238E27FC236}">
-                <a16:creationId xmlns:a16="http://schemas.microsoft.com/office/drawing/2014/main" id="{AE22AE0A-897B-16D9-DF86-8DDF04FEBFA5}"/>
-              </a:ext>
-            </a:extLst>
-          </p:cNvPr>
-          <p:cNvSpPr>
-            <a:spLocks noGrp="1"/>
-          </p:cNvSpPr>
-          <p:nvPr>
-            <p:ph type="title"/>
-          </p:nvPr>
-        </p:nvSpPr>
-        <p:spPr/>
-        <p:txBody>
-          <a:bodyPr/>
-          <a:lstStyle/>
-          <a:p>
-            <a:r>
-              <a:rPr lang="en-GB" noProof="0" dirty="0"/>
-              <a:t>Comparison</a:t>
-            </a:r>
-          </a:p>
-        </p:txBody>
-      </p:sp>
-      <p:sp>
-        <p:nvSpPr>
-          <p:cNvPr id="3" name="Textplatzhalter 2">
-            <a:extLst>
-              <a:ext uri="{FF2B5EF4-FFF2-40B4-BE49-F238E27FC236}">
-                <a16:creationId xmlns:a16="http://schemas.microsoft.com/office/drawing/2014/main" id="{7EF95789-0767-DE5A-8BD5-A53767EB060C}"/>
-              </a:ext>
-            </a:extLst>
-          </p:cNvPr>
-          <p:cNvSpPr>
-            <a:spLocks noGrp="1"/>
-          </p:cNvSpPr>
-          <p:nvPr>
-            <p:ph type="body" idx="1"/>
-          </p:nvPr>
-        </p:nvSpPr>
-        <p:spPr/>
-        <p:txBody>
-          <a:bodyPr/>
-          <a:lstStyle/>
-          <a:p>
-            <a:r>
-              <a:rPr lang="en-GB" noProof="0" dirty="0"/>
-              <a:t>Papers overrate their tools</a:t>
-            </a:r>
-          </a:p>
-        </p:txBody>
-      </p:sp>
-      <p:pic>
-        <p:nvPicPr>
-          <p:cNvPr id="5" name="Grafik 4">
-            <a:extLst>
-              <a:ext uri="{FF2B5EF4-FFF2-40B4-BE49-F238E27FC236}">
-                <a16:creationId xmlns:a16="http://schemas.microsoft.com/office/drawing/2014/main" id="{19AF21EC-B3D6-8A5D-D2FB-C3BEE5698937}"/>
-              </a:ext>
-            </a:extLst>
-          </p:cNvPr>
-          <p:cNvPicPr>
-            <a:picLocks noChangeAspect="1"/>
-          </p:cNvPicPr>
-          <p:nvPr/>
-        </p:nvPicPr>
-        <p:blipFill>
-          <a:blip r:embed="rId3"/>
-          <a:stretch>
-            <a:fillRect/>
-          </a:stretch>
-        </p:blipFill>
-        <p:spPr>
-          <a:xfrm>
-            <a:off x="2963803" y="3044355"/>
-            <a:ext cx="6039693" cy="1829055"/>
-          </a:xfrm>
-          <a:prstGeom prst="rect">
-            <a:avLst/>
-          </a:prstGeom>
-        </p:spPr>
-      </p:pic>
-      <p:pic>
-        <p:nvPicPr>
-          <p:cNvPr id="7" name="Grafik 6">
-            <a:extLst>
-              <a:ext uri="{FF2B5EF4-FFF2-40B4-BE49-F238E27FC236}">
-                <a16:creationId xmlns:a16="http://schemas.microsoft.com/office/drawing/2014/main" id="{9486D772-1629-E6C6-0F2D-4907051B6BEB}"/>
-              </a:ext>
-            </a:extLst>
-          </p:cNvPr>
-          <p:cNvPicPr>
-            <a:picLocks noChangeAspect="1"/>
-          </p:cNvPicPr>
-          <p:nvPr/>
-        </p:nvPicPr>
-        <p:blipFill>
-          <a:blip r:embed="rId4"/>
-          <a:stretch>
-            <a:fillRect/>
-          </a:stretch>
-        </p:blipFill>
-        <p:spPr>
-          <a:xfrm>
-            <a:off x="68944" y="3044355"/>
-            <a:ext cx="2737023" cy="1743327"/>
-          </a:xfrm>
-          <a:prstGeom prst="rect">
-            <a:avLst/>
-          </a:prstGeom>
-        </p:spPr>
-      </p:pic>
-    </p:spTree>
-    <p:extLst>
-      <p:ext uri="{BB962C8B-B14F-4D97-AF65-F5344CB8AC3E}">
-        <p14:creationId xmlns:p14="http://schemas.microsoft.com/office/powerpoint/2010/main" val="1840906427"/>
-      </p:ext>
-    </p:extLst>
-  </p:cSld>
-  <p:clrMapOvr>
-    <a:masterClrMapping/>
-  </p:clrMapOvr>
-  <p:transition spd="med"/>
-</p:sld>
-</file>
-
-<file path=ppt/slides/slide12.xml><?xml version="1.0" encoding="utf-8"?>
-<p:sld xmlns:a="http://schemas.openxmlformats.org/drawingml/2006/main" xmlns:r="http://schemas.openxmlformats.org/officeDocument/2006/relationships" xmlns:p="http://schemas.openxmlformats.org/presentationml/2006/main">
-  <p:cSld>
-    <p:spTree>
-      <p:nvGrpSpPr>
-        <p:cNvPr id="1" name=""/>
-        <p:cNvGrpSpPr/>
-        <p:nvPr/>
-      </p:nvGrpSpPr>
-      <p:grpSpPr>
-        <a:xfrm>
-          <a:off x="0" y="0"/>
-          <a:ext cx="0" cy="0"/>
-          <a:chOff x="0" y="0"/>
-          <a:chExt cx="0" cy="0"/>
-        </a:xfrm>
-      </p:grpSpPr>
-      <p:sp>
-        <p:nvSpPr>
-          <p:cNvPr id="279" name="Titel 5"/>
-          <p:cNvSpPr txBox="1">
-            <a:spLocks noGrp="1"/>
-          </p:cNvSpPr>
-          <p:nvPr>
-            <p:ph type="title"/>
-          </p:nvPr>
-        </p:nvSpPr>
-        <p:spPr>
-          <a:prstGeom prst="rect">
-            <a:avLst/>
-          </a:prstGeom>
-        </p:spPr>
-        <p:txBody>
-          <a:bodyPr/>
-          <a:lstStyle/>
-          <a:p>
-            <a:r>
-              <a:rPr lang="en-GB" noProof="0" dirty="0"/>
-              <a:t>Conclusion</a:t>
-            </a:r>
-          </a:p>
-        </p:txBody>
-      </p:sp>
-      <p:sp>
-        <p:nvSpPr>
-          <p:cNvPr id="280" name="Inhaltsplatzhalter 6"/>
-          <p:cNvSpPr txBox="1">
-            <a:spLocks noGrp="1"/>
-          </p:cNvSpPr>
-          <p:nvPr>
-            <p:ph type="body" idx="1"/>
-          </p:nvPr>
-        </p:nvSpPr>
-        <p:spPr>
-          <a:prstGeom prst="rect">
-            <a:avLst/>
-          </a:prstGeom>
-        </p:spPr>
-        <p:txBody>
-          <a:bodyPr/>
-          <a:lstStyle/>
-          <a:p>
-            <a:r>
-              <a:rPr lang="en-GB" noProof="0" dirty="0"/>
-              <a:t>More (independent) benchmarking necessary</a:t>
-            </a:r>
-          </a:p>
-          <a:p>
-            <a:r>
-              <a:rPr lang="en-GB" noProof="0" dirty="0"/>
-              <a:t>Testing on hybrid frameworks missing</a:t>
-            </a:r>
-          </a:p>
-          <a:p>
-            <a:r>
-              <a:rPr lang="en-GB" noProof="0" dirty="0"/>
-              <a:t>Obfuscated datasets missing</a:t>
-            </a:r>
-          </a:p>
-          <a:p>
-            <a:endParaRPr lang="en-GB" noProof="0" dirty="0"/>
-          </a:p>
-          <a:p>
-            <a:endParaRPr lang="en-GB" noProof="0" dirty="0"/>
-          </a:p>
-        </p:txBody>
-      </p:sp>
-    </p:spTree>
   </p:cSld>
   <p:clrMapOvr>
     <a:masterClrMapping/>
@@ -6615,6 +8322,463 @@
           <p:cNvPr id="2" name="Titel 1">
             <a:extLst>
               <a:ext uri="{FF2B5EF4-FFF2-40B4-BE49-F238E27FC236}">
+                <a16:creationId xmlns:a16="http://schemas.microsoft.com/office/drawing/2014/main" id="{AE22AE0A-897B-16D9-DF86-8DDF04FEBFA5}"/>
+              </a:ext>
+            </a:extLst>
+          </p:cNvPr>
+          <p:cNvSpPr>
+            <a:spLocks noGrp="1"/>
+          </p:cNvSpPr>
+          <p:nvPr>
+            <p:ph type="title"/>
+          </p:nvPr>
+        </p:nvSpPr>
+        <p:spPr/>
+        <p:txBody>
+          <a:bodyPr/>
+          <a:lstStyle/>
+          <a:p>
+            <a:r>
+              <a:rPr lang="en-GB" noProof="0" dirty="0"/>
+              <a:t>Comparison</a:t>
+            </a:r>
+          </a:p>
+        </p:txBody>
+      </p:sp>
+      <p:sp>
+        <p:nvSpPr>
+          <p:cNvPr id="3" name="Textplatzhalter 2">
+            <a:extLst>
+              <a:ext uri="{FF2B5EF4-FFF2-40B4-BE49-F238E27FC236}">
+                <a16:creationId xmlns:a16="http://schemas.microsoft.com/office/drawing/2014/main" id="{7EF95789-0767-DE5A-8BD5-A53767EB060C}"/>
+              </a:ext>
+            </a:extLst>
+          </p:cNvPr>
+          <p:cNvSpPr>
+            <a:spLocks noGrp="1"/>
+          </p:cNvSpPr>
+          <p:nvPr>
+            <p:ph type="body" idx="1"/>
+          </p:nvPr>
+        </p:nvSpPr>
+        <p:spPr/>
+        <p:txBody>
+          <a:bodyPr/>
+          <a:lstStyle/>
+          <a:p>
+            <a:pPr marL="6350" indent="0">
+              <a:buNone/>
+            </a:pPr>
+            <a:endParaRPr lang="en-GB" noProof="0" dirty="0"/>
+          </a:p>
+        </p:txBody>
+      </p:sp>
+      <p:pic>
+        <p:nvPicPr>
+          <p:cNvPr id="5" name="Grafik 4">
+            <a:extLst>
+              <a:ext uri="{FF2B5EF4-FFF2-40B4-BE49-F238E27FC236}">
+                <a16:creationId xmlns:a16="http://schemas.microsoft.com/office/drawing/2014/main" id="{19AF21EC-B3D6-8A5D-D2FB-C3BEE5698937}"/>
+              </a:ext>
+            </a:extLst>
+          </p:cNvPr>
+          <p:cNvPicPr>
+            <a:picLocks noChangeAspect="1"/>
+          </p:cNvPicPr>
+          <p:nvPr/>
+        </p:nvPicPr>
+        <p:blipFill>
+          <a:blip r:embed="rId3"/>
+          <a:stretch>
+            <a:fillRect/>
+          </a:stretch>
+        </p:blipFill>
+        <p:spPr>
+          <a:xfrm>
+            <a:off x="3104307" y="2210286"/>
+            <a:ext cx="6039693" cy="1829055"/>
+          </a:xfrm>
+          <a:prstGeom prst="rect">
+            <a:avLst/>
+          </a:prstGeom>
+        </p:spPr>
+      </p:pic>
+      <p:pic>
+        <p:nvPicPr>
+          <p:cNvPr id="7" name="Grafik 6">
+            <a:extLst>
+              <a:ext uri="{FF2B5EF4-FFF2-40B4-BE49-F238E27FC236}">
+                <a16:creationId xmlns:a16="http://schemas.microsoft.com/office/drawing/2014/main" id="{9486D772-1629-E6C6-0F2D-4907051B6BEB}"/>
+              </a:ext>
+            </a:extLst>
+          </p:cNvPr>
+          <p:cNvPicPr>
+            <a:picLocks noChangeAspect="1"/>
+          </p:cNvPicPr>
+          <p:nvPr/>
+        </p:nvPicPr>
+        <p:blipFill>
+          <a:blip r:embed="rId4"/>
+          <a:stretch>
+            <a:fillRect/>
+          </a:stretch>
+        </p:blipFill>
+        <p:spPr>
+          <a:xfrm>
+            <a:off x="0" y="2253149"/>
+            <a:ext cx="2737023" cy="1743327"/>
+          </a:xfrm>
+          <a:prstGeom prst="rect">
+            <a:avLst/>
+          </a:prstGeom>
+        </p:spPr>
+      </p:pic>
+    </p:spTree>
+    <p:extLst>
+      <p:ext uri="{BB962C8B-B14F-4D97-AF65-F5344CB8AC3E}">
+        <p14:creationId xmlns:p14="http://schemas.microsoft.com/office/powerpoint/2010/main" val="1840906427"/>
+      </p:ext>
+    </p:extLst>
+  </p:cSld>
+  <p:clrMapOvr>
+    <a:masterClrMapping/>
+  </p:clrMapOvr>
+  <p:transition spd="med"/>
+</p:sld>
+</file>
+
+<file path=ppt/slides/slide14.xml><?xml version="1.0" encoding="utf-8"?>
+<p:sld xmlns:a="http://schemas.openxmlformats.org/drawingml/2006/main" xmlns:r="http://schemas.openxmlformats.org/officeDocument/2006/relationships" xmlns:p="http://schemas.openxmlformats.org/presentationml/2006/main">
+  <p:cSld>
+    <p:spTree>
+      <p:nvGrpSpPr>
+        <p:cNvPr id="1" name=""/>
+        <p:cNvGrpSpPr/>
+        <p:nvPr/>
+      </p:nvGrpSpPr>
+      <p:grpSpPr>
+        <a:xfrm>
+          <a:off x="0" y="0"/>
+          <a:ext cx="0" cy="0"/>
+          <a:chOff x="0" y="0"/>
+          <a:chExt cx="0" cy="0"/>
+        </a:xfrm>
+      </p:grpSpPr>
+      <p:sp>
+        <p:nvSpPr>
+          <p:cNvPr id="279" name="Titel 5"/>
+          <p:cNvSpPr txBox="1">
+            <a:spLocks noGrp="1"/>
+          </p:cNvSpPr>
+          <p:nvPr>
+            <p:ph type="title"/>
+          </p:nvPr>
+        </p:nvSpPr>
+        <p:spPr>
+          <a:prstGeom prst="rect">
+            <a:avLst/>
+          </a:prstGeom>
+        </p:spPr>
+        <p:txBody>
+          <a:bodyPr/>
+          <a:lstStyle/>
+          <a:p>
+            <a:r>
+              <a:rPr lang="en-GB" noProof="0" dirty="0"/>
+              <a:t>Conclusion</a:t>
+            </a:r>
+          </a:p>
+        </p:txBody>
+      </p:sp>
+      <p:sp>
+        <p:nvSpPr>
+          <p:cNvPr id="280" name="Inhaltsplatzhalter 6"/>
+          <p:cNvSpPr txBox="1">
+            <a:spLocks noGrp="1"/>
+          </p:cNvSpPr>
+          <p:nvPr>
+            <p:ph type="body" idx="1"/>
+          </p:nvPr>
+        </p:nvSpPr>
+        <p:spPr>
+          <a:prstGeom prst="rect">
+            <a:avLst/>
+          </a:prstGeom>
+        </p:spPr>
+        <p:txBody>
+          <a:bodyPr/>
+          <a:lstStyle/>
+          <a:p>
+            <a:r>
+              <a:rPr lang="en-GB" noProof="0" dirty="0"/>
+              <a:t>Standardized </a:t>
+            </a:r>
+            <a:r>
+              <a:rPr lang="en-GB" dirty="0"/>
+              <a:t>t</a:t>
+            </a:r>
+            <a:r>
+              <a:rPr lang="en-GB" noProof="0" dirty="0" err="1"/>
+              <a:t>esting</a:t>
+            </a:r>
+            <a:r>
+              <a:rPr lang="en-GB" noProof="0" dirty="0"/>
+              <a:t> data set required</a:t>
+            </a:r>
+          </a:p>
+          <a:p>
+            <a:r>
+              <a:rPr lang="en-GB" dirty="0"/>
+              <a:t>Version level accuracy scores low</a:t>
+            </a:r>
+          </a:p>
+          <a:p>
+            <a:r>
+              <a:rPr lang="en-GB" noProof="0" dirty="0"/>
+              <a:t>Existing Data sets not </a:t>
+            </a:r>
+            <a:r>
+              <a:rPr lang="en-GB" noProof="0" dirty="0" err="1"/>
+              <a:t>represen</a:t>
+            </a:r>
+            <a:r>
+              <a:rPr lang="en-GB" dirty="0" err="1"/>
+              <a:t>tative</a:t>
+            </a:r>
+            <a:endParaRPr lang="en-GB" noProof="0" dirty="0"/>
+          </a:p>
+          <a:p>
+            <a:endParaRPr lang="en-GB" noProof="0" dirty="0"/>
+          </a:p>
+        </p:txBody>
+      </p:sp>
+    </p:spTree>
+  </p:cSld>
+  <p:clrMapOvr>
+    <a:masterClrMapping/>
+  </p:clrMapOvr>
+  <p:transition spd="med"/>
+</p:sld>
+</file>
+
+<file path=ppt/slides/slide15.xml><?xml version="1.0" encoding="utf-8"?>
+<p:sld xmlns:a="http://schemas.openxmlformats.org/drawingml/2006/main" xmlns:r="http://schemas.openxmlformats.org/officeDocument/2006/relationships" xmlns:p="http://schemas.openxmlformats.org/presentationml/2006/main">
+  <p:cSld>
+    <p:spTree>
+      <p:nvGrpSpPr>
+        <p:cNvPr id="1" name=""/>
+        <p:cNvGrpSpPr/>
+        <p:nvPr/>
+      </p:nvGrpSpPr>
+      <p:grpSpPr>
+        <a:xfrm>
+          <a:off x="0" y="0"/>
+          <a:ext cx="0" cy="0"/>
+          <a:chOff x="0" y="0"/>
+          <a:chExt cx="0" cy="0"/>
+        </a:xfrm>
+      </p:grpSpPr>
+      <p:sp>
+        <p:nvSpPr>
+          <p:cNvPr id="2" name="Titel 1">
+            <a:extLst>
+              <a:ext uri="{FF2B5EF4-FFF2-40B4-BE49-F238E27FC236}">
+                <a16:creationId xmlns:a16="http://schemas.microsoft.com/office/drawing/2014/main" id="{7741DA49-3290-8238-53EF-E8ED8FB64730}"/>
+              </a:ext>
+            </a:extLst>
+          </p:cNvPr>
+          <p:cNvSpPr>
+            <a:spLocks noGrp="1"/>
+          </p:cNvSpPr>
+          <p:nvPr>
+            <p:ph type="title"/>
+          </p:nvPr>
+        </p:nvSpPr>
+        <p:spPr/>
+        <p:txBody>
+          <a:bodyPr/>
+          <a:lstStyle/>
+          <a:p>
+            <a:r>
+              <a:rPr lang="de-CH" dirty="0"/>
+              <a:t>Outlook</a:t>
+            </a:r>
+          </a:p>
+        </p:txBody>
+      </p:sp>
+      <p:sp>
+        <p:nvSpPr>
+          <p:cNvPr id="3" name="Textplatzhalter 2">
+            <a:extLst>
+              <a:ext uri="{FF2B5EF4-FFF2-40B4-BE49-F238E27FC236}">
+                <a16:creationId xmlns:a16="http://schemas.microsoft.com/office/drawing/2014/main" id="{37ACD56E-384A-8624-4795-9CAAE59B0AD7}"/>
+              </a:ext>
+            </a:extLst>
+          </p:cNvPr>
+          <p:cNvSpPr>
+            <a:spLocks noGrp="1"/>
+          </p:cNvSpPr>
+          <p:nvPr>
+            <p:ph type="body" idx="1"/>
+          </p:nvPr>
+        </p:nvSpPr>
+        <p:spPr/>
+        <p:txBody>
+          <a:bodyPr/>
+          <a:lstStyle/>
+          <a:p>
+            <a:r>
+              <a:rPr lang="de-CH" dirty="0"/>
+              <a:t>Data </a:t>
+            </a:r>
+            <a:r>
+              <a:rPr lang="de-CH" dirty="0" err="1"/>
+              <a:t>set</a:t>
+            </a:r>
+            <a:r>
+              <a:rPr lang="de-CH" dirty="0"/>
+              <a:t> </a:t>
+            </a:r>
+            <a:r>
+              <a:rPr lang="de-CH" dirty="0" err="1"/>
+              <a:t>offers</a:t>
+            </a:r>
+            <a:r>
+              <a:rPr lang="de-CH" dirty="0"/>
+              <a:t> </a:t>
+            </a:r>
+            <a:r>
+              <a:rPr lang="de-CH" dirty="0" err="1"/>
+              <a:t>obfuscated</a:t>
+            </a:r>
+            <a:r>
+              <a:rPr lang="de-CH" dirty="0"/>
+              <a:t> and non </a:t>
+            </a:r>
+            <a:r>
+              <a:rPr lang="de-CH" dirty="0" err="1"/>
+              <a:t>obfuscated</a:t>
+            </a:r>
+            <a:r>
+              <a:rPr lang="de-CH" dirty="0"/>
+              <a:t> hybrid </a:t>
+            </a:r>
+            <a:r>
+              <a:rPr lang="de-CH" dirty="0" err="1"/>
+              <a:t>apps</a:t>
+            </a:r>
+            <a:endParaRPr lang="de-CH" dirty="0"/>
+          </a:p>
+          <a:p>
+            <a:r>
+              <a:rPr lang="de-CH" dirty="0" err="1"/>
+              <a:t>Guaranteed</a:t>
+            </a:r>
+            <a:r>
+              <a:rPr lang="de-CH" dirty="0"/>
+              <a:t> </a:t>
+            </a:r>
+            <a:r>
+              <a:rPr lang="de-CH" dirty="0" err="1"/>
+              <a:t>accuracy</a:t>
+            </a:r>
+            <a:r>
+              <a:rPr lang="de-CH" dirty="0"/>
+              <a:t> </a:t>
+            </a:r>
+            <a:r>
+              <a:rPr lang="de-CH" dirty="0" err="1"/>
+              <a:t>by</a:t>
+            </a:r>
+            <a:r>
+              <a:rPr lang="de-CH" dirty="0"/>
+              <a:t> </a:t>
+            </a:r>
+            <a:r>
+              <a:rPr lang="de-CH" dirty="0" err="1"/>
+              <a:t>self-compiling</a:t>
+            </a:r>
+            <a:endParaRPr lang="de-CH" dirty="0"/>
+          </a:p>
+          <a:p>
+            <a:r>
+              <a:rPr lang="de-CH" dirty="0" err="1"/>
+              <a:t>Used</a:t>
+            </a:r>
+            <a:r>
+              <a:rPr lang="de-CH" dirty="0"/>
+              <a:t> </a:t>
+            </a:r>
+            <a:r>
+              <a:rPr lang="de-CH" dirty="0" err="1"/>
+              <a:t>for</a:t>
+            </a:r>
+            <a:r>
+              <a:rPr lang="de-CH" dirty="0"/>
+              <a:t>:</a:t>
+            </a:r>
+          </a:p>
+          <a:p>
+            <a:pPr lvl="1"/>
+            <a:r>
+              <a:rPr lang="de-CH" dirty="0"/>
+              <a:t>Benchmarking</a:t>
+            </a:r>
+          </a:p>
+          <a:p>
+            <a:pPr lvl="1"/>
+            <a:r>
+              <a:rPr lang="de-CH" dirty="0"/>
+              <a:t>Training </a:t>
+            </a:r>
+            <a:r>
+              <a:rPr lang="de-CH" dirty="0" err="1"/>
+              <a:t>models</a:t>
+            </a:r>
+            <a:endParaRPr lang="de-CH" dirty="0"/>
+          </a:p>
+          <a:p>
+            <a:pPr lvl="2"/>
+            <a:endParaRPr lang="de-CH" dirty="0"/>
+          </a:p>
+        </p:txBody>
+      </p:sp>
+    </p:spTree>
+    <p:extLst>
+      <p:ext uri="{BB962C8B-B14F-4D97-AF65-F5344CB8AC3E}">
+        <p14:creationId xmlns:p14="http://schemas.microsoft.com/office/powerpoint/2010/main" val="1098706551"/>
+      </p:ext>
+    </p:extLst>
+  </p:cSld>
+  <p:clrMapOvr>
+    <a:masterClrMapping/>
+  </p:clrMapOvr>
+  <p:transition spd="med"/>
+</p:sld>
+</file>
+
+<file path=ppt/slides/slide16.xml><?xml version="1.0" encoding="utf-8"?>
+<p:sld xmlns:a="http://schemas.openxmlformats.org/drawingml/2006/main" xmlns:r="http://schemas.openxmlformats.org/officeDocument/2006/relationships" xmlns:p="http://schemas.openxmlformats.org/presentationml/2006/main">
+  <p:cSld>
+    <p:spTree>
+      <p:nvGrpSpPr>
+        <p:cNvPr id="1" name=""/>
+        <p:cNvGrpSpPr/>
+        <p:nvPr/>
+      </p:nvGrpSpPr>
+      <p:grpSpPr>
+        <a:xfrm>
+          <a:off x="0" y="0"/>
+          <a:ext cx="0" cy="0"/>
+          <a:chOff x="0" y="0"/>
+          <a:chExt cx="0" cy="0"/>
+        </a:xfrm>
+      </p:grpSpPr>
+      <p:sp>
+        <p:nvSpPr>
+          <p:cNvPr id="2" name="Titel 1">
+            <a:extLst>
+              <a:ext uri="{FF2B5EF4-FFF2-40B4-BE49-F238E27FC236}">
                 <a16:creationId xmlns:a16="http://schemas.microsoft.com/office/drawing/2014/main" id="{B04BA110-79EB-FC4E-CCF3-F9CDB950A6B2}"/>
               </a:ext>
             </a:extLst>
@@ -6659,14 +8823,519 @@
           <a:bodyPr/>
           <a:lstStyle/>
           <a:p>
-            <a:endParaRPr lang="de-CH"/>
-          </a:p>
-        </p:txBody>
-      </p:sp>
+            <a:endParaRPr lang="de-CH" dirty="0"/>
+          </a:p>
+        </p:txBody>
+      </p:sp>
+      <p:pic>
+        <p:nvPicPr>
+          <p:cNvPr id="3074" name="Picture 2" descr="To Get the Most Out of Your Team, Ask Better Questions - Business HorsePower">
+            <a:extLst>
+              <a:ext uri="{FF2B5EF4-FFF2-40B4-BE49-F238E27FC236}">
+                <a16:creationId xmlns:a16="http://schemas.microsoft.com/office/drawing/2014/main" id="{3B8D2727-3E4C-92D3-5858-A0DAC4C4594C}"/>
+              </a:ext>
+            </a:extLst>
+          </p:cNvPr>
+          <p:cNvPicPr>
+            <a:picLocks noChangeAspect="1" noChangeArrowheads="1"/>
+          </p:cNvPicPr>
+          <p:nvPr/>
+        </p:nvPicPr>
+        <p:blipFill>
+          <a:blip r:embed="rId2">
+            <a:extLst>
+              <a:ext uri="{28A0092B-C50C-407E-A947-70E740481C1C}">
+                <a14:useLocalDpi xmlns:a14="http://schemas.microsoft.com/office/drawing/2010/main" val="0"/>
+              </a:ext>
+            </a:extLst>
+          </a:blip>
+          <a:srcRect/>
+          <a:stretch>
+            <a:fillRect/>
+          </a:stretch>
+        </p:blipFill>
+        <p:spPr bwMode="auto">
+          <a:xfrm>
+            <a:off x="3500437" y="2053251"/>
+            <a:ext cx="2143125" cy="2143125"/>
+          </a:xfrm>
+          <a:prstGeom prst="rect">
+            <a:avLst/>
+          </a:prstGeom>
+          <a:noFill/>
+          <a:extLst>
+            <a:ext uri="{909E8E84-426E-40DD-AFC4-6F175D3DCCD1}">
+              <a14:hiddenFill xmlns:a14="http://schemas.microsoft.com/office/drawing/2010/main">
+                <a:solidFill>
+                  <a:srgbClr val="FFFFFF"/>
+                </a:solidFill>
+              </a14:hiddenFill>
+            </a:ext>
+          </a:extLst>
+        </p:spPr>
+      </p:pic>
     </p:spTree>
     <p:extLst>
       <p:ext uri="{BB962C8B-B14F-4D97-AF65-F5344CB8AC3E}">
         <p14:creationId xmlns:p14="http://schemas.microsoft.com/office/powerpoint/2010/main" val="3560432698"/>
+      </p:ext>
+    </p:extLst>
+  </p:cSld>
+  <p:clrMapOvr>
+    <a:masterClrMapping/>
+  </p:clrMapOvr>
+  <p:transition spd="med"/>
+</p:sld>
+</file>
+
+<file path=ppt/slides/slide17.xml><?xml version="1.0" encoding="utf-8"?>
+<p:sld xmlns:a="http://schemas.openxmlformats.org/drawingml/2006/main" xmlns:r="http://schemas.openxmlformats.org/officeDocument/2006/relationships" xmlns:p="http://schemas.openxmlformats.org/presentationml/2006/main">
+  <p:cSld>
+    <p:spTree>
+      <p:nvGrpSpPr>
+        <p:cNvPr id="1" name=""/>
+        <p:cNvGrpSpPr/>
+        <p:nvPr/>
+      </p:nvGrpSpPr>
+      <p:grpSpPr>
+        <a:xfrm>
+          <a:off x="0" y="0"/>
+          <a:ext cx="0" cy="0"/>
+          <a:chOff x="0" y="0"/>
+          <a:chExt cx="0" cy="0"/>
+        </a:xfrm>
+      </p:grpSpPr>
+      <p:sp>
+        <p:nvSpPr>
+          <p:cNvPr id="2" name="Titel 1">
+            <a:extLst>
+              <a:ext uri="{FF2B5EF4-FFF2-40B4-BE49-F238E27FC236}">
+                <a16:creationId xmlns:a16="http://schemas.microsoft.com/office/drawing/2014/main" id="{7B5772FA-734F-9E99-172F-0C992B662051}"/>
+              </a:ext>
+            </a:extLst>
+          </p:cNvPr>
+          <p:cNvSpPr>
+            <a:spLocks noGrp="1"/>
+          </p:cNvSpPr>
+          <p:nvPr>
+            <p:ph type="title"/>
+          </p:nvPr>
+        </p:nvSpPr>
+        <p:spPr/>
+        <p:txBody>
+          <a:bodyPr/>
+          <a:lstStyle/>
+          <a:p>
+            <a:r>
+              <a:rPr lang="de-CH" dirty="0"/>
+              <a:t>Sources</a:t>
+            </a:r>
+          </a:p>
+        </p:txBody>
+      </p:sp>
+      <p:sp>
+        <p:nvSpPr>
+          <p:cNvPr id="3" name="Textplatzhalter 2">
+            <a:extLst>
+              <a:ext uri="{FF2B5EF4-FFF2-40B4-BE49-F238E27FC236}">
+                <a16:creationId xmlns:a16="http://schemas.microsoft.com/office/drawing/2014/main" id="{74354FFC-02B3-3B87-6BAA-F0B02256B2B2}"/>
+              </a:ext>
+            </a:extLst>
+          </p:cNvPr>
+          <p:cNvSpPr>
+            <a:spLocks noGrp="1"/>
+          </p:cNvSpPr>
+          <p:nvPr>
+            <p:ph type="body" idx="1"/>
+          </p:nvPr>
+        </p:nvSpPr>
+        <p:spPr/>
+        <p:txBody>
+          <a:bodyPr>
+            <a:normAutofit/>
+          </a:bodyPr>
+          <a:lstStyle/>
+          <a:p>
+            <a:r>
+              <a:rPr lang="de-CH" sz="1200" dirty="0"/>
+              <a:t>Slide 3: </a:t>
+            </a:r>
+          </a:p>
+          <a:p>
+            <a:pPr lvl="1"/>
+            <a:r>
+              <a:rPr lang="en-GB" sz="1200" dirty="0"/>
+              <a:t>1: https://avatars.githubusercontent.com/u/14101776?s=280&amp;v=4, 25.05.26; </a:t>
+            </a:r>
+          </a:p>
+          <a:p>
+            <a:pPr lvl="1"/>
+            <a:r>
+              <a:rPr lang="en-GB" sz="1200" dirty="0"/>
+              <a:t>2: https://de.wikipedia.org/wiki/React_Native, 25.05.26</a:t>
+            </a:r>
+          </a:p>
+          <a:p>
+            <a:endParaRPr lang="en-GB" sz="1200" dirty="0"/>
+          </a:p>
+          <a:p>
+            <a:r>
+              <a:rPr lang="de-CH" sz="1200" dirty="0"/>
+              <a:t> Slide 4: </a:t>
+            </a:r>
+            <a:r>
+              <a:rPr lang="en-US" sz="1200" dirty="0"/>
+              <a:t> </a:t>
+            </a:r>
+          </a:p>
+          <a:p>
+            <a:pPr lvl="1"/>
+            <a:r>
+              <a:rPr lang="en-US" sz="1200" dirty="0"/>
+              <a:t>B. </a:t>
+            </a:r>
+            <a:r>
+              <a:rPr lang="en-US" sz="1200" dirty="0" err="1"/>
+              <a:t>Gokkaya</a:t>
+            </a:r>
+            <a:r>
+              <a:rPr lang="en-US" sz="1200" dirty="0"/>
+              <a:t>, L. Aniello, and B. Halak, “Software supply chain: A taxonomy of attacks, mitigations and risk assessment strategies,” Journal of Information Security and Applications, vol. 97, p. 104324, 2026. [Online]. Available: https://www.sciencedirect.com/science/article/pii/S2214212625003606,</a:t>
+            </a:r>
+          </a:p>
+          <a:p>
+            <a:pPr lvl="1"/>
+            <a:r>
+              <a:rPr lang="en-US" sz="1200" dirty="0"/>
+              <a:t>H. Wang, Y. Guo, Z. Ma, and X. Chen, “Wukong: a scalable and accurate two-phase approach to android app clone detection,” in Proceedings of the 2015 International Symposium on Software Testing and Analysis, ser. ISSTA 2015. New York, NY, USA: Association for Computing Machinery, 2015, p. 71–82. [Online]. Available: https://doi.org/10.1145/2771783.2771795</a:t>
+            </a:r>
+            <a:endParaRPr lang="de-CH" sz="1200" dirty="0"/>
+          </a:p>
+        </p:txBody>
+      </p:sp>
+    </p:spTree>
+    <p:extLst>
+      <p:ext uri="{BB962C8B-B14F-4D97-AF65-F5344CB8AC3E}">
+        <p14:creationId xmlns:p14="http://schemas.microsoft.com/office/powerpoint/2010/main" val="2771359829"/>
+      </p:ext>
+    </p:extLst>
+  </p:cSld>
+  <p:clrMapOvr>
+    <a:masterClrMapping/>
+  </p:clrMapOvr>
+  <p:transition spd="med"/>
+</p:sld>
+</file>
+
+<file path=ppt/slides/slide18.xml><?xml version="1.0" encoding="utf-8"?>
+<p:sld xmlns:a="http://schemas.openxmlformats.org/drawingml/2006/main" xmlns:r="http://schemas.openxmlformats.org/officeDocument/2006/relationships" xmlns:p="http://schemas.openxmlformats.org/presentationml/2006/main">
+  <p:cSld>
+    <p:spTree>
+      <p:nvGrpSpPr>
+        <p:cNvPr id="1" name=""/>
+        <p:cNvGrpSpPr/>
+        <p:nvPr/>
+      </p:nvGrpSpPr>
+      <p:grpSpPr>
+        <a:xfrm>
+          <a:off x="0" y="0"/>
+          <a:ext cx="0" cy="0"/>
+          <a:chOff x="0" y="0"/>
+          <a:chExt cx="0" cy="0"/>
+        </a:xfrm>
+      </p:grpSpPr>
+      <p:sp>
+        <p:nvSpPr>
+          <p:cNvPr id="2" name="Titel 1">
+            <a:extLst>
+              <a:ext uri="{FF2B5EF4-FFF2-40B4-BE49-F238E27FC236}">
+                <a16:creationId xmlns:a16="http://schemas.microsoft.com/office/drawing/2014/main" id="{A5E6EC18-A6F4-2505-4267-EA7BC6D11697}"/>
+              </a:ext>
+            </a:extLst>
+          </p:cNvPr>
+          <p:cNvSpPr>
+            <a:spLocks noGrp="1"/>
+          </p:cNvSpPr>
+          <p:nvPr>
+            <p:ph type="title"/>
+          </p:nvPr>
+        </p:nvSpPr>
+        <p:spPr/>
+        <p:txBody>
+          <a:bodyPr/>
+          <a:lstStyle/>
+          <a:p>
+            <a:r>
+              <a:rPr lang="de-CH" dirty="0"/>
+              <a:t>Sources</a:t>
+            </a:r>
+          </a:p>
+        </p:txBody>
+      </p:sp>
+      <p:sp>
+        <p:nvSpPr>
+          <p:cNvPr id="3" name="Textplatzhalter 2">
+            <a:extLst>
+              <a:ext uri="{FF2B5EF4-FFF2-40B4-BE49-F238E27FC236}">
+                <a16:creationId xmlns:a16="http://schemas.microsoft.com/office/drawing/2014/main" id="{CDB6D2A8-F848-45BA-BD73-E0AAF6286C3A}"/>
+              </a:ext>
+            </a:extLst>
+          </p:cNvPr>
+          <p:cNvSpPr>
+            <a:spLocks noGrp="1"/>
+          </p:cNvSpPr>
+          <p:nvPr>
+            <p:ph type="body" idx="1"/>
+          </p:nvPr>
+        </p:nvSpPr>
+        <p:spPr/>
+        <p:txBody>
+          <a:bodyPr>
+            <a:normAutofit/>
+          </a:bodyPr>
+          <a:lstStyle/>
+          <a:p>
+            <a:r>
+              <a:rPr lang="de-CH" sz="1200" dirty="0"/>
+              <a:t>Slide 5: </a:t>
+            </a:r>
+            <a:r>
+              <a:rPr lang="en-US" sz="1200" dirty="0"/>
+              <a:t> L. Zhan, J. Ming, J. Fu, G. Peng, L. Sha, and L. Lan, “The hidden complexities of android </a:t>
+            </a:r>
+            <a:r>
+              <a:rPr lang="en-US" sz="1200" dirty="0" err="1"/>
+              <a:t>tpl</a:t>
+            </a:r>
+            <a:r>
+              <a:rPr lang="en-US" sz="1200" dirty="0"/>
+              <a:t> detection: An empirical analysis of techniques, challenges, and effectiveness,” Computers Security, vol. 159, p. 104672, 2025. [Online]. Available: https://www.sciencedirect.com/science/article/pii/S016740482500361X</a:t>
+            </a:r>
+          </a:p>
+          <a:p>
+            <a:r>
+              <a:rPr lang="en-US" sz="1200" dirty="0"/>
+              <a:t>Slide 6-8: Z. Ma, H. Wang, Y. Guo, and X. Chen, “</a:t>
+            </a:r>
+            <a:r>
+              <a:rPr lang="en-US" sz="1200" dirty="0" err="1"/>
+              <a:t>Libradar</a:t>
+            </a:r>
+            <a:r>
+              <a:rPr lang="en-US" sz="1200" dirty="0"/>
+              <a:t>: Fast and accurate detection of third-party libraries in android apps,” in 2016 IEEE/ACM 38th International Conference on Software Engineering Companion (ICSE-C), 2016, pp. 653–656.</a:t>
+            </a:r>
+          </a:p>
+          <a:p>
+            <a:r>
+              <a:rPr lang="en-US" sz="1200" dirty="0"/>
+              <a:t>Slide 9: Y. Wu, C. Sun, D. Zeng, G. Tan, S. Ma, and P. Wang, “</a:t>
+            </a:r>
+            <a:r>
+              <a:rPr lang="en-US" sz="1200" dirty="0" err="1"/>
+              <a:t>LibScan</a:t>
+            </a:r>
+            <a:r>
+              <a:rPr lang="en-US" sz="1200" dirty="0"/>
+              <a:t>: Towards more precise Third-Party library identification for android applications,” in 32nd USENIX Security Symposium (USENIX Security 23). Anaheim, CA: USENIX Association, Aug. 2023, pp. 3385–3402. [Online]. Available: https://www.usenix.org/conference/usenixsecurity23/presentation/wu-yafei</a:t>
+            </a:r>
+          </a:p>
+          <a:p>
+            <a:r>
+              <a:rPr lang="de-CH" sz="1200" dirty="0"/>
+              <a:t>Slide 10: D. Pan, Y. </a:t>
+            </a:r>
+            <a:r>
+              <a:rPr lang="de-CH" sz="1200" dirty="0" err="1"/>
+              <a:t>Xu</a:t>
+            </a:r>
+            <a:r>
+              <a:rPr lang="de-CH" sz="1200" dirty="0"/>
+              <a:t>, R. Feng, D. </a:t>
+            </a:r>
+            <a:r>
+              <a:rPr lang="de-CH" sz="1200" dirty="0" err="1"/>
+              <a:t>Yu</a:t>
+            </a:r>
+            <a:r>
+              <a:rPr lang="de-CH" sz="1200" dirty="0"/>
+              <a:t>, J. Chen, Y. Fang, and Y. Zhang, “Pay </a:t>
+            </a:r>
+            <a:r>
+              <a:rPr lang="de-CH" sz="1200" dirty="0" err="1"/>
+              <a:t>your</a:t>
+            </a:r>
+            <a:r>
+              <a:rPr lang="de-CH" sz="1200" dirty="0"/>
+              <a:t> </a:t>
+            </a:r>
+            <a:r>
+              <a:rPr lang="de-CH" sz="1200" dirty="0" err="1"/>
+              <a:t>attention</a:t>
+            </a:r>
+            <a:r>
+              <a:rPr lang="de-CH" sz="1200" dirty="0"/>
+              <a:t> on </a:t>
+            </a:r>
+            <a:r>
+              <a:rPr lang="de-CH" sz="1200" dirty="0" err="1"/>
+              <a:t>lib</a:t>
+            </a:r>
+            <a:r>
+              <a:rPr lang="de-CH" sz="1200" dirty="0"/>
+              <a:t>! </a:t>
+            </a:r>
+            <a:r>
+              <a:rPr lang="de-CH" sz="1200" dirty="0" err="1"/>
+              <a:t>android</a:t>
+            </a:r>
+            <a:r>
+              <a:rPr lang="de-CH" sz="1200" dirty="0"/>
+              <a:t> </a:t>
+            </a:r>
+            <a:r>
+              <a:rPr lang="de-CH" sz="1200" dirty="0" err="1"/>
+              <a:t>third</a:t>
+            </a:r>
+            <a:r>
+              <a:rPr lang="de-CH" sz="1200" dirty="0"/>
+              <a:t>-party </a:t>
+            </a:r>
+            <a:r>
+              <a:rPr lang="de-CH" sz="1200" dirty="0" err="1"/>
+              <a:t>library</a:t>
+            </a:r>
+            <a:r>
+              <a:rPr lang="de-CH" sz="1200" dirty="0"/>
+              <a:t> </a:t>
+            </a:r>
+            <a:r>
+              <a:rPr lang="de-CH" sz="1200" dirty="0" err="1"/>
+              <a:t>detection</a:t>
+            </a:r>
+            <a:r>
+              <a:rPr lang="de-CH" sz="1200" dirty="0"/>
+              <a:t> via feature </a:t>
+            </a:r>
+            <a:r>
+              <a:rPr lang="de-CH" sz="1200" dirty="0" err="1"/>
+              <a:t>language</a:t>
+            </a:r>
+            <a:r>
+              <a:rPr lang="de-CH" sz="1200" dirty="0"/>
+              <a:t> </a:t>
+            </a:r>
+            <a:r>
+              <a:rPr lang="de-CH" sz="1200" dirty="0" err="1"/>
+              <a:t>model</a:t>
+            </a:r>
+            <a:r>
+              <a:rPr lang="de-CH" sz="1200" dirty="0"/>
+              <a:t>,” in 2025 IEEE International Conference on Software Analysis, Evolution and Reengineering (SANER), 2025, pp. 217–228.</a:t>
+            </a:r>
+          </a:p>
+        </p:txBody>
+      </p:sp>
+    </p:spTree>
+    <p:extLst>
+      <p:ext uri="{BB962C8B-B14F-4D97-AF65-F5344CB8AC3E}">
+        <p14:creationId xmlns:p14="http://schemas.microsoft.com/office/powerpoint/2010/main" val="388014762"/>
+      </p:ext>
+    </p:extLst>
+  </p:cSld>
+  <p:clrMapOvr>
+    <a:masterClrMapping/>
+  </p:clrMapOvr>
+  <p:transition spd="med"/>
+</p:sld>
+</file>
+
+<file path=ppt/slides/slide19.xml><?xml version="1.0" encoding="utf-8"?>
+<p:sld xmlns:a="http://schemas.openxmlformats.org/drawingml/2006/main" xmlns:r="http://schemas.openxmlformats.org/officeDocument/2006/relationships" xmlns:p="http://schemas.openxmlformats.org/presentationml/2006/main">
+  <p:cSld>
+    <p:spTree>
+      <p:nvGrpSpPr>
+        <p:cNvPr id="1" name=""/>
+        <p:cNvGrpSpPr/>
+        <p:nvPr/>
+      </p:nvGrpSpPr>
+      <p:grpSpPr>
+        <a:xfrm>
+          <a:off x="0" y="0"/>
+          <a:ext cx="0" cy="0"/>
+          <a:chOff x="0" y="0"/>
+          <a:chExt cx="0" cy="0"/>
+        </a:xfrm>
+      </p:grpSpPr>
+      <p:sp>
+        <p:nvSpPr>
+          <p:cNvPr id="2" name="Titel 1">
+            <a:extLst>
+              <a:ext uri="{FF2B5EF4-FFF2-40B4-BE49-F238E27FC236}">
+                <a16:creationId xmlns:a16="http://schemas.microsoft.com/office/drawing/2014/main" id="{66C7CD65-6661-91AA-8B9F-1EED1D45B331}"/>
+              </a:ext>
+            </a:extLst>
+          </p:cNvPr>
+          <p:cNvSpPr>
+            <a:spLocks noGrp="1"/>
+          </p:cNvSpPr>
+          <p:nvPr>
+            <p:ph type="title"/>
+          </p:nvPr>
+        </p:nvSpPr>
+        <p:spPr/>
+        <p:txBody>
+          <a:bodyPr/>
+          <a:lstStyle/>
+          <a:p>
+            <a:r>
+              <a:rPr lang="de-CH" dirty="0"/>
+              <a:t>Sources</a:t>
+            </a:r>
+          </a:p>
+        </p:txBody>
+      </p:sp>
+      <p:sp>
+        <p:nvSpPr>
+          <p:cNvPr id="3" name="Textplatzhalter 2">
+            <a:extLst>
+              <a:ext uri="{FF2B5EF4-FFF2-40B4-BE49-F238E27FC236}">
+                <a16:creationId xmlns:a16="http://schemas.microsoft.com/office/drawing/2014/main" id="{D1C032E6-BA7D-1718-54D2-F0420CEE8463}"/>
+              </a:ext>
+            </a:extLst>
+          </p:cNvPr>
+          <p:cNvSpPr>
+            <a:spLocks noGrp="1"/>
+          </p:cNvSpPr>
+          <p:nvPr>
+            <p:ph type="body" idx="1"/>
+          </p:nvPr>
+        </p:nvSpPr>
+        <p:spPr/>
+        <p:txBody>
+          <a:bodyPr>
+            <a:normAutofit/>
+          </a:bodyPr>
+          <a:lstStyle/>
+          <a:p>
+            <a:r>
+              <a:rPr lang="de-CH" sz="1200" dirty="0"/>
+              <a:t>Slide 11-13: </a:t>
+            </a:r>
+            <a:r>
+              <a:rPr lang="en-US" sz="1200" dirty="0"/>
+              <a:t>J. Gu, H. Lu, G. Nan, Y. Lin, K. Wang, Y. Guo, Y. Cao, and Y. Liu, “Revisiting third-party library detection: A ground truth dataset and its implications across security tasks,” pp. 1–3, 7–9, 2025. [Online]. Available: https://arxiv.org/abs/2509.04091</a:t>
+            </a:r>
+          </a:p>
+          <a:p>
+            <a:endParaRPr lang="de-CH" sz="1200" dirty="0"/>
+          </a:p>
+        </p:txBody>
+      </p:sp>
+    </p:spTree>
+    <p:extLst>
+      <p:ext uri="{BB962C8B-B14F-4D97-AF65-F5344CB8AC3E}">
+        <p14:creationId xmlns:p14="http://schemas.microsoft.com/office/powerpoint/2010/main" val="1637844945"/>
       </p:ext>
     </p:extLst>
   </p:cSld>
@@ -6707,7 +9376,7 @@
         <p:spPr>
           <a:xfrm>
             <a:off x="540275" y="5002569"/>
-            <a:ext cx="65" cy="123111"/>
+            <a:ext cx="57708" cy="123111"/>
           </a:xfrm>
           <a:prstGeom prst="rect">
             <a:avLst/>
@@ -6722,7 +9391,10 @@
           <a:bodyPr/>
           <a:lstStyle/>
           <a:p>
-            <a:endParaRPr lang="en-GB" noProof="0" dirty="0"/>
+            <a:r>
+              <a:rPr lang="en-GB" noProof="0" dirty="0"/>
+              <a:t>2</a:t>
+            </a:r>
           </a:p>
         </p:txBody>
       </p:sp>
@@ -6738,7 +9410,7 @@
         </p:nvSpPr>
         <p:spPr>
           <a:xfrm>
-            <a:off x="539999" y="2190750"/>
+            <a:off x="539999" y="1853101"/>
             <a:ext cx="7992441" cy="2610000"/>
           </a:xfrm>
           <a:prstGeom prst="rect">
@@ -6850,7 +9522,23 @@
               <a:rPr lang="en-GB" dirty="0"/>
               <a:t>Conclusion</a:t>
             </a:r>
-            <a:endParaRPr lang="en-GB" noProof="0" dirty="0"/>
+          </a:p>
+          <a:p>
+            <a:pPr marL="457200" indent="-457200">
+              <a:spcBef>
+                <a:spcPts val="600"/>
+              </a:spcBef>
+              <a:buClr>
+                <a:srgbClr val="000000"/>
+              </a:buClr>
+              <a:buFontTx/>
+              <a:buAutoNum type="arabicPeriod"/>
+              <a:defRPr spc="-100"/>
+            </a:pPr>
+            <a:r>
+              <a:rPr lang="en-GB" noProof="0" dirty="0"/>
+              <a:t>Outlook</a:t>
+            </a:r>
           </a:p>
         </p:txBody>
       </p:sp>
@@ -6997,27 +9685,19 @@
           <a:bodyPr/>
           <a:lstStyle/>
           <a:p>
+            <a:endParaRPr lang="en-GB" noProof="0" dirty="0"/>
+          </a:p>
+          <a:p>
+            <a:endParaRPr lang="en-GB" dirty="0"/>
+          </a:p>
+          <a:p>
             <a:r>
               <a:rPr lang="en-GB" noProof="0" dirty="0"/>
-              <a:t>Bachelors Thesis: Building a Ground-Truth Dataset of Android Hybrid Applications and Their Third-Party Libraries</a:t>
-            </a:r>
-          </a:p>
-          <a:p>
-            <a:r>
-              <a:rPr lang="en-GB" noProof="0" dirty="0"/>
-              <a:t>Building Pipeline</a:t>
-            </a:r>
-          </a:p>
-          <a:p>
-            <a:r>
-              <a:rPr lang="en-GB" noProof="0" dirty="0"/>
-              <a:t>Hybrid Frameworks (Flutter, Apache Cordova, React Native,…)</a:t>
-            </a:r>
-          </a:p>
-          <a:p>
-            <a:r>
-              <a:rPr lang="en-GB" noProof="0" dirty="0"/>
-              <a:t>Goal: Ground Truth Dataset</a:t>
+              <a:t>Bachelors Thesis: </a:t>
+            </a:r>
+            <a:r>
+              <a:rPr lang="en-GB" i="1" noProof="0" dirty="0"/>
+              <a:t>Building a Ground-Truth Dataset of Android Hybrid Applications and Their Third-Party Libraries</a:t>
             </a:r>
           </a:p>
           <a:p>
@@ -7097,7 +9777,7 @@
         </p:blipFill>
         <p:spPr bwMode="auto">
           <a:xfrm>
-            <a:off x="7539718" y="3396342"/>
+            <a:off x="6955423" y="2659496"/>
             <a:ext cx="1604281" cy="1604281"/>
           </a:xfrm>
           <a:prstGeom prst="rect">
@@ -7144,8 +9824,8 @@
         </p:blipFill>
         <p:spPr bwMode="auto">
           <a:xfrm>
-            <a:off x="5892430" y="1246393"/>
-            <a:ext cx="2295525" cy="1990725"/>
+            <a:off x="5839165" y="1450493"/>
+            <a:ext cx="1720836" cy="1492343"/>
           </a:xfrm>
           <a:prstGeom prst="rect">
             <a:avLst/>
@@ -7273,36 +9953,6 @@
           <a:bodyPr/>
           <a:lstStyle/>
           <a:p>
-            <a:r>
-              <a:rPr lang="en-GB" noProof="0" dirty="0"/>
-              <a:t>Libraries become more important</a:t>
-            </a:r>
-          </a:p>
-          <a:p>
-            <a:r>
-              <a:rPr lang="en-GB" noProof="0" dirty="0"/>
-              <a:t>Security risks</a:t>
-            </a:r>
-          </a:p>
-          <a:p>
-            <a:r>
-              <a:rPr lang="en-GB" noProof="0" dirty="0"/>
-              <a:t>Vulnerabilities</a:t>
-            </a:r>
-          </a:p>
-          <a:p>
-            <a:r>
-              <a:rPr lang="en-GB" noProof="0" dirty="0"/>
-              <a:t>Interest in knowing libraries</a:t>
-            </a:r>
-          </a:p>
-          <a:p>
-            <a:r>
-              <a:rPr lang="en-GB" noProof="0" dirty="0"/>
-              <a:t>Open-source vs. proprietary apps</a:t>
-            </a:r>
-          </a:p>
-          <a:p>
             <a:endParaRPr lang="en-GB" noProof="0" dirty="0"/>
           </a:p>
           <a:p>
@@ -7319,7 +9969,7 @@
         <p:spPr>
           <a:xfrm>
             <a:off x="990649" y="5002567"/>
-            <a:ext cx="2377254" cy="123111"/>
+            <a:ext cx="5084725" cy="123111"/>
           </a:xfrm>
           <a:prstGeom prst="rect">
             <a:avLst/>
@@ -7344,18 +9994,26 @@
           </a:lstStyle>
           <a:p>
             <a:r>
+              <a:rPr lang="en-GB" noProof="0" dirty="0" err="1"/>
+              <a:t>Gokkaya</a:t>
+            </a:r>
+            <a:r>
               <a:rPr lang="en-GB" noProof="0" dirty="0"/>
-              <a:t>https://www.privacyguides.org/en/android/, 25.05.26</a:t>
+              <a:t> et al.: </a:t>
+            </a:r>
+            <a:r>
+              <a:rPr lang="en-US" dirty="0"/>
+              <a:t>Software supply chain: A taxonomy of attacks, mitigations and risk assessment strategies, 2026</a:t>
             </a:r>
           </a:p>
         </p:txBody>
       </p:sp>
       <p:pic>
         <p:nvPicPr>
-          <p:cNvPr id="2050" name="Picture 2" descr="Android - Privacy Guides">
+          <p:cNvPr id="1028" name="Picture 4">
             <a:extLst>
               <a:ext uri="{FF2B5EF4-FFF2-40B4-BE49-F238E27FC236}">
-                <a16:creationId xmlns:a16="http://schemas.microsoft.com/office/drawing/2014/main" id="{DEEE15ED-44D3-BC8D-2E28-EFEB3C4E74BD}"/>
+                <a16:creationId xmlns:a16="http://schemas.microsoft.com/office/drawing/2014/main" id="{3E176B66-A12E-BC82-C612-C1C931B1FED5}"/>
               </a:ext>
             </a:extLst>
           </p:cNvPr>
@@ -7379,8 +10037,8 @@
         </p:blipFill>
         <p:spPr bwMode="auto">
           <a:xfrm>
-            <a:off x="6258342" y="2062533"/>
-            <a:ext cx="1971675" cy="2314575"/>
+            <a:off x="417250" y="1491629"/>
+            <a:ext cx="4154750" cy="2735517"/>
           </a:xfrm>
           <a:prstGeom prst="rect">
             <a:avLst/>
@@ -7397,6 +10055,34 @@
           </a:extLst>
         </p:spPr>
       </p:pic>
+      <p:graphicFrame>
+        <p:nvGraphicFramePr>
+          <p:cNvPr id="4" name="Diagramm 3">
+            <a:extLst>
+              <a:ext uri="{FF2B5EF4-FFF2-40B4-BE49-F238E27FC236}">
+                <a16:creationId xmlns:a16="http://schemas.microsoft.com/office/drawing/2014/main" id="{3F828B5E-8A7A-C726-D77E-8A32421AE591}"/>
+              </a:ext>
+            </a:extLst>
+          </p:cNvPr>
+          <p:cNvGraphicFramePr/>
+          <p:nvPr>
+            <p:extLst>
+              <p:ext uri="{D42A27DB-BD31-4B8C-83A1-F6EECF244321}">
+                <p14:modId xmlns:p14="http://schemas.microsoft.com/office/powerpoint/2010/main" val="2225284288"/>
+              </p:ext>
+            </p:extLst>
+          </p:nvPr>
+        </p:nvGraphicFramePr>
+        <p:xfrm>
+          <a:off x="4572000" y="1328963"/>
+          <a:ext cx="3740458" cy="3112121"/>
+        </p:xfrm>
+        <a:graphic>
+          <a:graphicData uri="http://schemas.openxmlformats.org/drawingml/2006/chart">
+            <c:chart xmlns:c="http://schemas.openxmlformats.org/drawingml/2006/chart" xmlns:r="http://schemas.openxmlformats.org/officeDocument/2006/relationships" r:id="rId4"/>
+          </a:graphicData>
+        </a:graphic>
+      </p:graphicFrame>
     </p:spTree>
   </p:cSld>
   <p:clrMapOvr>
@@ -7500,30 +10186,9 @@
           <a:bodyPr/>
           <a:lstStyle/>
           <a:p>
-            <a:r>
-              <a:rPr lang="en-GB" noProof="0" dirty="0"/>
-              <a:t>Recent research topic</a:t>
-            </a:r>
-          </a:p>
-          <a:p>
-            <a:r>
-              <a:rPr lang="en-GB" noProof="0" dirty="0"/>
-              <a:t>3 Categories: learning-based, similarity-based and clustering-based</a:t>
-            </a:r>
-          </a:p>
-          <a:p>
-            <a:r>
-              <a:rPr lang="en-GB" noProof="0" dirty="0"/>
-              <a:t>Many different approaches</a:t>
-            </a:r>
-          </a:p>
-          <a:p>
-            <a:r>
-              <a:rPr lang="en-GB" noProof="0" dirty="0"/>
-              <a:t>Same goal</a:t>
-            </a:r>
-          </a:p>
-          <a:p>
+            <a:pPr marL="6350" indent="0">
+              <a:buNone/>
+            </a:pPr>
             <a:endParaRPr lang="en-GB" noProof="0" dirty="0"/>
           </a:p>
         </p:txBody>
@@ -7537,7 +10202,7 @@
         <p:spPr>
           <a:xfrm>
             <a:off x="955138" y="5000624"/>
-            <a:ext cx="5516683" cy="123111"/>
+            <a:ext cx="6386695" cy="123111"/>
           </a:xfrm>
           <a:prstGeom prst="rect">
             <a:avLst/>
@@ -7563,11 +10228,63 @@
           <a:p>
             <a:r>
               <a:rPr lang="en-GB" noProof="0" dirty="0"/>
-              <a:t>Zhou et al : Version-level third-party library detection in android applications via class structural similarity, 2025</a:t>
-            </a:r>
-          </a:p>
-        </p:txBody>
-      </p:sp>
+              <a:t>Zhan et al.: </a:t>
+            </a:r>
+            <a:r>
+              <a:rPr lang="en-US" dirty="0"/>
+              <a:t>The hidden complexities of Android TPL detection: An empirical analysis of techniques, challenges, and effectiveness, 2025</a:t>
+            </a:r>
+            <a:endParaRPr lang="en-GB" noProof="0" dirty="0"/>
+          </a:p>
+        </p:txBody>
+      </p:sp>
+      <p:pic>
+        <p:nvPicPr>
+          <p:cNvPr id="2054" name="Picture 6">
+            <a:extLst>
+              <a:ext uri="{FF2B5EF4-FFF2-40B4-BE49-F238E27FC236}">
+                <a16:creationId xmlns:a16="http://schemas.microsoft.com/office/drawing/2014/main" id="{26A42379-AA09-FB1F-E7D8-05CDC8016AFA}"/>
+              </a:ext>
+            </a:extLst>
+          </p:cNvPr>
+          <p:cNvPicPr>
+            <a:picLocks noChangeAspect="1" noChangeArrowheads="1"/>
+          </p:cNvPicPr>
+          <p:nvPr/>
+        </p:nvPicPr>
+        <p:blipFill>
+          <a:blip r:embed="rId3" cstate="print">
+            <a:extLst>
+              <a:ext uri="{28A0092B-C50C-407E-A947-70E740481C1C}">
+                <a14:useLocalDpi xmlns:a14="http://schemas.microsoft.com/office/drawing/2010/main" val="0"/>
+              </a:ext>
+            </a:extLst>
+          </a:blip>
+          <a:srcRect/>
+          <a:stretch>
+            <a:fillRect/>
+          </a:stretch>
+        </p:blipFill>
+        <p:spPr bwMode="auto">
+          <a:xfrm>
+            <a:off x="518348" y="1377992"/>
+            <a:ext cx="8014093" cy="3493644"/>
+          </a:xfrm>
+          <a:prstGeom prst="rect">
+            <a:avLst/>
+          </a:prstGeom>
+          <a:noFill/>
+          <a:extLst>
+            <a:ext uri="{909E8E84-426E-40DD-AFC4-6F175D3DCCD1}">
+              <a14:hiddenFill xmlns:a14="http://schemas.microsoft.com/office/drawing/2010/main">
+                <a:solidFill>
+                  <a:srgbClr val="FFFFFF"/>
+                </a:solidFill>
+              </a14:hiddenFill>
+            </a:ext>
+          </a:extLst>
+        </p:spPr>
+      </p:pic>
     </p:spTree>
   </p:cSld>
   <p:clrMapOvr>
@@ -7649,95 +10366,6 @@
               <a:buFontTx/>
               <a:buChar char="-"/>
             </a:pPr>
-            <a:r>
-              <a:rPr lang="en-GB" noProof="0" dirty="0"/>
-              <a:t>Extract Features (relationships, hierarchy, signatures)</a:t>
-            </a:r>
-          </a:p>
-          <a:p>
-            <a:pPr>
-              <a:buFontTx/>
-              <a:buChar char="-"/>
-            </a:pPr>
-            <a:r>
-              <a:rPr lang="en-GB" noProof="0" dirty="0"/>
-              <a:t>Hash </a:t>
-            </a:r>
-          </a:p>
-          <a:p>
-            <a:pPr>
-              <a:buFontTx/>
-              <a:buChar char="-"/>
-            </a:pPr>
-            <a:r>
-              <a:rPr lang="en-GB" noProof="0" dirty="0"/>
-              <a:t>Cluster on apps</a:t>
-            </a:r>
-          </a:p>
-          <a:p>
-            <a:pPr>
-              <a:buFontTx/>
-              <a:buChar char="-"/>
-            </a:pPr>
-            <a:r>
-              <a:rPr lang="en-GB" noProof="0" dirty="0"/>
-              <a:t>Label Clusters</a:t>
-            </a:r>
-          </a:p>
-          <a:p>
-            <a:pPr>
-              <a:buFontTx/>
-              <a:buChar char="-"/>
-            </a:pPr>
-            <a:r>
-              <a:rPr lang="en-GB" noProof="0" dirty="0"/>
-              <a:t>Compare Fingerprints</a:t>
-            </a:r>
-          </a:p>
-          <a:p>
-            <a:pPr>
-              <a:buFontTx/>
-              <a:buChar char="-"/>
-            </a:pPr>
-            <a:r>
-              <a:rPr lang="en-GB" noProof="0" dirty="0"/>
-              <a:t>No Database needed</a:t>
-            </a:r>
-          </a:p>
-          <a:p>
-            <a:pPr>
-              <a:buFontTx/>
-              <a:buChar char="-"/>
-            </a:pPr>
-            <a:r>
-              <a:rPr lang="en-GB" noProof="0" dirty="0"/>
-              <a:t>Faster after clustering, less accurate</a:t>
-            </a:r>
-          </a:p>
-          <a:p>
-            <a:pPr>
-              <a:buFontTx/>
-              <a:buChar char="-"/>
-            </a:pPr>
-            <a:r>
-              <a:rPr lang="en-GB" noProof="0" dirty="0" err="1"/>
-              <a:t>LibRadar</a:t>
-            </a:r>
-            <a:r>
-              <a:rPr lang="en-GB" noProof="0" dirty="0"/>
-              <a:t>, </a:t>
-            </a:r>
-            <a:r>
-              <a:rPr lang="en-GB" noProof="0" dirty="0" err="1"/>
-              <a:t>LibD</a:t>
-            </a:r>
-            <a:endParaRPr lang="en-GB" noProof="0" dirty="0"/>
-          </a:p>
-          <a:p>
-            <a:pPr>
-              <a:buFontTx/>
-              <a:buChar char="-"/>
-            </a:pPr>
             <a:endParaRPr lang="en-GB" noProof="0" dirty="0"/>
           </a:p>
         </p:txBody>
@@ -7756,7 +10384,7 @@
         </p:nvSpPr>
         <p:spPr>
           <a:xfrm>
-            <a:off x="955138" y="5000624"/>
+            <a:off x="1291658" y="5020389"/>
             <a:ext cx="5516683" cy="123111"/>
           </a:xfrm>
           <a:prstGeom prst="rect">
@@ -7782,17 +10410,59 @@
           </a:lstStyle>
           <a:p>
             <a:r>
+              <a:rPr lang="en-GB" noProof="0" dirty="0" err="1"/>
+              <a:t>Ziang</a:t>
+            </a:r>
+            <a:r>
               <a:rPr lang="en-GB" noProof="0" dirty="0"/>
-              <a:t>Zhang et al. : </a:t>
+              <a:t> et al.</a:t>
+            </a:r>
+            <a:r>
+              <a:rPr lang="en-GB" dirty="0"/>
+              <a:t>: </a:t>
+            </a:r>
+            <a:r>
+              <a:rPr lang="en-US" dirty="0" err="1"/>
+              <a:t>LibRadar</a:t>
             </a:r>
             <a:r>
               <a:rPr lang="en-US" dirty="0"/>
-              <a:t>Obfuscation-resilient detection of Android third-party libraries using multi-scale code dependency fusion</a:t>
+              <a:t>: Fast and Accurate Detection of Third-party Libraries in Android Apps, 2016</a:t>
             </a:r>
             <a:endParaRPr lang="en-GB" noProof="0" dirty="0"/>
           </a:p>
         </p:txBody>
       </p:sp>
+      <p:pic>
+        <p:nvPicPr>
+          <p:cNvPr id="8" name="Grafik 7">
+            <a:extLst>
+              <a:ext uri="{FF2B5EF4-FFF2-40B4-BE49-F238E27FC236}">
+                <a16:creationId xmlns:a16="http://schemas.microsoft.com/office/drawing/2014/main" id="{7A85C087-F4D6-F5E8-389D-78C25915F533}"/>
+              </a:ext>
+            </a:extLst>
+          </p:cNvPr>
+          <p:cNvPicPr>
+            <a:picLocks noChangeAspect="1"/>
+          </p:cNvPicPr>
+          <p:nvPr/>
+        </p:nvPicPr>
+        <p:blipFill>
+          <a:blip r:embed="rId3"/>
+          <a:stretch>
+            <a:fillRect/>
+          </a:stretch>
+        </p:blipFill>
+        <p:spPr>
+          <a:xfrm>
+            <a:off x="294502" y="1310096"/>
+            <a:ext cx="8309499" cy="3629436"/>
+          </a:xfrm>
+          <a:prstGeom prst="rect">
+            <a:avLst/>
+          </a:prstGeom>
+        </p:spPr>
+      </p:pic>
     </p:spTree>
     <p:extLst>
       <p:ext uri="{BB962C8B-B14F-4D97-AF65-F5344CB8AC3E}">
@@ -7829,7 +10499,7 @@
           <p:cNvPr id="2" name="Titel 1">
             <a:extLst>
               <a:ext uri="{FF2B5EF4-FFF2-40B4-BE49-F238E27FC236}">
-                <a16:creationId xmlns:a16="http://schemas.microsoft.com/office/drawing/2014/main" id="{3624D6FC-1DB7-E084-2BD2-88A7729BD652}"/>
+                <a16:creationId xmlns:a16="http://schemas.microsoft.com/office/drawing/2014/main" id="{0B67EE2C-AF7A-5600-CFB0-6E240E6995D7}"/>
               </a:ext>
             </a:extLst>
           </p:cNvPr>
@@ -7846,9 +10516,22 @@
           <a:lstStyle/>
           <a:p>
             <a:r>
-              <a:rPr lang="en-GB" noProof="0" dirty="0"/>
-              <a:t>Similarity-based Detection</a:t>
-            </a:r>
+              <a:rPr lang="de-CH" dirty="0"/>
+              <a:t>Clustering-</a:t>
+            </a:r>
+            <a:r>
+              <a:rPr lang="de-CH" dirty="0" err="1"/>
+              <a:t>based</a:t>
+            </a:r>
+            <a:r>
+              <a:rPr lang="de-CH" dirty="0"/>
+              <a:t> </a:t>
+            </a:r>
+            <a:r>
+              <a:rPr lang="de-CH" dirty="0" err="1"/>
+              <a:t>Detection</a:t>
+            </a:r>
+            <a:endParaRPr lang="de-CH" dirty="0"/>
           </a:p>
         </p:txBody>
       </p:sp>
@@ -7857,7 +10540,7 @@
           <p:cNvPr id="3" name="Textplatzhalter 2">
             <a:extLst>
               <a:ext uri="{FF2B5EF4-FFF2-40B4-BE49-F238E27FC236}">
-                <a16:creationId xmlns:a16="http://schemas.microsoft.com/office/drawing/2014/main" id="{D069624F-879D-E669-2B6A-9A7EA31E1A16}"/>
+                <a16:creationId xmlns:a16="http://schemas.microsoft.com/office/drawing/2014/main" id="{C5D4016E-723D-48C8-A736-8F24BC845E48}"/>
               </a:ext>
             </a:extLst>
           </p:cNvPr>
@@ -7870,111 +10553,49 @@
         </p:nvSpPr>
         <p:spPr/>
         <p:txBody>
-          <a:bodyPr>
-            <a:normAutofit/>
-          </a:bodyPr>
+          <a:bodyPr/>
           <a:lstStyle/>
           <a:p>
-            <a:pPr>
-              <a:buFontTx/>
-              <a:buChar char="-"/>
-            </a:pPr>
-            <a:r>
-              <a:rPr lang="en-GB" noProof="0" dirty="0"/>
-              <a:t>Build profile from Library</a:t>
-            </a:r>
-          </a:p>
-          <a:p>
-            <a:pPr>
-              <a:buFontTx/>
-              <a:buChar char="-"/>
-            </a:pPr>
-            <a:r>
-              <a:rPr lang="en-GB" noProof="0" dirty="0"/>
-              <a:t>Build profile from App</a:t>
-            </a:r>
-          </a:p>
-          <a:p>
-            <a:pPr>
-              <a:buFontTx/>
-              <a:buChar char="-"/>
-            </a:pPr>
-            <a:r>
-              <a:rPr lang="en-GB" noProof="0" dirty="0"/>
-              <a:t>Compare with probability</a:t>
-            </a:r>
-          </a:p>
-          <a:p>
-            <a:pPr>
-              <a:buFontTx/>
-              <a:buChar char="-"/>
-            </a:pPr>
-            <a:r>
-              <a:rPr lang="en-GB" noProof="0" dirty="0"/>
-              <a:t>Profile consist of class hierarchy, fuzzy hashes of bytecode, Control Flow Graphs, Class dependency signatures…</a:t>
-            </a:r>
-          </a:p>
-          <a:p>
-            <a:pPr>
-              <a:buFontTx/>
-              <a:buChar char="-"/>
-            </a:pPr>
-            <a:r>
-              <a:rPr lang="en-GB" noProof="0" dirty="0"/>
-              <a:t>Prone to obfuscation</a:t>
-            </a:r>
-          </a:p>
-          <a:p>
-            <a:pPr>
-              <a:buFontTx/>
-              <a:buChar char="-"/>
-            </a:pPr>
-            <a:r>
-              <a:rPr lang="en-GB" noProof="0" dirty="0"/>
-              <a:t>More accurate, but usually slower</a:t>
-            </a:r>
-          </a:p>
-          <a:p>
-            <a:pPr>
-              <a:buFontTx/>
-              <a:buChar char="-"/>
-            </a:pPr>
-            <a:r>
-              <a:rPr lang="en-GB" noProof="0" dirty="0" err="1"/>
-              <a:t>LibScout</a:t>
-            </a:r>
-            <a:r>
-              <a:rPr lang="en-GB" noProof="0" dirty="0"/>
-              <a:t>, ORLIS, </a:t>
-            </a:r>
-            <a:r>
-              <a:rPr lang="en-GB" noProof="0" dirty="0" err="1"/>
-              <a:t>LibPecker</a:t>
-            </a:r>
-            <a:endParaRPr lang="en-GB" noProof="0" dirty="0"/>
-          </a:p>
-          <a:p>
-            <a:pPr>
-              <a:buFontTx/>
-              <a:buChar char="-"/>
-            </a:pPr>
-            <a:endParaRPr lang="en-GB" noProof="0" dirty="0"/>
-          </a:p>
-          <a:p>
-            <a:pPr>
-              <a:buFontTx/>
-              <a:buChar char="-"/>
-            </a:pPr>
-            <a:endParaRPr lang="en-GB" noProof="0" dirty="0"/>
-          </a:p>
-        </p:txBody>
-      </p:sp>
-      <p:sp>
-        <p:nvSpPr>
-          <p:cNvPr id="7" name="Rechteck 2">
+            <a:endParaRPr lang="de-CH"/>
+          </a:p>
+        </p:txBody>
+      </p:sp>
+      <p:pic>
+        <p:nvPicPr>
+          <p:cNvPr id="5" name="Grafik 4">
             <a:extLst>
               <a:ext uri="{FF2B5EF4-FFF2-40B4-BE49-F238E27FC236}">
-                <a16:creationId xmlns:a16="http://schemas.microsoft.com/office/drawing/2014/main" id="{8B259E80-764E-08C9-1206-E488BD4CED2F}"/>
+                <a16:creationId xmlns:a16="http://schemas.microsoft.com/office/drawing/2014/main" id="{A0F98BD9-E8A7-F912-BF54-45C0BB82CBC4}"/>
+              </a:ext>
+            </a:extLst>
+          </p:cNvPr>
+          <p:cNvPicPr>
+            <a:picLocks noChangeAspect="1"/>
+          </p:cNvPicPr>
+          <p:nvPr/>
+        </p:nvPicPr>
+        <p:blipFill>
+          <a:blip r:embed="rId3"/>
+          <a:stretch>
+            <a:fillRect/>
+          </a:stretch>
+        </p:blipFill>
+        <p:spPr>
+          <a:xfrm>
+            <a:off x="539999" y="1491629"/>
+            <a:ext cx="7744906" cy="2886478"/>
+          </a:xfrm>
+          <a:prstGeom prst="rect">
+            <a:avLst/>
+          </a:prstGeom>
+        </p:spPr>
+      </p:pic>
+      <p:sp>
+        <p:nvSpPr>
+          <p:cNvPr id="6" name="Rechteck 2">
+            <a:extLst>
+              <a:ext uri="{FF2B5EF4-FFF2-40B4-BE49-F238E27FC236}">
+                <a16:creationId xmlns:a16="http://schemas.microsoft.com/office/drawing/2014/main" id="{F5BB4CCA-8F72-ED1B-4694-7FA43E6D4517}"/>
               </a:ext>
             </a:extLst>
           </p:cNvPr>
@@ -7983,8 +10604,8 @@
         </p:nvSpPr>
         <p:spPr>
           <a:xfrm>
-            <a:off x="502379" y="4989250"/>
-            <a:ext cx="6466592" cy="123111"/>
+            <a:off x="1291658" y="5014782"/>
+            <a:ext cx="5516683" cy="123111"/>
           </a:xfrm>
           <a:prstGeom prst="rect">
             <a:avLst/>
@@ -8009,16 +10630,24 @@
           </a:lstStyle>
           <a:p>
             <a:r>
+              <a:rPr lang="en-GB" noProof="0" dirty="0" err="1"/>
+              <a:t>Ziang</a:t>
+            </a:r>
+            <a:r>
               <a:rPr lang="en-GB" noProof="0" dirty="0"/>
-              <a:t>Wu et al: </a:t>
+              <a:t> et al.</a:t>
+            </a:r>
+            <a:r>
+              <a:rPr lang="en-GB" dirty="0"/>
+              <a:t>: </a:t>
             </a:r>
             <a:r>
               <a:rPr lang="en-US" dirty="0" err="1"/>
-              <a:t>LibScan</a:t>
+              <a:t>LibRadar</a:t>
             </a:r>
             <a:r>
               <a:rPr lang="en-US" dirty="0"/>
-              <a:t>: Towards More Precise Third-Party Library Identification for Android Applications, 2023</a:t>
+              <a:t>: Fast and Accurate Detection of Third-party Libraries in Android Apps, 2016</a:t>
             </a:r>
             <a:endParaRPr lang="en-GB" noProof="0" dirty="0"/>
           </a:p>
@@ -8027,7 +10656,7 @@
     </p:spTree>
     <p:extLst>
       <p:ext uri="{BB962C8B-B14F-4D97-AF65-F5344CB8AC3E}">
-        <p14:creationId xmlns:p14="http://schemas.microsoft.com/office/powerpoint/2010/main" val="3047920506"/>
+        <p14:creationId xmlns:p14="http://schemas.microsoft.com/office/powerpoint/2010/main" val="2871248524"/>
       </p:ext>
     </p:extLst>
   </p:cSld>
@@ -8060,7 +10689,7 @@
           <p:cNvPr id="2" name="Titel 1">
             <a:extLst>
               <a:ext uri="{FF2B5EF4-FFF2-40B4-BE49-F238E27FC236}">
-                <a16:creationId xmlns:a16="http://schemas.microsoft.com/office/drawing/2014/main" id="{4FBF0903-937F-DA4F-B55B-04633D576A2B}"/>
+                <a16:creationId xmlns:a16="http://schemas.microsoft.com/office/drawing/2014/main" id="{0434E59A-15D9-FBDD-17E7-CE1752E0D26F}"/>
               </a:ext>
             </a:extLst>
           </p:cNvPr>
@@ -8077,9 +10706,22 @@
           <a:lstStyle/>
           <a:p>
             <a:r>
-              <a:rPr lang="en-GB" noProof="0" dirty="0"/>
-              <a:t>Learning-based Detection</a:t>
-            </a:r>
+              <a:rPr lang="de-CH" dirty="0"/>
+              <a:t>Clustering-</a:t>
+            </a:r>
+            <a:r>
+              <a:rPr lang="de-CH" dirty="0" err="1"/>
+              <a:t>based</a:t>
+            </a:r>
+            <a:r>
+              <a:rPr lang="de-CH" dirty="0"/>
+              <a:t> </a:t>
+            </a:r>
+            <a:r>
+              <a:rPr lang="de-CH" dirty="0" err="1"/>
+              <a:t>Detection</a:t>
+            </a:r>
+            <a:endParaRPr lang="de-CH" dirty="0"/>
           </a:p>
         </p:txBody>
       </p:sp>
@@ -8088,7 +10730,7 @@
           <p:cNvPr id="3" name="Textplatzhalter 2">
             <a:extLst>
               <a:ext uri="{FF2B5EF4-FFF2-40B4-BE49-F238E27FC236}">
-                <a16:creationId xmlns:a16="http://schemas.microsoft.com/office/drawing/2014/main" id="{82F4C04A-85DE-8DD8-5A52-A71B9555258F}"/>
+                <a16:creationId xmlns:a16="http://schemas.microsoft.com/office/drawing/2014/main" id="{E949BD17-E17F-0022-57B2-B7B16E8777E7}"/>
               </a:ext>
             </a:extLst>
           </p:cNvPr>
@@ -8104,39 +10746,46 @@
           <a:bodyPr/>
           <a:lstStyle/>
           <a:p>
-            <a:r>
-              <a:rPr lang="en-GB" noProof="0" dirty="0"/>
-              <a:t>Language Model</a:t>
-            </a:r>
-          </a:p>
-          <a:p>
-            <a:r>
-              <a:rPr lang="en-GB" noProof="0" dirty="0"/>
-              <a:t>Pretrained on unlabelled data</a:t>
-            </a:r>
-          </a:p>
-          <a:p>
-            <a:r>
-              <a:rPr lang="en-GB" dirty="0"/>
-              <a:t>Hard to find data set</a:t>
-            </a:r>
-            <a:endParaRPr lang="en-GB" noProof="0" dirty="0"/>
-          </a:p>
-          <a:p>
-            <a:r>
-              <a:rPr lang="en-GB" noProof="0" dirty="0" err="1"/>
-              <a:t>LibAttention</a:t>
-            </a:r>
-            <a:endParaRPr lang="en-GB" noProof="0" dirty="0"/>
-          </a:p>
-        </p:txBody>
-      </p:sp>
-      <p:sp>
-        <p:nvSpPr>
-          <p:cNvPr id="4" name="Rechteck 4">
+            <a:endParaRPr lang="de-CH"/>
+          </a:p>
+        </p:txBody>
+      </p:sp>
+      <p:pic>
+        <p:nvPicPr>
+          <p:cNvPr id="5" name="Grafik 4">
             <a:extLst>
               <a:ext uri="{FF2B5EF4-FFF2-40B4-BE49-F238E27FC236}">
-                <a16:creationId xmlns:a16="http://schemas.microsoft.com/office/drawing/2014/main" id="{1C4B04A5-F05F-0D9E-859D-E1CE40CEB33E}"/>
+                <a16:creationId xmlns:a16="http://schemas.microsoft.com/office/drawing/2014/main" id="{64113613-5B6A-44DC-6B49-EE7A72C9AE64}"/>
+              </a:ext>
+            </a:extLst>
+          </p:cNvPr>
+          <p:cNvPicPr>
+            <a:picLocks noChangeAspect="1"/>
+          </p:cNvPicPr>
+          <p:nvPr/>
+        </p:nvPicPr>
+        <p:blipFill>
+          <a:blip r:embed="rId3"/>
+          <a:stretch>
+            <a:fillRect/>
+          </a:stretch>
+        </p:blipFill>
+        <p:spPr>
+          <a:xfrm>
+            <a:off x="1290931" y="1458417"/>
+            <a:ext cx="6490577" cy="3332793"/>
+          </a:xfrm>
+          <a:prstGeom prst="rect">
+            <a:avLst/>
+          </a:prstGeom>
+        </p:spPr>
+      </p:pic>
+      <p:sp>
+        <p:nvSpPr>
+          <p:cNvPr id="6" name="Rechteck 2">
+            <a:extLst>
+              <a:ext uri="{FF2B5EF4-FFF2-40B4-BE49-F238E27FC236}">
+                <a16:creationId xmlns:a16="http://schemas.microsoft.com/office/drawing/2014/main" id="{F47631AF-B6EF-5E4E-542F-E63D82AB6AE2}"/>
               </a:ext>
             </a:extLst>
           </p:cNvPr>
@@ -8145,8 +10794,8 @@
         </p:nvSpPr>
         <p:spPr>
           <a:xfrm>
-            <a:off x="990648" y="5007008"/>
-            <a:ext cx="8082331" cy="123111"/>
+            <a:off x="717552" y="5020389"/>
+            <a:ext cx="5516683" cy="123111"/>
           </a:xfrm>
           <a:prstGeom prst="rect">
             <a:avLst/>
@@ -8171,8 +10820,24 @@
           </a:lstStyle>
           <a:p>
             <a:r>
+              <a:rPr lang="en-GB" noProof="0" dirty="0" err="1"/>
+              <a:t>Ziang</a:t>
+            </a:r>
+            <a:r>
+              <a:rPr lang="en-GB" noProof="0" dirty="0"/>
+              <a:t> et al.</a:t>
+            </a:r>
+            <a:r>
+              <a:rPr lang="en-GB" dirty="0"/>
+              <a:t>: </a:t>
+            </a:r>
+            <a:r>
+              <a:rPr lang="en-US" dirty="0" err="1"/>
+              <a:t>LibRadar</a:t>
+            </a:r>
+            <a:r>
               <a:rPr lang="en-US" dirty="0"/>
-              <a:t>Pan et al: Pay Your Attention on Lib! Android Third-Party Library Detection via Feature Language Model, 2025</a:t>
+              <a:t>: Fast and Accurate Detection of Third-party Libraries in Android Apps, 2016</a:t>
             </a:r>
             <a:endParaRPr lang="en-GB" noProof="0" dirty="0"/>
           </a:p>
@@ -8181,7 +10846,7 @@
     </p:spTree>
     <p:extLst>
       <p:ext uri="{BB962C8B-B14F-4D97-AF65-F5344CB8AC3E}">
-        <p14:creationId xmlns:p14="http://schemas.microsoft.com/office/powerpoint/2010/main" val="2677606480"/>
+        <p14:creationId xmlns:p14="http://schemas.microsoft.com/office/powerpoint/2010/main" val="3217228714"/>
       </p:ext>
     </p:extLst>
   </p:cSld>
@@ -8211,128 +10876,86 @@
       </p:grpSpPr>
       <p:sp>
         <p:nvSpPr>
-          <p:cNvPr id="249" name="Foliennummernplatzhalter 5"/>
-          <p:cNvSpPr txBox="1">
-            <a:spLocks noGrp="1"/>
-          </p:cNvSpPr>
-          <p:nvPr>
-            <p:ph type="sldNum" sz="quarter" idx="2"/>
-          </p:nvPr>
-        </p:nvSpPr>
-        <p:spPr>
-          <a:prstGeom prst="rect">
-            <a:avLst/>
-          </a:prstGeom>
-          <a:extLst>
-            <a:ext uri="{C572A759-6A51-4108-AA02-DFA0A04FC94B}">
-              <ma14:wrappingTextBoxFlag xmlns="" xmlns:m="http://schemas.openxmlformats.org/officeDocument/2006/math" xmlns:a14="http://schemas.microsoft.com/office/drawing/2010/main" xmlns:ma14="http://schemas.microsoft.com/office/mac/drawingml/2011/main" val="1"/>
-            </a:ext>
-          </a:extLst>
-        </p:spPr>
-        <p:txBody>
-          <a:bodyPr/>
-          <a:lstStyle/>
-          <a:p>
-            <a:fld id="{86CB4B4D-7CA3-9044-876B-883B54F8677D}" type="slidenum">
-              <a:rPr lang="en-GB" noProof="0" smtClean="0"/>
-              <a:t>9</a:t>
-            </a:fld>
-            <a:endParaRPr lang="en-GB" noProof="0" dirty="0"/>
-          </a:p>
-        </p:txBody>
-      </p:sp>
-      <p:sp>
-        <p:nvSpPr>
-          <p:cNvPr id="250" name="Titel 5"/>
-          <p:cNvSpPr txBox="1">
+          <p:cNvPr id="2" name="Titel 1">
+            <a:extLst>
+              <a:ext uri="{FF2B5EF4-FFF2-40B4-BE49-F238E27FC236}">
+                <a16:creationId xmlns:a16="http://schemas.microsoft.com/office/drawing/2014/main" id="{3624D6FC-1DB7-E084-2BD2-88A7729BD652}"/>
+              </a:ext>
+            </a:extLst>
+          </p:cNvPr>
+          <p:cNvSpPr>
             <a:spLocks noGrp="1"/>
           </p:cNvSpPr>
           <p:nvPr>
             <p:ph type="title"/>
           </p:nvPr>
         </p:nvSpPr>
-        <p:spPr>
-          <a:prstGeom prst="rect">
-            <a:avLst/>
-          </a:prstGeom>
-        </p:spPr>
+        <p:spPr/>
         <p:txBody>
           <a:bodyPr/>
           <a:lstStyle/>
           <a:p>
             <a:r>
               <a:rPr lang="en-GB" noProof="0" dirty="0"/>
-              <a:t>Benchmarking</a:t>
-            </a:r>
-          </a:p>
-        </p:txBody>
-      </p:sp>
-      <p:sp>
-        <p:nvSpPr>
-          <p:cNvPr id="251" name="Inhaltsplatzhalter 6"/>
-          <p:cNvSpPr txBox="1">
+              <a:t>Similarity-based Detection</a:t>
+            </a:r>
+          </a:p>
+        </p:txBody>
+      </p:sp>
+      <p:sp>
+        <p:nvSpPr>
+          <p:cNvPr id="3" name="Textplatzhalter 2">
+            <a:extLst>
+              <a:ext uri="{FF2B5EF4-FFF2-40B4-BE49-F238E27FC236}">
+                <a16:creationId xmlns:a16="http://schemas.microsoft.com/office/drawing/2014/main" id="{D069624F-879D-E669-2B6A-9A7EA31E1A16}"/>
+              </a:ext>
+            </a:extLst>
+          </p:cNvPr>
+          <p:cNvSpPr>
             <a:spLocks noGrp="1"/>
           </p:cNvSpPr>
           <p:nvPr>
             <p:ph type="body" idx="1"/>
           </p:nvPr>
         </p:nvSpPr>
-        <p:spPr>
-          <a:prstGeom prst="rect">
-            <a:avLst/>
-          </a:prstGeom>
-        </p:spPr>
-        <p:txBody>
-          <a:bodyPr/>
+        <p:spPr/>
+        <p:txBody>
+          <a:bodyPr>
+            <a:normAutofit/>
+          </a:bodyPr>
           <a:lstStyle/>
           <a:p>
-            <a:r>
-              <a:rPr lang="en-GB" noProof="0" dirty="0"/>
-              <a:t>Only one independent benchmark (2025)</a:t>
-            </a:r>
-          </a:p>
-          <a:p>
-            <a:r>
-              <a:rPr lang="en-GB" noProof="0" dirty="0"/>
-              <a:t>Find APKs on GitHub &amp; F-Droid</a:t>
-            </a:r>
-          </a:p>
-          <a:p>
-            <a:r>
-              <a:rPr lang="en-GB" noProof="0" dirty="0"/>
-              <a:t>Extract TPLs</a:t>
-            </a:r>
-          </a:p>
-          <a:p>
-            <a:r>
-              <a:rPr lang="en-GB" noProof="0" dirty="0"/>
-              <a:t>Test selected tools</a:t>
-            </a:r>
-          </a:p>
-          <a:p>
-            <a:r>
-              <a:rPr lang="en-GB" noProof="0" dirty="0"/>
-              <a:t>Hybrid Frameworks excluded</a:t>
-            </a:r>
-          </a:p>
-          <a:p>
+            <a:pPr>
+              <a:buFontTx/>
+              <a:buChar char="-"/>
+            </a:pPr>
             <a:endParaRPr lang="en-GB" noProof="0" dirty="0"/>
           </a:p>
           <a:p>
+            <a:pPr>
+              <a:buFontTx/>
+              <a:buChar char="-"/>
+            </a:pPr>
             <a:endParaRPr lang="en-GB" noProof="0" dirty="0"/>
           </a:p>
         </p:txBody>
       </p:sp>
       <p:sp>
         <p:nvSpPr>
-          <p:cNvPr id="252" name="Rechteck 4"/>
+          <p:cNvPr id="7" name="Rechteck 2">
+            <a:extLst>
+              <a:ext uri="{FF2B5EF4-FFF2-40B4-BE49-F238E27FC236}">
+                <a16:creationId xmlns:a16="http://schemas.microsoft.com/office/drawing/2014/main" id="{8B259E80-764E-08C9-1206-E488BD4CED2F}"/>
+              </a:ext>
+            </a:extLst>
+          </p:cNvPr>
           <p:cNvSpPr txBox="1"/>
           <p:nvPr/>
         </p:nvSpPr>
         <p:spPr>
           <a:xfrm>
-            <a:off x="990648" y="5007008"/>
-            <a:ext cx="8082331" cy="123111"/>
+            <a:off x="502379" y="4989250"/>
+            <a:ext cx="6466592" cy="123111"/>
           </a:xfrm>
           <a:prstGeom prst="rect">
             <a:avLst/>
@@ -8358,12 +10981,56 @@
           <a:p>
             <a:r>
               <a:rPr lang="en-GB" noProof="0" dirty="0"/>
-              <a:t>Gu et al. : Revisiting Third-Party Library Detection: A Ground Truth Dataset and Its Implications Across Security Tasks, 2025</a:t>
-            </a:r>
-          </a:p>
-        </p:txBody>
-      </p:sp>
+              <a:t>Wu et al: </a:t>
+            </a:r>
+            <a:r>
+              <a:rPr lang="en-US" dirty="0" err="1"/>
+              <a:t>LibScan</a:t>
+            </a:r>
+            <a:r>
+              <a:rPr lang="en-US" dirty="0"/>
+              <a:t>: Towards More Precise Third-Party Library Identification for Android Applications, 2023</a:t>
+            </a:r>
+            <a:endParaRPr lang="en-GB" noProof="0" dirty="0"/>
+          </a:p>
+        </p:txBody>
+      </p:sp>
+      <p:pic>
+        <p:nvPicPr>
+          <p:cNvPr id="5" name="Grafik 4">
+            <a:extLst>
+              <a:ext uri="{FF2B5EF4-FFF2-40B4-BE49-F238E27FC236}">
+                <a16:creationId xmlns:a16="http://schemas.microsoft.com/office/drawing/2014/main" id="{48A94FF4-0804-09D2-778B-0042740D30E4}"/>
+              </a:ext>
+            </a:extLst>
+          </p:cNvPr>
+          <p:cNvPicPr>
+            <a:picLocks noChangeAspect="1"/>
+          </p:cNvPicPr>
+          <p:nvPr/>
+        </p:nvPicPr>
+        <p:blipFill>
+          <a:blip r:embed="rId3"/>
+          <a:stretch>
+            <a:fillRect/>
+          </a:stretch>
+        </p:blipFill>
+        <p:spPr>
+          <a:xfrm>
+            <a:off x="0" y="1776445"/>
+            <a:ext cx="9144000" cy="2523531"/>
+          </a:xfrm>
+          <a:prstGeom prst="rect">
+            <a:avLst/>
+          </a:prstGeom>
+        </p:spPr>
+      </p:pic>
     </p:spTree>
+    <p:extLst>
+      <p:ext uri="{BB962C8B-B14F-4D97-AF65-F5344CB8AC3E}">
+        <p14:creationId xmlns:p14="http://schemas.microsoft.com/office/powerpoint/2010/main" val="3047920506"/>
+      </p:ext>
+    </p:extLst>
   </p:cSld>
   <p:clrMapOvr>
     <a:masterClrMapping/>

--- a/Presentations/26_05_26_Seminar.pptx
+++ b/Presentations/26_05_26_Seminar.pptx
@@ -14,19 +14,19 @@
     <p:sldId id="259" r:id="rId5"/>
     <p:sldId id="260" r:id="rId6"/>
     <p:sldId id="267" r:id="rId7"/>
-    <p:sldId id="273" r:id="rId8"/>
-    <p:sldId id="274" r:id="rId9"/>
-    <p:sldId id="268" r:id="rId10"/>
-    <p:sldId id="271" r:id="rId11"/>
-    <p:sldId id="262" r:id="rId12"/>
-    <p:sldId id="269" r:id="rId13"/>
-    <p:sldId id="270" r:id="rId14"/>
-    <p:sldId id="266" r:id="rId15"/>
-    <p:sldId id="275" r:id="rId16"/>
-    <p:sldId id="272" r:id="rId17"/>
-    <p:sldId id="276" r:id="rId18"/>
-    <p:sldId id="277" r:id="rId19"/>
-    <p:sldId id="278" r:id="rId20"/>
+    <p:sldId id="268" r:id="rId8"/>
+    <p:sldId id="271" r:id="rId9"/>
+    <p:sldId id="262" r:id="rId10"/>
+    <p:sldId id="269" r:id="rId11"/>
+    <p:sldId id="270" r:id="rId12"/>
+    <p:sldId id="266" r:id="rId13"/>
+    <p:sldId id="275" r:id="rId14"/>
+    <p:sldId id="272" r:id="rId15"/>
+    <p:sldId id="276" r:id="rId16"/>
+    <p:sldId id="277" r:id="rId17"/>
+    <p:sldId id="278" r:id="rId18"/>
+    <p:sldId id="273" r:id="rId19"/>
+    <p:sldId id="274" r:id="rId20"/>
   </p:sldIdLst>
   <p:sldSz cx="9144000" cy="5143500" type="screen16x9"/>
   <p:notesSz cx="6858000" cy="9144000"/>
@@ -1389,31 +1389,13 @@
           <a:lstStyle/>
           <a:p>
             <a:r>
-              <a:rPr lang="en-GB" noProof="0" dirty="0"/>
-              <a:t>Language Model</a:t>
-            </a:r>
-          </a:p>
-          <a:p>
-            <a:r>
-              <a:rPr lang="en-GB" noProof="0" dirty="0"/>
-              <a:t>Pretrained on unlabelled data</a:t>
-            </a:r>
-          </a:p>
-          <a:p>
-            <a:r>
-              <a:rPr lang="en-GB" dirty="0"/>
-              <a:t>Hard to find data set</a:t>
-            </a:r>
-            <a:endParaRPr lang="en-GB" noProof="0" dirty="0"/>
-          </a:p>
-          <a:p>
-            <a:r>
-              <a:rPr lang="en-GB" noProof="0" dirty="0" err="1"/>
-              <a:t>LibAttention</a:t>
-            </a:r>
-            <a:endParaRPr lang="en-GB" noProof="0" dirty="0"/>
-          </a:p>
-          <a:p>
+              <a:rPr lang="de-CH" dirty="0"/>
+              <a:t>10 </a:t>
+            </a:r>
+            <a:r>
+              <a:rPr lang="de-CH" dirty="0" err="1"/>
+              <a:t>tools</a:t>
+            </a:r>
             <a:endParaRPr lang="de-CH" dirty="0"/>
           </a:p>
         </p:txBody>
@@ -1421,7 +1403,7 @@
     </p:spTree>
     <p:extLst>
       <p:ext uri="{BB962C8B-B14F-4D97-AF65-F5344CB8AC3E}">
-        <p14:creationId xmlns:p14="http://schemas.microsoft.com/office/powerpoint/2010/main" val="3643931675"/>
+        <p14:creationId xmlns:p14="http://schemas.microsoft.com/office/powerpoint/2010/main" val="2420835844"/>
       </p:ext>
     </p:extLst>
   </p:cSld>
@@ -1482,53 +1464,176 @@
           <a:p>
             <a:r>
               <a:rPr lang="de-CH" dirty="0"/>
-              <a:t>Sources: </a:t>
+              <a:t>=&gt; People </a:t>
             </a:r>
             <a:r>
               <a:rPr lang="de-CH" dirty="0" err="1"/>
-              <a:t>Github</a:t>
+              <a:t>overrate</a:t>
             </a:r>
             <a:r>
               <a:rPr lang="de-CH" dirty="0"/>
-              <a:t>, </a:t>
+              <a:t> </a:t>
             </a:r>
             <a:r>
               <a:rPr lang="de-CH" dirty="0" err="1"/>
-              <a:t>Fdroid</a:t>
+              <a:t>their</a:t>
+            </a:r>
+            <a:r>
+              <a:rPr lang="de-CH" dirty="0"/>
+              <a:t> </a:t>
+            </a:r>
+            <a:r>
+              <a:rPr lang="de-CH" dirty="0" err="1"/>
+              <a:t>tools</a:t>
+            </a:r>
+            <a:r>
+              <a:rPr lang="de-CH" dirty="0"/>
+              <a:t> in </a:t>
+            </a:r>
+            <a:r>
+              <a:rPr lang="de-CH" dirty="0" err="1"/>
+              <a:t>papers</a:t>
             </a:r>
             <a:endParaRPr lang="de-CH" dirty="0"/>
           </a:p>
           <a:p>
             <a:r>
-              <a:rPr lang="en-GB" noProof="0" dirty="0"/>
-              <a:t>Only one independent benchmark (2025)</a:t>
-            </a:r>
-          </a:p>
-          <a:p>
-            <a:r>
-              <a:rPr lang="en-GB" noProof="0" dirty="0"/>
-              <a:t>Find APKs on GitHub &amp; F-Droid</a:t>
-            </a:r>
-          </a:p>
-          <a:p>
-            <a:r>
-              <a:rPr lang="en-GB" noProof="0" dirty="0"/>
-              <a:t>Extract TPLs</a:t>
-            </a:r>
-          </a:p>
-          <a:p>
-            <a:r>
-              <a:rPr lang="en-GB" noProof="0" dirty="0"/>
-              <a:t>Test selected tools</a:t>
-            </a:r>
-          </a:p>
-          <a:p>
-            <a:r>
-              <a:rPr lang="en-GB" noProof="0" dirty="0"/>
-              <a:t>Hybrid Frameworks excluded</a:t>
-            </a:r>
-          </a:p>
-          <a:p>
+              <a:rPr lang="de-CH" dirty="0"/>
+              <a:t>TP: </a:t>
+            </a:r>
+            <a:r>
+              <a:rPr lang="de-CH" dirty="0" err="1"/>
+              <a:t>correctly</a:t>
+            </a:r>
+            <a:r>
+              <a:rPr lang="de-CH" dirty="0"/>
+              <a:t> </a:t>
+            </a:r>
+            <a:r>
+              <a:rPr lang="de-CH" dirty="0" err="1"/>
+              <a:t>identified</a:t>
+            </a:r>
+            <a:br>
+              <a:rPr lang="de-CH" dirty="0"/>
+            </a:br>
+            <a:r>
+              <a:rPr lang="de-CH" dirty="0"/>
+              <a:t>FP: </a:t>
+            </a:r>
+            <a:r>
+              <a:rPr lang="de-CH" dirty="0" err="1"/>
+              <a:t>incorrectly</a:t>
+            </a:r>
+            <a:r>
+              <a:rPr lang="de-CH" dirty="0"/>
+              <a:t> </a:t>
+            </a:r>
+            <a:r>
+              <a:rPr lang="de-CH" dirty="0" err="1"/>
+              <a:t>identified</a:t>
+            </a:r>
+            <a:r>
+              <a:rPr lang="de-CH" dirty="0"/>
+              <a:t> </a:t>
+            </a:r>
+            <a:r>
+              <a:rPr lang="de-CH" dirty="0" err="1"/>
+              <a:t>as</a:t>
+            </a:r>
+            <a:r>
+              <a:rPr lang="de-CH" dirty="0"/>
+              <a:t> </a:t>
+            </a:r>
+            <a:r>
+              <a:rPr lang="de-CH" dirty="0" err="1"/>
+              <a:t>present</a:t>
+            </a:r>
+            <a:r>
+              <a:rPr lang="de-CH" dirty="0"/>
+              <a:t> </a:t>
+            </a:r>
+            <a:r>
+              <a:rPr lang="de-CH" dirty="0" err="1"/>
+              <a:t>when</a:t>
+            </a:r>
+            <a:r>
+              <a:rPr lang="de-CH" dirty="0"/>
+              <a:t> </a:t>
+            </a:r>
+            <a:r>
+              <a:rPr lang="de-CH" dirty="0" err="1"/>
+              <a:t>they</a:t>
+            </a:r>
+            <a:r>
+              <a:rPr lang="de-CH" dirty="0"/>
+              <a:t> </a:t>
+            </a:r>
+            <a:r>
+              <a:rPr lang="de-CH" dirty="0" err="1"/>
+              <a:t>are</a:t>
+            </a:r>
+            <a:r>
+              <a:rPr lang="de-CH" dirty="0"/>
+              <a:t> not</a:t>
+            </a:r>
+          </a:p>
+          <a:p>
+            <a:r>
+              <a:rPr lang="de-CH" dirty="0"/>
+              <a:t>FN: </a:t>
+            </a:r>
+            <a:r>
+              <a:rPr lang="de-CH" dirty="0" err="1"/>
+              <a:t>incorrectly</a:t>
+            </a:r>
+            <a:r>
+              <a:rPr lang="de-CH" dirty="0"/>
+              <a:t> </a:t>
+            </a:r>
+            <a:r>
+              <a:rPr lang="de-CH" dirty="0" err="1"/>
+              <a:t>identified</a:t>
+            </a:r>
+            <a:r>
+              <a:rPr lang="de-CH" dirty="0"/>
+              <a:t> </a:t>
+            </a:r>
+            <a:r>
+              <a:rPr lang="de-CH" dirty="0" err="1"/>
+              <a:t>as</a:t>
+            </a:r>
+            <a:r>
+              <a:rPr lang="de-CH" dirty="0"/>
+              <a:t> absent </a:t>
+            </a:r>
+            <a:r>
+              <a:rPr lang="de-CH" dirty="0" err="1"/>
+              <a:t>when</a:t>
+            </a:r>
+            <a:r>
+              <a:rPr lang="de-CH" dirty="0"/>
+              <a:t> </a:t>
+            </a:r>
+            <a:r>
+              <a:rPr lang="de-CH" dirty="0" err="1"/>
+              <a:t>they</a:t>
+            </a:r>
+            <a:r>
+              <a:rPr lang="de-CH" dirty="0"/>
+              <a:t> </a:t>
+            </a:r>
+            <a:r>
+              <a:rPr lang="de-CH" dirty="0" err="1"/>
+              <a:t>are</a:t>
+            </a:r>
+            <a:r>
+              <a:rPr lang="de-CH" dirty="0"/>
+              <a:t> </a:t>
+            </a:r>
+            <a:r>
+              <a:rPr lang="de-CH" dirty="0" err="1"/>
+              <a:t>present</a:t>
+            </a:r>
             <a:endParaRPr lang="de-CH" dirty="0"/>
           </a:p>
         </p:txBody>
@@ -1536,7 +1641,7 @@
     </p:spTree>
     <p:extLst>
       <p:ext uri="{BB962C8B-B14F-4D97-AF65-F5344CB8AC3E}">
-        <p14:creationId xmlns:p14="http://schemas.microsoft.com/office/powerpoint/2010/main" val="2985197927"/>
+        <p14:creationId xmlns:p14="http://schemas.microsoft.com/office/powerpoint/2010/main" val="2724139584"/>
       </p:ext>
     </p:extLst>
   </p:cSld>
@@ -1596,177 +1701,33 @@
           <a:lstStyle/>
           <a:p>
             <a:r>
-              <a:rPr lang="de-CH" dirty="0"/>
-              <a:t>=&gt; People </a:t>
-            </a:r>
-            <a:r>
-              <a:rPr lang="de-CH" dirty="0" err="1"/>
-              <a:t>overrate</a:t>
-            </a:r>
-            <a:r>
-              <a:rPr lang="de-CH" dirty="0"/>
-              <a:t> </a:t>
-            </a:r>
-            <a:r>
-              <a:rPr lang="de-CH" dirty="0" err="1"/>
-              <a:t>their</a:t>
-            </a:r>
-            <a:r>
-              <a:rPr lang="de-CH" dirty="0"/>
-              <a:t> </a:t>
-            </a:r>
-            <a:r>
-              <a:rPr lang="de-CH" dirty="0" err="1"/>
-              <a:t>tools</a:t>
-            </a:r>
-            <a:r>
-              <a:rPr lang="de-CH" dirty="0"/>
-              <a:t> in </a:t>
-            </a:r>
-            <a:r>
-              <a:rPr lang="de-CH" dirty="0" err="1"/>
-              <a:t>papers</a:t>
-            </a:r>
-            <a:endParaRPr lang="de-CH" dirty="0"/>
-          </a:p>
-          <a:p>
-            <a:r>
-              <a:rPr lang="de-CH" dirty="0"/>
-              <a:t>TP: </a:t>
-            </a:r>
-            <a:r>
-              <a:rPr lang="de-CH" dirty="0" err="1"/>
-              <a:t>correctly</a:t>
-            </a:r>
-            <a:r>
-              <a:rPr lang="de-CH" dirty="0"/>
-              <a:t> </a:t>
-            </a:r>
-            <a:r>
-              <a:rPr lang="de-CH" dirty="0" err="1"/>
-              <a:t>identified</a:t>
-            </a:r>
-            <a:br>
-              <a:rPr lang="de-CH" dirty="0"/>
-            </a:br>
-            <a:r>
-              <a:rPr lang="de-CH" dirty="0"/>
-              <a:t>FP: </a:t>
-            </a:r>
-            <a:r>
-              <a:rPr lang="de-CH" dirty="0" err="1"/>
-              <a:t>incorrectly</a:t>
-            </a:r>
-            <a:r>
-              <a:rPr lang="de-CH" dirty="0"/>
-              <a:t> </a:t>
-            </a:r>
-            <a:r>
-              <a:rPr lang="de-CH" dirty="0" err="1"/>
-              <a:t>identified</a:t>
-            </a:r>
-            <a:r>
-              <a:rPr lang="de-CH" dirty="0"/>
-              <a:t> </a:t>
-            </a:r>
-            <a:r>
-              <a:rPr lang="de-CH" dirty="0" err="1"/>
-              <a:t>as</a:t>
-            </a:r>
-            <a:r>
-              <a:rPr lang="de-CH" dirty="0"/>
-              <a:t> </a:t>
-            </a:r>
-            <a:r>
-              <a:rPr lang="de-CH" dirty="0" err="1"/>
-              <a:t>present</a:t>
-            </a:r>
-            <a:r>
-              <a:rPr lang="de-CH" dirty="0"/>
-              <a:t> </a:t>
-            </a:r>
-            <a:r>
-              <a:rPr lang="de-CH" dirty="0" err="1"/>
-              <a:t>when</a:t>
-            </a:r>
-            <a:r>
-              <a:rPr lang="de-CH" dirty="0"/>
-              <a:t> </a:t>
-            </a:r>
-            <a:r>
-              <a:rPr lang="de-CH" dirty="0" err="1"/>
-              <a:t>they</a:t>
-            </a:r>
-            <a:r>
-              <a:rPr lang="de-CH" dirty="0"/>
-              <a:t> </a:t>
-            </a:r>
-            <a:r>
-              <a:rPr lang="de-CH" dirty="0" err="1"/>
-              <a:t>are</a:t>
-            </a:r>
-            <a:r>
-              <a:rPr lang="de-CH" dirty="0"/>
-              <a:t> not</a:t>
-            </a:r>
-          </a:p>
-          <a:p>
-            <a:r>
-              <a:rPr lang="de-CH" dirty="0"/>
-              <a:t>FN: </a:t>
-            </a:r>
-            <a:r>
-              <a:rPr lang="de-CH" dirty="0" err="1"/>
-              <a:t>incorrectly</a:t>
-            </a:r>
-            <a:r>
-              <a:rPr lang="de-CH" dirty="0"/>
-              <a:t> </a:t>
-            </a:r>
-            <a:r>
-              <a:rPr lang="de-CH" dirty="0" err="1"/>
-              <a:t>identified</a:t>
-            </a:r>
-            <a:r>
-              <a:rPr lang="de-CH" dirty="0"/>
-              <a:t> </a:t>
-            </a:r>
-            <a:r>
-              <a:rPr lang="de-CH" dirty="0" err="1"/>
-              <a:t>as</a:t>
-            </a:r>
-            <a:r>
-              <a:rPr lang="de-CH" dirty="0"/>
-              <a:t> absent </a:t>
-            </a:r>
-            <a:r>
-              <a:rPr lang="de-CH" dirty="0" err="1"/>
-              <a:t>when</a:t>
-            </a:r>
-            <a:r>
-              <a:rPr lang="de-CH" dirty="0"/>
-              <a:t> </a:t>
-            </a:r>
-            <a:r>
-              <a:rPr lang="de-CH" dirty="0" err="1"/>
-              <a:t>they</a:t>
-            </a:r>
-            <a:r>
-              <a:rPr lang="de-CH" dirty="0"/>
-              <a:t> </a:t>
-            </a:r>
-            <a:r>
-              <a:rPr lang="de-CH" dirty="0" err="1"/>
-              <a:t>are</a:t>
-            </a:r>
-            <a:r>
-              <a:rPr lang="de-CH" dirty="0"/>
-              <a:t> </a:t>
-            </a:r>
-            <a:r>
-              <a:rPr lang="de-CH" dirty="0" err="1"/>
-              <a:t>present</a:t>
-            </a:r>
+              <a:rPr lang="en-GB" noProof="0" dirty="0"/>
+              <a:t>Featuring: </a:t>
+            </a:r>
+          </a:p>
+          <a:p>
+            <a:pPr lvl="1"/>
+            <a:r>
+              <a:rPr lang="en-GB" dirty="0"/>
+              <a:t>Obfuscated apps</a:t>
+            </a:r>
+          </a:p>
+          <a:p>
+            <a:pPr lvl="1"/>
+            <a:r>
+              <a:rPr lang="en-GB" noProof="0" dirty="0"/>
+              <a:t>Native apps</a:t>
+            </a:r>
+          </a:p>
+          <a:p>
+            <a:pPr lvl="1"/>
+            <a:r>
+              <a:rPr lang="en-GB" dirty="0"/>
+              <a:t>Hybrid apps</a:t>
+            </a:r>
+            <a:endParaRPr lang="en-GB" noProof="0" dirty="0"/>
+          </a:p>
+          <a:p>
             <a:endParaRPr lang="de-CH" dirty="0"/>
           </a:p>
         </p:txBody>
@@ -1774,7 +1735,7 @@
     </p:spTree>
     <p:extLst>
       <p:ext uri="{BB962C8B-B14F-4D97-AF65-F5344CB8AC3E}">
-        <p14:creationId xmlns:p14="http://schemas.microsoft.com/office/powerpoint/2010/main" val="2724139584"/>
+        <p14:creationId xmlns:p14="http://schemas.microsoft.com/office/powerpoint/2010/main" val="1599496441"/>
       </p:ext>
     </p:extLst>
   </p:cSld>
@@ -1834,33 +1795,41 @@
           <a:lstStyle/>
           <a:p>
             <a:r>
-              <a:rPr lang="en-GB" noProof="0" dirty="0"/>
-              <a:t>Featuring: </a:t>
-            </a:r>
-          </a:p>
-          <a:p>
-            <a:pPr lvl="1"/>
-            <a:r>
-              <a:rPr lang="en-GB" dirty="0"/>
-              <a:t>Obfuscated apps</a:t>
-            </a:r>
-          </a:p>
-          <a:p>
-            <a:pPr lvl="1"/>
-            <a:r>
-              <a:rPr lang="en-GB" noProof="0" dirty="0"/>
-              <a:t>Native apps</a:t>
-            </a:r>
-          </a:p>
-          <a:p>
-            <a:pPr lvl="1"/>
-            <a:r>
-              <a:rPr lang="en-GB" dirty="0"/>
-              <a:t>Hybrid apps</a:t>
-            </a:r>
-            <a:endParaRPr lang="en-GB" noProof="0" dirty="0"/>
-          </a:p>
-          <a:p>
+              <a:rPr lang="de-CH" dirty="0" err="1"/>
+              <a:t>Similarity</a:t>
+            </a:r>
+            <a:r>
+              <a:rPr lang="de-CH" dirty="0"/>
+              <a:t> </a:t>
+            </a:r>
+            <a:r>
+              <a:rPr lang="de-CH" dirty="0" err="1"/>
+              <a:t>based</a:t>
+            </a:r>
+            <a:r>
+              <a:rPr lang="de-CH" dirty="0"/>
+              <a:t> </a:t>
+            </a:r>
+            <a:r>
+              <a:rPr lang="de-CH" dirty="0" err="1"/>
+              <a:t>hashing</a:t>
+            </a:r>
+            <a:r>
+              <a:rPr lang="de-CH" dirty="0"/>
+              <a:t> </a:t>
+            </a:r>
+            <a:r>
+              <a:rPr lang="de-CH" dirty="0" err="1"/>
+              <a:t>vs</a:t>
+            </a:r>
+            <a:r>
+              <a:rPr lang="de-CH" dirty="0"/>
+              <a:t> normal </a:t>
+            </a:r>
+            <a:r>
+              <a:rPr lang="de-CH" dirty="0" err="1"/>
+              <a:t>hashing</a:t>
+            </a:r>
             <a:endParaRPr lang="de-CH" dirty="0"/>
           </a:p>
         </p:txBody>
@@ -1868,7 +1837,89 @@
     </p:spTree>
     <p:extLst>
       <p:ext uri="{BB962C8B-B14F-4D97-AF65-F5344CB8AC3E}">
-        <p14:creationId xmlns:p14="http://schemas.microsoft.com/office/powerpoint/2010/main" val="1599496441"/>
+        <p14:creationId xmlns:p14="http://schemas.microsoft.com/office/powerpoint/2010/main" val="3409589282"/>
+      </p:ext>
+    </p:extLst>
+  </p:cSld>
+  <p:clrMapOvr>
+    <a:masterClrMapping/>
+  </p:clrMapOvr>
+</p:notes>
+</file>
+
+<file path=ppt/notesSlides/notesSlide14.xml><?xml version="1.0" encoding="utf-8"?>
+<p:notes xmlns:a="http://schemas.openxmlformats.org/drawingml/2006/main" xmlns:r="http://schemas.openxmlformats.org/officeDocument/2006/relationships" xmlns:p="http://schemas.openxmlformats.org/presentationml/2006/main">
+  <p:cSld>
+    <p:spTree>
+      <p:nvGrpSpPr>
+        <p:cNvPr id="1" name=""/>
+        <p:cNvGrpSpPr/>
+        <p:nvPr/>
+      </p:nvGrpSpPr>
+      <p:grpSpPr>
+        <a:xfrm>
+          <a:off x="0" y="0"/>
+          <a:ext cx="0" cy="0"/>
+          <a:chOff x="0" y="0"/>
+          <a:chExt cx="0" cy="0"/>
+        </a:xfrm>
+      </p:grpSpPr>
+      <p:sp>
+        <p:nvSpPr>
+          <p:cNvPr id="2" name="Folienbildplatzhalter 1"/>
+          <p:cNvSpPr>
+            <a:spLocks noGrp="1" noRot="1" noChangeAspect="1"/>
+          </p:cNvSpPr>
+          <p:nvPr>
+            <p:ph type="sldImg"/>
+          </p:nvPr>
+        </p:nvSpPr>
+        <p:spPr>
+          <a:xfrm>
+            <a:off x="381000" y="685800"/>
+            <a:ext cx="6096000" cy="3429000"/>
+          </a:xfrm>
+        </p:spPr>
+      </p:sp>
+      <p:sp>
+        <p:nvSpPr>
+          <p:cNvPr id="3" name="Notizenplatzhalter 2"/>
+          <p:cNvSpPr>
+            <a:spLocks noGrp="1"/>
+          </p:cNvSpPr>
+          <p:nvPr>
+            <p:ph type="body" idx="1"/>
+          </p:nvPr>
+        </p:nvSpPr>
+        <p:spPr/>
+        <p:txBody>
+          <a:bodyPr/>
+          <a:lstStyle/>
+          <a:p>
+            <a:r>
+              <a:rPr lang="de-CH" dirty="0"/>
+              <a:t>Package </a:t>
+            </a:r>
+            <a:r>
+              <a:rPr lang="de-CH" dirty="0" err="1"/>
+              <a:t>level</a:t>
+            </a:r>
+            <a:r>
+              <a:rPr lang="de-CH" dirty="0"/>
+              <a:t> </a:t>
+            </a:r>
+            <a:r>
+              <a:rPr lang="de-CH" dirty="0" err="1"/>
+              <a:t>vectors</a:t>
+            </a:r>
+            <a:endParaRPr lang="de-CH" dirty="0"/>
+          </a:p>
+        </p:txBody>
+      </p:sp>
+    </p:spTree>
+    <p:extLst>
+      <p:ext uri="{BB962C8B-B14F-4D97-AF65-F5344CB8AC3E}">
+        <p14:creationId xmlns:p14="http://schemas.microsoft.com/office/powerpoint/2010/main" val="689321824"/>
       </p:ext>
     </p:extLst>
   </p:cSld>
@@ -2196,7 +2247,7 @@
           <a:p>
             <a:r>
               <a:rPr lang="en-GB" noProof="0" dirty="0"/>
-              <a:t>Recent research topic</a:t>
+              <a:t>Subjective to the authors</a:t>
             </a:r>
           </a:p>
           <a:p>
@@ -2439,26 +2490,109 @@
           <a:bodyPr/>
           <a:lstStyle/>
           <a:p>
-            <a:r>
-              <a:rPr lang="de-CH" dirty="0" err="1"/>
-              <a:t>Similarity</a:t>
-            </a:r>
-            <a:r>
-              <a:rPr lang="de-CH" dirty="0"/>
-              <a:t> </a:t>
-            </a:r>
-            <a:r>
-              <a:rPr lang="de-CH" dirty="0" err="1"/>
-              <a:t>based</a:t>
-            </a:r>
-            <a:r>
-              <a:rPr lang="de-CH" dirty="0"/>
-              <a:t> </a:t>
-            </a:r>
-            <a:r>
-              <a:rPr lang="de-CH" dirty="0" err="1"/>
-              <a:t>hashing</a:t>
-            </a:r>
+            <a:pPr>
+              <a:buFontTx/>
+              <a:buChar char="-"/>
+            </a:pPr>
+            <a:r>
+              <a:rPr lang="en-GB" noProof="0" dirty="0"/>
+              <a:t>Build profile from Library</a:t>
+            </a:r>
+          </a:p>
+          <a:p>
+            <a:pPr>
+              <a:buFontTx/>
+              <a:buChar char="-"/>
+            </a:pPr>
+            <a:r>
+              <a:rPr lang="en-GB" noProof="0" dirty="0"/>
+              <a:t>Build profile from App</a:t>
+            </a:r>
+            <a:br>
+              <a:rPr lang="en-GB" noProof="0" dirty="0"/>
+            </a:br>
+            <a:r>
+              <a:rPr lang="en-GB" noProof="0" dirty="0"/>
+              <a:t>Signature-based class correspondence detection =&gt; coarse filter</a:t>
+            </a:r>
+          </a:p>
+          <a:p>
+            <a:pPr>
+              <a:buFontTx/>
+              <a:buNone/>
+            </a:pPr>
+            <a:r>
+              <a:rPr lang="en-GB" noProof="0" dirty="0"/>
+              <a:t>Opcode = bytecode matching =&gt; more exp</a:t>
+            </a:r>
+            <a:br>
+              <a:rPr lang="en-GB" noProof="0" dirty="0"/>
+            </a:br>
+            <a:r>
+              <a:rPr lang="en-GB" noProof="0" dirty="0"/>
+              <a:t>call-chain = sequences of method calls</a:t>
+            </a:r>
+          </a:p>
+          <a:p>
+            <a:pPr>
+              <a:buFontTx/>
+              <a:buChar char="-"/>
+            </a:pPr>
+            <a:r>
+              <a:rPr lang="en-GB" noProof="0" dirty="0"/>
+              <a:t>Compare with probability</a:t>
+            </a:r>
+          </a:p>
+          <a:p>
+            <a:pPr>
+              <a:buFontTx/>
+              <a:buChar char="-"/>
+            </a:pPr>
+            <a:r>
+              <a:rPr lang="en-GB" noProof="0" dirty="0"/>
+              <a:t>Profile consist of class hierarchy, fuzzy hashes of bytecode, Control Flow Graphs, Class dependency signatures…</a:t>
+            </a:r>
+          </a:p>
+          <a:p>
+            <a:pPr>
+              <a:buFontTx/>
+              <a:buChar char="-"/>
+            </a:pPr>
+            <a:r>
+              <a:rPr lang="en-GB" noProof="0" dirty="0"/>
+              <a:t>Prone to obfuscation</a:t>
+            </a:r>
+          </a:p>
+          <a:p>
+            <a:pPr>
+              <a:buFontTx/>
+              <a:buChar char="-"/>
+            </a:pPr>
+            <a:r>
+              <a:rPr lang="en-GB" noProof="0" dirty="0"/>
+              <a:t>More accurate, but usually slower</a:t>
+            </a:r>
+          </a:p>
+          <a:p>
+            <a:pPr>
+              <a:buFontTx/>
+              <a:buChar char="-"/>
+            </a:pPr>
+            <a:r>
+              <a:rPr lang="en-GB" noProof="0" dirty="0" err="1"/>
+              <a:t>LibScout</a:t>
+            </a:r>
+            <a:r>
+              <a:rPr lang="en-GB" noProof="0" dirty="0"/>
+              <a:t>, ORLIS, </a:t>
+            </a:r>
+            <a:r>
+              <a:rPr lang="en-GB" noProof="0" dirty="0" err="1"/>
+              <a:t>LibPecker</a:t>
+            </a:r>
+            <a:endParaRPr lang="en-GB" noProof="0" dirty="0"/>
+          </a:p>
+          <a:p>
             <a:endParaRPr lang="de-CH" dirty="0"/>
           </a:p>
         </p:txBody>
@@ -2466,7 +2600,7 @@
     </p:spTree>
     <p:extLst>
       <p:ext uri="{BB962C8B-B14F-4D97-AF65-F5344CB8AC3E}">
-        <p14:creationId xmlns:p14="http://schemas.microsoft.com/office/powerpoint/2010/main" val="3409589282"/>
+        <p14:creationId xmlns:p14="http://schemas.microsoft.com/office/powerpoint/2010/main" val="2404977055"/>
       </p:ext>
     </p:extLst>
   </p:cSld>
@@ -2525,6 +2659,32 @@
           <a:bodyPr/>
           <a:lstStyle/>
           <a:p>
+            <a:r>
+              <a:rPr lang="en-GB" noProof="0" dirty="0"/>
+              <a:t>Language Model</a:t>
+            </a:r>
+          </a:p>
+          <a:p>
+            <a:r>
+              <a:rPr lang="en-GB" noProof="0" dirty="0"/>
+              <a:t>Pretrained on unlabelled data</a:t>
+            </a:r>
+          </a:p>
+          <a:p>
+            <a:r>
+              <a:rPr lang="en-GB" dirty="0"/>
+              <a:t>Hard to find data set</a:t>
+            </a:r>
+            <a:endParaRPr lang="en-GB" noProof="0" dirty="0"/>
+          </a:p>
+          <a:p>
+            <a:r>
+              <a:rPr lang="en-GB" noProof="0" dirty="0" err="1"/>
+              <a:t>LibAttention</a:t>
+            </a:r>
+            <a:endParaRPr lang="en-GB" noProof="0" dirty="0"/>
+          </a:p>
+          <a:p>
             <a:endParaRPr lang="de-CH" dirty="0"/>
           </a:p>
         </p:txBody>
@@ -2532,7 +2692,7 @@
     </p:spTree>
     <p:extLst>
       <p:ext uri="{BB962C8B-B14F-4D97-AF65-F5344CB8AC3E}">
-        <p14:creationId xmlns:p14="http://schemas.microsoft.com/office/powerpoint/2010/main" val="689321824"/>
+        <p14:creationId xmlns:p14="http://schemas.microsoft.com/office/powerpoint/2010/main" val="3643931675"/>
       </p:ext>
     </p:extLst>
   </p:cSld>
@@ -2591,83 +2751,53 @@
           <a:bodyPr/>
           <a:lstStyle/>
           <a:p>
-            <a:pPr>
-              <a:buFontTx/>
-              <a:buChar char="-"/>
-            </a:pPr>
+            <a:r>
+              <a:rPr lang="de-CH" dirty="0"/>
+              <a:t>Sources: </a:t>
+            </a:r>
+            <a:r>
+              <a:rPr lang="de-CH" dirty="0" err="1"/>
+              <a:t>Github</a:t>
+            </a:r>
+            <a:r>
+              <a:rPr lang="de-CH" dirty="0"/>
+              <a:t>, </a:t>
+            </a:r>
+            <a:r>
+              <a:rPr lang="de-CH" dirty="0" err="1"/>
+              <a:t>Fdroid</a:t>
+            </a:r>
+            <a:endParaRPr lang="de-CH" dirty="0"/>
+          </a:p>
+          <a:p>
             <a:r>
               <a:rPr lang="en-GB" noProof="0" dirty="0"/>
-              <a:t>Build profile from Library</a:t>
-            </a:r>
-          </a:p>
-          <a:p>
-            <a:pPr>
-              <a:buFontTx/>
-              <a:buChar char="-"/>
-            </a:pPr>
+              <a:t>Only one independent benchmark (2025)</a:t>
+            </a:r>
+          </a:p>
+          <a:p>
             <a:r>
               <a:rPr lang="en-GB" noProof="0" dirty="0"/>
-              <a:t>Build profile from App</a:t>
-            </a:r>
-          </a:p>
-          <a:p>
-            <a:pPr>
-              <a:buFontTx/>
-              <a:buChar char="-"/>
-            </a:pPr>
+              <a:t>Find APKs on GitHub &amp; F-Droid</a:t>
+            </a:r>
+          </a:p>
+          <a:p>
             <a:r>
               <a:rPr lang="en-GB" noProof="0" dirty="0"/>
-              <a:t>Compare with probability</a:t>
-            </a:r>
-          </a:p>
-          <a:p>
-            <a:pPr>
-              <a:buFontTx/>
-              <a:buChar char="-"/>
-            </a:pPr>
+              <a:t>Extract TPLs</a:t>
+            </a:r>
+          </a:p>
+          <a:p>
             <a:r>
               <a:rPr lang="en-GB" noProof="0" dirty="0"/>
-              <a:t>Profile consist of class hierarchy, fuzzy hashes of bytecode, Control Flow Graphs, Class dependency signatures…</a:t>
-            </a:r>
-          </a:p>
-          <a:p>
-            <a:pPr>
-              <a:buFontTx/>
-              <a:buChar char="-"/>
-            </a:pPr>
+              <a:t>Test selected tools</a:t>
+            </a:r>
+          </a:p>
+          <a:p>
             <a:r>
               <a:rPr lang="en-GB" noProof="0" dirty="0"/>
-              <a:t>Prone to obfuscation</a:t>
-            </a:r>
-          </a:p>
-          <a:p>
-            <a:pPr>
-              <a:buFontTx/>
-              <a:buChar char="-"/>
-            </a:pPr>
-            <a:r>
-              <a:rPr lang="en-GB" noProof="0" dirty="0"/>
-              <a:t>More accurate, but usually slower</a:t>
-            </a:r>
-          </a:p>
-          <a:p>
-            <a:pPr>
-              <a:buFontTx/>
-              <a:buChar char="-"/>
-            </a:pPr>
-            <a:r>
-              <a:rPr lang="en-GB" noProof="0" dirty="0" err="1"/>
-              <a:t>LibScout</a:t>
-            </a:r>
-            <a:r>
-              <a:rPr lang="en-GB" noProof="0" dirty="0"/>
-              <a:t>, ORLIS, </a:t>
-            </a:r>
-            <a:r>
-              <a:rPr lang="en-GB" noProof="0" dirty="0" err="1"/>
-              <a:t>LibPecker</a:t>
-            </a:r>
-            <a:endParaRPr lang="en-GB" noProof="0" dirty="0"/>
+              <a:t>Hybrid Frameworks excluded</a:t>
+            </a:r>
           </a:p>
           <a:p>
             <a:endParaRPr lang="de-CH" dirty="0"/>
@@ -2677,7 +2807,7 @@
     </p:spTree>
     <p:extLst>
       <p:ext uri="{BB962C8B-B14F-4D97-AF65-F5344CB8AC3E}">
-        <p14:creationId xmlns:p14="http://schemas.microsoft.com/office/powerpoint/2010/main" val="2404977055"/>
+        <p14:creationId xmlns:p14="http://schemas.microsoft.com/office/powerpoint/2010/main" val="2985197927"/>
       </p:ext>
     </p:extLst>
   </p:cSld>
@@ -2776,7 +2906,7 @@
           </a:ln>
           <a:extLst>
             <a:ext uri="{C572A759-6A51-4108-AA02-DFA0A04FC94B}">
-              <ma14:wrappingTextBoxFlag xmlns="" xmlns:m="http://schemas.openxmlformats.org/officeDocument/2006/math" xmlns:a14="http://schemas.microsoft.com/office/drawing/2010/main" xmlns:ma14="http://schemas.microsoft.com/office/mac/drawingml/2011/main" val="1"/>
+              <ma14:wrappingTextBoxFlag xmlns:ma14="http://schemas.microsoft.com/office/mac/drawingml/2011/main" xmlns:a14="http://schemas.microsoft.com/office/drawing/2010/main" xmlns:m="http://schemas.openxmlformats.org/officeDocument/2006/math" xmlns="" val="1"/>
             </a:ext>
           </a:extLst>
         </p:spPr>
@@ -3575,7 +3705,7 @@
           </a:ln>
           <a:extLst>
             <a:ext uri="{C572A759-6A51-4108-AA02-DFA0A04FC94B}">
-              <ma14:wrappingTextBoxFlag xmlns="" xmlns:m="http://schemas.openxmlformats.org/officeDocument/2006/math" xmlns:a14="http://schemas.microsoft.com/office/drawing/2010/main" xmlns:ma14="http://schemas.microsoft.com/office/mac/drawingml/2011/main" val="1"/>
+              <ma14:wrappingTextBoxFlag xmlns:ma14="http://schemas.microsoft.com/office/mac/drawingml/2011/main" xmlns:a14="http://schemas.microsoft.com/office/drawing/2010/main" xmlns:m="http://schemas.openxmlformats.org/officeDocument/2006/math" xmlns="" val="1"/>
             </a:ext>
           </a:extLst>
         </p:spPr>
@@ -5981,7 +6111,7 @@
           </a:ln>
           <a:extLst>
             <a:ext uri="{C572A759-6A51-4108-AA02-DFA0A04FC94B}">
-              <ma14:wrappingTextBoxFlag xmlns="" xmlns:m="http://schemas.openxmlformats.org/officeDocument/2006/math" xmlns:a14="http://schemas.microsoft.com/office/drawing/2010/main" xmlns:ma14="http://schemas.microsoft.com/office/mac/drawingml/2011/main" val="1"/>
+              <ma14:wrappingTextBoxFlag xmlns:ma14="http://schemas.microsoft.com/office/mac/drawingml/2011/main" xmlns:a14="http://schemas.microsoft.com/office/drawing/2010/main" xmlns:m="http://schemas.openxmlformats.org/officeDocument/2006/math" xmlns="" val="1"/>
             </a:ext>
           </a:extLst>
         </p:spPr>
@@ -6072,7 +6202,7 @@
           </a:ln>
           <a:extLst>
             <a:ext uri="{C572A759-6A51-4108-AA02-DFA0A04FC94B}">
-              <ma14:wrappingTextBoxFlag xmlns="" xmlns:m="http://schemas.openxmlformats.org/officeDocument/2006/math" xmlns:a14="http://schemas.microsoft.com/office/drawing/2010/main" xmlns:ma14="http://schemas.microsoft.com/office/mac/drawingml/2011/main" val="1"/>
+              <ma14:wrappingTextBoxFlag xmlns:ma14="http://schemas.microsoft.com/office/mac/drawingml/2011/main" xmlns:a14="http://schemas.microsoft.com/office/drawing/2010/main" xmlns:m="http://schemas.openxmlformats.org/officeDocument/2006/math" xmlns="" val="1"/>
             </a:ext>
           </a:extLst>
         </p:spPr>
@@ -6109,7 +6239,7 @@
           </a:ln>
           <a:extLst>
             <a:ext uri="{C572A759-6A51-4108-AA02-DFA0A04FC94B}">
-              <ma14:wrappingTextBoxFlag xmlns="" xmlns:m="http://schemas.openxmlformats.org/officeDocument/2006/math" xmlns:a14="http://schemas.microsoft.com/office/drawing/2010/main" xmlns:ma14="http://schemas.microsoft.com/office/mac/drawingml/2011/main" val="1"/>
+              <ma14:wrappingTextBoxFlag xmlns:ma14="http://schemas.microsoft.com/office/mac/drawingml/2011/main" xmlns:a14="http://schemas.microsoft.com/office/drawing/2010/main" xmlns:m="http://schemas.openxmlformats.org/officeDocument/2006/math" xmlns="" val="1"/>
             </a:ext>
           </a:extLst>
         </p:spPr>
@@ -6962,7 +7092,7 @@
           </a:prstGeom>
           <a:extLst>
             <a:ext uri="{C572A759-6A51-4108-AA02-DFA0A04FC94B}">
-              <ma14:wrappingTextBoxFlag xmlns="" xmlns:m="http://schemas.openxmlformats.org/officeDocument/2006/math" xmlns:a14="http://schemas.microsoft.com/office/drawing/2010/main" xmlns:ma14="http://schemas.microsoft.com/office/mac/drawingml/2011/main" val="1"/>
+              <ma14:wrappingTextBoxFlag xmlns:ma14="http://schemas.microsoft.com/office/mac/drawingml/2011/main" xmlns:a14="http://schemas.microsoft.com/office/drawing/2010/main" xmlns:m="http://schemas.openxmlformats.org/officeDocument/2006/math" xmlns="" val="1"/>
             </a:ext>
           </a:extLst>
         </p:spPr>
@@ -6978,7 +7108,7 @@
             </a:pPr>
             <a:r>
               <a:rPr lang="en-GB" noProof="0" dirty="0"/>
-              <a:t>28.05.2026</a:t>
+              <a:t>29.05.2026</a:t>
             </a:r>
           </a:p>
         </p:txBody>
@@ -7003,7 +7133,7 @@
           </a:prstGeom>
           <a:extLst>
             <a:ext uri="{C572A759-6A51-4108-AA02-DFA0A04FC94B}">
-              <ma14:wrappingTextBoxFlag xmlns="" xmlns:m="http://schemas.openxmlformats.org/officeDocument/2006/math" xmlns:a14="http://schemas.microsoft.com/office/drawing/2010/main" xmlns:ma14="http://schemas.microsoft.com/office/mac/drawingml/2011/main" val="1"/>
+              <ma14:wrappingTextBoxFlag xmlns:ma14="http://schemas.microsoft.com/office/mac/drawingml/2011/main" xmlns:a14="http://schemas.microsoft.com/office/drawing/2010/main" xmlns:m="http://schemas.openxmlformats.org/officeDocument/2006/math" xmlns="" val="1"/>
             </a:ext>
           </a:extLst>
         </p:spPr>
@@ -7147,6 +7277,2859 @@
           <p:cNvPr id="2" name="Titel 1">
             <a:extLst>
               <a:ext uri="{FF2B5EF4-FFF2-40B4-BE49-F238E27FC236}">
+                <a16:creationId xmlns:a16="http://schemas.microsoft.com/office/drawing/2014/main" id="{57D6814B-2D04-1F0E-EA9F-45E769D257A4}"/>
+              </a:ext>
+            </a:extLst>
+          </p:cNvPr>
+          <p:cNvSpPr>
+            <a:spLocks noGrp="1"/>
+          </p:cNvSpPr>
+          <p:nvPr>
+            <p:ph type="title"/>
+          </p:nvPr>
+        </p:nvSpPr>
+        <p:spPr/>
+        <p:txBody>
+          <a:bodyPr/>
+          <a:lstStyle/>
+          <a:p>
+            <a:r>
+              <a:rPr lang="en-GB" noProof="0" dirty="0"/>
+              <a:t>Results</a:t>
+            </a:r>
+          </a:p>
+        </p:txBody>
+      </p:sp>
+      <p:sp>
+        <p:nvSpPr>
+          <p:cNvPr id="3" name="Textplatzhalter 2">
+            <a:extLst>
+              <a:ext uri="{FF2B5EF4-FFF2-40B4-BE49-F238E27FC236}">
+                <a16:creationId xmlns:a16="http://schemas.microsoft.com/office/drawing/2014/main" id="{883FB313-EFAD-8342-8D55-1E37439BA966}"/>
+              </a:ext>
+            </a:extLst>
+          </p:cNvPr>
+          <p:cNvSpPr>
+            <a:spLocks noGrp="1"/>
+          </p:cNvSpPr>
+          <p:nvPr>
+            <p:ph type="body" sz="half" idx="1"/>
+          </p:nvPr>
+        </p:nvSpPr>
+        <p:spPr/>
+        <p:txBody>
+          <a:bodyPr/>
+          <a:lstStyle/>
+          <a:p>
+            <a:endParaRPr lang="en-GB" noProof="0" dirty="0"/>
+          </a:p>
+        </p:txBody>
+      </p:sp>
+      <p:pic>
+        <p:nvPicPr>
+          <p:cNvPr id="5" name="Grafik 4">
+            <a:extLst>
+              <a:ext uri="{FF2B5EF4-FFF2-40B4-BE49-F238E27FC236}">
+                <a16:creationId xmlns:a16="http://schemas.microsoft.com/office/drawing/2014/main" id="{F27121CE-2ADE-6164-5EEE-3A298CCF06B7}"/>
+              </a:ext>
+            </a:extLst>
+          </p:cNvPr>
+          <p:cNvPicPr>
+            <a:picLocks noChangeAspect="1"/>
+          </p:cNvPicPr>
+          <p:nvPr/>
+        </p:nvPicPr>
+        <p:blipFill>
+          <a:blip r:embed="rId3"/>
+          <a:stretch>
+            <a:fillRect/>
+          </a:stretch>
+        </p:blipFill>
+        <p:spPr>
+          <a:xfrm>
+            <a:off x="0" y="1338995"/>
+            <a:ext cx="9144000" cy="3783975"/>
+          </a:xfrm>
+          <a:prstGeom prst="rect">
+            <a:avLst/>
+          </a:prstGeom>
+        </p:spPr>
+      </p:pic>
+    </p:spTree>
+    <p:extLst>
+      <p:ext uri="{BB962C8B-B14F-4D97-AF65-F5344CB8AC3E}">
+        <p14:creationId xmlns:p14="http://schemas.microsoft.com/office/powerpoint/2010/main" val="1135385790"/>
+      </p:ext>
+    </p:extLst>
+  </p:cSld>
+  <p:clrMapOvr>
+    <a:masterClrMapping/>
+  </p:clrMapOvr>
+  <p:transition spd="med"/>
+</p:sld>
+</file>
+
+<file path=ppt/slides/slide11.xml><?xml version="1.0" encoding="utf-8"?>
+<p:sld xmlns:a="http://schemas.openxmlformats.org/drawingml/2006/main" xmlns:r="http://schemas.openxmlformats.org/officeDocument/2006/relationships" xmlns:p="http://schemas.openxmlformats.org/presentationml/2006/main">
+  <p:cSld>
+    <p:spTree>
+      <p:nvGrpSpPr>
+        <p:cNvPr id="1" name=""/>
+        <p:cNvGrpSpPr/>
+        <p:nvPr/>
+      </p:nvGrpSpPr>
+      <p:grpSpPr>
+        <a:xfrm>
+          <a:off x="0" y="0"/>
+          <a:ext cx="0" cy="0"/>
+          <a:chOff x="0" y="0"/>
+          <a:chExt cx="0" cy="0"/>
+        </a:xfrm>
+      </p:grpSpPr>
+      <p:sp>
+        <p:nvSpPr>
+          <p:cNvPr id="2" name="Titel 1">
+            <a:extLst>
+              <a:ext uri="{FF2B5EF4-FFF2-40B4-BE49-F238E27FC236}">
+                <a16:creationId xmlns:a16="http://schemas.microsoft.com/office/drawing/2014/main" id="{AE22AE0A-897B-16D9-DF86-8DDF04FEBFA5}"/>
+              </a:ext>
+            </a:extLst>
+          </p:cNvPr>
+          <p:cNvSpPr>
+            <a:spLocks noGrp="1"/>
+          </p:cNvSpPr>
+          <p:nvPr>
+            <p:ph type="title"/>
+          </p:nvPr>
+        </p:nvSpPr>
+        <p:spPr/>
+        <p:txBody>
+          <a:bodyPr/>
+          <a:lstStyle/>
+          <a:p>
+            <a:r>
+              <a:rPr lang="en-GB" noProof="0" dirty="0"/>
+              <a:t>Comparison</a:t>
+            </a:r>
+          </a:p>
+        </p:txBody>
+      </p:sp>
+      <p:sp>
+        <p:nvSpPr>
+          <p:cNvPr id="3" name="Textplatzhalter 2">
+            <a:extLst>
+              <a:ext uri="{FF2B5EF4-FFF2-40B4-BE49-F238E27FC236}">
+                <a16:creationId xmlns:a16="http://schemas.microsoft.com/office/drawing/2014/main" id="{7EF95789-0767-DE5A-8BD5-A53767EB060C}"/>
+              </a:ext>
+            </a:extLst>
+          </p:cNvPr>
+          <p:cNvSpPr>
+            <a:spLocks noGrp="1"/>
+          </p:cNvSpPr>
+          <p:nvPr>
+            <p:ph type="body" idx="1"/>
+          </p:nvPr>
+        </p:nvSpPr>
+        <p:spPr/>
+        <p:txBody>
+          <a:bodyPr/>
+          <a:lstStyle/>
+          <a:p>
+            <a:pPr marL="6350" indent="0">
+              <a:buNone/>
+            </a:pPr>
+            <a:endParaRPr lang="en-GB" noProof="0" dirty="0"/>
+          </a:p>
+        </p:txBody>
+      </p:sp>
+      <p:pic>
+        <p:nvPicPr>
+          <p:cNvPr id="5" name="Grafik 4">
+            <a:extLst>
+              <a:ext uri="{FF2B5EF4-FFF2-40B4-BE49-F238E27FC236}">
+                <a16:creationId xmlns:a16="http://schemas.microsoft.com/office/drawing/2014/main" id="{19AF21EC-B3D6-8A5D-D2FB-C3BEE5698937}"/>
+              </a:ext>
+            </a:extLst>
+          </p:cNvPr>
+          <p:cNvPicPr>
+            <a:picLocks noChangeAspect="1"/>
+          </p:cNvPicPr>
+          <p:nvPr/>
+        </p:nvPicPr>
+        <p:blipFill>
+          <a:blip r:embed="rId3"/>
+          <a:stretch>
+            <a:fillRect/>
+          </a:stretch>
+        </p:blipFill>
+        <p:spPr>
+          <a:xfrm>
+            <a:off x="3104307" y="2210286"/>
+            <a:ext cx="6039693" cy="1829055"/>
+          </a:xfrm>
+          <a:prstGeom prst="rect">
+            <a:avLst/>
+          </a:prstGeom>
+        </p:spPr>
+      </p:pic>
+      <p:pic>
+        <p:nvPicPr>
+          <p:cNvPr id="7" name="Grafik 6">
+            <a:extLst>
+              <a:ext uri="{FF2B5EF4-FFF2-40B4-BE49-F238E27FC236}">
+                <a16:creationId xmlns:a16="http://schemas.microsoft.com/office/drawing/2014/main" id="{9486D772-1629-E6C6-0F2D-4907051B6BEB}"/>
+              </a:ext>
+            </a:extLst>
+          </p:cNvPr>
+          <p:cNvPicPr>
+            <a:picLocks noChangeAspect="1"/>
+          </p:cNvPicPr>
+          <p:nvPr/>
+        </p:nvPicPr>
+        <p:blipFill>
+          <a:blip r:embed="rId4"/>
+          <a:stretch>
+            <a:fillRect/>
+          </a:stretch>
+        </p:blipFill>
+        <p:spPr>
+          <a:xfrm>
+            <a:off x="0" y="2253149"/>
+            <a:ext cx="2737023" cy="1743327"/>
+          </a:xfrm>
+          <a:prstGeom prst="rect">
+            <a:avLst/>
+          </a:prstGeom>
+        </p:spPr>
+      </p:pic>
+    </p:spTree>
+    <p:extLst>
+      <p:ext uri="{BB962C8B-B14F-4D97-AF65-F5344CB8AC3E}">
+        <p14:creationId xmlns:p14="http://schemas.microsoft.com/office/powerpoint/2010/main" val="1840906427"/>
+      </p:ext>
+    </p:extLst>
+  </p:cSld>
+  <p:clrMapOvr>
+    <a:masterClrMapping/>
+  </p:clrMapOvr>
+  <p:transition spd="med"/>
+</p:sld>
+</file>
+
+<file path=ppt/slides/slide12.xml><?xml version="1.0" encoding="utf-8"?>
+<p:sld xmlns:a="http://schemas.openxmlformats.org/drawingml/2006/main" xmlns:r="http://schemas.openxmlformats.org/officeDocument/2006/relationships" xmlns:p="http://schemas.openxmlformats.org/presentationml/2006/main">
+  <p:cSld>
+    <p:spTree>
+      <p:nvGrpSpPr>
+        <p:cNvPr id="1" name=""/>
+        <p:cNvGrpSpPr/>
+        <p:nvPr/>
+      </p:nvGrpSpPr>
+      <p:grpSpPr>
+        <a:xfrm>
+          <a:off x="0" y="0"/>
+          <a:ext cx="0" cy="0"/>
+          <a:chOff x="0" y="0"/>
+          <a:chExt cx="0" cy="0"/>
+        </a:xfrm>
+      </p:grpSpPr>
+      <p:sp>
+        <p:nvSpPr>
+          <p:cNvPr id="279" name="Titel 5"/>
+          <p:cNvSpPr txBox="1">
+            <a:spLocks noGrp="1"/>
+          </p:cNvSpPr>
+          <p:nvPr>
+            <p:ph type="title"/>
+          </p:nvPr>
+        </p:nvSpPr>
+        <p:spPr>
+          <a:prstGeom prst="rect">
+            <a:avLst/>
+          </a:prstGeom>
+        </p:spPr>
+        <p:txBody>
+          <a:bodyPr/>
+          <a:lstStyle/>
+          <a:p>
+            <a:r>
+              <a:rPr lang="en-GB" noProof="0" dirty="0"/>
+              <a:t>Conclusion</a:t>
+            </a:r>
+          </a:p>
+        </p:txBody>
+      </p:sp>
+      <p:sp>
+        <p:nvSpPr>
+          <p:cNvPr id="280" name="Inhaltsplatzhalter 6"/>
+          <p:cNvSpPr txBox="1">
+            <a:spLocks noGrp="1"/>
+          </p:cNvSpPr>
+          <p:nvPr>
+            <p:ph type="body" idx="1"/>
+          </p:nvPr>
+        </p:nvSpPr>
+        <p:spPr>
+          <a:prstGeom prst="rect">
+            <a:avLst/>
+          </a:prstGeom>
+        </p:spPr>
+        <p:txBody>
+          <a:bodyPr/>
+          <a:lstStyle/>
+          <a:p>
+            <a:r>
+              <a:rPr lang="en-GB" noProof="0" dirty="0"/>
+              <a:t>Standardized </a:t>
+            </a:r>
+            <a:r>
+              <a:rPr lang="en-GB" dirty="0"/>
+              <a:t>t</a:t>
+            </a:r>
+            <a:r>
+              <a:rPr lang="en-GB" noProof="0" dirty="0" err="1"/>
+              <a:t>esting</a:t>
+            </a:r>
+            <a:r>
+              <a:rPr lang="en-GB" noProof="0" dirty="0"/>
+              <a:t> data set required</a:t>
+            </a:r>
+          </a:p>
+          <a:p>
+            <a:r>
+              <a:rPr lang="en-GB" dirty="0"/>
+              <a:t>Version level accuracy scores low</a:t>
+            </a:r>
+          </a:p>
+          <a:p>
+            <a:r>
+              <a:rPr lang="en-GB" noProof="0" dirty="0"/>
+              <a:t>Existing Data sets not </a:t>
+            </a:r>
+            <a:r>
+              <a:rPr lang="en-GB" noProof="0" dirty="0" err="1"/>
+              <a:t>represen</a:t>
+            </a:r>
+            <a:r>
+              <a:rPr lang="en-GB" dirty="0" err="1"/>
+              <a:t>tative</a:t>
+            </a:r>
+            <a:endParaRPr lang="en-GB" noProof="0" dirty="0"/>
+          </a:p>
+          <a:p>
+            <a:endParaRPr lang="en-GB" noProof="0" dirty="0"/>
+          </a:p>
+        </p:txBody>
+      </p:sp>
+    </p:spTree>
+  </p:cSld>
+  <p:clrMapOvr>
+    <a:masterClrMapping/>
+  </p:clrMapOvr>
+  <p:transition spd="med"/>
+</p:sld>
+</file>
+
+<file path=ppt/slides/slide13.xml><?xml version="1.0" encoding="utf-8"?>
+<p:sld xmlns:a="http://schemas.openxmlformats.org/drawingml/2006/main" xmlns:r="http://schemas.openxmlformats.org/officeDocument/2006/relationships" xmlns:p="http://schemas.openxmlformats.org/presentationml/2006/main">
+  <p:cSld>
+    <p:spTree>
+      <p:nvGrpSpPr>
+        <p:cNvPr id="1" name=""/>
+        <p:cNvGrpSpPr/>
+        <p:nvPr/>
+      </p:nvGrpSpPr>
+      <p:grpSpPr>
+        <a:xfrm>
+          <a:off x="0" y="0"/>
+          <a:ext cx="0" cy="0"/>
+          <a:chOff x="0" y="0"/>
+          <a:chExt cx="0" cy="0"/>
+        </a:xfrm>
+      </p:grpSpPr>
+      <p:sp>
+        <p:nvSpPr>
+          <p:cNvPr id="2" name="Titel 1">
+            <a:extLst>
+              <a:ext uri="{FF2B5EF4-FFF2-40B4-BE49-F238E27FC236}">
+                <a16:creationId xmlns:a16="http://schemas.microsoft.com/office/drawing/2014/main" id="{7741DA49-3290-8238-53EF-E8ED8FB64730}"/>
+              </a:ext>
+            </a:extLst>
+          </p:cNvPr>
+          <p:cNvSpPr>
+            <a:spLocks noGrp="1"/>
+          </p:cNvSpPr>
+          <p:nvPr>
+            <p:ph type="title"/>
+          </p:nvPr>
+        </p:nvSpPr>
+        <p:spPr/>
+        <p:txBody>
+          <a:bodyPr/>
+          <a:lstStyle/>
+          <a:p>
+            <a:r>
+              <a:rPr lang="de-CH" dirty="0"/>
+              <a:t>Outlook</a:t>
+            </a:r>
+          </a:p>
+        </p:txBody>
+      </p:sp>
+      <p:sp>
+        <p:nvSpPr>
+          <p:cNvPr id="3" name="Textplatzhalter 2">
+            <a:extLst>
+              <a:ext uri="{FF2B5EF4-FFF2-40B4-BE49-F238E27FC236}">
+                <a16:creationId xmlns:a16="http://schemas.microsoft.com/office/drawing/2014/main" id="{37ACD56E-384A-8624-4795-9CAAE59B0AD7}"/>
+              </a:ext>
+            </a:extLst>
+          </p:cNvPr>
+          <p:cNvSpPr>
+            <a:spLocks noGrp="1"/>
+          </p:cNvSpPr>
+          <p:nvPr>
+            <p:ph type="body" idx="1"/>
+          </p:nvPr>
+        </p:nvSpPr>
+        <p:spPr/>
+        <p:txBody>
+          <a:bodyPr/>
+          <a:lstStyle/>
+          <a:p>
+            <a:r>
+              <a:rPr lang="de-CH" dirty="0"/>
+              <a:t>Data </a:t>
+            </a:r>
+            <a:r>
+              <a:rPr lang="de-CH" dirty="0" err="1"/>
+              <a:t>set</a:t>
+            </a:r>
+            <a:r>
+              <a:rPr lang="de-CH" dirty="0"/>
+              <a:t> </a:t>
+            </a:r>
+            <a:r>
+              <a:rPr lang="de-CH" dirty="0" err="1"/>
+              <a:t>offers</a:t>
+            </a:r>
+            <a:r>
+              <a:rPr lang="de-CH" dirty="0"/>
+              <a:t> </a:t>
+            </a:r>
+            <a:r>
+              <a:rPr lang="de-CH" dirty="0" err="1"/>
+              <a:t>obfuscated</a:t>
+            </a:r>
+            <a:r>
+              <a:rPr lang="de-CH" dirty="0"/>
+              <a:t> and non </a:t>
+            </a:r>
+            <a:r>
+              <a:rPr lang="de-CH" dirty="0" err="1"/>
+              <a:t>obfuscated</a:t>
+            </a:r>
+            <a:r>
+              <a:rPr lang="de-CH" dirty="0"/>
+              <a:t> hybrid </a:t>
+            </a:r>
+            <a:r>
+              <a:rPr lang="de-CH" dirty="0" err="1"/>
+              <a:t>apps</a:t>
+            </a:r>
+            <a:endParaRPr lang="de-CH" dirty="0"/>
+          </a:p>
+          <a:p>
+            <a:r>
+              <a:rPr lang="de-CH" dirty="0" err="1"/>
+              <a:t>Guaranteed</a:t>
+            </a:r>
+            <a:r>
+              <a:rPr lang="de-CH" dirty="0"/>
+              <a:t> </a:t>
+            </a:r>
+            <a:r>
+              <a:rPr lang="de-CH" dirty="0" err="1"/>
+              <a:t>accuracy</a:t>
+            </a:r>
+            <a:r>
+              <a:rPr lang="de-CH" dirty="0"/>
+              <a:t> </a:t>
+            </a:r>
+            <a:r>
+              <a:rPr lang="de-CH" dirty="0" err="1"/>
+              <a:t>by</a:t>
+            </a:r>
+            <a:r>
+              <a:rPr lang="de-CH" dirty="0"/>
+              <a:t> </a:t>
+            </a:r>
+            <a:r>
+              <a:rPr lang="de-CH" dirty="0" err="1"/>
+              <a:t>self-compiling</a:t>
+            </a:r>
+            <a:endParaRPr lang="de-CH" dirty="0"/>
+          </a:p>
+          <a:p>
+            <a:r>
+              <a:rPr lang="de-CH" dirty="0" err="1"/>
+              <a:t>Used</a:t>
+            </a:r>
+            <a:r>
+              <a:rPr lang="de-CH" dirty="0"/>
+              <a:t> </a:t>
+            </a:r>
+            <a:r>
+              <a:rPr lang="de-CH" dirty="0" err="1"/>
+              <a:t>for</a:t>
+            </a:r>
+            <a:r>
+              <a:rPr lang="de-CH" dirty="0"/>
+              <a:t>:</a:t>
+            </a:r>
+          </a:p>
+          <a:p>
+            <a:pPr lvl="1"/>
+            <a:r>
+              <a:rPr lang="de-CH" dirty="0"/>
+              <a:t>Benchmarking</a:t>
+            </a:r>
+          </a:p>
+          <a:p>
+            <a:pPr lvl="1"/>
+            <a:r>
+              <a:rPr lang="de-CH" dirty="0"/>
+              <a:t>Training </a:t>
+            </a:r>
+            <a:r>
+              <a:rPr lang="de-CH" dirty="0" err="1"/>
+              <a:t>models</a:t>
+            </a:r>
+            <a:endParaRPr lang="de-CH" dirty="0"/>
+          </a:p>
+          <a:p>
+            <a:pPr lvl="2"/>
+            <a:endParaRPr lang="de-CH" dirty="0"/>
+          </a:p>
+        </p:txBody>
+      </p:sp>
+    </p:spTree>
+    <p:extLst>
+      <p:ext uri="{BB962C8B-B14F-4D97-AF65-F5344CB8AC3E}">
+        <p14:creationId xmlns:p14="http://schemas.microsoft.com/office/powerpoint/2010/main" val="1098706551"/>
+      </p:ext>
+    </p:extLst>
+  </p:cSld>
+  <p:clrMapOvr>
+    <a:masterClrMapping/>
+  </p:clrMapOvr>
+  <p:transition spd="med"/>
+</p:sld>
+</file>
+
+<file path=ppt/slides/slide14.xml><?xml version="1.0" encoding="utf-8"?>
+<p:sld xmlns:a="http://schemas.openxmlformats.org/drawingml/2006/main" xmlns:r="http://schemas.openxmlformats.org/officeDocument/2006/relationships" xmlns:p="http://schemas.openxmlformats.org/presentationml/2006/main">
+  <p:cSld>
+    <p:spTree>
+      <p:nvGrpSpPr>
+        <p:cNvPr id="1" name=""/>
+        <p:cNvGrpSpPr/>
+        <p:nvPr/>
+      </p:nvGrpSpPr>
+      <p:grpSpPr>
+        <a:xfrm>
+          <a:off x="0" y="0"/>
+          <a:ext cx="0" cy="0"/>
+          <a:chOff x="0" y="0"/>
+          <a:chExt cx="0" cy="0"/>
+        </a:xfrm>
+      </p:grpSpPr>
+      <p:sp>
+        <p:nvSpPr>
+          <p:cNvPr id="2" name="Titel 1">
+            <a:extLst>
+              <a:ext uri="{FF2B5EF4-FFF2-40B4-BE49-F238E27FC236}">
+                <a16:creationId xmlns:a16="http://schemas.microsoft.com/office/drawing/2014/main" id="{B04BA110-79EB-FC4E-CCF3-F9CDB950A6B2}"/>
+              </a:ext>
+            </a:extLst>
+          </p:cNvPr>
+          <p:cNvSpPr>
+            <a:spLocks noGrp="1"/>
+          </p:cNvSpPr>
+          <p:nvPr>
+            <p:ph type="title"/>
+          </p:nvPr>
+        </p:nvSpPr>
+        <p:spPr/>
+        <p:txBody>
+          <a:bodyPr/>
+          <a:lstStyle/>
+          <a:p>
+            <a:r>
+              <a:rPr lang="de-CH" dirty="0"/>
+              <a:t>Questions</a:t>
+            </a:r>
+          </a:p>
+        </p:txBody>
+      </p:sp>
+      <p:sp>
+        <p:nvSpPr>
+          <p:cNvPr id="3" name="Textplatzhalter 2">
+            <a:extLst>
+              <a:ext uri="{FF2B5EF4-FFF2-40B4-BE49-F238E27FC236}">
+                <a16:creationId xmlns:a16="http://schemas.microsoft.com/office/drawing/2014/main" id="{896D67A2-A6D9-AA66-62E5-F7E61E793C3C}"/>
+              </a:ext>
+            </a:extLst>
+          </p:cNvPr>
+          <p:cNvSpPr>
+            <a:spLocks noGrp="1"/>
+          </p:cNvSpPr>
+          <p:nvPr>
+            <p:ph type="body" idx="1"/>
+          </p:nvPr>
+        </p:nvSpPr>
+        <p:spPr/>
+        <p:txBody>
+          <a:bodyPr/>
+          <a:lstStyle/>
+          <a:p>
+            <a:endParaRPr lang="de-CH" dirty="0"/>
+          </a:p>
+        </p:txBody>
+      </p:sp>
+      <p:pic>
+        <p:nvPicPr>
+          <p:cNvPr id="3074" name="Picture 2" descr="To Get the Most Out of Your Team, Ask Better Questions - Business HorsePower">
+            <a:extLst>
+              <a:ext uri="{FF2B5EF4-FFF2-40B4-BE49-F238E27FC236}">
+                <a16:creationId xmlns:a16="http://schemas.microsoft.com/office/drawing/2014/main" id="{3B8D2727-3E4C-92D3-5858-A0DAC4C4594C}"/>
+              </a:ext>
+            </a:extLst>
+          </p:cNvPr>
+          <p:cNvPicPr>
+            <a:picLocks noChangeAspect="1" noChangeArrowheads="1"/>
+          </p:cNvPicPr>
+          <p:nvPr/>
+        </p:nvPicPr>
+        <p:blipFill>
+          <a:blip r:embed="rId2">
+            <a:extLst>
+              <a:ext uri="{28A0092B-C50C-407E-A947-70E740481C1C}">
+                <a14:useLocalDpi xmlns:a14="http://schemas.microsoft.com/office/drawing/2010/main" val="0"/>
+              </a:ext>
+            </a:extLst>
+          </a:blip>
+          <a:srcRect/>
+          <a:stretch>
+            <a:fillRect/>
+          </a:stretch>
+        </p:blipFill>
+        <p:spPr bwMode="auto">
+          <a:xfrm>
+            <a:off x="3500437" y="2053251"/>
+            <a:ext cx="2143125" cy="2143125"/>
+          </a:xfrm>
+          <a:prstGeom prst="rect">
+            <a:avLst/>
+          </a:prstGeom>
+          <a:noFill/>
+          <a:extLst>
+            <a:ext uri="{909E8E84-426E-40DD-AFC4-6F175D3DCCD1}">
+              <a14:hiddenFill xmlns:a14="http://schemas.microsoft.com/office/drawing/2010/main">
+                <a:solidFill>
+                  <a:srgbClr val="FFFFFF"/>
+                </a:solidFill>
+              </a14:hiddenFill>
+            </a:ext>
+          </a:extLst>
+        </p:spPr>
+      </p:pic>
+    </p:spTree>
+    <p:extLst>
+      <p:ext uri="{BB962C8B-B14F-4D97-AF65-F5344CB8AC3E}">
+        <p14:creationId xmlns:p14="http://schemas.microsoft.com/office/powerpoint/2010/main" val="3560432698"/>
+      </p:ext>
+    </p:extLst>
+  </p:cSld>
+  <p:clrMapOvr>
+    <a:masterClrMapping/>
+  </p:clrMapOvr>
+  <p:transition spd="med"/>
+</p:sld>
+</file>
+
+<file path=ppt/slides/slide15.xml><?xml version="1.0" encoding="utf-8"?>
+<p:sld xmlns:a="http://schemas.openxmlformats.org/drawingml/2006/main" xmlns:r="http://schemas.openxmlformats.org/officeDocument/2006/relationships" xmlns:p="http://schemas.openxmlformats.org/presentationml/2006/main">
+  <p:cSld>
+    <p:spTree>
+      <p:nvGrpSpPr>
+        <p:cNvPr id="1" name=""/>
+        <p:cNvGrpSpPr/>
+        <p:nvPr/>
+      </p:nvGrpSpPr>
+      <p:grpSpPr>
+        <a:xfrm>
+          <a:off x="0" y="0"/>
+          <a:ext cx="0" cy="0"/>
+          <a:chOff x="0" y="0"/>
+          <a:chExt cx="0" cy="0"/>
+        </a:xfrm>
+      </p:grpSpPr>
+      <p:sp>
+        <p:nvSpPr>
+          <p:cNvPr id="2" name="Titel 1">
+            <a:extLst>
+              <a:ext uri="{FF2B5EF4-FFF2-40B4-BE49-F238E27FC236}">
+                <a16:creationId xmlns:a16="http://schemas.microsoft.com/office/drawing/2014/main" id="{7B5772FA-734F-9E99-172F-0C992B662051}"/>
+              </a:ext>
+            </a:extLst>
+          </p:cNvPr>
+          <p:cNvSpPr>
+            <a:spLocks noGrp="1"/>
+          </p:cNvSpPr>
+          <p:nvPr>
+            <p:ph type="title"/>
+          </p:nvPr>
+        </p:nvSpPr>
+        <p:spPr/>
+        <p:txBody>
+          <a:bodyPr/>
+          <a:lstStyle/>
+          <a:p>
+            <a:r>
+              <a:rPr lang="de-CH" dirty="0"/>
+              <a:t>Sources</a:t>
+            </a:r>
+          </a:p>
+        </p:txBody>
+      </p:sp>
+      <p:sp>
+        <p:nvSpPr>
+          <p:cNvPr id="3" name="Textplatzhalter 2">
+            <a:extLst>
+              <a:ext uri="{FF2B5EF4-FFF2-40B4-BE49-F238E27FC236}">
+                <a16:creationId xmlns:a16="http://schemas.microsoft.com/office/drawing/2014/main" id="{74354FFC-02B3-3B87-6BAA-F0B02256B2B2}"/>
+              </a:ext>
+            </a:extLst>
+          </p:cNvPr>
+          <p:cNvSpPr>
+            <a:spLocks noGrp="1"/>
+          </p:cNvSpPr>
+          <p:nvPr>
+            <p:ph type="body" idx="1"/>
+          </p:nvPr>
+        </p:nvSpPr>
+        <p:spPr/>
+        <p:txBody>
+          <a:bodyPr>
+            <a:normAutofit/>
+          </a:bodyPr>
+          <a:lstStyle/>
+          <a:p>
+            <a:r>
+              <a:rPr lang="de-CH" sz="1200" dirty="0"/>
+              <a:t>Slide 3: </a:t>
+            </a:r>
+          </a:p>
+          <a:p>
+            <a:pPr lvl="1"/>
+            <a:r>
+              <a:rPr lang="en-GB" sz="1200" dirty="0"/>
+              <a:t>1: https://avatars.githubusercontent.com/u/14101776?s=280&amp;v=4, 25.05.26; </a:t>
+            </a:r>
+          </a:p>
+          <a:p>
+            <a:pPr lvl="1"/>
+            <a:r>
+              <a:rPr lang="en-GB" sz="1200" dirty="0"/>
+              <a:t>2: https://de.wikipedia.org/wiki/React_Native, 25.05.26</a:t>
+            </a:r>
+          </a:p>
+          <a:p>
+            <a:endParaRPr lang="en-GB" sz="1200" dirty="0"/>
+          </a:p>
+          <a:p>
+            <a:r>
+              <a:rPr lang="de-CH" sz="1200" dirty="0"/>
+              <a:t> Slide 4: </a:t>
+            </a:r>
+            <a:r>
+              <a:rPr lang="en-US" sz="1200" dirty="0"/>
+              <a:t> </a:t>
+            </a:r>
+          </a:p>
+          <a:p>
+            <a:pPr lvl="1"/>
+            <a:r>
+              <a:rPr lang="en-US" sz="1200" dirty="0"/>
+              <a:t>B. </a:t>
+            </a:r>
+            <a:r>
+              <a:rPr lang="en-US" sz="1200" dirty="0" err="1"/>
+              <a:t>Gokkaya</a:t>
+            </a:r>
+            <a:r>
+              <a:rPr lang="en-US" sz="1200" dirty="0"/>
+              <a:t>, L. Aniello, and B. Halak, “Software supply chain: A taxonomy of attacks, mitigations and risk assessment strategies,” Journal of Information Security and Applications, vol. 97, p. 104324, 2026. [Online]. Available: https://www.sciencedirect.com/science/article/pii/S2214212625003606,</a:t>
+            </a:r>
+          </a:p>
+          <a:p>
+            <a:pPr lvl="1"/>
+            <a:r>
+              <a:rPr lang="en-US" sz="1200" dirty="0"/>
+              <a:t>H. Wang, Y. Guo, Z. Ma, and X. Chen, “Wukong: a scalable and accurate two-phase approach to android app clone detection,” in Proceedings of the 2015 International Symposium on Software Testing and Analysis, ser. ISSTA 2015. New York, NY, USA: Association for Computing Machinery, 2015, p. 71–82. [Online]. Available: https://doi.org/10.1145/2771783.2771795</a:t>
+            </a:r>
+            <a:endParaRPr lang="de-CH" sz="1200" dirty="0"/>
+          </a:p>
+        </p:txBody>
+      </p:sp>
+    </p:spTree>
+    <p:extLst>
+      <p:ext uri="{BB962C8B-B14F-4D97-AF65-F5344CB8AC3E}">
+        <p14:creationId xmlns:p14="http://schemas.microsoft.com/office/powerpoint/2010/main" val="2771359829"/>
+      </p:ext>
+    </p:extLst>
+  </p:cSld>
+  <p:clrMapOvr>
+    <a:masterClrMapping/>
+  </p:clrMapOvr>
+  <p:transition spd="med"/>
+</p:sld>
+</file>
+
+<file path=ppt/slides/slide16.xml><?xml version="1.0" encoding="utf-8"?>
+<p:sld xmlns:a="http://schemas.openxmlformats.org/drawingml/2006/main" xmlns:r="http://schemas.openxmlformats.org/officeDocument/2006/relationships" xmlns:p="http://schemas.openxmlformats.org/presentationml/2006/main">
+  <p:cSld>
+    <p:spTree>
+      <p:nvGrpSpPr>
+        <p:cNvPr id="1" name=""/>
+        <p:cNvGrpSpPr/>
+        <p:nvPr/>
+      </p:nvGrpSpPr>
+      <p:grpSpPr>
+        <a:xfrm>
+          <a:off x="0" y="0"/>
+          <a:ext cx="0" cy="0"/>
+          <a:chOff x="0" y="0"/>
+          <a:chExt cx="0" cy="0"/>
+        </a:xfrm>
+      </p:grpSpPr>
+      <p:sp>
+        <p:nvSpPr>
+          <p:cNvPr id="2" name="Titel 1">
+            <a:extLst>
+              <a:ext uri="{FF2B5EF4-FFF2-40B4-BE49-F238E27FC236}">
+                <a16:creationId xmlns:a16="http://schemas.microsoft.com/office/drawing/2014/main" id="{A5E6EC18-A6F4-2505-4267-EA7BC6D11697}"/>
+              </a:ext>
+            </a:extLst>
+          </p:cNvPr>
+          <p:cNvSpPr>
+            <a:spLocks noGrp="1"/>
+          </p:cNvSpPr>
+          <p:nvPr>
+            <p:ph type="title"/>
+          </p:nvPr>
+        </p:nvSpPr>
+        <p:spPr/>
+        <p:txBody>
+          <a:bodyPr/>
+          <a:lstStyle/>
+          <a:p>
+            <a:r>
+              <a:rPr lang="de-CH" dirty="0"/>
+              <a:t>Sources</a:t>
+            </a:r>
+          </a:p>
+        </p:txBody>
+      </p:sp>
+      <p:sp>
+        <p:nvSpPr>
+          <p:cNvPr id="3" name="Textplatzhalter 2">
+            <a:extLst>
+              <a:ext uri="{FF2B5EF4-FFF2-40B4-BE49-F238E27FC236}">
+                <a16:creationId xmlns:a16="http://schemas.microsoft.com/office/drawing/2014/main" id="{CDB6D2A8-F848-45BA-BD73-E0AAF6286C3A}"/>
+              </a:ext>
+            </a:extLst>
+          </p:cNvPr>
+          <p:cNvSpPr>
+            <a:spLocks noGrp="1"/>
+          </p:cNvSpPr>
+          <p:nvPr>
+            <p:ph type="body" idx="1"/>
+          </p:nvPr>
+        </p:nvSpPr>
+        <p:spPr/>
+        <p:txBody>
+          <a:bodyPr>
+            <a:normAutofit/>
+          </a:bodyPr>
+          <a:lstStyle/>
+          <a:p>
+            <a:r>
+              <a:rPr lang="de-CH" sz="1200" dirty="0"/>
+              <a:t>Slide 5: </a:t>
+            </a:r>
+            <a:r>
+              <a:rPr lang="en-US" sz="1200" dirty="0"/>
+              <a:t> L. Zhan, J. Ming, J. Fu, G. Peng, L. Sha, and L. Lan, “The hidden complexities of android </a:t>
+            </a:r>
+            <a:r>
+              <a:rPr lang="en-US" sz="1200" dirty="0" err="1"/>
+              <a:t>tpl</a:t>
+            </a:r>
+            <a:r>
+              <a:rPr lang="en-US" sz="1200" dirty="0"/>
+              <a:t> detection: An empirical analysis of techniques, challenges, and effectiveness,” Computers Security, vol. 159, p. 104672, 2025. [Online]. Available: https://www.sciencedirect.com/science/article/pii/S016740482500361X</a:t>
+            </a:r>
+          </a:p>
+          <a:p>
+            <a:r>
+              <a:rPr lang="en-US" sz="1200" dirty="0"/>
+              <a:t>Slide 6: Z. Ma, H. Wang, Y. Guo, and X. Chen, “</a:t>
+            </a:r>
+            <a:r>
+              <a:rPr lang="en-US" sz="1200" dirty="0" err="1"/>
+              <a:t>Libradar</a:t>
+            </a:r>
+            <a:r>
+              <a:rPr lang="en-US" sz="1200" dirty="0"/>
+              <a:t>: Fast and accurate detection of third-party libraries in android apps,” in 2016 IEEE/ACM 38th International Conference on Software Engineering Companion (ICSE-C), 2016, pp. 653–656.</a:t>
+            </a:r>
+          </a:p>
+          <a:p>
+            <a:r>
+              <a:rPr lang="en-US" sz="1200" dirty="0"/>
+              <a:t>Slide 7: Y. Wu, C. Sun, D. Zeng, G. Tan, S. Ma, and P. Wang, “</a:t>
+            </a:r>
+            <a:r>
+              <a:rPr lang="en-US" sz="1200" dirty="0" err="1"/>
+              <a:t>LibScan</a:t>
+            </a:r>
+            <a:r>
+              <a:rPr lang="en-US" sz="1200" dirty="0"/>
+              <a:t>: Towards more precise Third-Party library identification for android applications,” in 32nd USENIX Security Symposium (USENIX Security 23). Anaheim, CA: USENIX Association, Aug. 2023, pp. 3385–3402. [Online]. Available: https://www.usenix.org/conference/usenixsecurity23/presentation/wu-yafei</a:t>
+            </a:r>
+          </a:p>
+          <a:p>
+            <a:r>
+              <a:rPr lang="de-CH" sz="1200" dirty="0"/>
+              <a:t>Slide 8: D. Pan, Y. </a:t>
+            </a:r>
+            <a:r>
+              <a:rPr lang="de-CH" sz="1200" dirty="0" err="1"/>
+              <a:t>Xu</a:t>
+            </a:r>
+            <a:r>
+              <a:rPr lang="de-CH" sz="1200" dirty="0"/>
+              <a:t>, R. Feng, D. </a:t>
+            </a:r>
+            <a:r>
+              <a:rPr lang="de-CH" sz="1200" dirty="0" err="1"/>
+              <a:t>Yu</a:t>
+            </a:r>
+            <a:r>
+              <a:rPr lang="de-CH" sz="1200" dirty="0"/>
+              <a:t>, J. Chen, Y. Fang, and Y. Zhang, “Pay </a:t>
+            </a:r>
+            <a:r>
+              <a:rPr lang="de-CH" sz="1200" dirty="0" err="1"/>
+              <a:t>your</a:t>
+            </a:r>
+            <a:r>
+              <a:rPr lang="de-CH" sz="1200" dirty="0"/>
+              <a:t> </a:t>
+            </a:r>
+            <a:r>
+              <a:rPr lang="de-CH" sz="1200" dirty="0" err="1"/>
+              <a:t>attention</a:t>
+            </a:r>
+            <a:r>
+              <a:rPr lang="de-CH" sz="1200" dirty="0"/>
+              <a:t> on </a:t>
+            </a:r>
+            <a:r>
+              <a:rPr lang="de-CH" sz="1200" dirty="0" err="1"/>
+              <a:t>lib</a:t>
+            </a:r>
+            <a:r>
+              <a:rPr lang="de-CH" sz="1200" dirty="0"/>
+              <a:t>! </a:t>
+            </a:r>
+            <a:r>
+              <a:rPr lang="de-CH" sz="1200" dirty="0" err="1"/>
+              <a:t>android</a:t>
+            </a:r>
+            <a:r>
+              <a:rPr lang="de-CH" sz="1200" dirty="0"/>
+              <a:t> </a:t>
+            </a:r>
+            <a:r>
+              <a:rPr lang="de-CH" sz="1200" dirty="0" err="1"/>
+              <a:t>third</a:t>
+            </a:r>
+            <a:r>
+              <a:rPr lang="de-CH" sz="1200" dirty="0"/>
+              <a:t>-party </a:t>
+            </a:r>
+            <a:r>
+              <a:rPr lang="de-CH" sz="1200" dirty="0" err="1"/>
+              <a:t>library</a:t>
+            </a:r>
+            <a:r>
+              <a:rPr lang="de-CH" sz="1200" dirty="0"/>
+              <a:t> </a:t>
+            </a:r>
+            <a:r>
+              <a:rPr lang="de-CH" sz="1200" dirty="0" err="1"/>
+              <a:t>detection</a:t>
+            </a:r>
+            <a:r>
+              <a:rPr lang="de-CH" sz="1200" dirty="0"/>
+              <a:t> via feature </a:t>
+            </a:r>
+            <a:r>
+              <a:rPr lang="de-CH" sz="1200" dirty="0" err="1"/>
+              <a:t>language</a:t>
+            </a:r>
+            <a:r>
+              <a:rPr lang="de-CH" sz="1200" dirty="0"/>
+              <a:t> </a:t>
+            </a:r>
+            <a:r>
+              <a:rPr lang="de-CH" sz="1200" dirty="0" err="1"/>
+              <a:t>model</a:t>
+            </a:r>
+            <a:r>
+              <a:rPr lang="de-CH" sz="1200" dirty="0"/>
+              <a:t>,” in 2025 IEEE International Conference on Software Analysis, Evolution and Reengineering (SANER), 2025, pp. 217–228.</a:t>
+            </a:r>
+          </a:p>
+        </p:txBody>
+      </p:sp>
+    </p:spTree>
+    <p:extLst>
+      <p:ext uri="{BB962C8B-B14F-4D97-AF65-F5344CB8AC3E}">
+        <p14:creationId xmlns:p14="http://schemas.microsoft.com/office/powerpoint/2010/main" val="388014762"/>
+      </p:ext>
+    </p:extLst>
+  </p:cSld>
+  <p:clrMapOvr>
+    <a:masterClrMapping/>
+  </p:clrMapOvr>
+  <p:transition spd="med"/>
+</p:sld>
+</file>
+
+<file path=ppt/slides/slide17.xml><?xml version="1.0" encoding="utf-8"?>
+<p:sld xmlns:a="http://schemas.openxmlformats.org/drawingml/2006/main" xmlns:r="http://schemas.openxmlformats.org/officeDocument/2006/relationships" xmlns:p="http://schemas.openxmlformats.org/presentationml/2006/main">
+  <p:cSld>
+    <p:spTree>
+      <p:nvGrpSpPr>
+        <p:cNvPr id="1" name=""/>
+        <p:cNvGrpSpPr/>
+        <p:nvPr/>
+      </p:nvGrpSpPr>
+      <p:grpSpPr>
+        <a:xfrm>
+          <a:off x="0" y="0"/>
+          <a:ext cx="0" cy="0"/>
+          <a:chOff x="0" y="0"/>
+          <a:chExt cx="0" cy="0"/>
+        </a:xfrm>
+      </p:grpSpPr>
+      <p:sp>
+        <p:nvSpPr>
+          <p:cNvPr id="2" name="Titel 1">
+            <a:extLst>
+              <a:ext uri="{FF2B5EF4-FFF2-40B4-BE49-F238E27FC236}">
+                <a16:creationId xmlns:a16="http://schemas.microsoft.com/office/drawing/2014/main" id="{66C7CD65-6661-91AA-8B9F-1EED1D45B331}"/>
+              </a:ext>
+            </a:extLst>
+          </p:cNvPr>
+          <p:cNvSpPr>
+            <a:spLocks noGrp="1"/>
+          </p:cNvSpPr>
+          <p:nvPr>
+            <p:ph type="title"/>
+          </p:nvPr>
+        </p:nvSpPr>
+        <p:spPr/>
+        <p:txBody>
+          <a:bodyPr/>
+          <a:lstStyle/>
+          <a:p>
+            <a:r>
+              <a:rPr lang="de-CH" dirty="0"/>
+              <a:t>Sources</a:t>
+            </a:r>
+          </a:p>
+        </p:txBody>
+      </p:sp>
+      <p:sp>
+        <p:nvSpPr>
+          <p:cNvPr id="3" name="Textplatzhalter 2">
+            <a:extLst>
+              <a:ext uri="{FF2B5EF4-FFF2-40B4-BE49-F238E27FC236}">
+                <a16:creationId xmlns:a16="http://schemas.microsoft.com/office/drawing/2014/main" id="{D1C032E6-BA7D-1718-54D2-F0420CEE8463}"/>
+              </a:ext>
+            </a:extLst>
+          </p:cNvPr>
+          <p:cNvSpPr>
+            <a:spLocks noGrp="1"/>
+          </p:cNvSpPr>
+          <p:nvPr>
+            <p:ph type="body" idx="1"/>
+          </p:nvPr>
+        </p:nvSpPr>
+        <p:spPr/>
+        <p:txBody>
+          <a:bodyPr>
+            <a:normAutofit/>
+          </a:bodyPr>
+          <a:lstStyle/>
+          <a:p>
+            <a:r>
+              <a:rPr lang="de-CH" sz="1200" dirty="0"/>
+              <a:t>Slide 9-11: </a:t>
+            </a:r>
+            <a:r>
+              <a:rPr lang="en-US" sz="1200" dirty="0"/>
+              <a:t>J. Gu, H. Lu, G. Nan, Y. Lin, K. Wang, Y. Guo, Y. Cao, and Y. Liu, “Revisiting third-party library detection: A ground truth dataset and its implications across security tasks,” pp. 1–3, 7–9, 2025. [Online]. Available: https://arxiv.org/abs/2509.04091</a:t>
+            </a:r>
+          </a:p>
+          <a:p>
+            <a:endParaRPr lang="de-CH" sz="1200" dirty="0"/>
+          </a:p>
+        </p:txBody>
+      </p:sp>
+    </p:spTree>
+    <p:extLst>
+      <p:ext uri="{BB962C8B-B14F-4D97-AF65-F5344CB8AC3E}">
+        <p14:creationId xmlns:p14="http://schemas.microsoft.com/office/powerpoint/2010/main" val="1637844945"/>
+      </p:ext>
+    </p:extLst>
+  </p:cSld>
+  <p:clrMapOvr>
+    <a:masterClrMapping/>
+  </p:clrMapOvr>
+  <p:transition spd="med"/>
+</p:sld>
+</file>
+
+<file path=ppt/slides/slide18.xml><?xml version="1.0" encoding="utf-8"?>
+<p:sld xmlns:a="http://schemas.openxmlformats.org/drawingml/2006/main" xmlns:r="http://schemas.openxmlformats.org/officeDocument/2006/relationships" xmlns:p="http://schemas.openxmlformats.org/presentationml/2006/main">
+  <p:cSld>
+    <p:spTree>
+      <p:nvGrpSpPr>
+        <p:cNvPr id="1" name=""/>
+        <p:cNvGrpSpPr/>
+        <p:nvPr/>
+      </p:nvGrpSpPr>
+      <p:grpSpPr>
+        <a:xfrm>
+          <a:off x="0" y="0"/>
+          <a:ext cx="0" cy="0"/>
+          <a:chOff x="0" y="0"/>
+          <a:chExt cx="0" cy="0"/>
+        </a:xfrm>
+      </p:grpSpPr>
+      <p:sp>
+        <p:nvSpPr>
+          <p:cNvPr id="2" name="Titel 1">
+            <a:extLst>
+              <a:ext uri="{FF2B5EF4-FFF2-40B4-BE49-F238E27FC236}">
+                <a16:creationId xmlns:a16="http://schemas.microsoft.com/office/drawing/2014/main" id="{0B67EE2C-AF7A-5600-CFB0-6E240E6995D7}"/>
+              </a:ext>
+            </a:extLst>
+          </p:cNvPr>
+          <p:cNvSpPr>
+            <a:spLocks noGrp="1"/>
+          </p:cNvSpPr>
+          <p:nvPr>
+            <p:ph type="title"/>
+          </p:nvPr>
+        </p:nvSpPr>
+        <p:spPr/>
+        <p:txBody>
+          <a:bodyPr/>
+          <a:lstStyle/>
+          <a:p>
+            <a:r>
+              <a:rPr lang="de-CH" dirty="0"/>
+              <a:t>Clustering-</a:t>
+            </a:r>
+            <a:r>
+              <a:rPr lang="de-CH" dirty="0" err="1"/>
+              <a:t>based</a:t>
+            </a:r>
+            <a:r>
+              <a:rPr lang="de-CH" dirty="0"/>
+              <a:t> </a:t>
+            </a:r>
+            <a:r>
+              <a:rPr lang="de-CH" dirty="0" err="1"/>
+              <a:t>Detection</a:t>
+            </a:r>
+            <a:endParaRPr lang="de-CH" dirty="0"/>
+          </a:p>
+        </p:txBody>
+      </p:sp>
+      <p:sp>
+        <p:nvSpPr>
+          <p:cNvPr id="3" name="Textplatzhalter 2">
+            <a:extLst>
+              <a:ext uri="{FF2B5EF4-FFF2-40B4-BE49-F238E27FC236}">
+                <a16:creationId xmlns:a16="http://schemas.microsoft.com/office/drawing/2014/main" id="{C5D4016E-723D-48C8-A736-8F24BC845E48}"/>
+              </a:ext>
+            </a:extLst>
+          </p:cNvPr>
+          <p:cNvSpPr>
+            <a:spLocks noGrp="1"/>
+          </p:cNvSpPr>
+          <p:nvPr>
+            <p:ph type="body" idx="1"/>
+          </p:nvPr>
+        </p:nvSpPr>
+        <p:spPr/>
+        <p:txBody>
+          <a:bodyPr/>
+          <a:lstStyle/>
+          <a:p>
+            <a:endParaRPr lang="de-CH"/>
+          </a:p>
+        </p:txBody>
+      </p:sp>
+      <p:pic>
+        <p:nvPicPr>
+          <p:cNvPr id="5" name="Grafik 4">
+            <a:extLst>
+              <a:ext uri="{FF2B5EF4-FFF2-40B4-BE49-F238E27FC236}">
+                <a16:creationId xmlns:a16="http://schemas.microsoft.com/office/drawing/2014/main" id="{A0F98BD9-E8A7-F912-BF54-45C0BB82CBC4}"/>
+              </a:ext>
+            </a:extLst>
+          </p:cNvPr>
+          <p:cNvPicPr>
+            <a:picLocks noChangeAspect="1"/>
+          </p:cNvPicPr>
+          <p:nvPr/>
+        </p:nvPicPr>
+        <p:blipFill>
+          <a:blip r:embed="rId3"/>
+          <a:stretch>
+            <a:fillRect/>
+          </a:stretch>
+        </p:blipFill>
+        <p:spPr>
+          <a:xfrm>
+            <a:off x="539999" y="1491629"/>
+            <a:ext cx="7744906" cy="2886478"/>
+          </a:xfrm>
+          <a:prstGeom prst="rect">
+            <a:avLst/>
+          </a:prstGeom>
+        </p:spPr>
+      </p:pic>
+      <p:sp>
+        <p:nvSpPr>
+          <p:cNvPr id="6" name="Rechteck 2">
+            <a:extLst>
+              <a:ext uri="{FF2B5EF4-FFF2-40B4-BE49-F238E27FC236}">
+                <a16:creationId xmlns:a16="http://schemas.microsoft.com/office/drawing/2014/main" id="{F5BB4CCA-8F72-ED1B-4694-7FA43E6D4517}"/>
+              </a:ext>
+            </a:extLst>
+          </p:cNvPr>
+          <p:cNvSpPr txBox="1"/>
+          <p:nvPr/>
+        </p:nvSpPr>
+        <p:spPr>
+          <a:xfrm>
+            <a:off x="1291658" y="5014782"/>
+            <a:ext cx="5516683" cy="123111"/>
+          </a:xfrm>
+          <a:prstGeom prst="rect">
+            <a:avLst/>
+          </a:prstGeom>
+          <a:ln w="12700">
+            <a:miter lim="400000"/>
+          </a:ln>
+          <a:extLst>
+            <a:ext uri="{C572A759-6A51-4108-AA02-DFA0A04FC94B}">
+              <ma14:wrappingTextBoxFlag xmlns:ma14="http://schemas.microsoft.com/office/mac/drawingml/2011/main" xmlns:a14="http://schemas.microsoft.com/office/drawing/2010/main" xmlns:m="http://schemas.openxmlformats.org/officeDocument/2006/math" xmlns="" val="1"/>
+            </a:ext>
+          </a:extLst>
+        </p:spPr>
+        <p:txBody>
+          <a:bodyPr wrap="square" lIns="0" tIns="0" rIns="0" bIns="0">
+            <a:spAutoFit/>
+          </a:bodyPr>
+          <a:lstStyle>
+            <a:lvl1pPr>
+              <a:defRPr sz="800"/>
+            </a:lvl1pPr>
+          </a:lstStyle>
+          <a:p>
+            <a:r>
+              <a:rPr lang="en-GB" noProof="0" dirty="0" err="1"/>
+              <a:t>Ziang</a:t>
+            </a:r>
+            <a:r>
+              <a:rPr lang="en-GB" noProof="0" dirty="0"/>
+              <a:t> et al.</a:t>
+            </a:r>
+            <a:r>
+              <a:rPr lang="en-GB" dirty="0"/>
+              <a:t>: </a:t>
+            </a:r>
+            <a:r>
+              <a:rPr lang="en-US" dirty="0" err="1"/>
+              <a:t>LibRadar</a:t>
+            </a:r>
+            <a:r>
+              <a:rPr lang="en-US" dirty="0"/>
+              <a:t>: Fast and Accurate Detection of Third-party Libraries in Android Apps, 2016</a:t>
+            </a:r>
+            <a:endParaRPr lang="en-GB" noProof="0" dirty="0"/>
+          </a:p>
+        </p:txBody>
+      </p:sp>
+    </p:spTree>
+    <p:extLst>
+      <p:ext uri="{BB962C8B-B14F-4D97-AF65-F5344CB8AC3E}">
+        <p14:creationId xmlns:p14="http://schemas.microsoft.com/office/powerpoint/2010/main" val="2871248524"/>
+      </p:ext>
+    </p:extLst>
+  </p:cSld>
+  <p:clrMapOvr>
+    <a:masterClrMapping/>
+  </p:clrMapOvr>
+  <p:transition spd="med"/>
+</p:sld>
+</file>
+
+<file path=ppt/slides/slide19.xml><?xml version="1.0" encoding="utf-8"?>
+<p:sld xmlns:a="http://schemas.openxmlformats.org/drawingml/2006/main" xmlns:r="http://schemas.openxmlformats.org/officeDocument/2006/relationships" xmlns:p="http://schemas.openxmlformats.org/presentationml/2006/main">
+  <p:cSld>
+    <p:spTree>
+      <p:nvGrpSpPr>
+        <p:cNvPr id="1" name=""/>
+        <p:cNvGrpSpPr/>
+        <p:nvPr/>
+      </p:nvGrpSpPr>
+      <p:grpSpPr>
+        <a:xfrm>
+          <a:off x="0" y="0"/>
+          <a:ext cx="0" cy="0"/>
+          <a:chOff x="0" y="0"/>
+          <a:chExt cx="0" cy="0"/>
+        </a:xfrm>
+      </p:grpSpPr>
+      <p:sp>
+        <p:nvSpPr>
+          <p:cNvPr id="2" name="Titel 1">
+            <a:extLst>
+              <a:ext uri="{FF2B5EF4-FFF2-40B4-BE49-F238E27FC236}">
+                <a16:creationId xmlns:a16="http://schemas.microsoft.com/office/drawing/2014/main" id="{0434E59A-15D9-FBDD-17E7-CE1752E0D26F}"/>
+              </a:ext>
+            </a:extLst>
+          </p:cNvPr>
+          <p:cNvSpPr>
+            <a:spLocks noGrp="1"/>
+          </p:cNvSpPr>
+          <p:nvPr>
+            <p:ph type="title"/>
+          </p:nvPr>
+        </p:nvSpPr>
+        <p:spPr/>
+        <p:txBody>
+          <a:bodyPr/>
+          <a:lstStyle/>
+          <a:p>
+            <a:r>
+              <a:rPr lang="de-CH" dirty="0"/>
+              <a:t>Clustering-</a:t>
+            </a:r>
+            <a:r>
+              <a:rPr lang="de-CH" dirty="0" err="1"/>
+              <a:t>based</a:t>
+            </a:r>
+            <a:r>
+              <a:rPr lang="de-CH" dirty="0"/>
+              <a:t> </a:t>
+            </a:r>
+            <a:r>
+              <a:rPr lang="de-CH" dirty="0" err="1"/>
+              <a:t>Detection</a:t>
+            </a:r>
+            <a:endParaRPr lang="de-CH" dirty="0"/>
+          </a:p>
+        </p:txBody>
+      </p:sp>
+      <p:sp>
+        <p:nvSpPr>
+          <p:cNvPr id="3" name="Textplatzhalter 2">
+            <a:extLst>
+              <a:ext uri="{FF2B5EF4-FFF2-40B4-BE49-F238E27FC236}">
+                <a16:creationId xmlns:a16="http://schemas.microsoft.com/office/drawing/2014/main" id="{E949BD17-E17F-0022-57B2-B7B16E8777E7}"/>
+              </a:ext>
+            </a:extLst>
+          </p:cNvPr>
+          <p:cNvSpPr>
+            <a:spLocks noGrp="1"/>
+          </p:cNvSpPr>
+          <p:nvPr>
+            <p:ph type="body" idx="1"/>
+          </p:nvPr>
+        </p:nvSpPr>
+        <p:spPr/>
+        <p:txBody>
+          <a:bodyPr/>
+          <a:lstStyle/>
+          <a:p>
+            <a:endParaRPr lang="de-CH"/>
+          </a:p>
+        </p:txBody>
+      </p:sp>
+      <p:pic>
+        <p:nvPicPr>
+          <p:cNvPr id="5" name="Grafik 4">
+            <a:extLst>
+              <a:ext uri="{FF2B5EF4-FFF2-40B4-BE49-F238E27FC236}">
+                <a16:creationId xmlns:a16="http://schemas.microsoft.com/office/drawing/2014/main" id="{64113613-5B6A-44DC-6B49-EE7A72C9AE64}"/>
+              </a:ext>
+            </a:extLst>
+          </p:cNvPr>
+          <p:cNvPicPr>
+            <a:picLocks noChangeAspect="1"/>
+          </p:cNvPicPr>
+          <p:nvPr/>
+        </p:nvPicPr>
+        <p:blipFill>
+          <a:blip r:embed="rId3"/>
+          <a:stretch>
+            <a:fillRect/>
+          </a:stretch>
+        </p:blipFill>
+        <p:spPr>
+          <a:xfrm>
+            <a:off x="1290931" y="1458417"/>
+            <a:ext cx="6490577" cy="3332793"/>
+          </a:xfrm>
+          <a:prstGeom prst="rect">
+            <a:avLst/>
+          </a:prstGeom>
+        </p:spPr>
+      </p:pic>
+      <p:sp>
+        <p:nvSpPr>
+          <p:cNvPr id="6" name="Rechteck 2">
+            <a:extLst>
+              <a:ext uri="{FF2B5EF4-FFF2-40B4-BE49-F238E27FC236}">
+                <a16:creationId xmlns:a16="http://schemas.microsoft.com/office/drawing/2014/main" id="{F47631AF-B6EF-5E4E-542F-E63D82AB6AE2}"/>
+              </a:ext>
+            </a:extLst>
+          </p:cNvPr>
+          <p:cNvSpPr txBox="1"/>
+          <p:nvPr/>
+        </p:nvSpPr>
+        <p:spPr>
+          <a:xfrm>
+            <a:off x="717552" y="5020389"/>
+            <a:ext cx="5516683" cy="123111"/>
+          </a:xfrm>
+          <a:prstGeom prst="rect">
+            <a:avLst/>
+          </a:prstGeom>
+          <a:ln w="12700">
+            <a:miter lim="400000"/>
+          </a:ln>
+          <a:extLst>
+            <a:ext uri="{C572A759-6A51-4108-AA02-DFA0A04FC94B}">
+              <ma14:wrappingTextBoxFlag xmlns:ma14="http://schemas.microsoft.com/office/mac/drawingml/2011/main" xmlns:a14="http://schemas.microsoft.com/office/drawing/2010/main" xmlns:m="http://schemas.openxmlformats.org/officeDocument/2006/math" xmlns="" val="1"/>
+            </a:ext>
+          </a:extLst>
+        </p:spPr>
+        <p:txBody>
+          <a:bodyPr wrap="square" lIns="0" tIns="0" rIns="0" bIns="0">
+            <a:spAutoFit/>
+          </a:bodyPr>
+          <a:lstStyle>
+            <a:lvl1pPr>
+              <a:defRPr sz="800"/>
+            </a:lvl1pPr>
+          </a:lstStyle>
+          <a:p>
+            <a:r>
+              <a:rPr lang="en-GB" noProof="0" dirty="0" err="1"/>
+              <a:t>Ziang</a:t>
+            </a:r>
+            <a:r>
+              <a:rPr lang="en-GB" noProof="0" dirty="0"/>
+              <a:t> et al.</a:t>
+            </a:r>
+            <a:r>
+              <a:rPr lang="en-GB" dirty="0"/>
+              <a:t>: </a:t>
+            </a:r>
+            <a:r>
+              <a:rPr lang="en-US" dirty="0" err="1"/>
+              <a:t>LibRadar</a:t>
+            </a:r>
+            <a:r>
+              <a:rPr lang="en-US" dirty="0"/>
+              <a:t>: Fast and Accurate Detection of Third-party Libraries in Android Apps, 2016</a:t>
+            </a:r>
+            <a:endParaRPr lang="en-GB" noProof="0" dirty="0"/>
+          </a:p>
+        </p:txBody>
+      </p:sp>
+    </p:spTree>
+    <p:extLst>
+      <p:ext uri="{BB962C8B-B14F-4D97-AF65-F5344CB8AC3E}">
+        <p14:creationId xmlns:p14="http://schemas.microsoft.com/office/powerpoint/2010/main" val="3217228714"/>
+      </p:ext>
+    </p:extLst>
+  </p:cSld>
+  <p:clrMapOvr>
+    <a:masterClrMapping/>
+  </p:clrMapOvr>
+  <p:transition spd="med"/>
+</p:sld>
+</file>
+
+<file path=ppt/slides/slide2.xml><?xml version="1.0" encoding="utf-8"?>
+<p:sld xmlns:a="http://schemas.openxmlformats.org/drawingml/2006/main" xmlns:r="http://schemas.openxmlformats.org/officeDocument/2006/relationships" xmlns:p="http://schemas.openxmlformats.org/presentationml/2006/main">
+  <p:cSld>
+    <p:spTree>
+      <p:nvGrpSpPr>
+        <p:cNvPr id="1" name=""/>
+        <p:cNvGrpSpPr/>
+        <p:nvPr/>
+      </p:nvGrpSpPr>
+      <p:grpSpPr>
+        <a:xfrm>
+          <a:off x="0" y="0"/>
+          <a:ext cx="0" cy="0"/>
+          <a:chOff x="0" y="0"/>
+          <a:chExt cx="0" cy="0"/>
+        </a:xfrm>
+      </p:grpSpPr>
+      <p:sp>
+        <p:nvSpPr>
+          <p:cNvPr id="210" name="Foliennummernplatzhalter 5"/>
+          <p:cNvSpPr txBox="1">
+            <a:spLocks noGrp="1"/>
+          </p:cNvSpPr>
+          <p:nvPr>
+            <p:ph type="sldNum" sz="quarter" idx="2"/>
+          </p:nvPr>
+        </p:nvSpPr>
+        <p:spPr>
+          <a:xfrm>
+            <a:off x="540275" y="5002569"/>
+            <a:ext cx="57708" cy="123111"/>
+          </a:xfrm>
+          <a:prstGeom prst="rect">
+            <a:avLst/>
+          </a:prstGeom>
+          <a:extLst>
+            <a:ext uri="{C572A759-6A51-4108-AA02-DFA0A04FC94B}">
+              <ma14:wrappingTextBoxFlag xmlns:ma14="http://schemas.microsoft.com/office/mac/drawingml/2011/main" xmlns:a14="http://schemas.microsoft.com/office/drawing/2010/main" xmlns:m="http://schemas.openxmlformats.org/officeDocument/2006/math" xmlns="" val="1"/>
+            </a:ext>
+          </a:extLst>
+        </p:spPr>
+        <p:txBody>
+          <a:bodyPr/>
+          <a:lstStyle/>
+          <a:p>
+            <a:r>
+              <a:rPr lang="en-GB" noProof="0" dirty="0"/>
+              <a:t>2</a:t>
+            </a:r>
+          </a:p>
+        </p:txBody>
+      </p:sp>
+      <p:sp>
+        <p:nvSpPr>
+          <p:cNvPr id="211" name="Textplatzhalter 3"/>
+          <p:cNvSpPr txBox="1">
+            <a:spLocks noGrp="1"/>
+          </p:cNvSpPr>
+          <p:nvPr>
+            <p:ph type="body" idx="1"/>
+          </p:nvPr>
+        </p:nvSpPr>
+        <p:spPr>
+          <a:xfrm>
+            <a:off x="539999" y="1853101"/>
+            <a:ext cx="7992441" cy="2610000"/>
+          </a:xfrm>
+          <a:prstGeom prst="rect">
+            <a:avLst/>
+          </a:prstGeom>
+        </p:spPr>
+        <p:txBody>
+          <a:bodyPr/>
+          <a:lstStyle/>
+          <a:p>
+            <a:pPr marL="457200" indent="-457200">
+              <a:spcBef>
+                <a:spcPts val="600"/>
+              </a:spcBef>
+              <a:buClr>
+                <a:srgbClr val="000000"/>
+              </a:buClr>
+              <a:buFontTx/>
+              <a:buAutoNum type="arabicPeriod"/>
+              <a:defRPr spc="-100"/>
+            </a:pPr>
+            <a:r>
+              <a:rPr lang="en-GB" noProof="0" dirty="0"/>
+              <a:t>Background</a:t>
+            </a:r>
+          </a:p>
+          <a:p>
+            <a:pPr marL="457200" indent="-457200">
+              <a:spcBef>
+                <a:spcPts val="600"/>
+              </a:spcBef>
+              <a:buClr>
+                <a:srgbClr val="000000"/>
+              </a:buClr>
+              <a:buFontTx/>
+              <a:buAutoNum type="arabicPeriod"/>
+              <a:defRPr spc="-100"/>
+            </a:pPr>
+            <a:r>
+              <a:rPr lang="en-GB" noProof="0" dirty="0"/>
+              <a:t>Introduction</a:t>
+            </a:r>
+          </a:p>
+          <a:p>
+            <a:pPr marL="457200" indent="-457200">
+              <a:spcBef>
+                <a:spcPts val="600"/>
+              </a:spcBef>
+              <a:buClr>
+                <a:srgbClr val="000000"/>
+              </a:buClr>
+              <a:buFontTx/>
+              <a:buAutoNum type="arabicPeriod"/>
+              <a:defRPr spc="-100"/>
+            </a:pPr>
+            <a:r>
+              <a:rPr lang="en-GB" noProof="0" dirty="0"/>
+              <a:t>TPL Detection</a:t>
+            </a:r>
+          </a:p>
+          <a:p>
+            <a:pPr marL="457200" indent="-457200">
+              <a:spcBef>
+                <a:spcPts val="600"/>
+              </a:spcBef>
+              <a:buClr>
+                <a:srgbClr val="000000"/>
+              </a:buClr>
+              <a:buFontTx/>
+              <a:buAutoNum type="arabicPeriod"/>
+              <a:defRPr spc="-100"/>
+            </a:pPr>
+            <a:r>
+              <a:rPr lang="en-GB" noProof="0" dirty="0"/>
+              <a:t>Benchmarking</a:t>
+            </a:r>
+          </a:p>
+          <a:p>
+            <a:pPr marL="457200" indent="-457200">
+              <a:spcBef>
+                <a:spcPts val="600"/>
+              </a:spcBef>
+              <a:buClr>
+                <a:srgbClr val="000000"/>
+              </a:buClr>
+              <a:buFontTx/>
+              <a:buAutoNum type="arabicPeriod"/>
+              <a:defRPr spc="-100"/>
+            </a:pPr>
+            <a:r>
+              <a:rPr lang="en-GB" dirty="0"/>
+              <a:t>Results</a:t>
+            </a:r>
+            <a:endParaRPr lang="en-GB" noProof="0" dirty="0"/>
+          </a:p>
+          <a:p>
+            <a:pPr marL="457200" indent="-457200">
+              <a:spcBef>
+                <a:spcPts val="600"/>
+              </a:spcBef>
+              <a:buClr>
+                <a:srgbClr val="000000"/>
+              </a:buClr>
+              <a:buFontTx/>
+              <a:buAutoNum type="arabicPeriod"/>
+              <a:defRPr spc="-100"/>
+            </a:pPr>
+            <a:r>
+              <a:rPr lang="en-GB" dirty="0"/>
+              <a:t>Conclusion</a:t>
+            </a:r>
+          </a:p>
+          <a:p>
+            <a:pPr marL="457200" indent="-457200">
+              <a:spcBef>
+                <a:spcPts val="600"/>
+              </a:spcBef>
+              <a:buClr>
+                <a:srgbClr val="000000"/>
+              </a:buClr>
+              <a:buFontTx/>
+              <a:buAutoNum type="arabicPeriod"/>
+              <a:defRPr spc="-100"/>
+            </a:pPr>
+            <a:r>
+              <a:rPr lang="en-GB" noProof="0" dirty="0"/>
+              <a:t>Outlook</a:t>
+            </a:r>
+          </a:p>
+        </p:txBody>
+      </p:sp>
+      <p:sp>
+        <p:nvSpPr>
+          <p:cNvPr id="212" name="Titel 6"/>
+          <p:cNvSpPr txBox="1">
+            <a:spLocks noGrp="1"/>
+          </p:cNvSpPr>
+          <p:nvPr>
+            <p:ph type="title"/>
+          </p:nvPr>
+        </p:nvSpPr>
+        <p:spPr>
+          <a:xfrm>
+            <a:off x="539999" y="680399"/>
+            <a:ext cx="7020002" cy="410370"/>
+          </a:xfrm>
+          <a:prstGeom prst="rect">
+            <a:avLst/>
+          </a:prstGeom>
+        </p:spPr>
+        <p:txBody>
+          <a:bodyPr/>
+          <a:lstStyle/>
+          <a:p>
+            <a:r>
+              <a:rPr lang="en-GB" noProof="0" dirty="0"/>
+              <a:t>Outline</a:t>
+            </a:r>
+          </a:p>
+        </p:txBody>
+      </p:sp>
+    </p:spTree>
+  </p:cSld>
+  <p:clrMapOvr>
+    <a:masterClrMapping/>
+  </p:clrMapOvr>
+  <p:transition spd="med"/>
+</p:sld>
+</file>
+
+<file path=ppt/slides/slide3.xml><?xml version="1.0" encoding="utf-8"?>
+<p:sld xmlns:a="http://schemas.openxmlformats.org/drawingml/2006/main" xmlns:r="http://schemas.openxmlformats.org/officeDocument/2006/relationships" xmlns:p="http://schemas.openxmlformats.org/presentationml/2006/main">
+  <p:cSld>
+    <p:spTree>
+      <p:nvGrpSpPr>
+        <p:cNvPr id="1" name=""/>
+        <p:cNvGrpSpPr/>
+        <p:nvPr/>
+      </p:nvGrpSpPr>
+      <p:grpSpPr>
+        <a:xfrm>
+          <a:off x="0" y="0"/>
+          <a:ext cx="0" cy="0"/>
+          <a:chOff x="0" y="0"/>
+          <a:chExt cx="0" cy="0"/>
+        </a:xfrm>
+      </p:grpSpPr>
+      <p:sp>
+        <p:nvSpPr>
+          <p:cNvPr id="217" name="Foliennummernplatzhalter 5"/>
+          <p:cNvSpPr txBox="1">
+            <a:spLocks noGrp="1"/>
+          </p:cNvSpPr>
+          <p:nvPr>
+            <p:ph type="sldNum" sz="quarter" idx="2"/>
+          </p:nvPr>
+        </p:nvSpPr>
+        <p:spPr>
+          <a:prstGeom prst="rect">
+            <a:avLst/>
+          </a:prstGeom>
+          <a:extLst>
+            <a:ext uri="{C572A759-6A51-4108-AA02-DFA0A04FC94B}">
+              <ma14:wrappingTextBoxFlag xmlns:ma14="http://schemas.microsoft.com/office/mac/drawingml/2011/main" xmlns:a14="http://schemas.microsoft.com/office/drawing/2010/main" xmlns:m="http://schemas.openxmlformats.org/officeDocument/2006/math" xmlns="" val="1"/>
+            </a:ext>
+          </a:extLst>
+        </p:spPr>
+        <p:txBody>
+          <a:bodyPr/>
+          <a:lstStyle/>
+          <a:p>
+            <a:fld id="{86CB4B4D-7CA3-9044-876B-883B54F8677D}" type="slidenum">
+              <a:rPr lang="en-GB" noProof="0" smtClean="0"/>
+              <a:t>3</a:t>
+            </a:fld>
+            <a:endParaRPr lang="en-GB" noProof="0" dirty="0"/>
+          </a:p>
+        </p:txBody>
+      </p:sp>
+      <p:sp>
+        <p:nvSpPr>
+          <p:cNvPr id="218" name="Titel 5"/>
+          <p:cNvSpPr txBox="1">
+            <a:spLocks noGrp="1"/>
+          </p:cNvSpPr>
+          <p:nvPr>
+            <p:ph type="title"/>
+          </p:nvPr>
+        </p:nvSpPr>
+        <p:spPr>
+          <a:xfrm>
+            <a:off x="539999" y="676800"/>
+            <a:ext cx="7020002" cy="410370"/>
+          </a:xfrm>
+          <a:prstGeom prst="rect">
+            <a:avLst/>
+          </a:prstGeom>
+        </p:spPr>
+        <p:txBody>
+          <a:bodyPr>
+            <a:normAutofit/>
+          </a:bodyPr>
+          <a:lstStyle/>
+          <a:p>
+            <a:r>
+              <a:rPr lang="en-GB" noProof="0" dirty="0"/>
+              <a:t>Background</a:t>
+            </a:r>
+          </a:p>
+        </p:txBody>
+      </p:sp>
+      <p:sp>
+        <p:nvSpPr>
+          <p:cNvPr id="219" name="Inhaltsplatzhalter 6"/>
+          <p:cNvSpPr txBox="1">
+            <a:spLocks noGrp="1"/>
+          </p:cNvSpPr>
+          <p:nvPr>
+            <p:ph type="body" sz="half" idx="1"/>
+          </p:nvPr>
+        </p:nvSpPr>
+        <p:spPr>
+          <a:xfrm>
+            <a:off x="539999" y="1491629"/>
+            <a:ext cx="4968106" cy="3266371"/>
+          </a:xfrm>
+          <a:prstGeom prst="rect">
+            <a:avLst/>
+          </a:prstGeom>
+        </p:spPr>
+        <p:txBody>
+          <a:bodyPr/>
+          <a:lstStyle/>
+          <a:p>
+            <a:endParaRPr lang="en-GB" noProof="0" dirty="0"/>
+          </a:p>
+          <a:p>
+            <a:endParaRPr lang="en-GB" dirty="0"/>
+          </a:p>
+          <a:p>
+            <a:r>
+              <a:rPr lang="en-GB" noProof="0" dirty="0"/>
+              <a:t>Bachelors Thesis: </a:t>
+            </a:r>
+            <a:r>
+              <a:rPr lang="en-GB" i="1" noProof="0" dirty="0"/>
+              <a:t>Building a Ground-Truth Dataset of Android Hybrid Applications and Their Third-Party Libraries</a:t>
+            </a:r>
+          </a:p>
+          <a:p>
+            <a:endParaRPr lang="en-GB" noProof="0" dirty="0"/>
+          </a:p>
+          <a:p>
+            <a:endParaRPr lang="en-GB" noProof="0" dirty="0"/>
+          </a:p>
+        </p:txBody>
+      </p:sp>
+      <p:sp>
+        <p:nvSpPr>
+          <p:cNvPr id="223" name="Rechteck 2"/>
+          <p:cNvSpPr txBox="1"/>
+          <p:nvPr/>
+        </p:nvSpPr>
+        <p:spPr>
+          <a:xfrm>
+            <a:off x="990649" y="5002567"/>
+            <a:ext cx="5964774" cy="123111"/>
+          </a:xfrm>
+          <a:prstGeom prst="rect">
+            <a:avLst/>
+          </a:prstGeom>
+          <a:ln w="12700">
+            <a:miter lim="400000"/>
+          </a:ln>
+          <a:extLst>
+            <a:ext uri="{C572A759-6A51-4108-AA02-DFA0A04FC94B}">
+              <ma14:wrappingTextBoxFlag xmlns:ma14="http://schemas.microsoft.com/office/mac/drawingml/2011/main" xmlns:a14="http://schemas.microsoft.com/office/drawing/2010/main" xmlns:m="http://schemas.openxmlformats.org/officeDocument/2006/math" xmlns="" val="1"/>
+            </a:ext>
+          </a:extLst>
+        </p:spPr>
+        <p:txBody>
+          <a:bodyPr wrap="none" lIns="0" tIns="0" rIns="0" bIns="0">
+            <a:spAutoFit/>
+          </a:bodyPr>
+          <a:lstStyle>
+            <a:lvl1pPr>
+              <a:defRPr sz="800"/>
+            </a:lvl1pPr>
+          </a:lstStyle>
+          <a:p>
+            <a:r>
+              <a:rPr lang="en-GB" noProof="0" dirty="0"/>
+              <a:t>1: https://avatars.githubusercontent.com/u/14101776?s=280&amp;v=4, 25.05.26; 2: https://de.wikipedia.org/wiki/React_Native, 25.05.26 </a:t>
+            </a:r>
+          </a:p>
+        </p:txBody>
+      </p:sp>
+      <p:pic>
+        <p:nvPicPr>
+          <p:cNvPr id="1026" name="Picture 2" descr="Flutter · GitHub">
+            <a:extLst>
+              <a:ext uri="{FF2B5EF4-FFF2-40B4-BE49-F238E27FC236}">
+                <a16:creationId xmlns:a16="http://schemas.microsoft.com/office/drawing/2014/main" id="{1E360B14-D4C8-CD02-0E54-014D2DC37A5D}"/>
+              </a:ext>
+            </a:extLst>
+          </p:cNvPr>
+          <p:cNvPicPr>
+            <a:picLocks noChangeAspect="1" noChangeArrowheads="1"/>
+          </p:cNvPicPr>
+          <p:nvPr/>
+        </p:nvPicPr>
+        <p:blipFill>
+          <a:blip r:embed="rId3">
+            <a:extLst>
+              <a:ext uri="{28A0092B-C50C-407E-A947-70E740481C1C}">
+                <a14:useLocalDpi xmlns:a14="http://schemas.microsoft.com/office/drawing/2010/main" val="0"/>
+              </a:ext>
+            </a:extLst>
+          </a:blip>
+          <a:srcRect/>
+          <a:stretch>
+            <a:fillRect/>
+          </a:stretch>
+        </p:blipFill>
+        <p:spPr bwMode="auto">
+          <a:xfrm>
+            <a:off x="6955423" y="2659496"/>
+            <a:ext cx="1604281" cy="1604281"/>
+          </a:xfrm>
+          <a:prstGeom prst="rect">
+            <a:avLst/>
+          </a:prstGeom>
+          <a:noFill/>
+          <a:extLst>
+            <a:ext uri="{909E8E84-426E-40DD-AFC4-6F175D3DCCD1}">
+              <a14:hiddenFill xmlns:a14="http://schemas.microsoft.com/office/drawing/2010/main">
+                <a:solidFill>
+                  <a:srgbClr val="FFFFFF"/>
+                </a:solidFill>
+              </a14:hiddenFill>
+            </a:ext>
+          </a:extLst>
+        </p:spPr>
+      </p:pic>
+      <p:pic>
+        <p:nvPicPr>
+          <p:cNvPr id="1028" name="Picture 4" descr="React Native – Wikipedia">
+            <a:extLst>
+              <a:ext uri="{FF2B5EF4-FFF2-40B4-BE49-F238E27FC236}">
+                <a16:creationId xmlns:a16="http://schemas.microsoft.com/office/drawing/2014/main" id="{E6BB07F2-D070-31AE-859F-8B159547726E}"/>
+              </a:ext>
+            </a:extLst>
+          </p:cNvPr>
+          <p:cNvPicPr>
+            <a:picLocks noChangeAspect="1" noChangeArrowheads="1"/>
+          </p:cNvPicPr>
+          <p:nvPr/>
+        </p:nvPicPr>
+        <p:blipFill>
+          <a:blip r:embed="rId4">
+            <a:extLst>
+              <a:ext uri="{28A0092B-C50C-407E-A947-70E740481C1C}">
+                <a14:useLocalDpi xmlns:a14="http://schemas.microsoft.com/office/drawing/2010/main" val="0"/>
+              </a:ext>
+            </a:extLst>
+          </a:blip>
+          <a:srcRect/>
+          <a:stretch>
+            <a:fillRect/>
+          </a:stretch>
+        </p:blipFill>
+        <p:spPr bwMode="auto">
+          <a:xfrm>
+            <a:off x="5839165" y="1450493"/>
+            <a:ext cx="1720836" cy="1492343"/>
+          </a:xfrm>
+          <a:prstGeom prst="rect">
+            <a:avLst/>
+          </a:prstGeom>
+          <a:noFill/>
+          <a:extLst>
+            <a:ext uri="{909E8E84-426E-40DD-AFC4-6F175D3DCCD1}">
+              <a14:hiddenFill xmlns:a14="http://schemas.microsoft.com/office/drawing/2010/main">
+                <a:solidFill>
+                  <a:srgbClr val="FFFFFF"/>
+                </a:solidFill>
+              </a14:hiddenFill>
+            </a:ext>
+          </a:extLst>
+        </p:spPr>
+      </p:pic>
+    </p:spTree>
+  </p:cSld>
+  <p:clrMapOvr>
+    <a:masterClrMapping/>
+  </p:clrMapOvr>
+  <p:transition spd="med"/>
+</p:sld>
+</file>
+
+<file path=ppt/slides/slide4.xml><?xml version="1.0" encoding="utf-8"?>
+<p:sld xmlns:a="http://schemas.openxmlformats.org/drawingml/2006/main" xmlns:r="http://schemas.openxmlformats.org/officeDocument/2006/relationships" xmlns:p="http://schemas.openxmlformats.org/presentationml/2006/main">
+  <p:cSld>
+    <p:spTree>
+      <p:nvGrpSpPr>
+        <p:cNvPr id="1" name=""/>
+        <p:cNvGrpSpPr/>
+        <p:nvPr/>
+      </p:nvGrpSpPr>
+      <p:grpSpPr>
+        <a:xfrm>
+          <a:off x="0" y="0"/>
+          <a:ext cx="0" cy="0"/>
+          <a:chOff x="0" y="0"/>
+          <a:chExt cx="0" cy="0"/>
+        </a:xfrm>
+      </p:grpSpPr>
+      <p:sp>
+        <p:nvSpPr>
+          <p:cNvPr id="225" name="Foliennummernplatzhalter 5"/>
+          <p:cNvSpPr txBox="1">
+            <a:spLocks noGrp="1"/>
+          </p:cNvSpPr>
+          <p:nvPr>
+            <p:ph type="sldNum" sz="quarter" idx="2"/>
+          </p:nvPr>
+        </p:nvSpPr>
+        <p:spPr>
+          <a:prstGeom prst="rect">
+            <a:avLst/>
+          </a:prstGeom>
+          <a:extLst>
+            <a:ext uri="{C572A759-6A51-4108-AA02-DFA0A04FC94B}">
+              <ma14:wrappingTextBoxFlag xmlns:ma14="http://schemas.microsoft.com/office/mac/drawingml/2011/main" xmlns:a14="http://schemas.microsoft.com/office/drawing/2010/main" xmlns:m="http://schemas.openxmlformats.org/officeDocument/2006/math" xmlns="" val="1"/>
+            </a:ext>
+          </a:extLst>
+        </p:spPr>
+        <p:txBody>
+          <a:bodyPr/>
+          <a:lstStyle/>
+          <a:p>
+            <a:fld id="{86CB4B4D-7CA3-9044-876B-883B54F8677D}" type="slidenum">
+              <a:rPr lang="en-GB" noProof="0" smtClean="0"/>
+              <a:t>4</a:t>
+            </a:fld>
+            <a:endParaRPr lang="en-GB" noProof="0" dirty="0"/>
+          </a:p>
+        </p:txBody>
+      </p:sp>
+      <p:sp>
+        <p:nvSpPr>
+          <p:cNvPr id="226" name="Titel 5"/>
+          <p:cNvSpPr txBox="1">
+            <a:spLocks noGrp="1"/>
+          </p:cNvSpPr>
+          <p:nvPr>
+            <p:ph type="title"/>
+          </p:nvPr>
+        </p:nvSpPr>
+        <p:spPr>
+          <a:xfrm>
+            <a:off x="539999" y="676800"/>
+            <a:ext cx="7020002" cy="410370"/>
+          </a:xfrm>
+          <a:prstGeom prst="rect">
+            <a:avLst/>
+          </a:prstGeom>
+        </p:spPr>
+        <p:txBody>
+          <a:bodyPr/>
+          <a:lstStyle/>
+          <a:p>
+            <a:r>
+              <a:rPr lang="en-GB" noProof="0" dirty="0"/>
+              <a:t>Introduction</a:t>
+            </a:r>
+          </a:p>
+        </p:txBody>
+      </p:sp>
+      <p:sp>
+        <p:nvSpPr>
+          <p:cNvPr id="227" name="Inhaltsplatzhalter 6"/>
+          <p:cNvSpPr txBox="1">
+            <a:spLocks noGrp="1"/>
+          </p:cNvSpPr>
+          <p:nvPr>
+            <p:ph type="body" sz="half" idx="1"/>
+          </p:nvPr>
+        </p:nvSpPr>
+        <p:spPr>
+          <a:xfrm>
+            <a:off x="539999" y="1491629"/>
+            <a:ext cx="4968106" cy="3266371"/>
+          </a:xfrm>
+          <a:prstGeom prst="rect">
+            <a:avLst/>
+          </a:prstGeom>
+        </p:spPr>
+        <p:txBody>
+          <a:bodyPr/>
+          <a:lstStyle/>
+          <a:p>
+            <a:endParaRPr lang="en-GB" noProof="0" dirty="0"/>
+          </a:p>
+          <a:p>
+            <a:endParaRPr lang="en-GB" noProof="0" dirty="0"/>
+          </a:p>
+        </p:txBody>
+      </p:sp>
+      <p:sp>
+        <p:nvSpPr>
+          <p:cNvPr id="231" name="Rechteck 2"/>
+          <p:cNvSpPr txBox="1"/>
+          <p:nvPr/>
+        </p:nvSpPr>
+        <p:spPr>
+          <a:xfrm>
+            <a:off x="990649" y="5002567"/>
+            <a:ext cx="5084725" cy="123111"/>
+          </a:xfrm>
+          <a:prstGeom prst="rect">
+            <a:avLst/>
+          </a:prstGeom>
+          <a:ln w="12700">
+            <a:miter lim="400000"/>
+          </a:ln>
+          <a:extLst>
+            <a:ext uri="{C572A759-6A51-4108-AA02-DFA0A04FC94B}">
+              <ma14:wrappingTextBoxFlag xmlns:ma14="http://schemas.microsoft.com/office/mac/drawingml/2011/main" xmlns:a14="http://schemas.microsoft.com/office/drawing/2010/main" xmlns:m="http://schemas.openxmlformats.org/officeDocument/2006/math" xmlns="" val="1"/>
+            </a:ext>
+          </a:extLst>
+        </p:spPr>
+        <p:txBody>
+          <a:bodyPr wrap="none" lIns="0" tIns="0" rIns="0" bIns="0">
+            <a:spAutoFit/>
+          </a:bodyPr>
+          <a:lstStyle>
+            <a:lvl1pPr>
+              <a:defRPr sz="800"/>
+            </a:lvl1pPr>
+          </a:lstStyle>
+          <a:p>
+            <a:r>
+              <a:rPr lang="en-GB" noProof="0" dirty="0" err="1"/>
+              <a:t>Gokkaya</a:t>
+            </a:r>
+            <a:r>
+              <a:rPr lang="en-GB" noProof="0" dirty="0"/>
+              <a:t> et al.: </a:t>
+            </a:r>
+            <a:r>
+              <a:rPr lang="en-US" dirty="0"/>
+              <a:t>Software supply chain: A taxonomy of attacks, mitigations and risk assessment strategies, 2026</a:t>
+            </a:r>
+          </a:p>
+        </p:txBody>
+      </p:sp>
+      <p:pic>
+        <p:nvPicPr>
+          <p:cNvPr id="1028" name="Picture 4">
+            <a:extLst>
+              <a:ext uri="{FF2B5EF4-FFF2-40B4-BE49-F238E27FC236}">
+                <a16:creationId xmlns:a16="http://schemas.microsoft.com/office/drawing/2014/main" id="{3E176B66-A12E-BC82-C612-C1C931B1FED5}"/>
+              </a:ext>
+            </a:extLst>
+          </p:cNvPr>
+          <p:cNvPicPr>
+            <a:picLocks noChangeAspect="1" noChangeArrowheads="1"/>
+          </p:cNvPicPr>
+          <p:nvPr/>
+        </p:nvPicPr>
+        <p:blipFill>
+          <a:blip r:embed="rId3">
+            <a:extLst>
+              <a:ext uri="{28A0092B-C50C-407E-A947-70E740481C1C}">
+                <a14:useLocalDpi xmlns:a14="http://schemas.microsoft.com/office/drawing/2010/main" val="0"/>
+              </a:ext>
+            </a:extLst>
+          </a:blip>
+          <a:srcRect/>
+          <a:stretch>
+            <a:fillRect/>
+          </a:stretch>
+        </p:blipFill>
+        <p:spPr bwMode="auto">
+          <a:xfrm>
+            <a:off x="417250" y="1491629"/>
+            <a:ext cx="4154750" cy="2735517"/>
+          </a:xfrm>
+          <a:prstGeom prst="rect">
+            <a:avLst/>
+          </a:prstGeom>
+          <a:noFill/>
+          <a:extLst>
+            <a:ext uri="{909E8E84-426E-40DD-AFC4-6F175D3DCCD1}">
+              <a14:hiddenFill xmlns:a14="http://schemas.microsoft.com/office/drawing/2010/main">
+                <a:solidFill>
+                  <a:srgbClr val="FFFFFF"/>
+                </a:solidFill>
+              </a14:hiddenFill>
+            </a:ext>
+          </a:extLst>
+        </p:spPr>
+      </p:pic>
+      <p:graphicFrame>
+        <p:nvGraphicFramePr>
+          <p:cNvPr id="4" name="Diagramm 3">
+            <a:extLst>
+              <a:ext uri="{FF2B5EF4-FFF2-40B4-BE49-F238E27FC236}">
+                <a16:creationId xmlns:a16="http://schemas.microsoft.com/office/drawing/2014/main" id="{3F828B5E-8A7A-C726-D77E-8A32421AE591}"/>
+              </a:ext>
+            </a:extLst>
+          </p:cNvPr>
+          <p:cNvGraphicFramePr/>
+          <p:nvPr>
+            <p:extLst>
+              <p:ext uri="{D42A27DB-BD31-4B8C-83A1-F6EECF244321}">
+                <p14:modId xmlns:p14="http://schemas.microsoft.com/office/powerpoint/2010/main" val="2225284288"/>
+              </p:ext>
+            </p:extLst>
+          </p:nvPr>
+        </p:nvGraphicFramePr>
+        <p:xfrm>
+          <a:off x="4572000" y="1328963"/>
+          <a:ext cx="3740458" cy="3112121"/>
+        </p:xfrm>
+        <a:graphic>
+          <a:graphicData uri="http://schemas.openxmlformats.org/drawingml/2006/chart">
+            <c:chart xmlns:c="http://schemas.openxmlformats.org/drawingml/2006/chart" xmlns:r="http://schemas.openxmlformats.org/officeDocument/2006/relationships" r:id="rId4"/>
+          </a:graphicData>
+        </a:graphic>
+      </p:graphicFrame>
+    </p:spTree>
+  </p:cSld>
+  <p:clrMapOvr>
+    <a:masterClrMapping/>
+  </p:clrMapOvr>
+  <p:transition spd="med"/>
+</p:sld>
+</file>
+
+<file path=ppt/slides/slide5.xml><?xml version="1.0" encoding="utf-8"?>
+<p:sld xmlns:a="http://schemas.openxmlformats.org/drawingml/2006/main" xmlns:r="http://schemas.openxmlformats.org/officeDocument/2006/relationships" xmlns:p="http://schemas.openxmlformats.org/presentationml/2006/main">
+  <p:cSld>
+    <p:spTree>
+      <p:nvGrpSpPr>
+        <p:cNvPr id="1" name=""/>
+        <p:cNvGrpSpPr/>
+        <p:nvPr/>
+      </p:nvGrpSpPr>
+      <p:grpSpPr>
+        <a:xfrm>
+          <a:off x="0" y="0"/>
+          <a:ext cx="0" cy="0"/>
+          <a:chOff x="0" y="0"/>
+          <a:chExt cx="0" cy="0"/>
+        </a:xfrm>
+      </p:grpSpPr>
+      <p:sp>
+        <p:nvSpPr>
+          <p:cNvPr id="236" name="Foliennummernplatzhalter 5"/>
+          <p:cNvSpPr txBox="1">
+            <a:spLocks noGrp="1"/>
+          </p:cNvSpPr>
+          <p:nvPr>
+            <p:ph type="sldNum" sz="quarter" idx="2"/>
+          </p:nvPr>
+        </p:nvSpPr>
+        <p:spPr>
+          <a:prstGeom prst="rect">
+            <a:avLst/>
+          </a:prstGeom>
+          <a:extLst>
+            <a:ext uri="{C572A759-6A51-4108-AA02-DFA0A04FC94B}">
+              <ma14:wrappingTextBoxFlag xmlns:ma14="http://schemas.microsoft.com/office/mac/drawingml/2011/main" xmlns:a14="http://schemas.microsoft.com/office/drawing/2010/main" xmlns:m="http://schemas.openxmlformats.org/officeDocument/2006/math" xmlns="" val="1"/>
+            </a:ext>
+          </a:extLst>
+        </p:spPr>
+        <p:txBody>
+          <a:bodyPr/>
+          <a:lstStyle/>
+          <a:p>
+            <a:fld id="{86CB4B4D-7CA3-9044-876B-883B54F8677D}" type="slidenum">
+              <a:rPr lang="en-GB" noProof="0" smtClean="0"/>
+              <a:t>5</a:t>
+            </a:fld>
+            <a:endParaRPr lang="en-GB" noProof="0" dirty="0"/>
+          </a:p>
+        </p:txBody>
+      </p:sp>
+      <p:sp>
+        <p:nvSpPr>
+          <p:cNvPr id="237" name="Titel 5"/>
+          <p:cNvSpPr txBox="1">
+            <a:spLocks noGrp="1"/>
+          </p:cNvSpPr>
+          <p:nvPr>
+            <p:ph type="title"/>
+          </p:nvPr>
+        </p:nvSpPr>
+        <p:spPr>
+          <a:prstGeom prst="rect">
+            <a:avLst/>
+          </a:prstGeom>
+        </p:spPr>
+        <p:txBody>
+          <a:bodyPr/>
+          <a:lstStyle/>
+          <a:p>
+            <a:r>
+              <a:rPr lang="en-GB" noProof="0" dirty="0"/>
+              <a:t>TPL Detection</a:t>
+            </a:r>
+          </a:p>
+        </p:txBody>
+      </p:sp>
+      <p:sp>
+        <p:nvSpPr>
+          <p:cNvPr id="238" name="Inhaltsplatzhalter 6"/>
+          <p:cNvSpPr txBox="1">
+            <a:spLocks noGrp="1"/>
+          </p:cNvSpPr>
+          <p:nvPr>
+            <p:ph type="body" idx="1"/>
+          </p:nvPr>
+        </p:nvSpPr>
+        <p:spPr>
+          <a:prstGeom prst="rect">
+            <a:avLst/>
+          </a:prstGeom>
+        </p:spPr>
+        <p:txBody>
+          <a:bodyPr/>
+          <a:lstStyle/>
+          <a:p>
+            <a:pPr marL="6350" indent="0">
+              <a:buNone/>
+            </a:pPr>
+            <a:endParaRPr lang="en-GB" noProof="0" dirty="0"/>
+          </a:p>
+        </p:txBody>
+      </p:sp>
+      <p:sp>
+        <p:nvSpPr>
+          <p:cNvPr id="239" name="Rechteck 2"/>
+          <p:cNvSpPr txBox="1"/>
+          <p:nvPr/>
+        </p:nvSpPr>
+        <p:spPr>
+          <a:xfrm>
+            <a:off x="955138" y="5000624"/>
+            <a:ext cx="6386695" cy="123111"/>
+          </a:xfrm>
+          <a:prstGeom prst="rect">
+            <a:avLst/>
+          </a:prstGeom>
+          <a:ln w="12700">
+            <a:miter lim="400000"/>
+          </a:ln>
+          <a:extLst>
+            <a:ext uri="{C572A759-6A51-4108-AA02-DFA0A04FC94B}">
+              <ma14:wrappingTextBoxFlag xmlns:ma14="http://schemas.microsoft.com/office/mac/drawingml/2011/main" xmlns:a14="http://schemas.microsoft.com/office/drawing/2010/main" xmlns:m="http://schemas.openxmlformats.org/officeDocument/2006/math" xmlns="" val="1"/>
+            </a:ext>
+          </a:extLst>
+        </p:spPr>
+        <p:txBody>
+          <a:bodyPr wrap="square" lIns="0" tIns="0" rIns="0" bIns="0">
+            <a:spAutoFit/>
+          </a:bodyPr>
+          <a:lstStyle>
+            <a:lvl1pPr>
+              <a:defRPr sz="800"/>
+            </a:lvl1pPr>
+          </a:lstStyle>
+          <a:p>
+            <a:r>
+              <a:rPr lang="en-GB" noProof="0" dirty="0"/>
+              <a:t>Zhan et al.: </a:t>
+            </a:r>
+            <a:r>
+              <a:rPr lang="en-US" dirty="0"/>
+              <a:t>The hidden complexities of Android TPL detection: An empirical analysis of techniques, challenges, and effectiveness, 2025</a:t>
+            </a:r>
+            <a:endParaRPr lang="en-GB" noProof="0" dirty="0"/>
+          </a:p>
+        </p:txBody>
+      </p:sp>
+      <p:pic>
+        <p:nvPicPr>
+          <p:cNvPr id="2054" name="Picture 6">
+            <a:extLst>
+              <a:ext uri="{FF2B5EF4-FFF2-40B4-BE49-F238E27FC236}">
+                <a16:creationId xmlns:a16="http://schemas.microsoft.com/office/drawing/2014/main" id="{26A42379-AA09-FB1F-E7D8-05CDC8016AFA}"/>
+              </a:ext>
+            </a:extLst>
+          </p:cNvPr>
+          <p:cNvPicPr>
+            <a:picLocks noChangeAspect="1" noChangeArrowheads="1"/>
+          </p:cNvPicPr>
+          <p:nvPr/>
+        </p:nvPicPr>
+        <p:blipFill>
+          <a:blip r:embed="rId3" cstate="print">
+            <a:extLst>
+              <a:ext uri="{28A0092B-C50C-407E-A947-70E740481C1C}">
+                <a14:useLocalDpi xmlns:a14="http://schemas.microsoft.com/office/drawing/2010/main" val="0"/>
+              </a:ext>
+            </a:extLst>
+          </a:blip>
+          <a:srcRect/>
+          <a:stretch>
+            <a:fillRect/>
+          </a:stretch>
+        </p:blipFill>
+        <p:spPr bwMode="auto">
+          <a:xfrm>
+            <a:off x="518348" y="1377992"/>
+            <a:ext cx="8014093" cy="3493644"/>
+          </a:xfrm>
+          <a:prstGeom prst="rect">
+            <a:avLst/>
+          </a:prstGeom>
+          <a:noFill/>
+          <a:extLst>
+            <a:ext uri="{909E8E84-426E-40DD-AFC4-6F175D3DCCD1}">
+              <a14:hiddenFill xmlns:a14="http://schemas.microsoft.com/office/drawing/2010/main">
+                <a:solidFill>
+                  <a:srgbClr val="FFFFFF"/>
+                </a:solidFill>
+              </a14:hiddenFill>
+            </a:ext>
+          </a:extLst>
+        </p:spPr>
+      </p:pic>
+    </p:spTree>
+  </p:cSld>
+  <p:clrMapOvr>
+    <a:masterClrMapping/>
+  </p:clrMapOvr>
+  <p:transition spd="med"/>
+</p:sld>
+</file>
+
+<file path=ppt/slides/slide6.xml><?xml version="1.0" encoding="utf-8"?>
+<p:sld xmlns:a="http://schemas.openxmlformats.org/drawingml/2006/main" xmlns:r="http://schemas.openxmlformats.org/officeDocument/2006/relationships" xmlns:p="http://schemas.openxmlformats.org/presentationml/2006/main">
+  <p:cSld>
+    <p:spTree>
+      <p:nvGrpSpPr>
+        <p:cNvPr id="1" name=""/>
+        <p:cNvGrpSpPr/>
+        <p:nvPr/>
+      </p:nvGrpSpPr>
+      <p:grpSpPr>
+        <a:xfrm>
+          <a:off x="0" y="0"/>
+          <a:ext cx="0" cy="0"/>
+          <a:chOff x="0" y="0"/>
+          <a:chExt cx="0" cy="0"/>
+        </a:xfrm>
+      </p:grpSpPr>
+      <p:sp>
+        <p:nvSpPr>
+          <p:cNvPr id="2" name="Titel 1">
+            <a:extLst>
+              <a:ext uri="{FF2B5EF4-FFF2-40B4-BE49-F238E27FC236}">
+                <a16:creationId xmlns:a16="http://schemas.microsoft.com/office/drawing/2014/main" id="{C5696F86-DE8C-D53D-6A9B-9D8CAD3C9263}"/>
+              </a:ext>
+            </a:extLst>
+          </p:cNvPr>
+          <p:cNvSpPr>
+            <a:spLocks noGrp="1"/>
+          </p:cNvSpPr>
+          <p:nvPr>
+            <p:ph type="title"/>
+          </p:nvPr>
+        </p:nvSpPr>
+        <p:spPr/>
+        <p:txBody>
+          <a:bodyPr/>
+          <a:lstStyle/>
+          <a:p>
+            <a:r>
+              <a:rPr lang="en-GB" noProof="0" dirty="0"/>
+              <a:t>Clustering-based Detection</a:t>
+            </a:r>
+          </a:p>
+        </p:txBody>
+      </p:sp>
+      <p:sp>
+        <p:nvSpPr>
+          <p:cNvPr id="3" name="Textplatzhalter 2">
+            <a:extLst>
+              <a:ext uri="{FF2B5EF4-FFF2-40B4-BE49-F238E27FC236}">
+                <a16:creationId xmlns:a16="http://schemas.microsoft.com/office/drawing/2014/main" id="{9985BDDE-FC19-30AE-F51A-0767894CD025}"/>
+              </a:ext>
+            </a:extLst>
+          </p:cNvPr>
+          <p:cNvSpPr>
+            <a:spLocks noGrp="1"/>
+          </p:cNvSpPr>
+          <p:nvPr>
+            <p:ph type="body" idx="1"/>
+          </p:nvPr>
+        </p:nvSpPr>
+        <p:spPr/>
+        <p:txBody>
+          <a:bodyPr>
+            <a:normAutofit/>
+          </a:bodyPr>
+          <a:lstStyle/>
+          <a:p>
+            <a:pPr>
+              <a:buFontTx/>
+              <a:buChar char="-"/>
+            </a:pPr>
+            <a:endParaRPr lang="en-GB" noProof="0" dirty="0"/>
+          </a:p>
+        </p:txBody>
+      </p:sp>
+      <p:sp>
+        <p:nvSpPr>
+          <p:cNvPr id="7" name="Rechteck 2">
+            <a:extLst>
+              <a:ext uri="{FF2B5EF4-FFF2-40B4-BE49-F238E27FC236}">
+                <a16:creationId xmlns:a16="http://schemas.microsoft.com/office/drawing/2014/main" id="{4B243EE4-1F38-7031-273F-20E9E88EC1E9}"/>
+              </a:ext>
+            </a:extLst>
+          </p:cNvPr>
+          <p:cNvSpPr txBox="1"/>
+          <p:nvPr/>
+        </p:nvSpPr>
+        <p:spPr>
+          <a:xfrm>
+            <a:off x="1291658" y="5020389"/>
+            <a:ext cx="5516683" cy="123111"/>
+          </a:xfrm>
+          <a:prstGeom prst="rect">
+            <a:avLst/>
+          </a:prstGeom>
+          <a:ln w="12700">
+            <a:miter lim="400000"/>
+          </a:ln>
+          <a:extLst>
+            <a:ext uri="{C572A759-6A51-4108-AA02-DFA0A04FC94B}">
+              <ma14:wrappingTextBoxFlag xmlns:ma14="http://schemas.microsoft.com/office/mac/drawingml/2011/main" xmlns:a14="http://schemas.microsoft.com/office/drawing/2010/main" xmlns:m="http://schemas.openxmlformats.org/officeDocument/2006/math" xmlns="" val="1"/>
+            </a:ext>
+          </a:extLst>
+        </p:spPr>
+        <p:txBody>
+          <a:bodyPr wrap="square" lIns="0" tIns="0" rIns="0" bIns="0">
+            <a:spAutoFit/>
+          </a:bodyPr>
+          <a:lstStyle>
+            <a:lvl1pPr>
+              <a:defRPr sz="800"/>
+            </a:lvl1pPr>
+          </a:lstStyle>
+          <a:p>
+            <a:r>
+              <a:rPr lang="en-GB" noProof="0" dirty="0" err="1"/>
+              <a:t>Ziang</a:t>
+            </a:r>
+            <a:r>
+              <a:rPr lang="en-GB" noProof="0" dirty="0"/>
+              <a:t> et al.</a:t>
+            </a:r>
+            <a:r>
+              <a:rPr lang="en-GB" dirty="0"/>
+              <a:t>: </a:t>
+            </a:r>
+            <a:r>
+              <a:rPr lang="en-US" dirty="0" err="1"/>
+              <a:t>LibRadar</a:t>
+            </a:r>
+            <a:r>
+              <a:rPr lang="en-US" dirty="0"/>
+              <a:t>: Fast and Accurate Detection of Third-party Libraries in Android Apps, 2016</a:t>
+            </a:r>
+            <a:endParaRPr lang="en-GB" noProof="0" dirty="0"/>
+          </a:p>
+        </p:txBody>
+      </p:sp>
+      <p:pic>
+        <p:nvPicPr>
+          <p:cNvPr id="8" name="Grafik 7">
+            <a:extLst>
+              <a:ext uri="{FF2B5EF4-FFF2-40B4-BE49-F238E27FC236}">
+                <a16:creationId xmlns:a16="http://schemas.microsoft.com/office/drawing/2014/main" id="{7A85C087-F4D6-F5E8-389D-78C25915F533}"/>
+              </a:ext>
+            </a:extLst>
+          </p:cNvPr>
+          <p:cNvPicPr>
+            <a:picLocks noChangeAspect="1"/>
+          </p:cNvPicPr>
+          <p:nvPr/>
+        </p:nvPicPr>
+        <p:blipFill>
+          <a:blip r:embed="rId3"/>
+          <a:stretch>
+            <a:fillRect/>
+          </a:stretch>
+        </p:blipFill>
+        <p:spPr>
+          <a:xfrm>
+            <a:off x="294502" y="1310096"/>
+            <a:ext cx="8309499" cy="3629436"/>
+          </a:xfrm>
+          <a:prstGeom prst="rect">
+            <a:avLst/>
+          </a:prstGeom>
+        </p:spPr>
+      </p:pic>
+    </p:spTree>
+    <p:extLst>
+      <p:ext uri="{BB962C8B-B14F-4D97-AF65-F5344CB8AC3E}">
+        <p14:creationId xmlns:p14="http://schemas.microsoft.com/office/powerpoint/2010/main" val="2721240723"/>
+      </p:ext>
+    </p:extLst>
+  </p:cSld>
+  <p:clrMapOvr>
+    <a:masterClrMapping/>
+  </p:clrMapOvr>
+  <p:transition spd="med"/>
+</p:sld>
+</file>
+
+<file path=ppt/slides/slide7.xml><?xml version="1.0" encoding="utf-8"?>
+<p:sld xmlns:a="http://schemas.openxmlformats.org/drawingml/2006/main" xmlns:r="http://schemas.openxmlformats.org/officeDocument/2006/relationships" xmlns:p="http://schemas.openxmlformats.org/presentationml/2006/main">
+  <p:cSld>
+    <p:spTree>
+      <p:nvGrpSpPr>
+        <p:cNvPr id="1" name=""/>
+        <p:cNvGrpSpPr/>
+        <p:nvPr/>
+      </p:nvGrpSpPr>
+      <p:grpSpPr>
+        <a:xfrm>
+          <a:off x="0" y="0"/>
+          <a:ext cx="0" cy="0"/>
+          <a:chOff x="0" y="0"/>
+          <a:chExt cx="0" cy="0"/>
+        </a:xfrm>
+      </p:grpSpPr>
+      <p:sp>
+        <p:nvSpPr>
+          <p:cNvPr id="2" name="Titel 1">
+            <a:extLst>
+              <a:ext uri="{FF2B5EF4-FFF2-40B4-BE49-F238E27FC236}">
+                <a16:creationId xmlns:a16="http://schemas.microsoft.com/office/drawing/2014/main" id="{3624D6FC-1DB7-E084-2BD2-88A7729BD652}"/>
+              </a:ext>
+            </a:extLst>
+          </p:cNvPr>
+          <p:cNvSpPr>
+            <a:spLocks noGrp="1"/>
+          </p:cNvSpPr>
+          <p:nvPr>
+            <p:ph type="title"/>
+          </p:nvPr>
+        </p:nvSpPr>
+        <p:spPr/>
+        <p:txBody>
+          <a:bodyPr/>
+          <a:lstStyle/>
+          <a:p>
+            <a:r>
+              <a:rPr lang="en-GB" noProof="0" dirty="0"/>
+              <a:t>Similarity-based Detection</a:t>
+            </a:r>
+          </a:p>
+        </p:txBody>
+      </p:sp>
+      <p:sp>
+        <p:nvSpPr>
+          <p:cNvPr id="3" name="Textplatzhalter 2">
+            <a:extLst>
+              <a:ext uri="{FF2B5EF4-FFF2-40B4-BE49-F238E27FC236}">
+                <a16:creationId xmlns:a16="http://schemas.microsoft.com/office/drawing/2014/main" id="{D069624F-879D-E669-2B6A-9A7EA31E1A16}"/>
+              </a:ext>
+            </a:extLst>
+          </p:cNvPr>
+          <p:cNvSpPr>
+            <a:spLocks noGrp="1"/>
+          </p:cNvSpPr>
+          <p:nvPr>
+            <p:ph type="body" idx="1"/>
+          </p:nvPr>
+        </p:nvSpPr>
+        <p:spPr/>
+        <p:txBody>
+          <a:bodyPr>
+            <a:normAutofit/>
+          </a:bodyPr>
+          <a:lstStyle/>
+          <a:p>
+            <a:pPr>
+              <a:buFontTx/>
+              <a:buChar char="-"/>
+            </a:pPr>
+            <a:endParaRPr lang="en-GB" noProof="0" dirty="0"/>
+          </a:p>
+          <a:p>
+            <a:pPr>
+              <a:buFontTx/>
+              <a:buChar char="-"/>
+            </a:pPr>
+            <a:endParaRPr lang="en-GB" noProof="0" dirty="0"/>
+          </a:p>
+        </p:txBody>
+      </p:sp>
+      <p:sp>
+        <p:nvSpPr>
+          <p:cNvPr id="7" name="Rechteck 2">
+            <a:extLst>
+              <a:ext uri="{FF2B5EF4-FFF2-40B4-BE49-F238E27FC236}">
+                <a16:creationId xmlns:a16="http://schemas.microsoft.com/office/drawing/2014/main" id="{8B259E80-764E-08C9-1206-E488BD4CED2F}"/>
+              </a:ext>
+            </a:extLst>
+          </p:cNvPr>
+          <p:cNvSpPr txBox="1"/>
+          <p:nvPr/>
+        </p:nvSpPr>
+        <p:spPr>
+          <a:xfrm>
+            <a:off x="502379" y="4989250"/>
+            <a:ext cx="6466592" cy="123111"/>
+          </a:xfrm>
+          <a:prstGeom prst="rect">
+            <a:avLst/>
+          </a:prstGeom>
+          <a:ln w="12700">
+            <a:miter lim="400000"/>
+          </a:ln>
+          <a:extLst>
+            <a:ext uri="{C572A759-6A51-4108-AA02-DFA0A04FC94B}">
+              <ma14:wrappingTextBoxFlag xmlns:ma14="http://schemas.microsoft.com/office/mac/drawingml/2011/main" xmlns:a14="http://schemas.microsoft.com/office/drawing/2010/main" xmlns:m="http://schemas.openxmlformats.org/officeDocument/2006/math" xmlns="" val="1"/>
+            </a:ext>
+          </a:extLst>
+        </p:spPr>
+        <p:txBody>
+          <a:bodyPr wrap="square" lIns="0" tIns="0" rIns="0" bIns="0">
+            <a:spAutoFit/>
+          </a:bodyPr>
+          <a:lstStyle>
+            <a:lvl1pPr>
+              <a:defRPr sz="800"/>
+            </a:lvl1pPr>
+          </a:lstStyle>
+          <a:p>
+            <a:r>
+              <a:rPr lang="en-GB" noProof="0" dirty="0"/>
+              <a:t>Wu et al: </a:t>
+            </a:r>
+            <a:r>
+              <a:rPr lang="en-US" dirty="0" err="1"/>
+              <a:t>LibScan</a:t>
+            </a:r>
+            <a:r>
+              <a:rPr lang="en-US" dirty="0"/>
+              <a:t>: Towards More Precise Third-Party Library Identification for Android Applications, 2023</a:t>
+            </a:r>
+            <a:endParaRPr lang="en-GB" noProof="0" dirty="0"/>
+          </a:p>
+        </p:txBody>
+      </p:sp>
+      <p:pic>
+        <p:nvPicPr>
+          <p:cNvPr id="5" name="Grafik 4">
+            <a:extLst>
+              <a:ext uri="{FF2B5EF4-FFF2-40B4-BE49-F238E27FC236}">
+                <a16:creationId xmlns:a16="http://schemas.microsoft.com/office/drawing/2014/main" id="{48A94FF4-0804-09D2-778B-0042740D30E4}"/>
+              </a:ext>
+            </a:extLst>
+          </p:cNvPr>
+          <p:cNvPicPr>
+            <a:picLocks noChangeAspect="1"/>
+          </p:cNvPicPr>
+          <p:nvPr/>
+        </p:nvPicPr>
+        <p:blipFill>
+          <a:blip r:embed="rId3"/>
+          <a:stretch>
+            <a:fillRect/>
+          </a:stretch>
+        </p:blipFill>
+        <p:spPr>
+          <a:xfrm>
+            <a:off x="0" y="1776445"/>
+            <a:ext cx="9144000" cy="2523531"/>
+          </a:xfrm>
+          <a:prstGeom prst="rect">
+            <a:avLst/>
+          </a:prstGeom>
+        </p:spPr>
+      </p:pic>
+    </p:spTree>
+    <p:extLst>
+      <p:ext uri="{BB962C8B-B14F-4D97-AF65-F5344CB8AC3E}">
+        <p14:creationId xmlns:p14="http://schemas.microsoft.com/office/powerpoint/2010/main" val="3047920506"/>
+      </p:ext>
+    </p:extLst>
+  </p:cSld>
+  <p:clrMapOvr>
+    <a:masterClrMapping/>
+  </p:clrMapOvr>
+  <p:transition spd="med"/>
+</p:sld>
+</file>
+
+<file path=ppt/slides/slide8.xml><?xml version="1.0" encoding="utf-8"?>
+<p:sld xmlns:a="http://schemas.openxmlformats.org/drawingml/2006/main" xmlns:r="http://schemas.openxmlformats.org/officeDocument/2006/relationships" xmlns:p="http://schemas.openxmlformats.org/presentationml/2006/main">
+  <p:cSld>
+    <p:spTree>
+      <p:nvGrpSpPr>
+        <p:cNvPr id="1" name=""/>
+        <p:cNvGrpSpPr/>
+        <p:nvPr/>
+      </p:nvGrpSpPr>
+      <p:grpSpPr>
+        <a:xfrm>
+          <a:off x="0" y="0"/>
+          <a:ext cx="0" cy="0"/>
+          <a:chOff x="0" y="0"/>
+          <a:chExt cx="0" cy="0"/>
+        </a:xfrm>
+      </p:grpSpPr>
+      <p:sp>
+        <p:nvSpPr>
+          <p:cNvPr id="2" name="Titel 1">
+            <a:extLst>
+              <a:ext uri="{FF2B5EF4-FFF2-40B4-BE49-F238E27FC236}">
                 <a16:creationId xmlns:a16="http://schemas.microsoft.com/office/drawing/2014/main" id="{4FBF0903-937F-DA4F-B55B-04633D576A2B}"/>
               </a:ext>
             </a:extLst>
@@ -7223,7 +10206,7 @@
           </a:ln>
           <a:extLst>
             <a:ext uri="{C572A759-6A51-4108-AA02-DFA0A04FC94B}">
-              <ma14:wrappingTextBoxFlag xmlns="" xmlns:m="http://schemas.openxmlformats.org/officeDocument/2006/math" xmlns:a14="http://schemas.microsoft.com/office/drawing/2010/main" xmlns:ma14="http://schemas.microsoft.com/office/mac/drawingml/2011/main" val="1"/>
+              <ma14:wrappingTextBoxFlag xmlns:ma14="http://schemas.microsoft.com/office/mac/drawingml/2011/main" xmlns:a14="http://schemas.microsoft.com/office/drawing/2010/main" xmlns:m="http://schemas.openxmlformats.org/officeDocument/2006/math" xmlns="" val="1"/>
             </a:ext>
           </a:extLst>
         </p:spPr>
@@ -7581,7 +10564,7 @@
 </p:sld>
 </file>
 
-<file path=ppt/slides/slide11.xml><?xml version="1.0" encoding="utf-8"?>
+<file path=ppt/slides/slide9.xml><?xml version="1.0" encoding="utf-8"?>
 <p:sld xmlns:a="http://schemas.openxmlformats.org/drawingml/2006/main" xmlns:r="http://schemas.openxmlformats.org/officeDocument/2006/relationships" xmlns:p="http://schemas.openxmlformats.org/presentationml/2006/main">
   <p:cSld>
     <p:spTree>
@@ -7614,7 +10597,7 @@
           </a:prstGeom>
           <a:extLst>
             <a:ext uri="{C572A759-6A51-4108-AA02-DFA0A04FC94B}">
-              <ma14:wrappingTextBoxFlag xmlns="" xmlns:m="http://schemas.openxmlformats.org/officeDocument/2006/math" xmlns:a14="http://schemas.microsoft.com/office/drawing/2010/main" xmlns:ma14="http://schemas.microsoft.com/office/mac/drawingml/2011/main" val="1"/>
+              <ma14:wrappingTextBoxFlag xmlns:ma14="http://schemas.microsoft.com/office/mac/drawingml/2011/main" xmlns:a14="http://schemas.microsoft.com/office/drawing/2010/main" xmlns:m="http://schemas.openxmlformats.org/officeDocument/2006/math" xmlns="" val="1"/>
             </a:ext>
           </a:extLst>
         </p:spPr>
@@ -7624,7 +10607,7 @@
           <a:p>
             <a:fld id="{86CB4B4D-7CA3-9044-876B-883B54F8677D}" type="slidenum">
               <a:rPr lang="en-GB" noProof="0" smtClean="0"/>
-              <a:t>11</a:t>
+              <a:t>9</a:t>
             </a:fld>
             <a:endParaRPr lang="en-GB" noProof="0" dirty="0"/>
           </a:p>
@@ -7704,7 +10687,7 @@
           </a:ln>
           <a:extLst>
             <a:ext uri="{C572A759-6A51-4108-AA02-DFA0A04FC94B}">
-              <ma14:wrappingTextBoxFlag xmlns="" xmlns:m="http://schemas.openxmlformats.org/officeDocument/2006/math" xmlns:a14="http://schemas.microsoft.com/office/drawing/2010/main" xmlns:ma14="http://schemas.microsoft.com/office/mac/drawingml/2011/main" val="1"/>
+              <ma14:wrappingTextBoxFlag xmlns:ma14="http://schemas.microsoft.com/office/mac/drawingml/2011/main" xmlns:a14="http://schemas.microsoft.com/office/drawing/2010/main" xmlns:m="http://schemas.openxmlformats.org/officeDocument/2006/math" xmlns="" val="1"/>
             </a:ext>
           </a:extLst>
         </p:spPr>
@@ -8183,2859 +11166,6 @@
       <p:bldP spid="4" grpId="0" animBg="1"/>
     </p:bldLst>
   </p:timing>
-</p:sld>
-</file>
-
-<file path=ppt/slides/slide12.xml><?xml version="1.0" encoding="utf-8"?>
-<p:sld xmlns:a="http://schemas.openxmlformats.org/drawingml/2006/main" xmlns:r="http://schemas.openxmlformats.org/officeDocument/2006/relationships" xmlns:p="http://schemas.openxmlformats.org/presentationml/2006/main">
-  <p:cSld>
-    <p:spTree>
-      <p:nvGrpSpPr>
-        <p:cNvPr id="1" name=""/>
-        <p:cNvGrpSpPr/>
-        <p:nvPr/>
-      </p:nvGrpSpPr>
-      <p:grpSpPr>
-        <a:xfrm>
-          <a:off x="0" y="0"/>
-          <a:ext cx="0" cy="0"/>
-          <a:chOff x="0" y="0"/>
-          <a:chExt cx="0" cy="0"/>
-        </a:xfrm>
-      </p:grpSpPr>
-      <p:sp>
-        <p:nvSpPr>
-          <p:cNvPr id="2" name="Titel 1">
-            <a:extLst>
-              <a:ext uri="{FF2B5EF4-FFF2-40B4-BE49-F238E27FC236}">
-                <a16:creationId xmlns:a16="http://schemas.microsoft.com/office/drawing/2014/main" id="{57D6814B-2D04-1F0E-EA9F-45E769D257A4}"/>
-              </a:ext>
-            </a:extLst>
-          </p:cNvPr>
-          <p:cNvSpPr>
-            <a:spLocks noGrp="1"/>
-          </p:cNvSpPr>
-          <p:nvPr>
-            <p:ph type="title"/>
-          </p:nvPr>
-        </p:nvSpPr>
-        <p:spPr/>
-        <p:txBody>
-          <a:bodyPr/>
-          <a:lstStyle/>
-          <a:p>
-            <a:r>
-              <a:rPr lang="en-GB" noProof="0" dirty="0"/>
-              <a:t>Results</a:t>
-            </a:r>
-          </a:p>
-        </p:txBody>
-      </p:sp>
-      <p:sp>
-        <p:nvSpPr>
-          <p:cNvPr id="3" name="Textplatzhalter 2">
-            <a:extLst>
-              <a:ext uri="{FF2B5EF4-FFF2-40B4-BE49-F238E27FC236}">
-                <a16:creationId xmlns:a16="http://schemas.microsoft.com/office/drawing/2014/main" id="{883FB313-EFAD-8342-8D55-1E37439BA966}"/>
-              </a:ext>
-            </a:extLst>
-          </p:cNvPr>
-          <p:cNvSpPr>
-            <a:spLocks noGrp="1"/>
-          </p:cNvSpPr>
-          <p:nvPr>
-            <p:ph type="body" sz="half" idx="1"/>
-          </p:nvPr>
-        </p:nvSpPr>
-        <p:spPr/>
-        <p:txBody>
-          <a:bodyPr/>
-          <a:lstStyle/>
-          <a:p>
-            <a:endParaRPr lang="en-GB" noProof="0" dirty="0"/>
-          </a:p>
-        </p:txBody>
-      </p:sp>
-      <p:pic>
-        <p:nvPicPr>
-          <p:cNvPr id="5" name="Grafik 4">
-            <a:extLst>
-              <a:ext uri="{FF2B5EF4-FFF2-40B4-BE49-F238E27FC236}">
-                <a16:creationId xmlns:a16="http://schemas.microsoft.com/office/drawing/2014/main" id="{F27121CE-2ADE-6164-5EEE-3A298CCF06B7}"/>
-              </a:ext>
-            </a:extLst>
-          </p:cNvPr>
-          <p:cNvPicPr>
-            <a:picLocks noChangeAspect="1"/>
-          </p:cNvPicPr>
-          <p:nvPr/>
-        </p:nvPicPr>
-        <p:blipFill>
-          <a:blip r:embed="rId2"/>
-          <a:stretch>
-            <a:fillRect/>
-          </a:stretch>
-        </p:blipFill>
-        <p:spPr>
-          <a:xfrm>
-            <a:off x="0" y="1338995"/>
-            <a:ext cx="9144000" cy="3783975"/>
-          </a:xfrm>
-          <a:prstGeom prst="rect">
-            <a:avLst/>
-          </a:prstGeom>
-        </p:spPr>
-      </p:pic>
-    </p:spTree>
-    <p:extLst>
-      <p:ext uri="{BB962C8B-B14F-4D97-AF65-F5344CB8AC3E}">
-        <p14:creationId xmlns:p14="http://schemas.microsoft.com/office/powerpoint/2010/main" val="1135385790"/>
-      </p:ext>
-    </p:extLst>
-  </p:cSld>
-  <p:clrMapOvr>
-    <a:masterClrMapping/>
-  </p:clrMapOvr>
-  <p:transition spd="med"/>
-</p:sld>
-</file>
-
-<file path=ppt/slides/slide13.xml><?xml version="1.0" encoding="utf-8"?>
-<p:sld xmlns:a="http://schemas.openxmlformats.org/drawingml/2006/main" xmlns:r="http://schemas.openxmlformats.org/officeDocument/2006/relationships" xmlns:p="http://schemas.openxmlformats.org/presentationml/2006/main">
-  <p:cSld>
-    <p:spTree>
-      <p:nvGrpSpPr>
-        <p:cNvPr id="1" name=""/>
-        <p:cNvGrpSpPr/>
-        <p:nvPr/>
-      </p:nvGrpSpPr>
-      <p:grpSpPr>
-        <a:xfrm>
-          <a:off x="0" y="0"/>
-          <a:ext cx="0" cy="0"/>
-          <a:chOff x="0" y="0"/>
-          <a:chExt cx="0" cy="0"/>
-        </a:xfrm>
-      </p:grpSpPr>
-      <p:sp>
-        <p:nvSpPr>
-          <p:cNvPr id="2" name="Titel 1">
-            <a:extLst>
-              <a:ext uri="{FF2B5EF4-FFF2-40B4-BE49-F238E27FC236}">
-                <a16:creationId xmlns:a16="http://schemas.microsoft.com/office/drawing/2014/main" id="{AE22AE0A-897B-16D9-DF86-8DDF04FEBFA5}"/>
-              </a:ext>
-            </a:extLst>
-          </p:cNvPr>
-          <p:cNvSpPr>
-            <a:spLocks noGrp="1"/>
-          </p:cNvSpPr>
-          <p:nvPr>
-            <p:ph type="title"/>
-          </p:nvPr>
-        </p:nvSpPr>
-        <p:spPr/>
-        <p:txBody>
-          <a:bodyPr/>
-          <a:lstStyle/>
-          <a:p>
-            <a:r>
-              <a:rPr lang="en-GB" noProof="0" dirty="0"/>
-              <a:t>Comparison</a:t>
-            </a:r>
-          </a:p>
-        </p:txBody>
-      </p:sp>
-      <p:sp>
-        <p:nvSpPr>
-          <p:cNvPr id="3" name="Textplatzhalter 2">
-            <a:extLst>
-              <a:ext uri="{FF2B5EF4-FFF2-40B4-BE49-F238E27FC236}">
-                <a16:creationId xmlns:a16="http://schemas.microsoft.com/office/drawing/2014/main" id="{7EF95789-0767-DE5A-8BD5-A53767EB060C}"/>
-              </a:ext>
-            </a:extLst>
-          </p:cNvPr>
-          <p:cNvSpPr>
-            <a:spLocks noGrp="1"/>
-          </p:cNvSpPr>
-          <p:nvPr>
-            <p:ph type="body" idx="1"/>
-          </p:nvPr>
-        </p:nvSpPr>
-        <p:spPr/>
-        <p:txBody>
-          <a:bodyPr/>
-          <a:lstStyle/>
-          <a:p>
-            <a:pPr marL="6350" indent="0">
-              <a:buNone/>
-            </a:pPr>
-            <a:endParaRPr lang="en-GB" noProof="0" dirty="0"/>
-          </a:p>
-        </p:txBody>
-      </p:sp>
-      <p:pic>
-        <p:nvPicPr>
-          <p:cNvPr id="5" name="Grafik 4">
-            <a:extLst>
-              <a:ext uri="{FF2B5EF4-FFF2-40B4-BE49-F238E27FC236}">
-                <a16:creationId xmlns:a16="http://schemas.microsoft.com/office/drawing/2014/main" id="{19AF21EC-B3D6-8A5D-D2FB-C3BEE5698937}"/>
-              </a:ext>
-            </a:extLst>
-          </p:cNvPr>
-          <p:cNvPicPr>
-            <a:picLocks noChangeAspect="1"/>
-          </p:cNvPicPr>
-          <p:nvPr/>
-        </p:nvPicPr>
-        <p:blipFill>
-          <a:blip r:embed="rId3"/>
-          <a:stretch>
-            <a:fillRect/>
-          </a:stretch>
-        </p:blipFill>
-        <p:spPr>
-          <a:xfrm>
-            <a:off x="3104307" y="2210286"/>
-            <a:ext cx="6039693" cy="1829055"/>
-          </a:xfrm>
-          <a:prstGeom prst="rect">
-            <a:avLst/>
-          </a:prstGeom>
-        </p:spPr>
-      </p:pic>
-      <p:pic>
-        <p:nvPicPr>
-          <p:cNvPr id="7" name="Grafik 6">
-            <a:extLst>
-              <a:ext uri="{FF2B5EF4-FFF2-40B4-BE49-F238E27FC236}">
-                <a16:creationId xmlns:a16="http://schemas.microsoft.com/office/drawing/2014/main" id="{9486D772-1629-E6C6-0F2D-4907051B6BEB}"/>
-              </a:ext>
-            </a:extLst>
-          </p:cNvPr>
-          <p:cNvPicPr>
-            <a:picLocks noChangeAspect="1"/>
-          </p:cNvPicPr>
-          <p:nvPr/>
-        </p:nvPicPr>
-        <p:blipFill>
-          <a:blip r:embed="rId4"/>
-          <a:stretch>
-            <a:fillRect/>
-          </a:stretch>
-        </p:blipFill>
-        <p:spPr>
-          <a:xfrm>
-            <a:off x="0" y="2253149"/>
-            <a:ext cx="2737023" cy="1743327"/>
-          </a:xfrm>
-          <a:prstGeom prst="rect">
-            <a:avLst/>
-          </a:prstGeom>
-        </p:spPr>
-      </p:pic>
-    </p:spTree>
-    <p:extLst>
-      <p:ext uri="{BB962C8B-B14F-4D97-AF65-F5344CB8AC3E}">
-        <p14:creationId xmlns:p14="http://schemas.microsoft.com/office/powerpoint/2010/main" val="1840906427"/>
-      </p:ext>
-    </p:extLst>
-  </p:cSld>
-  <p:clrMapOvr>
-    <a:masterClrMapping/>
-  </p:clrMapOvr>
-  <p:transition spd="med"/>
-</p:sld>
-</file>
-
-<file path=ppt/slides/slide14.xml><?xml version="1.0" encoding="utf-8"?>
-<p:sld xmlns:a="http://schemas.openxmlformats.org/drawingml/2006/main" xmlns:r="http://schemas.openxmlformats.org/officeDocument/2006/relationships" xmlns:p="http://schemas.openxmlformats.org/presentationml/2006/main">
-  <p:cSld>
-    <p:spTree>
-      <p:nvGrpSpPr>
-        <p:cNvPr id="1" name=""/>
-        <p:cNvGrpSpPr/>
-        <p:nvPr/>
-      </p:nvGrpSpPr>
-      <p:grpSpPr>
-        <a:xfrm>
-          <a:off x="0" y="0"/>
-          <a:ext cx="0" cy="0"/>
-          <a:chOff x="0" y="0"/>
-          <a:chExt cx="0" cy="0"/>
-        </a:xfrm>
-      </p:grpSpPr>
-      <p:sp>
-        <p:nvSpPr>
-          <p:cNvPr id="279" name="Titel 5"/>
-          <p:cNvSpPr txBox="1">
-            <a:spLocks noGrp="1"/>
-          </p:cNvSpPr>
-          <p:nvPr>
-            <p:ph type="title"/>
-          </p:nvPr>
-        </p:nvSpPr>
-        <p:spPr>
-          <a:prstGeom prst="rect">
-            <a:avLst/>
-          </a:prstGeom>
-        </p:spPr>
-        <p:txBody>
-          <a:bodyPr/>
-          <a:lstStyle/>
-          <a:p>
-            <a:r>
-              <a:rPr lang="en-GB" noProof="0" dirty="0"/>
-              <a:t>Conclusion</a:t>
-            </a:r>
-          </a:p>
-        </p:txBody>
-      </p:sp>
-      <p:sp>
-        <p:nvSpPr>
-          <p:cNvPr id="280" name="Inhaltsplatzhalter 6"/>
-          <p:cNvSpPr txBox="1">
-            <a:spLocks noGrp="1"/>
-          </p:cNvSpPr>
-          <p:nvPr>
-            <p:ph type="body" idx="1"/>
-          </p:nvPr>
-        </p:nvSpPr>
-        <p:spPr>
-          <a:prstGeom prst="rect">
-            <a:avLst/>
-          </a:prstGeom>
-        </p:spPr>
-        <p:txBody>
-          <a:bodyPr/>
-          <a:lstStyle/>
-          <a:p>
-            <a:r>
-              <a:rPr lang="en-GB" noProof="0" dirty="0"/>
-              <a:t>Standardized </a:t>
-            </a:r>
-            <a:r>
-              <a:rPr lang="en-GB" dirty="0"/>
-              <a:t>t</a:t>
-            </a:r>
-            <a:r>
-              <a:rPr lang="en-GB" noProof="0" dirty="0" err="1"/>
-              <a:t>esting</a:t>
-            </a:r>
-            <a:r>
-              <a:rPr lang="en-GB" noProof="0" dirty="0"/>
-              <a:t> data set required</a:t>
-            </a:r>
-          </a:p>
-          <a:p>
-            <a:r>
-              <a:rPr lang="en-GB" dirty="0"/>
-              <a:t>Version level accuracy scores low</a:t>
-            </a:r>
-          </a:p>
-          <a:p>
-            <a:r>
-              <a:rPr lang="en-GB" noProof="0" dirty="0"/>
-              <a:t>Existing Data sets not </a:t>
-            </a:r>
-            <a:r>
-              <a:rPr lang="en-GB" noProof="0" dirty="0" err="1"/>
-              <a:t>represen</a:t>
-            </a:r>
-            <a:r>
-              <a:rPr lang="en-GB" dirty="0" err="1"/>
-              <a:t>tative</a:t>
-            </a:r>
-            <a:endParaRPr lang="en-GB" noProof="0" dirty="0"/>
-          </a:p>
-          <a:p>
-            <a:endParaRPr lang="en-GB" noProof="0" dirty="0"/>
-          </a:p>
-        </p:txBody>
-      </p:sp>
-    </p:spTree>
-  </p:cSld>
-  <p:clrMapOvr>
-    <a:masterClrMapping/>
-  </p:clrMapOvr>
-  <p:transition spd="med"/>
-</p:sld>
-</file>
-
-<file path=ppt/slides/slide15.xml><?xml version="1.0" encoding="utf-8"?>
-<p:sld xmlns:a="http://schemas.openxmlformats.org/drawingml/2006/main" xmlns:r="http://schemas.openxmlformats.org/officeDocument/2006/relationships" xmlns:p="http://schemas.openxmlformats.org/presentationml/2006/main">
-  <p:cSld>
-    <p:spTree>
-      <p:nvGrpSpPr>
-        <p:cNvPr id="1" name=""/>
-        <p:cNvGrpSpPr/>
-        <p:nvPr/>
-      </p:nvGrpSpPr>
-      <p:grpSpPr>
-        <a:xfrm>
-          <a:off x="0" y="0"/>
-          <a:ext cx="0" cy="0"/>
-          <a:chOff x="0" y="0"/>
-          <a:chExt cx="0" cy="0"/>
-        </a:xfrm>
-      </p:grpSpPr>
-      <p:sp>
-        <p:nvSpPr>
-          <p:cNvPr id="2" name="Titel 1">
-            <a:extLst>
-              <a:ext uri="{FF2B5EF4-FFF2-40B4-BE49-F238E27FC236}">
-                <a16:creationId xmlns:a16="http://schemas.microsoft.com/office/drawing/2014/main" id="{7741DA49-3290-8238-53EF-E8ED8FB64730}"/>
-              </a:ext>
-            </a:extLst>
-          </p:cNvPr>
-          <p:cNvSpPr>
-            <a:spLocks noGrp="1"/>
-          </p:cNvSpPr>
-          <p:nvPr>
-            <p:ph type="title"/>
-          </p:nvPr>
-        </p:nvSpPr>
-        <p:spPr/>
-        <p:txBody>
-          <a:bodyPr/>
-          <a:lstStyle/>
-          <a:p>
-            <a:r>
-              <a:rPr lang="de-CH" dirty="0"/>
-              <a:t>Outlook</a:t>
-            </a:r>
-          </a:p>
-        </p:txBody>
-      </p:sp>
-      <p:sp>
-        <p:nvSpPr>
-          <p:cNvPr id="3" name="Textplatzhalter 2">
-            <a:extLst>
-              <a:ext uri="{FF2B5EF4-FFF2-40B4-BE49-F238E27FC236}">
-                <a16:creationId xmlns:a16="http://schemas.microsoft.com/office/drawing/2014/main" id="{37ACD56E-384A-8624-4795-9CAAE59B0AD7}"/>
-              </a:ext>
-            </a:extLst>
-          </p:cNvPr>
-          <p:cNvSpPr>
-            <a:spLocks noGrp="1"/>
-          </p:cNvSpPr>
-          <p:nvPr>
-            <p:ph type="body" idx="1"/>
-          </p:nvPr>
-        </p:nvSpPr>
-        <p:spPr/>
-        <p:txBody>
-          <a:bodyPr/>
-          <a:lstStyle/>
-          <a:p>
-            <a:r>
-              <a:rPr lang="de-CH" dirty="0"/>
-              <a:t>Data </a:t>
-            </a:r>
-            <a:r>
-              <a:rPr lang="de-CH" dirty="0" err="1"/>
-              <a:t>set</a:t>
-            </a:r>
-            <a:r>
-              <a:rPr lang="de-CH" dirty="0"/>
-              <a:t> </a:t>
-            </a:r>
-            <a:r>
-              <a:rPr lang="de-CH" dirty="0" err="1"/>
-              <a:t>offers</a:t>
-            </a:r>
-            <a:r>
-              <a:rPr lang="de-CH" dirty="0"/>
-              <a:t> </a:t>
-            </a:r>
-            <a:r>
-              <a:rPr lang="de-CH" dirty="0" err="1"/>
-              <a:t>obfuscated</a:t>
-            </a:r>
-            <a:r>
-              <a:rPr lang="de-CH" dirty="0"/>
-              <a:t> and non </a:t>
-            </a:r>
-            <a:r>
-              <a:rPr lang="de-CH" dirty="0" err="1"/>
-              <a:t>obfuscated</a:t>
-            </a:r>
-            <a:r>
-              <a:rPr lang="de-CH" dirty="0"/>
-              <a:t> hybrid </a:t>
-            </a:r>
-            <a:r>
-              <a:rPr lang="de-CH" dirty="0" err="1"/>
-              <a:t>apps</a:t>
-            </a:r>
-            <a:endParaRPr lang="de-CH" dirty="0"/>
-          </a:p>
-          <a:p>
-            <a:r>
-              <a:rPr lang="de-CH" dirty="0" err="1"/>
-              <a:t>Guaranteed</a:t>
-            </a:r>
-            <a:r>
-              <a:rPr lang="de-CH" dirty="0"/>
-              <a:t> </a:t>
-            </a:r>
-            <a:r>
-              <a:rPr lang="de-CH" dirty="0" err="1"/>
-              <a:t>accuracy</a:t>
-            </a:r>
-            <a:r>
-              <a:rPr lang="de-CH" dirty="0"/>
-              <a:t> </a:t>
-            </a:r>
-            <a:r>
-              <a:rPr lang="de-CH" dirty="0" err="1"/>
-              <a:t>by</a:t>
-            </a:r>
-            <a:r>
-              <a:rPr lang="de-CH" dirty="0"/>
-              <a:t> </a:t>
-            </a:r>
-            <a:r>
-              <a:rPr lang="de-CH" dirty="0" err="1"/>
-              <a:t>self-compiling</a:t>
-            </a:r>
-            <a:endParaRPr lang="de-CH" dirty="0"/>
-          </a:p>
-          <a:p>
-            <a:r>
-              <a:rPr lang="de-CH" dirty="0" err="1"/>
-              <a:t>Used</a:t>
-            </a:r>
-            <a:r>
-              <a:rPr lang="de-CH" dirty="0"/>
-              <a:t> </a:t>
-            </a:r>
-            <a:r>
-              <a:rPr lang="de-CH" dirty="0" err="1"/>
-              <a:t>for</a:t>
-            </a:r>
-            <a:r>
-              <a:rPr lang="de-CH" dirty="0"/>
-              <a:t>:</a:t>
-            </a:r>
-          </a:p>
-          <a:p>
-            <a:pPr lvl="1"/>
-            <a:r>
-              <a:rPr lang="de-CH" dirty="0"/>
-              <a:t>Benchmarking</a:t>
-            </a:r>
-          </a:p>
-          <a:p>
-            <a:pPr lvl="1"/>
-            <a:r>
-              <a:rPr lang="de-CH" dirty="0"/>
-              <a:t>Training </a:t>
-            </a:r>
-            <a:r>
-              <a:rPr lang="de-CH" dirty="0" err="1"/>
-              <a:t>models</a:t>
-            </a:r>
-            <a:endParaRPr lang="de-CH" dirty="0"/>
-          </a:p>
-          <a:p>
-            <a:pPr lvl="2"/>
-            <a:endParaRPr lang="de-CH" dirty="0"/>
-          </a:p>
-        </p:txBody>
-      </p:sp>
-    </p:spTree>
-    <p:extLst>
-      <p:ext uri="{BB962C8B-B14F-4D97-AF65-F5344CB8AC3E}">
-        <p14:creationId xmlns:p14="http://schemas.microsoft.com/office/powerpoint/2010/main" val="1098706551"/>
-      </p:ext>
-    </p:extLst>
-  </p:cSld>
-  <p:clrMapOvr>
-    <a:masterClrMapping/>
-  </p:clrMapOvr>
-  <p:transition spd="med"/>
-</p:sld>
-</file>
-
-<file path=ppt/slides/slide16.xml><?xml version="1.0" encoding="utf-8"?>
-<p:sld xmlns:a="http://schemas.openxmlformats.org/drawingml/2006/main" xmlns:r="http://schemas.openxmlformats.org/officeDocument/2006/relationships" xmlns:p="http://schemas.openxmlformats.org/presentationml/2006/main">
-  <p:cSld>
-    <p:spTree>
-      <p:nvGrpSpPr>
-        <p:cNvPr id="1" name=""/>
-        <p:cNvGrpSpPr/>
-        <p:nvPr/>
-      </p:nvGrpSpPr>
-      <p:grpSpPr>
-        <a:xfrm>
-          <a:off x="0" y="0"/>
-          <a:ext cx="0" cy="0"/>
-          <a:chOff x="0" y="0"/>
-          <a:chExt cx="0" cy="0"/>
-        </a:xfrm>
-      </p:grpSpPr>
-      <p:sp>
-        <p:nvSpPr>
-          <p:cNvPr id="2" name="Titel 1">
-            <a:extLst>
-              <a:ext uri="{FF2B5EF4-FFF2-40B4-BE49-F238E27FC236}">
-                <a16:creationId xmlns:a16="http://schemas.microsoft.com/office/drawing/2014/main" id="{B04BA110-79EB-FC4E-CCF3-F9CDB950A6B2}"/>
-              </a:ext>
-            </a:extLst>
-          </p:cNvPr>
-          <p:cNvSpPr>
-            <a:spLocks noGrp="1"/>
-          </p:cNvSpPr>
-          <p:nvPr>
-            <p:ph type="title"/>
-          </p:nvPr>
-        </p:nvSpPr>
-        <p:spPr/>
-        <p:txBody>
-          <a:bodyPr/>
-          <a:lstStyle/>
-          <a:p>
-            <a:r>
-              <a:rPr lang="de-CH" dirty="0"/>
-              <a:t>Questions</a:t>
-            </a:r>
-          </a:p>
-        </p:txBody>
-      </p:sp>
-      <p:sp>
-        <p:nvSpPr>
-          <p:cNvPr id="3" name="Textplatzhalter 2">
-            <a:extLst>
-              <a:ext uri="{FF2B5EF4-FFF2-40B4-BE49-F238E27FC236}">
-                <a16:creationId xmlns:a16="http://schemas.microsoft.com/office/drawing/2014/main" id="{896D67A2-A6D9-AA66-62E5-F7E61E793C3C}"/>
-              </a:ext>
-            </a:extLst>
-          </p:cNvPr>
-          <p:cNvSpPr>
-            <a:spLocks noGrp="1"/>
-          </p:cNvSpPr>
-          <p:nvPr>
-            <p:ph type="body" idx="1"/>
-          </p:nvPr>
-        </p:nvSpPr>
-        <p:spPr/>
-        <p:txBody>
-          <a:bodyPr/>
-          <a:lstStyle/>
-          <a:p>
-            <a:endParaRPr lang="de-CH" dirty="0"/>
-          </a:p>
-        </p:txBody>
-      </p:sp>
-      <p:pic>
-        <p:nvPicPr>
-          <p:cNvPr id="3074" name="Picture 2" descr="To Get the Most Out of Your Team, Ask Better Questions - Business HorsePower">
-            <a:extLst>
-              <a:ext uri="{FF2B5EF4-FFF2-40B4-BE49-F238E27FC236}">
-                <a16:creationId xmlns:a16="http://schemas.microsoft.com/office/drawing/2014/main" id="{3B8D2727-3E4C-92D3-5858-A0DAC4C4594C}"/>
-              </a:ext>
-            </a:extLst>
-          </p:cNvPr>
-          <p:cNvPicPr>
-            <a:picLocks noChangeAspect="1" noChangeArrowheads="1"/>
-          </p:cNvPicPr>
-          <p:nvPr/>
-        </p:nvPicPr>
-        <p:blipFill>
-          <a:blip r:embed="rId2">
-            <a:extLst>
-              <a:ext uri="{28A0092B-C50C-407E-A947-70E740481C1C}">
-                <a14:useLocalDpi xmlns:a14="http://schemas.microsoft.com/office/drawing/2010/main" val="0"/>
-              </a:ext>
-            </a:extLst>
-          </a:blip>
-          <a:srcRect/>
-          <a:stretch>
-            <a:fillRect/>
-          </a:stretch>
-        </p:blipFill>
-        <p:spPr bwMode="auto">
-          <a:xfrm>
-            <a:off x="3500437" y="2053251"/>
-            <a:ext cx="2143125" cy="2143125"/>
-          </a:xfrm>
-          <a:prstGeom prst="rect">
-            <a:avLst/>
-          </a:prstGeom>
-          <a:noFill/>
-          <a:extLst>
-            <a:ext uri="{909E8E84-426E-40DD-AFC4-6F175D3DCCD1}">
-              <a14:hiddenFill xmlns:a14="http://schemas.microsoft.com/office/drawing/2010/main">
-                <a:solidFill>
-                  <a:srgbClr val="FFFFFF"/>
-                </a:solidFill>
-              </a14:hiddenFill>
-            </a:ext>
-          </a:extLst>
-        </p:spPr>
-      </p:pic>
-    </p:spTree>
-    <p:extLst>
-      <p:ext uri="{BB962C8B-B14F-4D97-AF65-F5344CB8AC3E}">
-        <p14:creationId xmlns:p14="http://schemas.microsoft.com/office/powerpoint/2010/main" val="3560432698"/>
-      </p:ext>
-    </p:extLst>
-  </p:cSld>
-  <p:clrMapOvr>
-    <a:masterClrMapping/>
-  </p:clrMapOvr>
-  <p:transition spd="med"/>
-</p:sld>
-</file>
-
-<file path=ppt/slides/slide17.xml><?xml version="1.0" encoding="utf-8"?>
-<p:sld xmlns:a="http://schemas.openxmlformats.org/drawingml/2006/main" xmlns:r="http://schemas.openxmlformats.org/officeDocument/2006/relationships" xmlns:p="http://schemas.openxmlformats.org/presentationml/2006/main">
-  <p:cSld>
-    <p:spTree>
-      <p:nvGrpSpPr>
-        <p:cNvPr id="1" name=""/>
-        <p:cNvGrpSpPr/>
-        <p:nvPr/>
-      </p:nvGrpSpPr>
-      <p:grpSpPr>
-        <a:xfrm>
-          <a:off x="0" y="0"/>
-          <a:ext cx="0" cy="0"/>
-          <a:chOff x="0" y="0"/>
-          <a:chExt cx="0" cy="0"/>
-        </a:xfrm>
-      </p:grpSpPr>
-      <p:sp>
-        <p:nvSpPr>
-          <p:cNvPr id="2" name="Titel 1">
-            <a:extLst>
-              <a:ext uri="{FF2B5EF4-FFF2-40B4-BE49-F238E27FC236}">
-                <a16:creationId xmlns:a16="http://schemas.microsoft.com/office/drawing/2014/main" id="{7B5772FA-734F-9E99-172F-0C992B662051}"/>
-              </a:ext>
-            </a:extLst>
-          </p:cNvPr>
-          <p:cNvSpPr>
-            <a:spLocks noGrp="1"/>
-          </p:cNvSpPr>
-          <p:nvPr>
-            <p:ph type="title"/>
-          </p:nvPr>
-        </p:nvSpPr>
-        <p:spPr/>
-        <p:txBody>
-          <a:bodyPr/>
-          <a:lstStyle/>
-          <a:p>
-            <a:r>
-              <a:rPr lang="de-CH" dirty="0"/>
-              <a:t>Sources</a:t>
-            </a:r>
-          </a:p>
-        </p:txBody>
-      </p:sp>
-      <p:sp>
-        <p:nvSpPr>
-          <p:cNvPr id="3" name="Textplatzhalter 2">
-            <a:extLst>
-              <a:ext uri="{FF2B5EF4-FFF2-40B4-BE49-F238E27FC236}">
-                <a16:creationId xmlns:a16="http://schemas.microsoft.com/office/drawing/2014/main" id="{74354FFC-02B3-3B87-6BAA-F0B02256B2B2}"/>
-              </a:ext>
-            </a:extLst>
-          </p:cNvPr>
-          <p:cNvSpPr>
-            <a:spLocks noGrp="1"/>
-          </p:cNvSpPr>
-          <p:nvPr>
-            <p:ph type="body" idx="1"/>
-          </p:nvPr>
-        </p:nvSpPr>
-        <p:spPr/>
-        <p:txBody>
-          <a:bodyPr>
-            <a:normAutofit/>
-          </a:bodyPr>
-          <a:lstStyle/>
-          <a:p>
-            <a:r>
-              <a:rPr lang="de-CH" sz="1200" dirty="0"/>
-              <a:t>Slide 3: </a:t>
-            </a:r>
-          </a:p>
-          <a:p>
-            <a:pPr lvl="1"/>
-            <a:r>
-              <a:rPr lang="en-GB" sz="1200" dirty="0"/>
-              <a:t>1: https://avatars.githubusercontent.com/u/14101776?s=280&amp;v=4, 25.05.26; </a:t>
-            </a:r>
-          </a:p>
-          <a:p>
-            <a:pPr lvl="1"/>
-            <a:r>
-              <a:rPr lang="en-GB" sz="1200" dirty="0"/>
-              <a:t>2: https://de.wikipedia.org/wiki/React_Native, 25.05.26</a:t>
-            </a:r>
-          </a:p>
-          <a:p>
-            <a:endParaRPr lang="en-GB" sz="1200" dirty="0"/>
-          </a:p>
-          <a:p>
-            <a:r>
-              <a:rPr lang="de-CH" sz="1200" dirty="0"/>
-              <a:t> Slide 4: </a:t>
-            </a:r>
-            <a:r>
-              <a:rPr lang="en-US" sz="1200" dirty="0"/>
-              <a:t> </a:t>
-            </a:r>
-          </a:p>
-          <a:p>
-            <a:pPr lvl="1"/>
-            <a:r>
-              <a:rPr lang="en-US" sz="1200" dirty="0"/>
-              <a:t>B. </a:t>
-            </a:r>
-            <a:r>
-              <a:rPr lang="en-US" sz="1200" dirty="0" err="1"/>
-              <a:t>Gokkaya</a:t>
-            </a:r>
-            <a:r>
-              <a:rPr lang="en-US" sz="1200" dirty="0"/>
-              <a:t>, L. Aniello, and B. Halak, “Software supply chain: A taxonomy of attacks, mitigations and risk assessment strategies,” Journal of Information Security and Applications, vol. 97, p. 104324, 2026. [Online]. Available: https://www.sciencedirect.com/science/article/pii/S2214212625003606,</a:t>
-            </a:r>
-          </a:p>
-          <a:p>
-            <a:pPr lvl="1"/>
-            <a:r>
-              <a:rPr lang="en-US" sz="1200" dirty="0"/>
-              <a:t>H. Wang, Y. Guo, Z. Ma, and X. Chen, “Wukong: a scalable and accurate two-phase approach to android app clone detection,” in Proceedings of the 2015 International Symposium on Software Testing and Analysis, ser. ISSTA 2015. New York, NY, USA: Association for Computing Machinery, 2015, p. 71–82. [Online]. Available: https://doi.org/10.1145/2771783.2771795</a:t>
-            </a:r>
-            <a:endParaRPr lang="de-CH" sz="1200" dirty="0"/>
-          </a:p>
-        </p:txBody>
-      </p:sp>
-    </p:spTree>
-    <p:extLst>
-      <p:ext uri="{BB962C8B-B14F-4D97-AF65-F5344CB8AC3E}">
-        <p14:creationId xmlns:p14="http://schemas.microsoft.com/office/powerpoint/2010/main" val="2771359829"/>
-      </p:ext>
-    </p:extLst>
-  </p:cSld>
-  <p:clrMapOvr>
-    <a:masterClrMapping/>
-  </p:clrMapOvr>
-  <p:transition spd="med"/>
-</p:sld>
-</file>
-
-<file path=ppt/slides/slide18.xml><?xml version="1.0" encoding="utf-8"?>
-<p:sld xmlns:a="http://schemas.openxmlformats.org/drawingml/2006/main" xmlns:r="http://schemas.openxmlformats.org/officeDocument/2006/relationships" xmlns:p="http://schemas.openxmlformats.org/presentationml/2006/main">
-  <p:cSld>
-    <p:spTree>
-      <p:nvGrpSpPr>
-        <p:cNvPr id="1" name=""/>
-        <p:cNvGrpSpPr/>
-        <p:nvPr/>
-      </p:nvGrpSpPr>
-      <p:grpSpPr>
-        <a:xfrm>
-          <a:off x="0" y="0"/>
-          <a:ext cx="0" cy="0"/>
-          <a:chOff x="0" y="0"/>
-          <a:chExt cx="0" cy="0"/>
-        </a:xfrm>
-      </p:grpSpPr>
-      <p:sp>
-        <p:nvSpPr>
-          <p:cNvPr id="2" name="Titel 1">
-            <a:extLst>
-              <a:ext uri="{FF2B5EF4-FFF2-40B4-BE49-F238E27FC236}">
-                <a16:creationId xmlns:a16="http://schemas.microsoft.com/office/drawing/2014/main" id="{A5E6EC18-A6F4-2505-4267-EA7BC6D11697}"/>
-              </a:ext>
-            </a:extLst>
-          </p:cNvPr>
-          <p:cNvSpPr>
-            <a:spLocks noGrp="1"/>
-          </p:cNvSpPr>
-          <p:nvPr>
-            <p:ph type="title"/>
-          </p:nvPr>
-        </p:nvSpPr>
-        <p:spPr/>
-        <p:txBody>
-          <a:bodyPr/>
-          <a:lstStyle/>
-          <a:p>
-            <a:r>
-              <a:rPr lang="de-CH" dirty="0"/>
-              <a:t>Sources</a:t>
-            </a:r>
-          </a:p>
-        </p:txBody>
-      </p:sp>
-      <p:sp>
-        <p:nvSpPr>
-          <p:cNvPr id="3" name="Textplatzhalter 2">
-            <a:extLst>
-              <a:ext uri="{FF2B5EF4-FFF2-40B4-BE49-F238E27FC236}">
-                <a16:creationId xmlns:a16="http://schemas.microsoft.com/office/drawing/2014/main" id="{CDB6D2A8-F848-45BA-BD73-E0AAF6286C3A}"/>
-              </a:ext>
-            </a:extLst>
-          </p:cNvPr>
-          <p:cNvSpPr>
-            <a:spLocks noGrp="1"/>
-          </p:cNvSpPr>
-          <p:nvPr>
-            <p:ph type="body" idx="1"/>
-          </p:nvPr>
-        </p:nvSpPr>
-        <p:spPr/>
-        <p:txBody>
-          <a:bodyPr>
-            <a:normAutofit/>
-          </a:bodyPr>
-          <a:lstStyle/>
-          <a:p>
-            <a:r>
-              <a:rPr lang="de-CH" sz="1200" dirty="0"/>
-              <a:t>Slide 5: </a:t>
-            </a:r>
-            <a:r>
-              <a:rPr lang="en-US" sz="1200" dirty="0"/>
-              <a:t> L. Zhan, J. Ming, J. Fu, G. Peng, L. Sha, and L. Lan, “The hidden complexities of android </a:t>
-            </a:r>
-            <a:r>
-              <a:rPr lang="en-US" sz="1200" dirty="0" err="1"/>
-              <a:t>tpl</a:t>
-            </a:r>
-            <a:r>
-              <a:rPr lang="en-US" sz="1200" dirty="0"/>
-              <a:t> detection: An empirical analysis of techniques, challenges, and effectiveness,” Computers Security, vol. 159, p. 104672, 2025. [Online]. Available: https://www.sciencedirect.com/science/article/pii/S016740482500361X</a:t>
-            </a:r>
-          </a:p>
-          <a:p>
-            <a:r>
-              <a:rPr lang="en-US" sz="1200" dirty="0"/>
-              <a:t>Slide 6-8: Z. Ma, H. Wang, Y. Guo, and X. Chen, “</a:t>
-            </a:r>
-            <a:r>
-              <a:rPr lang="en-US" sz="1200" dirty="0" err="1"/>
-              <a:t>Libradar</a:t>
-            </a:r>
-            <a:r>
-              <a:rPr lang="en-US" sz="1200" dirty="0"/>
-              <a:t>: Fast and accurate detection of third-party libraries in android apps,” in 2016 IEEE/ACM 38th International Conference on Software Engineering Companion (ICSE-C), 2016, pp. 653–656.</a:t>
-            </a:r>
-          </a:p>
-          <a:p>
-            <a:r>
-              <a:rPr lang="en-US" sz="1200" dirty="0"/>
-              <a:t>Slide 9: Y. Wu, C. Sun, D. Zeng, G. Tan, S. Ma, and P. Wang, “</a:t>
-            </a:r>
-            <a:r>
-              <a:rPr lang="en-US" sz="1200" dirty="0" err="1"/>
-              <a:t>LibScan</a:t>
-            </a:r>
-            <a:r>
-              <a:rPr lang="en-US" sz="1200" dirty="0"/>
-              <a:t>: Towards more precise Third-Party library identification for android applications,” in 32nd USENIX Security Symposium (USENIX Security 23). Anaheim, CA: USENIX Association, Aug. 2023, pp. 3385–3402. [Online]. Available: https://www.usenix.org/conference/usenixsecurity23/presentation/wu-yafei</a:t>
-            </a:r>
-          </a:p>
-          <a:p>
-            <a:r>
-              <a:rPr lang="de-CH" sz="1200" dirty="0"/>
-              <a:t>Slide 10: D. Pan, Y. </a:t>
-            </a:r>
-            <a:r>
-              <a:rPr lang="de-CH" sz="1200" dirty="0" err="1"/>
-              <a:t>Xu</a:t>
-            </a:r>
-            <a:r>
-              <a:rPr lang="de-CH" sz="1200" dirty="0"/>
-              <a:t>, R. Feng, D. </a:t>
-            </a:r>
-            <a:r>
-              <a:rPr lang="de-CH" sz="1200" dirty="0" err="1"/>
-              <a:t>Yu</a:t>
-            </a:r>
-            <a:r>
-              <a:rPr lang="de-CH" sz="1200" dirty="0"/>
-              <a:t>, J. Chen, Y. Fang, and Y. Zhang, “Pay </a:t>
-            </a:r>
-            <a:r>
-              <a:rPr lang="de-CH" sz="1200" dirty="0" err="1"/>
-              <a:t>your</a:t>
-            </a:r>
-            <a:r>
-              <a:rPr lang="de-CH" sz="1200" dirty="0"/>
-              <a:t> </a:t>
-            </a:r>
-            <a:r>
-              <a:rPr lang="de-CH" sz="1200" dirty="0" err="1"/>
-              <a:t>attention</a:t>
-            </a:r>
-            <a:r>
-              <a:rPr lang="de-CH" sz="1200" dirty="0"/>
-              <a:t> on </a:t>
-            </a:r>
-            <a:r>
-              <a:rPr lang="de-CH" sz="1200" dirty="0" err="1"/>
-              <a:t>lib</a:t>
-            </a:r>
-            <a:r>
-              <a:rPr lang="de-CH" sz="1200" dirty="0"/>
-              <a:t>! </a:t>
-            </a:r>
-            <a:r>
-              <a:rPr lang="de-CH" sz="1200" dirty="0" err="1"/>
-              <a:t>android</a:t>
-            </a:r>
-            <a:r>
-              <a:rPr lang="de-CH" sz="1200" dirty="0"/>
-              <a:t> </a:t>
-            </a:r>
-            <a:r>
-              <a:rPr lang="de-CH" sz="1200" dirty="0" err="1"/>
-              <a:t>third</a:t>
-            </a:r>
-            <a:r>
-              <a:rPr lang="de-CH" sz="1200" dirty="0"/>
-              <a:t>-party </a:t>
-            </a:r>
-            <a:r>
-              <a:rPr lang="de-CH" sz="1200" dirty="0" err="1"/>
-              <a:t>library</a:t>
-            </a:r>
-            <a:r>
-              <a:rPr lang="de-CH" sz="1200" dirty="0"/>
-              <a:t> </a:t>
-            </a:r>
-            <a:r>
-              <a:rPr lang="de-CH" sz="1200" dirty="0" err="1"/>
-              <a:t>detection</a:t>
-            </a:r>
-            <a:r>
-              <a:rPr lang="de-CH" sz="1200" dirty="0"/>
-              <a:t> via feature </a:t>
-            </a:r>
-            <a:r>
-              <a:rPr lang="de-CH" sz="1200" dirty="0" err="1"/>
-              <a:t>language</a:t>
-            </a:r>
-            <a:r>
-              <a:rPr lang="de-CH" sz="1200" dirty="0"/>
-              <a:t> </a:t>
-            </a:r>
-            <a:r>
-              <a:rPr lang="de-CH" sz="1200" dirty="0" err="1"/>
-              <a:t>model</a:t>
-            </a:r>
-            <a:r>
-              <a:rPr lang="de-CH" sz="1200" dirty="0"/>
-              <a:t>,” in 2025 IEEE International Conference on Software Analysis, Evolution and Reengineering (SANER), 2025, pp. 217–228.</a:t>
-            </a:r>
-          </a:p>
-        </p:txBody>
-      </p:sp>
-    </p:spTree>
-    <p:extLst>
-      <p:ext uri="{BB962C8B-B14F-4D97-AF65-F5344CB8AC3E}">
-        <p14:creationId xmlns:p14="http://schemas.microsoft.com/office/powerpoint/2010/main" val="388014762"/>
-      </p:ext>
-    </p:extLst>
-  </p:cSld>
-  <p:clrMapOvr>
-    <a:masterClrMapping/>
-  </p:clrMapOvr>
-  <p:transition spd="med"/>
-</p:sld>
-</file>
-
-<file path=ppt/slides/slide19.xml><?xml version="1.0" encoding="utf-8"?>
-<p:sld xmlns:a="http://schemas.openxmlformats.org/drawingml/2006/main" xmlns:r="http://schemas.openxmlformats.org/officeDocument/2006/relationships" xmlns:p="http://schemas.openxmlformats.org/presentationml/2006/main">
-  <p:cSld>
-    <p:spTree>
-      <p:nvGrpSpPr>
-        <p:cNvPr id="1" name=""/>
-        <p:cNvGrpSpPr/>
-        <p:nvPr/>
-      </p:nvGrpSpPr>
-      <p:grpSpPr>
-        <a:xfrm>
-          <a:off x="0" y="0"/>
-          <a:ext cx="0" cy="0"/>
-          <a:chOff x="0" y="0"/>
-          <a:chExt cx="0" cy="0"/>
-        </a:xfrm>
-      </p:grpSpPr>
-      <p:sp>
-        <p:nvSpPr>
-          <p:cNvPr id="2" name="Titel 1">
-            <a:extLst>
-              <a:ext uri="{FF2B5EF4-FFF2-40B4-BE49-F238E27FC236}">
-                <a16:creationId xmlns:a16="http://schemas.microsoft.com/office/drawing/2014/main" id="{66C7CD65-6661-91AA-8B9F-1EED1D45B331}"/>
-              </a:ext>
-            </a:extLst>
-          </p:cNvPr>
-          <p:cNvSpPr>
-            <a:spLocks noGrp="1"/>
-          </p:cNvSpPr>
-          <p:nvPr>
-            <p:ph type="title"/>
-          </p:nvPr>
-        </p:nvSpPr>
-        <p:spPr/>
-        <p:txBody>
-          <a:bodyPr/>
-          <a:lstStyle/>
-          <a:p>
-            <a:r>
-              <a:rPr lang="de-CH" dirty="0"/>
-              <a:t>Sources</a:t>
-            </a:r>
-          </a:p>
-        </p:txBody>
-      </p:sp>
-      <p:sp>
-        <p:nvSpPr>
-          <p:cNvPr id="3" name="Textplatzhalter 2">
-            <a:extLst>
-              <a:ext uri="{FF2B5EF4-FFF2-40B4-BE49-F238E27FC236}">
-                <a16:creationId xmlns:a16="http://schemas.microsoft.com/office/drawing/2014/main" id="{D1C032E6-BA7D-1718-54D2-F0420CEE8463}"/>
-              </a:ext>
-            </a:extLst>
-          </p:cNvPr>
-          <p:cNvSpPr>
-            <a:spLocks noGrp="1"/>
-          </p:cNvSpPr>
-          <p:nvPr>
-            <p:ph type="body" idx="1"/>
-          </p:nvPr>
-        </p:nvSpPr>
-        <p:spPr/>
-        <p:txBody>
-          <a:bodyPr>
-            <a:normAutofit/>
-          </a:bodyPr>
-          <a:lstStyle/>
-          <a:p>
-            <a:r>
-              <a:rPr lang="de-CH" sz="1200" dirty="0"/>
-              <a:t>Slide 11-13: </a:t>
-            </a:r>
-            <a:r>
-              <a:rPr lang="en-US" sz="1200" dirty="0"/>
-              <a:t>J. Gu, H. Lu, G. Nan, Y. Lin, K. Wang, Y. Guo, Y. Cao, and Y. Liu, “Revisiting third-party library detection: A ground truth dataset and its implications across security tasks,” pp. 1–3, 7–9, 2025. [Online]. Available: https://arxiv.org/abs/2509.04091</a:t>
-            </a:r>
-          </a:p>
-          <a:p>
-            <a:endParaRPr lang="de-CH" sz="1200" dirty="0"/>
-          </a:p>
-        </p:txBody>
-      </p:sp>
-    </p:spTree>
-    <p:extLst>
-      <p:ext uri="{BB962C8B-B14F-4D97-AF65-F5344CB8AC3E}">
-        <p14:creationId xmlns:p14="http://schemas.microsoft.com/office/powerpoint/2010/main" val="1637844945"/>
-      </p:ext>
-    </p:extLst>
-  </p:cSld>
-  <p:clrMapOvr>
-    <a:masterClrMapping/>
-  </p:clrMapOvr>
-  <p:transition spd="med"/>
-</p:sld>
-</file>
-
-<file path=ppt/slides/slide2.xml><?xml version="1.0" encoding="utf-8"?>
-<p:sld xmlns:a="http://schemas.openxmlformats.org/drawingml/2006/main" xmlns:r="http://schemas.openxmlformats.org/officeDocument/2006/relationships" xmlns:p="http://schemas.openxmlformats.org/presentationml/2006/main">
-  <p:cSld>
-    <p:spTree>
-      <p:nvGrpSpPr>
-        <p:cNvPr id="1" name=""/>
-        <p:cNvGrpSpPr/>
-        <p:nvPr/>
-      </p:nvGrpSpPr>
-      <p:grpSpPr>
-        <a:xfrm>
-          <a:off x="0" y="0"/>
-          <a:ext cx="0" cy="0"/>
-          <a:chOff x="0" y="0"/>
-          <a:chExt cx="0" cy="0"/>
-        </a:xfrm>
-      </p:grpSpPr>
-      <p:sp>
-        <p:nvSpPr>
-          <p:cNvPr id="210" name="Foliennummernplatzhalter 5"/>
-          <p:cNvSpPr txBox="1">
-            <a:spLocks noGrp="1"/>
-          </p:cNvSpPr>
-          <p:nvPr>
-            <p:ph type="sldNum" sz="quarter" idx="2"/>
-          </p:nvPr>
-        </p:nvSpPr>
-        <p:spPr>
-          <a:xfrm>
-            <a:off x="540275" y="5002569"/>
-            <a:ext cx="57708" cy="123111"/>
-          </a:xfrm>
-          <a:prstGeom prst="rect">
-            <a:avLst/>
-          </a:prstGeom>
-          <a:extLst>
-            <a:ext uri="{C572A759-6A51-4108-AA02-DFA0A04FC94B}">
-              <ma14:wrappingTextBoxFlag xmlns="" xmlns:m="http://schemas.openxmlformats.org/officeDocument/2006/math" xmlns:a14="http://schemas.microsoft.com/office/drawing/2010/main" xmlns:ma14="http://schemas.microsoft.com/office/mac/drawingml/2011/main" val="1"/>
-            </a:ext>
-          </a:extLst>
-        </p:spPr>
-        <p:txBody>
-          <a:bodyPr/>
-          <a:lstStyle/>
-          <a:p>
-            <a:r>
-              <a:rPr lang="en-GB" noProof="0" dirty="0"/>
-              <a:t>2</a:t>
-            </a:r>
-          </a:p>
-        </p:txBody>
-      </p:sp>
-      <p:sp>
-        <p:nvSpPr>
-          <p:cNvPr id="211" name="Textplatzhalter 3"/>
-          <p:cNvSpPr txBox="1">
-            <a:spLocks noGrp="1"/>
-          </p:cNvSpPr>
-          <p:nvPr>
-            <p:ph type="body" idx="1"/>
-          </p:nvPr>
-        </p:nvSpPr>
-        <p:spPr>
-          <a:xfrm>
-            <a:off x="539999" y="1853101"/>
-            <a:ext cx="7992441" cy="2610000"/>
-          </a:xfrm>
-          <a:prstGeom prst="rect">
-            <a:avLst/>
-          </a:prstGeom>
-        </p:spPr>
-        <p:txBody>
-          <a:bodyPr/>
-          <a:lstStyle/>
-          <a:p>
-            <a:pPr marL="457200" indent="-457200">
-              <a:spcBef>
-                <a:spcPts val="600"/>
-              </a:spcBef>
-              <a:buClr>
-                <a:srgbClr val="000000"/>
-              </a:buClr>
-              <a:buFontTx/>
-              <a:buAutoNum type="arabicPeriod"/>
-              <a:defRPr spc="-100"/>
-            </a:pPr>
-            <a:r>
-              <a:rPr lang="en-GB" noProof="0" dirty="0"/>
-              <a:t>Background</a:t>
-            </a:r>
-          </a:p>
-          <a:p>
-            <a:pPr marL="457200" indent="-457200">
-              <a:spcBef>
-                <a:spcPts val="600"/>
-              </a:spcBef>
-              <a:buClr>
-                <a:srgbClr val="000000"/>
-              </a:buClr>
-              <a:buFontTx/>
-              <a:buAutoNum type="arabicPeriod"/>
-              <a:defRPr spc="-100"/>
-            </a:pPr>
-            <a:r>
-              <a:rPr lang="en-GB" noProof="0" dirty="0"/>
-              <a:t>Introduction</a:t>
-            </a:r>
-          </a:p>
-          <a:p>
-            <a:pPr marL="457200" indent="-457200">
-              <a:spcBef>
-                <a:spcPts val="600"/>
-              </a:spcBef>
-              <a:buClr>
-                <a:srgbClr val="000000"/>
-              </a:buClr>
-              <a:buFontTx/>
-              <a:buAutoNum type="arabicPeriod"/>
-              <a:defRPr spc="-100"/>
-            </a:pPr>
-            <a:r>
-              <a:rPr lang="en-GB" noProof="0" dirty="0"/>
-              <a:t>TPL Detection</a:t>
-            </a:r>
-          </a:p>
-          <a:p>
-            <a:pPr marL="457200" indent="-457200">
-              <a:spcBef>
-                <a:spcPts val="600"/>
-              </a:spcBef>
-              <a:buClr>
-                <a:srgbClr val="000000"/>
-              </a:buClr>
-              <a:buFontTx/>
-              <a:buAutoNum type="arabicPeriod"/>
-              <a:defRPr spc="-100"/>
-            </a:pPr>
-            <a:r>
-              <a:rPr lang="en-GB" noProof="0" dirty="0"/>
-              <a:t>Benchmarking</a:t>
-            </a:r>
-          </a:p>
-          <a:p>
-            <a:pPr marL="457200" indent="-457200">
-              <a:spcBef>
-                <a:spcPts val="600"/>
-              </a:spcBef>
-              <a:buClr>
-                <a:srgbClr val="000000"/>
-              </a:buClr>
-              <a:buFontTx/>
-              <a:buAutoNum type="arabicPeriod"/>
-              <a:defRPr spc="-100"/>
-            </a:pPr>
-            <a:r>
-              <a:rPr lang="en-GB" dirty="0"/>
-              <a:t>Results</a:t>
-            </a:r>
-            <a:endParaRPr lang="en-GB" noProof="0" dirty="0"/>
-          </a:p>
-          <a:p>
-            <a:pPr marL="457200" indent="-457200">
-              <a:spcBef>
-                <a:spcPts val="600"/>
-              </a:spcBef>
-              <a:buClr>
-                <a:srgbClr val="000000"/>
-              </a:buClr>
-              <a:buFontTx/>
-              <a:buAutoNum type="arabicPeriod"/>
-              <a:defRPr spc="-100"/>
-            </a:pPr>
-            <a:r>
-              <a:rPr lang="en-GB" dirty="0"/>
-              <a:t>Conclusion</a:t>
-            </a:r>
-          </a:p>
-          <a:p>
-            <a:pPr marL="457200" indent="-457200">
-              <a:spcBef>
-                <a:spcPts val="600"/>
-              </a:spcBef>
-              <a:buClr>
-                <a:srgbClr val="000000"/>
-              </a:buClr>
-              <a:buFontTx/>
-              <a:buAutoNum type="arabicPeriod"/>
-              <a:defRPr spc="-100"/>
-            </a:pPr>
-            <a:r>
-              <a:rPr lang="en-GB" noProof="0" dirty="0"/>
-              <a:t>Outlook</a:t>
-            </a:r>
-          </a:p>
-        </p:txBody>
-      </p:sp>
-      <p:sp>
-        <p:nvSpPr>
-          <p:cNvPr id="212" name="Titel 6"/>
-          <p:cNvSpPr txBox="1">
-            <a:spLocks noGrp="1"/>
-          </p:cNvSpPr>
-          <p:nvPr>
-            <p:ph type="title"/>
-          </p:nvPr>
-        </p:nvSpPr>
-        <p:spPr>
-          <a:xfrm>
-            <a:off x="539999" y="680399"/>
-            <a:ext cx="7020002" cy="410370"/>
-          </a:xfrm>
-          <a:prstGeom prst="rect">
-            <a:avLst/>
-          </a:prstGeom>
-        </p:spPr>
-        <p:txBody>
-          <a:bodyPr/>
-          <a:lstStyle/>
-          <a:p>
-            <a:r>
-              <a:rPr lang="en-GB" noProof="0" dirty="0"/>
-              <a:t>Outline</a:t>
-            </a:r>
-          </a:p>
-        </p:txBody>
-      </p:sp>
-    </p:spTree>
-  </p:cSld>
-  <p:clrMapOvr>
-    <a:masterClrMapping/>
-  </p:clrMapOvr>
-  <p:transition spd="med"/>
-</p:sld>
-</file>
-
-<file path=ppt/slides/slide3.xml><?xml version="1.0" encoding="utf-8"?>
-<p:sld xmlns:a="http://schemas.openxmlformats.org/drawingml/2006/main" xmlns:r="http://schemas.openxmlformats.org/officeDocument/2006/relationships" xmlns:p="http://schemas.openxmlformats.org/presentationml/2006/main">
-  <p:cSld>
-    <p:spTree>
-      <p:nvGrpSpPr>
-        <p:cNvPr id="1" name=""/>
-        <p:cNvGrpSpPr/>
-        <p:nvPr/>
-      </p:nvGrpSpPr>
-      <p:grpSpPr>
-        <a:xfrm>
-          <a:off x="0" y="0"/>
-          <a:ext cx="0" cy="0"/>
-          <a:chOff x="0" y="0"/>
-          <a:chExt cx="0" cy="0"/>
-        </a:xfrm>
-      </p:grpSpPr>
-      <p:sp>
-        <p:nvSpPr>
-          <p:cNvPr id="217" name="Foliennummernplatzhalter 5"/>
-          <p:cNvSpPr txBox="1">
-            <a:spLocks noGrp="1"/>
-          </p:cNvSpPr>
-          <p:nvPr>
-            <p:ph type="sldNum" sz="quarter" idx="2"/>
-          </p:nvPr>
-        </p:nvSpPr>
-        <p:spPr>
-          <a:prstGeom prst="rect">
-            <a:avLst/>
-          </a:prstGeom>
-          <a:extLst>
-            <a:ext uri="{C572A759-6A51-4108-AA02-DFA0A04FC94B}">
-              <ma14:wrappingTextBoxFlag xmlns="" xmlns:m="http://schemas.openxmlformats.org/officeDocument/2006/math" xmlns:a14="http://schemas.microsoft.com/office/drawing/2010/main" xmlns:ma14="http://schemas.microsoft.com/office/mac/drawingml/2011/main" val="1"/>
-            </a:ext>
-          </a:extLst>
-        </p:spPr>
-        <p:txBody>
-          <a:bodyPr/>
-          <a:lstStyle/>
-          <a:p>
-            <a:fld id="{86CB4B4D-7CA3-9044-876B-883B54F8677D}" type="slidenum">
-              <a:rPr lang="en-GB" noProof="0" smtClean="0"/>
-              <a:t>3</a:t>
-            </a:fld>
-            <a:endParaRPr lang="en-GB" noProof="0" dirty="0"/>
-          </a:p>
-        </p:txBody>
-      </p:sp>
-      <p:sp>
-        <p:nvSpPr>
-          <p:cNvPr id="218" name="Titel 5"/>
-          <p:cNvSpPr txBox="1">
-            <a:spLocks noGrp="1"/>
-          </p:cNvSpPr>
-          <p:nvPr>
-            <p:ph type="title"/>
-          </p:nvPr>
-        </p:nvSpPr>
-        <p:spPr>
-          <a:xfrm>
-            <a:off x="539999" y="676800"/>
-            <a:ext cx="7020002" cy="410370"/>
-          </a:xfrm>
-          <a:prstGeom prst="rect">
-            <a:avLst/>
-          </a:prstGeom>
-        </p:spPr>
-        <p:txBody>
-          <a:bodyPr>
-            <a:normAutofit/>
-          </a:bodyPr>
-          <a:lstStyle/>
-          <a:p>
-            <a:r>
-              <a:rPr lang="en-GB" noProof="0" dirty="0"/>
-              <a:t>Background</a:t>
-            </a:r>
-          </a:p>
-        </p:txBody>
-      </p:sp>
-      <p:sp>
-        <p:nvSpPr>
-          <p:cNvPr id="219" name="Inhaltsplatzhalter 6"/>
-          <p:cNvSpPr txBox="1">
-            <a:spLocks noGrp="1"/>
-          </p:cNvSpPr>
-          <p:nvPr>
-            <p:ph type="body" sz="half" idx="1"/>
-          </p:nvPr>
-        </p:nvSpPr>
-        <p:spPr>
-          <a:xfrm>
-            <a:off x="539999" y="1491629"/>
-            <a:ext cx="4968106" cy="3266371"/>
-          </a:xfrm>
-          <a:prstGeom prst="rect">
-            <a:avLst/>
-          </a:prstGeom>
-        </p:spPr>
-        <p:txBody>
-          <a:bodyPr/>
-          <a:lstStyle/>
-          <a:p>
-            <a:endParaRPr lang="en-GB" noProof="0" dirty="0"/>
-          </a:p>
-          <a:p>
-            <a:endParaRPr lang="en-GB" dirty="0"/>
-          </a:p>
-          <a:p>
-            <a:r>
-              <a:rPr lang="en-GB" noProof="0" dirty="0"/>
-              <a:t>Bachelors Thesis: </a:t>
-            </a:r>
-            <a:r>
-              <a:rPr lang="en-GB" i="1" noProof="0" dirty="0"/>
-              <a:t>Building a Ground-Truth Dataset of Android Hybrid Applications and Their Third-Party Libraries</a:t>
-            </a:r>
-          </a:p>
-          <a:p>
-            <a:endParaRPr lang="en-GB" noProof="0" dirty="0"/>
-          </a:p>
-          <a:p>
-            <a:endParaRPr lang="en-GB" noProof="0" dirty="0"/>
-          </a:p>
-        </p:txBody>
-      </p:sp>
-      <p:sp>
-        <p:nvSpPr>
-          <p:cNvPr id="223" name="Rechteck 2"/>
-          <p:cNvSpPr txBox="1"/>
-          <p:nvPr/>
-        </p:nvSpPr>
-        <p:spPr>
-          <a:xfrm>
-            <a:off x="990649" y="5002567"/>
-            <a:ext cx="5964774" cy="123111"/>
-          </a:xfrm>
-          <a:prstGeom prst="rect">
-            <a:avLst/>
-          </a:prstGeom>
-          <a:ln w="12700">
-            <a:miter lim="400000"/>
-          </a:ln>
-          <a:extLst>
-            <a:ext uri="{C572A759-6A51-4108-AA02-DFA0A04FC94B}">
-              <ma14:wrappingTextBoxFlag xmlns="" xmlns:m="http://schemas.openxmlformats.org/officeDocument/2006/math" xmlns:a14="http://schemas.microsoft.com/office/drawing/2010/main" xmlns:ma14="http://schemas.microsoft.com/office/mac/drawingml/2011/main" val="1"/>
-            </a:ext>
-          </a:extLst>
-        </p:spPr>
-        <p:txBody>
-          <a:bodyPr wrap="none" lIns="0" tIns="0" rIns="0" bIns="0">
-            <a:spAutoFit/>
-          </a:bodyPr>
-          <a:lstStyle>
-            <a:lvl1pPr>
-              <a:defRPr sz="800"/>
-            </a:lvl1pPr>
-          </a:lstStyle>
-          <a:p>
-            <a:r>
-              <a:rPr lang="en-GB" noProof="0" dirty="0"/>
-              <a:t>1: https://avatars.githubusercontent.com/u/14101776?s=280&amp;v=4, 25.05.26; 2: https://de.wikipedia.org/wiki/React_Native, 25.05.26 </a:t>
-            </a:r>
-          </a:p>
-        </p:txBody>
-      </p:sp>
-      <p:pic>
-        <p:nvPicPr>
-          <p:cNvPr id="1026" name="Picture 2" descr="Flutter · GitHub">
-            <a:extLst>
-              <a:ext uri="{FF2B5EF4-FFF2-40B4-BE49-F238E27FC236}">
-                <a16:creationId xmlns:a16="http://schemas.microsoft.com/office/drawing/2014/main" id="{1E360B14-D4C8-CD02-0E54-014D2DC37A5D}"/>
-              </a:ext>
-            </a:extLst>
-          </p:cNvPr>
-          <p:cNvPicPr>
-            <a:picLocks noChangeAspect="1" noChangeArrowheads="1"/>
-          </p:cNvPicPr>
-          <p:nvPr/>
-        </p:nvPicPr>
-        <p:blipFill>
-          <a:blip r:embed="rId3">
-            <a:extLst>
-              <a:ext uri="{28A0092B-C50C-407E-A947-70E740481C1C}">
-                <a14:useLocalDpi xmlns:a14="http://schemas.microsoft.com/office/drawing/2010/main" val="0"/>
-              </a:ext>
-            </a:extLst>
-          </a:blip>
-          <a:srcRect/>
-          <a:stretch>
-            <a:fillRect/>
-          </a:stretch>
-        </p:blipFill>
-        <p:spPr bwMode="auto">
-          <a:xfrm>
-            <a:off x="6955423" y="2659496"/>
-            <a:ext cx="1604281" cy="1604281"/>
-          </a:xfrm>
-          <a:prstGeom prst="rect">
-            <a:avLst/>
-          </a:prstGeom>
-          <a:noFill/>
-          <a:extLst>
-            <a:ext uri="{909E8E84-426E-40DD-AFC4-6F175D3DCCD1}">
-              <a14:hiddenFill xmlns:a14="http://schemas.microsoft.com/office/drawing/2010/main">
-                <a:solidFill>
-                  <a:srgbClr val="FFFFFF"/>
-                </a:solidFill>
-              </a14:hiddenFill>
-            </a:ext>
-          </a:extLst>
-        </p:spPr>
-      </p:pic>
-      <p:pic>
-        <p:nvPicPr>
-          <p:cNvPr id="1028" name="Picture 4" descr="React Native – Wikipedia">
-            <a:extLst>
-              <a:ext uri="{FF2B5EF4-FFF2-40B4-BE49-F238E27FC236}">
-                <a16:creationId xmlns:a16="http://schemas.microsoft.com/office/drawing/2014/main" id="{E6BB07F2-D070-31AE-859F-8B159547726E}"/>
-              </a:ext>
-            </a:extLst>
-          </p:cNvPr>
-          <p:cNvPicPr>
-            <a:picLocks noChangeAspect="1" noChangeArrowheads="1"/>
-          </p:cNvPicPr>
-          <p:nvPr/>
-        </p:nvPicPr>
-        <p:blipFill>
-          <a:blip r:embed="rId4">
-            <a:extLst>
-              <a:ext uri="{28A0092B-C50C-407E-A947-70E740481C1C}">
-                <a14:useLocalDpi xmlns:a14="http://schemas.microsoft.com/office/drawing/2010/main" val="0"/>
-              </a:ext>
-            </a:extLst>
-          </a:blip>
-          <a:srcRect/>
-          <a:stretch>
-            <a:fillRect/>
-          </a:stretch>
-        </p:blipFill>
-        <p:spPr bwMode="auto">
-          <a:xfrm>
-            <a:off x="5839165" y="1450493"/>
-            <a:ext cx="1720836" cy="1492343"/>
-          </a:xfrm>
-          <a:prstGeom prst="rect">
-            <a:avLst/>
-          </a:prstGeom>
-          <a:noFill/>
-          <a:extLst>
-            <a:ext uri="{909E8E84-426E-40DD-AFC4-6F175D3DCCD1}">
-              <a14:hiddenFill xmlns:a14="http://schemas.microsoft.com/office/drawing/2010/main">
-                <a:solidFill>
-                  <a:srgbClr val="FFFFFF"/>
-                </a:solidFill>
-              </a14:hiddenFill>
-            </a:ext>
-          </a:extLst>
-        </p:spPr>
-      </p:pic>
-    </p:spTree>
-  </p:cSld>
-  <p:clrMapOvr>
-    <a:masterClrMapping/>
-  </p:clrMapOvr>
-  <p:transition spd="med"/>
-</p:sld>
-</file>
-
-<file path=ppt/slides/slide4.xml><?xml version="1.0" encoding="utf-8"?>
-<p:sld xmlns:a="http://schemas.openxmlformats.org/drawingml/2006/main" xmlns:r="http://schemas.openxmlformats.org/officeDocument/2006/relationships" xmlns:p="http://schemas.openxmlformats.org/presentationml/2006/main">
-  <p:cSld>
-    <p:spTree>
-      <p:nvGrpSpPr>
-        <p:cNvPr id="1" name=""/>
-        <p:cNvGrpSpPr/>
-        <p:nvPr/>
-      </p:nvGrpSpPr>
-      <p:grpSpPr>
-        <a:xfrm>
-          <a:off x="0" y="0"/>
-          <a:ext cx="0" cy="0"/>
-          <a:chOff x="0" y="0"/>
-          <a:chExt cx="0" cy="0"/>
-        </a:xfrm>
-      </p:grpSpPr>
-      <p:sp>
-        <p:nvSpPr>
-          <p:cNvPr id="225" name="Foliennummernplatzhalter 5"/>
-          <p:cNvSpPr txBox="1">
-            <a:spLocks noGrp="1"/>
-          </p:cNvSpPr>
-          <p:nvPr>
-            <p:ph type="sldNum" sz="quarter" idx="2"/>
-          </p:nvPr>
-        </p:nvSpPr>
-        <p:spPr>
-          <a:prstGeom prst="rect">
-            <a:avLst/>
-          </a:prstGeom>
-          <a:extLst>
-            <a:ext uri="{C572A759-6A51-4108-AA02-DFA0A04FC94B}">
-              <ma14:wrappingTextBoxFlag xmlns="" xmlns:m="http://schemas.openxmlformats.org/officeDocument/2006/math" xmlns:a14="http://schemas.microsoft.com/office/drawing/2010/main" xmlns:ma14="http://schemas.microsoft.com/office/mac/drawingml/2011/main" val="1"/>
-            </a:ext>
-          </a:extLst>
-        </p:spPr>
-        <p:txBody>
-          <a:bodyPr/>
-          <a:lstStyle/>
-          <a:p>
-            <a:fld id="{86CB4B4D-7CA3-9044-876B-883B54F8677D}" type="slidenum">
-              <a:rPr lang="en-GB" noProof="0" smtClean="0"/>
-              <a:t>4</a:t>
-            </a:fld>
-            <a:endParaRPr lang="en-GB" noProof="0" dirty="0"/>
-          </a:p>
-        </p:txBody>
-      </p:sp>
-      <p:sp>
-        <p:nvSpPr>
-          <p:cNvPr id="226" name="Titel 5"/>
-          <p:cNvSpPr txBox="1">
-            <a:spLocks noGrp="1"/>
-          </p:cNvSpPr>
-          <p:nvPr>
-            <p:ph type="title"/>
-          </p:nvPr>
-        </p:nvSpPr>
-        <p:spPr>
-          <a:xfrm>
-            <a:off x="539999" y="676800"/>
-            <a:ext cx="7020002" cy="410370"/>
-          </a:xfrm>
-          <a:prstGeom prst="rect">
-            <a:avLst/>
-          </a:prstGeom>
-        </p:spPr>
-        <p:txBody>
-          <a:bodyPr/>
-          <a:lstStyle/>
-          <a:p>
-            <a:r>
-              <a:rPr lang="en-GB" noProof="0" dirty="0"/>
-              <a:t>Introduction</a:t>
-            </a:r>
-          </a:p>
-        </p:txBody>
-      </p:sp>
-      <p:sp>
-        <p:nvSpPr>
-          <p:cNvPr id="227" name="Inhaltsplatzhalter 6"/>
-          <p:cNvSpPr txBox="1">
-            <a:spLocks noGrp="1"/>
-          </p:cNvSpPr>
-          <p:nvPr>
-            <p:ph type="body" sz="half" idx="1"/>
-          </p:nvPr>
-        </p:nvSpPr>
-        <p:spPr>
-          <a:xfrm>
-            <a:off x="539999" y="1491629"/>
-            <a:ext cx="4968106" cy="3266371"/>
-          </a:xfrm>
-          <a:prstGeom prst="rect">
-            <a:avLst/>
-          </a:prstGeom>
-        </p:spPr>
-        <p:txBody>
-          <a:bodyPr/>
-          <a:lstStyle/>
-          <a:p>
-            <a:endParaRPr lang="en-GB" noProof="0" dirty="0"/>
-          </a:p>
-          <a:p>
-            <a:endParaRPr lang="en-GB" noProof="0" dirty="0"/>
-          </a:p>
-        </p:txBody>
-      </p:sp>
-      <p:sp>
-        <p:nvSpPr>
-          <p:cNvPr id="231" name="Rechteck 2"/>
-          <p:cNvSpPr txBox="1"/>
-          <p:nvPr/>
-        </p:nvSpPr>
-        <p:spPr>
-          <a:xfrm>
-            <a:off x="990649" y="5002567"/>
-            <a:ext cx="5084725" cy="123111"/>
-          </a:xfrm>
-          <a:prstGeom prst="rect">
-            <a:avLst/>
-          </a:prstGeom>
-          <a:ln w="12700">
-            <a:miter lim="400000"/>
-          </a:ln>
-          <a:extLst>
-            <a:ext uri="{C572A759-6A51-4108-AA02-DFA0A04FC94B}">
-              <ma14:wrappingTextBoxFlag xmlns="" xmlns:m="http://schemas.openxmlformats.org/officeDocument/2006/math" xmlns:a14="http://schemas.microsoft.com/office/drawing/2010/main" xmlns:ma14="http://schemas.microsoft.com/office/mac/drawingml/2011/main" val="1"/>
-            </a:ext>
-          </a:extLst>
-        </p:spPr>
-        <p:txBody>
-          <a:bodyPr wrap="none" lIns="0" tIns="0" rIns="0" bIns="0">
-            <a:spAutoFit/>
-          </a:bodyPr>
-          <a:lstStyle>
-            <a:lvl1pPr>
-              <a:defRPr sz="800"/>
-            </a:lvl1pPr>
-          </a:lstStyle>
-          <a:p>
-            <a:r>
-              <a:rPr lang="en-GB" noProof="0" dirty="0" err="1"/>
-              <a:t>Gokkaya</a:t>
-            </a:r>
-            <a:r>
-              <a:rPr lang="en-GB" noProof="0" dirty="0"/>
-              <a:t> et al.: </a:t>
-            </a:r>
-            <a:r>
-              <a:rPr lang="en-US" dirty="0"/>
-              <a:t>Software supply chain: A taxonomy of attacks, mitigations and risk assessment strategies, 2026</a:t>
-            </a:r>
-          </a:p>
-        </p:txBody>
-      </p:sp>
-      <p:pic>
-        <p:nvPicPr>
-          <p:cNvPr id="1028" name="Picture 4">
-            <a:extLst>
-              <a:ext uri="{FF2B5EF4-FFF2-40B4-BE49-F238E27FC236}">
-                <a16:creationId xmlns:a16="http://schemas.microsoft.com/office/drawing/2014/main" id="{3E176B66-A12E-BC82-C612-C1C931B1FED5}"/>
-              </a:ext>
-            </a:extLst>
-          </p:cNvPr>
-          <p:cNvPicPr>
-            <a:picLocks noChangeAspect="1" noChangeArrowheads="1"/>
-          </p:cNvPicPr>
-          <p:nvPr/>
-        </p:nvPicPr>
-        <p:blipFill>
-          <a:blip r:embed="rId3">
-            <a:extLst>
-              <a:ext uri="{28A0092B-C50C-407E-A947-70E740481C1C}">
-                <a14:useLocalDpi xmlns:a14="http://schemas.microsoft.com/office/drawing/2010/main" val="0"/>
-              </a:ext>
-            </a:extLst>
-          </a:blip>
-          <a:srcRect/>
-          <a:stretch>
-            <a:fillRect/>
-          </a:stretch>
-        </p:blipFill>
-        <p:spPr bwMode="auto">
-          <a:xfrm>
-            <a:off x="417250" y="1491629"/>
-            <a:ext cx="4154750" cy="2735517"/>
-          </a:xfrm>
-          <a:prstGeom prst="rect">
-            <a:avLst/>
-          </a:prstGeom>
-          <a:noFill/>
-          <a:extLst>
-            <a:ext uri="{909E8E84-426E-40DD-AFC4-6F175D3DCCD1}">
-              <a14:hiddenFill xmlns:a14="http://schemas.microsoft.com/office/drawing/2010/main">
-                <a:solidFill>
-                  <a:srgbClr val="FFFFFF"/>
-                </a:solidFill>
-              </a14:hiddenFill>
-            </a:ext>
-          </a:extLst>
-        </p:spPr>
-      </p:pic>
-      <p:graphicFrame>
-        <p:nvGraphicFramePr>
-          <p:cNvPr id="4" name="Diagramm 3">
-            <a:extLst>
-              <a:ext uri="{FF2B5EF4-FFF2-40B4-BE49-F238E27FC236}">
-                <a16:creationId xmlns:a16="http://schemas.microsoft.com/office/drawing/2014/main" id="{3F828B5E-8A7A-C726-D77E-8A32421AE591}"/>
-              </a:ext>
-            </a:extLst>
-          </p:cNvPr>
-          <p:cNvGraphicFramePr/>
-          <p:nvPr>
-            <p:extLst>
-              <p:ext uri="{D42A27DB-BD31-4B8C-83A1-F6EECF244321}">
-                <p14:modId xmlns:p14="http://schemas.microsoft.com/office/powerpoint/2010/main" val="2225284288"/>
-              </p:ext>
-            </p:extLst>
-          </p:nvPr>
-        </p:nvGraphicFramePr>
-        <p:xfrm>
-          <a:off x="4572000" y="1328963"/>
-          <a:ext cx="3740458" cy="3112121"/>
-        </p:xfrm>
-        <a:graphic>
-          <a:graphicData uri="http://schemas.openxmlformats.org/drawingml/2006/chart">
-            <c:chart xmlns:c="http://schemas.openxmlformats.org/drawingml/2006/chart" xmlns:r="http://schemas.openxmlformats.org/officeDocument/2006/relationships" r:id="rId4"/>
-          </a:graphicData>
-        </a:graphic>
-      </p:graphicFrame>
-    </p:spTree>
-  </p:cSld>
-  <p:clrMapOvr>
-    <a:masterClrMapping/>
-  </p:clrMapOvr>
-  <p:transition spd="med"/>
-</p:sld>
-</file>
-
-<file path=ppt/slides/slide5.xml><?xml version="1.0" encoding="utf-8"?>
-<p:sld xmlns:a="http://schemas.openxmlformats.org/drawingml/2006/main" xmlns:r="http://schemas.openxmlformats.org/officeDocument/2006/relationships" xmlns:p="http://schemas.openxmlformats.org/presentationml/2006/main">
-  <p:cSld>
-    <p:spTree>
-      <p:nvGrpSpPr>
-        <p:cNvPr id="1" name=""/>
-        <p:cNvGrpSpPr/>
-        <p:nvPr/>
-      </p:nvGrpSpPr>
-      <p:grpSpPr>
-        <a:xfrm>
-          <a:off x="0" y="0"/>
-          <a:ext cx="0" cy="0"/>
-          <a:chOff x="0" y="0"/>
-          <a:chExt cx="0" cy="0"/>
-        </a:xfrm>
-      </p:grpSpPr>
-      <p:sp>
-        <p:nvSpPr>
-          <p:cNvPr id="236" name="Foliennummernplatzhalter 5"/>
-          <p:cNvSpPr txBox="1">
-            <a:spLocks noGrp="1"/>
-          </p:cNvSpPr>
-          <p:nvPr>
-            <p:ph type="sldNum" sz="quarter" idx="2"/>
-          </p:nvPr>
-        </p:nvSpPr>
-        <p:spPr>
-          <a:prstGeom prst="rect">
-            <a:avLst/>
-          </a:prstGeom>
-          <a:extLst>
-            <a:ext uri="{C572A759-6A51-4108-AA02-DFA0A04FC94B}">
-              <ma14:wrappingTextBoxFlag xmlns="" xmlns:m="http://schemas.openxmlformats.org/officeDocument/2006/math" xmlns:a14="http://schemas.microsoft.com/office/drawing/2010/main" xmlns:ma14="http://schemas.microsoft.com/office/mac/drawingml/2011/main" val="1"/>
-            </a:ext>
-          </a:extLst>
-        </p:spPr>
-        <p:txBody>
-          <a:bodyPr/>
-          <a:lstStyle/>
-          <a:p>
-            <a:fld id="{86CB4B4D-7CA3-9044-876B-883B54F8677D}" type="slidenum">
-              <a:rPr lang="en-GB" noProof="0" smtClean="0"/>
-              <a:t>5</a:t>
-            </a:fld>
-            <a:endParaRPr lang="en-GB" noProof="0" dirty="0"/>
-          </a:p>
-        </p:txBody>
-      </p:sp>
-      <p:sp>
-        <p:nvSpPr>
-          <p:cNvPr id="237" name="Titel 5"/>
-          <p:cNvSpPr txBox="1">
-            <a:spLocks noGrp="1"/>
-          </p:cNvSpPr>
-          <p:nvPr>
-            <p:ph type="title"/>
-          </p:nvPr>
-        </p:nvSpPr>
-        <p:spPr>
-          <a:prstGeom prst="rect">
-            <a:avLst/>
-          </a:prstGeom>
-        </p:spPr>
-        <p:txBody>
-          <a:bodyPr/>
-          <a:lstStyle/>
-          <a:p>
-            <a:r>
-              <a:rPr lang="en-GB" noProof="0" dirty="0"/>
-              <a:t>TPL Detection</a:t>
-            </a:r>
-          </a:p>
-        </p:txBody>
-      </p:sp>
-      <p:sp>
-        <p:nvSpPr>
-          <p:cNvPr id="238" name="Inhaltsplatzhalter 6"/>
-          <p:cNvSpPr txBox="1">
-            <a:spLocks noGrp="1"/>
-          </p:cNvSpPr>
-          <p:nvPr>
-            <p:ph type="body" idx="1"/>
-          </p:nvPr>
-        </p:nvSpPr>
-        <p:spPr>
-          <a:prstGeom prst="rect">
-            <a:avLst/>
-          </a:prstGeom>
-        </p:spPr>
-        <p:txBody>
-          <a:bodyPr/>
-          <a:lstStyle/>
-          <a:p>
-            <a:pPr marL="6350" indent="0">
-              <a:buNone/>
-            </a:pPr>
-            <a:endParaRPr lang="en-GB" noProof="0" dirty="0"/>
-          </a:p>
-        </p:txBody>
-      </p:sp>
-      <p:sp>
-        <p:nvSpPr>
-          <p:cNvPr id="239" name="Rechteck 2"/>
-          <p:cNvSpPr txBox="1"/>
-          <p:nvPr/>
-        </p:nvSpPr>
-        <p:spPr>
-          <a:xfrm>
-            <a:off x="955138" y="5000624"/>
-            <a:ext cx="6386695" cy="123111"/>
-          </a:xfrm>
-          <a:prstGeom prst="rect">
-            <a:avLst/>
-          </a:prstGeom>
-          <a:ln w="12700">
-            <a:miter lim="400000"/>
-          </a:ln>
-          <a:extLst>
-            <a:ext uri="{C572A759-6A51-4108-AA02-DFA0A04FC94B}">
-              <ma14:wrappingTextBoxFlag xmlns="" xmlns:m="http://schemas.openxmlformats.org/officeDocument/2006/math" xmlns:a14="http://schemas.microsoft.com/office/drawing/2010/main" xmlns:ma14="http://schemas.microsoft.com/office/mac/drawingml/2011/main" val="1"/>
-            </a:ext>
-          </a:extLst>
-        </p:spPr>
-        <p:txBody>
-          <a:bodyPr wrap="square" lIns="0" tIns="0" rIns="0" bIns="0">
-            <a:spAutoFit/>
-          </a:bodyPr>
-          <a:lstStyle>
-            <a:lvl1pPr>
-              <a:defRPr sz="800"/>
-            </a:lvl1pPr>
-          </a:lstStyle>
-          <a:p>
-            <a:r>
-              <a:rPr lang="en-GB" noProof="0" dirty="0"/>
-              <a:t>Zhan et al.: </a:t>
-            </a:r>
-            <a:r>
-              <a:rPr lang="en-US" dirty="0"/>
-              <a:t>The hidden complexities of Android TPL detection: An empirical analysis of techniques, challenges, and effectiveness, 2025</a:t>
-            </a:r>
-            <a:endParaRPr lang="en-GB" noProof="0" dirty="0"/>
-          </a:p>
-        </p:txBody>
-      </p:sp>
-      <p:pic>
-        <p:nvPicPr>
-          <p:cNvPr id="2054" name="Picture 6">
-            <a:extLst>
-              <a:ext uri="{FF2B5EF4-FFF2-40B4-BE49-F238E27FC236}">
-                <a16:creationId xmlns:a16="http://schemas.microsoft.com/office/drawing/2014/main" id="{26A42379-AA09-FB1F-E7D8-05CDC8016AFA}"/>
-              </a:ext>
-            </a:extLst>
-          </p:cNvPr>
-          <p:cNvPicPr>
-            <a:picLocks noChangeAspect="1" noChangeArrowheads="1"/>
-          </p:cNvPicPr>
-          <p:nvPr/>
-        </p:nvPicPr>
-        <p:blipFill>
-          <a:blip r:embed="rId3" cstate="print">
-            <a:extLst>
-              <a:ext uri="{28A0092B-C50C-407E-A947-70E740481C1C}">
-                <a14:useLocalDpi xmlns:a14="http://schemas.microsoft.com/office/drawing/2010/main" val="0"/>
-              </a:ext>
-            </a:extLst>
-          </a:blip>
-          <a:srcRect/>
-          <a:stretch>
-            <a:fillRect/>
-          </a:stretch>
-        </p:blipFill>
-        <p:spPr bwMode="auto">
-          <a:xfrm>
-            <a:off x="518348" y="1377992"/>
-            <a:ext cx="8014093" cy="3493644"/>
-          </a:xfrm>
-          <a:prstGeom prst="rect">
-            <a:avLst/>
-          </a:prstGeom>
-          <a:noFill/>
-          <a:extLst>
-            <a:ext uri="{909E8E84-426E-40DD-AFC4-6F175D3DCCD1}">
-              <a14:hiddenFill xmlns:a14="http://schemas.microsoft.com/office/drawing/2010/main">
-                <a:solidFill>
-                  <a:srgbClr val="FFFFFF"/>
-                </a:solidFill>
-              </a14:hiddenFill>
-            </a:ext>
-          </a:extLst>
-        </p:spPr>
-      </p:pic>
-    </p:spTree>
-  </p:cSld>
-  <p:clrMapOvr>
-    <a:masterClrMapping/>
-  </p:clrMapOvr>
-  <p:transition spd="med"/>
-</p:sld>
-</file>
-
-<file path=ppt/slides/slide6.xml><?xml version="1.0" encoding="utf-8"?>
-<p:sld xmlns:a="http://schemas.openxmlformats.org/drawingml/2006/main" xmlns:r="http://schemas.openxmlformats.org/officeDocument/2006/relationships" xmlns:p="http://schemas.openxmlformats.org/presentationml/2006/main">
-  <p:cSld>
-    <p:spTree>
-      <p:nvGrpSpPr>
-        <p:cNvPr id="1" name=""/>
-        <p:cNvGrpSpPr/>
-        <p:nvPr/>
-      </p:nvGrpSpPr>
-      <p:grpSpPr>
-        <a:xfrm>
-          <a:off x="0" y="0"/>
-          <a:ext cx="0" cy="0"/>
-          <a:chOff x="0" y="0"/>
-          <a:chExt cx="0" cy="0"/>
-        </a:xfrm>
-      </p:grpSpPr>
-      <p:sp>
-        <p:nvSpPr>
-          <p:cNvPr id="2" name="Titel 1">
-            <a:extLst>
-              <a:ext uri="{FF2B5EF4-FFF2-40B4-BE49-F238E27FC236}">
-                <a16:creationId xmlns:a16="http://schemas.microsoft.com/office/drawing/2014/main" id="{C5696F86-DE8C-D53D-6A9B-9D8CAD3C9263}"/>
-              </a:ext>
-            </a:extLst>
-          </p:cNvPr>
-          <p:cNvSpPr>
-            <a:spLocks noGrp="1"/>
-          </p:cNvSpPr>
-          <p:nvPr>
-            <p:ph type="title"/>
-          </p:nvPr>
-        </p:nvSpPr>
-        <p:spPr/>
-        <p:txBody>
-          <a:bodyPr/>
-          <a:lstStyle/>
-          <a:p>
-            <a:r>
-              <a:rPr lang="en-GB" noProof="0" dirty="0"/>
-              <a:t>Clustering-based Detection</a:t>
-            </a:r>
-          </a:p>
-        </p:txBody>
-      </p:sp>
-      <p:sp>
-        <p:nvSpPr>
-          <p:cNvPr id="3" name="Textplatzhalter 2">
-            <a:extLst>
-              <a:ext uri="{FF2B5EF4-FFF2-40B4-BE49-F238E27FC236}">
-                <a16:creationId xmlns:a16="http://schemas.microsoft.com/office/drawing/2014/main" id="{9985BDDE-FC19-30AE-F51A-0767894CD025}"/>
-              </a:ext>
-            </a:extLst>
-          </p:cNvPr>
-          <p:cNvSpPr>
-            <a:spLocks noGrp="1"/>
-          </p:cNvSpPr>
-          <p:nvPr>
-            <p:ph type="body" idx="1"/>
-          </p:nvPr>
-        </p:nvSpPr>
-        <p:spPr/>
-        <p:txBody>
-          <a:bodyPr>
-            <a:normAutofit/>
-          </a:bodyPr>
-          <a:lstStyle/>
-          <a:p>
-            <a:pPr>
-              <a:buFontTx/>
-              <a:buChar char="-"/>
-            </a:pPr>
-            <a:endParaRPr lang="en-GB" noProof="0" dirty="0"/>
-          </a:p>
-        </p:txBody>
-      </p:sp>
-      <p:sp>
-        <p:nvSpPr>
-          <p:cNvPr id="7" name="Rechteck 2">
-            <a:extLst>
-              <a:ext uri="{FF2B5EF4-FFF2-40B4-BE49-F238E27FC236}">
-                <a16:creationId xmlns:a16="http://schemas.microsoft.com/office/drawing/2014/main" id="{4B243EE4-1F38-7031-273F-20E9E88EC1E9}"/>
-              </a:ext>
-            </a:extLst>
-          </p:cNvPr>
-          <p:cNvSpPr txBox="1"/>
-          <p:nvPr/>
-        </p:nvSpPr>
-        <p:spPr>
-          <a:xfrm>
-            <a:off x="1291658" y="5020389"/>
-            <a:ext cx="5516683" cy="123111"/>
-          </a:xfrm>
-          <a:prstGeom prst="rect">
-            <a:avLst/>
-          </a:prstGeom>
-          <a:ln w="12700">
-            <a:miter lim="400000"/>
-          </a:ln>
-          <a:extLst>
-            <a:ext uri="{C572A759-6A51-4108-AA02-DFA0A04FC94B}">
-              <ma14:wrappingTextBoxFlag xmlns="" xmlns:m="http://schemas.openxmlformats.org/officeDocument/2006/math" xmlns:a14="http://schemas.microsoft.com/office/drawing/2010/main" xmlns:ma14="http://schemas.microsoft.com/office/mac/drawingml/2011/main" val="1"/>
-            </a:ext>
-          </a:extLst>
-        </p:spPr>
-        <p:txBody>
-          <a:bodyPr wrap="square" lIns="0" tIns="0" rIns="0" bIns="0">
-            <a:spAutoFit/>
-          </a:bodyPr>
-          <a:lstStyle>
-            <a:lvl1pPr>
-              <a:defRPr sz="800"/>
-            </a:lvl1pPr>
-          </a:lstStyle>
-          <a:p>
-            <a:r>
-              <a:rPr lang="en-GB" noProof="0" dirty="0" err="1"/>
-              <a:t>Ziang</a:t>
-            </a:r>
-            <a:r>
-              <a:rPr lang="en-GB" noProof="0" dirty="0"/>
-              <a:t> et al.</a:t>
-            </a:r>
-            <a:r>
-              <a:rPr lang="en-GB" dirty="0"/>
-              <a:t>: </a:t>
-            </a:r>
-            <a:r>
-              <a:rPr lang="en-US" dirty="0" err="1"/>
-              <a:t>LibRadar</a:t>
-            </a:r>
-            <a:r>
-              <a:rPr lang="en-US" dirty="0"/>
-              <a:t>: Fast and Accurate Detection of Third-party Libraries in Android Apps, 2016</a:t>
-            </a:r>
-            <a:endParaRPr lang="en-GB" noProof="0" dirty="0"/>
-          </a:p>
-        </p:txBody>
-      </p:sp>
-      <p:pic>
-        <p:nvPicPr>
-          <p:cNvPr id="8" name="Grafik 7">
-            <a:extLst>
-              <a:ext uri="{FF2B5EF4-FFF2-40B4-BE49-F238E27FC236}">
-                <a16:creationId xmlns:a16="http://schemas.microsoft.com/office/drawing/2014/main" id="{7A85C087-F4D6-F5E8-389D-78C25915F533}"/>
-              </a:ext>
-            </a:extLst>
-          </p:cNvPr>
-          <p:cNvPicPr>
-            <a:picLocks noChangeAspect="1"/>
-          </p:cNvPicPr>
-          <p:nvPr/>
-        </p:nvPicPr>
-        <p:blipFill>
-          <a:blip r:embed="rId3"/>
-          <a:stretch>
-            <a:fillRect/>
-          </a:stretch>
-        </p:blipFill>
-        <p:spPr>
-          <a:xfrm>
-            <a:off x="294502" y="1310096"/>
-            <a:ext cx="8309499" cy="3629436"/>
-          </a:xfrm>
-          <a:prstGeom prst="rect">
-            <a:avLst/>
-          </a:prstGeom>
-        </p:spPr>
-      </p:pic>
-    </p:spTree>
-    <p:extLst>
-      <p:ext uri="{BB962C8B-B14F-4D97-AF65-F5344CB8AC3E}">
-        <p14:creationId xmlns:p14="http://schemas.microsoft.com/office/powerpoint/2010/main" val="2721240723"/>
-      </p:ext>
-    </p:extLst>
-  </p:cSld>
-  <p:clrMapOvr>
-    <a:masterClrMapping/>
-  </p:clrMapOvr>
-  <p:transition spd="med"/>
-</p:sld>
-</file>
-
-<file path=ppt/slides/slide7.xml><?xml version="1.0" encoding="utf-8"?>
-<p:sld xmlns:a="http://schemas.openxmlformats.org/drawingml/2006/main" xmlns:r="http://schemas.openxmlformats.org/officeDocument/2006/relationships" xmlns:p="http://schemas.openxmlformats.org/presentationml/2006/main">
-  <p:cSld>
-    <p:spTree>
-      <p:nvGrpSpPr>
-        <p:cNvPr id="1" name=""/>
-        <p:cNvGrpSpPr/>
-        <p:nvPr/>
-      </p:nvGrpSpPr>
-      <p:grpSpPr>
-        <a:xfrm>
-          <a:off x="0" y="0"/>
-          <a:ext cx="0" cy="0"/>
-          <a:chOff x="0" y="0"/>
-          <a:chExt cx="0" cy="0"/>
-        </a:xfrm>
-      </p:grpSpPr>
-      <p:sp>
-        <p:nvSpPr>
-          <p:cNvPr id="2" name="Titel 1">
-            <a:extLst>
-              <a:ext uri="{FF2B5EF4-FFF2-40B4-BE49-F238E27FC236}">
-                <a16:creationId xmlns:a16="http://schemas.microsoft.com/office/drawing/2014/main" id="{0B67EE2C-AF7A-5600-CFB0-6E240E6995D7}"/>
-              </a:ext>
-            </a:extLst>
-          </p:cNvPr>
-          <p:cNvSpPr>
-            <a:spLocks noGrp="1"/>
-          </p:cNvSpPr>
-          <p:nvPr>
-            <p:ph type="title"/>
-          </p:nvPr>
-        </p:nvSpPr>
-        <p:spPr/>
-        <p:txBody>
-          <a:bodyPr/>
-          <a:lstStyle/>
-          <a:p>
-            <a:r>
-              <a:rPr lang="de-CH" dirty="0"/>
-              <a:t>Clustering-</a:t>
-            </a:r>
-            <a:r>
-              <a:rPr lang="de-CH" dirty="0" err="1"/>
-              <a:t>based</a:t>
-            </a:r>
-            <a:r>
-              <a:rPr lang="de-CH" dirty="0"/>
-              <a:t> </a:t>
-            </a:r>
-            <a:r>
-              <a:rPr lang="de-CH" dirty="0" err="1"/>
-              <a:t>Detection</a:t>
-            </a:r>
-            <a:endParaRPr lang="de-CH" dirty="0"/>
-          </a:p>
-        </p:txBody>
-      </p:sp>
-      <p:sp>
-        <p:nvSpPr>
-          <p:cNvPr id="3" name="Textplatzhalter 2">
-            <a:extLst>
-              <a:ext uri="{FF2B5EF4-FFF2-40B4-BE49-F238E27FC236}">
-                <a16:creationId xmlns:a16="http://schemas.microsoft.com/office/drawing/2014/main" id="{C5D4016E-723D-48C8-A736-8F24BC845E48}"/>
-              </a:ext>
-            </a:extLst>
-          </p:cNvPr>
-          <p:cNvSpPr>
-            <a:spLocks noGrp="1"/>
-          </p:cNvSpPr>
-          <p:nvPr>
-            <p:ph type="body" idx="1"/>
-          </p:nvPr>
-        </p:nvSpPr>
-        <p:spPr/>
-        <p:txBody>
-          <a:bodyPr/>
-          <a:lstStyle/>
-          <a:p>
-            <a:endParaRPr lang="de-CH"/>
-          </a:p>
-        </p:txBody>
-      </p:sp>
-      <p:pic>
-        <p:nvPicPr>
-          <p:cNvPr id="5" name="Grafik 4">
-            <a:extLst>
-              <a:ext uri="{FF2B5EF4-FFF2-40B4-BE49-F238E27FC236}">
-                <a16:creationId xmlns:a16="http://schemas.microsoft.com/office/drawing/2014/main" id="{A0F98BD9-E8A7-F912-BF54-45C0BB82CBC4}"/>
-              </a:ext>
-            </a:extLst>
-          </p:cNvPr>
-          <p:cNvPicPr>
-            <a:picLocks noChangeAspect="1"/>
-          </p:cNvPicPr>
-          <p:nvPr/>
-        </p:nvPicPr>
-        <p:blipFill>
-          <a:blip r:embed="rId3"/>
-          <a:stretch>
-            <a:fillRect/>
-          </a:stretch>
-        </p:blipFill>
-        <p:spPr>
-          <a:xfrm>
-            <a:off x="539999" y="1491629"/>
-            <a:ext cx="7744906" cy="2886478"/>
-          </a:xfrm>
-          <a:prstGeom prst="rect">
-            <a:avLst/>
-          </a:prstGeom>
-        </p:spPr>
-      </p:pic>
-      <p:sp>
-        <p:nvSpPr>
-          <p:cNvPr id="6" name="Rechteck 2">
-            <a:extLst>
-              <a:ext uri="{FF2B5EF4-FFF2-40B4-BE49-F238E27FC236}">
-                <a16:creationId xmlns:a16="http://schemas.microsoft.com/office/drawing/2014/main" id="{F5BB4CCA-8F72-ED1B-4694-7FA43E6D4517}"/>
-              </a:ext>
-            </a:extLst>
-          </p:cNvPr>
-          <p:cNvSpPr txBox="1"/>
-          <p:nvPr/>
-        </p:nvSpPr>
-        <p:spPr>
-          <a:xfrm>
-            <a:off x="1291658" y="5014782"/>
-            <a:ext cx="5516683" cy="123111"/>
-          </a:xfrm>
-          <a:prstGeom prst="rect">
-            <a:avLst/>
-          </a:prstGeom>
-          <a:ln w="12700">
-            <a:miter lim="400000"/>
-          </a:ln>
-          <a:extLst>
-            <a:ext uri="{C572A759-6A51-4108-AA02-DFA0A04FC94B}">
-              <ma14:wrappingTextBoxFlag xmlns="" xmlns:m="http://schemas.openxmlformats.org/officeDocument/2006/math" xmlns:a14="http://schemas.microsoft.com/office/drawing/2010/main" xmlns:ma14="http://schemas.microsoft.com/office/mac/drawingml/2011/main" val="1"/>
-            </a:ext>
-          </a:extLst>
-        </p:spPr>
-        <p:txBody>
-          <a:bodyPr wrap="square" lIns="0" tIns="0" rIns="0" bIns="0">
-            <a:spAutoFit/>
-          </a:bodyPr>
-          <a:lstStyle>
-            <a:lvl1pPr>
-              <a:defRPr sz="800"/>
-            </a:lvl1pPr>
-          </a:lstStyle>
-          <a:p>
-            <a:r>
-              <a:rPr lang="en-GB" noProof="0" dirty="0" err="1"/>
-              <a:t>Ziang</a:t>
-            </a:r>
-            <a:r>
-              <a:rPr lang="en-GB" noProof="0" dirty="0"/>
-              <a:t> et al.</a:t>
-            </a:r>
-            <a:r>
-              <a:rPr lang="en-GB" dirty="0"/>
-              <a:t>: </a:t>
-            </a:r>
-            <a:r>
-              <a:rPr lang="en-US" dirty="0" err="1"/>
-              <a:t>LibRadar</a:t>
-            </a:r>
-            <a:r>
-              <a:rPr lang="en-US" dirty="0"/>
-              <a:t>: Fast and Accurate Detection of Third-party Libraries in Android Apps, 2016</a:t>
-            </a:r>
-            <a:endParaRPr lang="en-GB" noProof="0" dirty="0"/>
-          </a:p>
-        </p:txBody>
-      </p:sp>
-    </p:spTree>
-    <p:extLst>
-      <p:ext uri="{BB962C8B-B14F-4D97-AF65-F5344CB8AC3E}">
-        <p14:creationId xmlns:p14="http://schemas.microsoft.com/office/powerpoint/2010/main" val="2871248524"/>
-      </p:ext>
-    </p:extLst>
-  </p:cSld>
-  <p:clrMapOvr>
-    <a:masterClrMapping/>
-  </p:clrMapOvr>
-  <p:transition spd="med"/>
-</p:sld>
-</file>
-
-<file path=ppt/slides/slide8.xml><?xml version="1.0" encoding="utf-8"?>
-<p:sld xmlns:a="http://schemas.openxmlformats.org/drawingml/2006/main" xmlns:r="http://schemas.openxmlformats.org/officeDocument/2006/relationships" xmlns:p="http://schemas.openxmlformats.org/presentationml/2006/main">
-  <p:cSld>
-    <p:spTree>
-      <p:nvGrpSpPr>
-        <p:cNvPr id="1" name=""/>
-        <p:cNvGrpSpPr/>
-        <p:nvPr/>
-      </p:nvGrpSpPr>
-      <p:grpSpPr>
-        <a:xfrm>
-          <a:off x="0" y="0"/>
-          <a:ext cx="0" cy="0"/>
-          <a:chOff x="0" y="0"/>
-          <a:chExt cx="0" cy="0"/>
-        </a:xfrm>
-      </p:grpSpPr>
-      <p:sp>
-        <p:nvSpPr>
-          <p:cNvPr id="2" name="Titel 1">
-            <a:extLst>
-              <a:ext uri="{FF2B5EF4-FFF2-40B4-BE49-F238E27FC236}">
-                <a16:creationId xmlns:a16="http://schemas.microsoft.com/office/drawing/2014/main" id="{0434E59A-15D9-FBDD-17E7-CE1752E0D26F}"/>
-              </a:ext>
-            </a:extLst>
-          </p:cNvPr>
-          <p:cNvSpPr>
-            <a:spLocks noGrp="1"/>
-          </p:cNvSpPr>
-          <p:nvPr>
-            <p:ph type="title"/>
-          </p:nvPr>
-        </p:nvSpPr>
-        <p:spPr/>
-        <p:txBody>
-          <a:bodyPr/>
-          <a:lstStyle/>
-          <a:p>
-            <a:r>
-              <a:rPr lang="de-CH" dirty="0"/>
-              <a:t>Clustering-</a:t>
-            </a:r>
-            <a:r>
-              <a:rPr lang="de-CH" dirty="0" err="1"/>
-              <a:t>based</a:t>
-            </a:r>
-            <a:r>
-              <a:rPr lang="de-CH" dirty="0"/>
-              <a:t> </a:t>
-            </a:r>
-            <a:r>
-              <a:rPr lang="de-CH" dirty="0" err="1"/>
-              <a:t>Detection</a:t>
-            </a:r>
-            <a:endParaRPr lang="de-CH" dirty="0"/>
-          </a:p>
-        </p:txBody>
-      </p:sp>
-      <p:sp>
-        <p:nvSpPr>
-          <p:cNvPr id="3" name="Textplatzhalter 2">
-            <a:extLst>
-              <a:ext uri="{FF2B5EF4-FFF2-40B4-BE49-F238E27FC236}">
-                <a16:creationId xmlns:a16="http://schemas.microsoft.com/office/drawing/2014/main" id="{E949BD17-E17F-0022-57B2-B7B16E8777E7}"/>
-              </a:ext>
-            </a:extLst>
-          </p:cNvPr>
-          <p:cNvSpPr>
-            <a:spLocks noGrp="1"/>
-          </p:cNvSpPr>
-          <p:nvPr>
-            <p:ph type="body" idx="1"/>
-          </p:nvPr>
-        </p:nvSpPr>
-        <p:spPr/>
-        <p:txBody>
-          <a:bodyPr/>
-          <a:lstStyle/>
-          <a:p>
-            <a:endParaRPr lang="de-CH"/>
-          </a:p>
-        </p:txBody>
-      </p:sp>
-      <p:pic>
-        <p:nvPicPr>
-          <p:cNvPr id="5" name="Grafik 4">
-            <a:extLst>
-              <a:ext uri="{FF2B5EF4-FFF2-40B4-BE49-F238E27FC236}">
-                <a16:creationId xmlns:a16="http://schemas.microsoft.com/office/drawing/2014/main" id="{64113613-5B6A-44DC-6B49-EE7A72C9AE64}"/>
-              </a:ext>
-            </a:extLst>
-          </p:cNvPr>
-          <p:cNvPicPr>
-            <a:picLocks noChangeAspect="1"/>
-          </p:cNvPicPr>
-          <p:nvPr/>
-        </p:nvPicPr>
-        <p:blipFill>
-          <a:blip r:embed="rId3"/>
-          <a:stretch>
-            <a:fillRect/>
-          </a:stretch>
-        </p:blipFill>
-        <p:spPr>
-          <a:xfrm>
-            <a:off x="1290931" y="1458417"/>
-            <a:ext cx="6490577" cy="3332793"/>
-          </a:xfrm>
-          <a:prstGeom prst="rect">
-            <a:avLst/>
-          </a:prstGeom>
-        </p:spPr>
-      </p:pic>
-      <p:sp>
-        <p:nvSpPr>
-          <p:cNvPr id="6" name="Rechteck 2">
-            <a:extLst>
-              <a:ext uri="{FF2B5EF4-FFF2-40B4-BE49-F238E27FC236}">
-                <a16:creationId xmlns:a16="http://schemas.microsoft.com/office/drawing/2014/main" id="{F47631AF-B6EF-5E4E-542F-E63D82AB6AE2}"/>
-              </a:ext>
-            </a:extLst>
-          </p:cNvPr>
-          <p:cNvSpPr txBox="1"/>
-          <p:nvPr/>
-        </p:nvSpPr>
-        <p:spPr>
-          <a:xfrm>
-            <a:off x="717552" y="5020389"/>
-            <a:ext cx="5516683" cy="123111"/>
-          </a:xfrm>
-          <a:prstGeom prst="rect">
-            <a:avLst/>
-          </a:prstGeom>
-          <a:ln w="12700">
-            <a:miter lim="400000"/>
-          </a:ln>
-          <a:extLst>
-            <a:ext uri="{C572A759-6A51-4108-AA02-DFA0A04FC94B}">
-              <ma14:wrappingTextBoxFlag xmlns="" xmlns:m="http://schemas.openxmlformats.org/officeDocument/2006/math" xmlns:a14="http://schemas.microsoft.com/office/drawing/2010/main" xmlns:ma14="http://schemas.microsoft.com/office/mac/drawingml/2011/main" val="1"/>
-            </a:ext>
-          </a:extLst>
-        </p:spPr>
-        <p:txBody>
-          <a:bodyPr wrap="square" lIns="0" tIns="0" rIns="0" bIns="0">
-            <a:spAutoFit/>
-          </a:bodyPr>
-          <a:lstStyle>
-            <a:lvl1pPr>
-              <a:defRPr sz="800"/>
-            </a:lvl1pPr>
-          </a:lstStyle>
-          <a:p>
-            <a:r>
-              <a:rPr lang="en-GB" noProof="0" dirty="0" err="1"/>
-              <a:t>Ziang</a:t>
-            </a:r>
-            <a:r>
-              <a:rPr lang="en-GB" noProof="0" dirty="0"/>
-              <a:t> et al.</a:t>
-            </a:r>
-            <a:r>
-              <a:rPr lang="en-GB" dirty="0"/>
-              <a:t>: </a:t>
-            </a:r>
-            <a:r>
-              <a:rPr lang="en-US" dirty="0" err="1"/>
-              <a:t>LibRadar</a:t>
-            </a:r>
-            <a:r>
-              <a:rPr lang="en-US" dirty="0"/>
-              <a:t>: Fast and Accurate Detection of Third-party Libraries in Android Apps, 2016</a:t>
-            </a:r>
-            <a:endParaRPr lang="en-GB" noProof="0" dirty="0"/>
-          </a:p>
-        </p:txBody>
-      </p:sp>
-    </p:spTree>
-    <p:extLst>
-      <p:ext uri="{BB962C8B-B14F-4D97-AF65-F5344CB8AC3E}">
-        <p14:creationId xmlns:p14="http://schemas.microsoft.com/office/powerpoint/2010/main" val="3217228714"/>
-      </p:ext>
-    </p:extLst>
-  </p:cSld>
-  <p:clrMapOvr>
-    <a:masterClrMapping/>
-  </p:clrMapOvr>
-  <p:transition spd="med"/>
-</p:sld>
-</file>
-
-<file path=ppt/slides/slide9.xml><?xml version="1.0" encoding="utf-8"?>
-<p:sld xmlns:a="http://schemas.openxmlformats.org/drawingml/2006/main" xmlns:r="http://schemas.openxmlformats.org/officeDocument/2006/relationships" xmlns:p="http://schemas.openxmlformats.org/presentationml/2006/main">
-  <p:cSld>
-    <p:spTree>
-      <p:nvGrpSpPr>
-        <p:cNvPr id="1" name=""/>
-        <p:cNvGrpSpPr/>
-        <p:nvPr/>
-      </p:nvGrpSpPr>
-      <p:grpSpPr>
-        <a:xfrm>
-          <a:off x="0" y="0"/>
-          <a:ext cx="0" cy="0"/>
-          <a:chOff x="0" y="0"/>
-          <a:chExt cx="0" cy="0"/>
-        </a:xfrm>
-      </p:grpSpPr>
-      <p:sp>
-        <p:nvSpPr>
-          <p:cNvPr id="2" name="Titel 1">
-            <a:extLst>
-              <a:ext uri="{FF2B5EF4-FFF2-40B4-BE49-F238E27FC236}">
-                <a16:creationId xmlns:a16="http://schemas.microsoft.com/office/drawing/2014/main" id="{3624D6FC-1DB7-E084-2BD2-88A7729BD652}"/>
-              </a:ext>
-            </a:extLst>
-          </p:cNvPr>
-          <p:cNvSpPr>
-            <a:spLocks noGrp="1"/>
-          </p:cNvSpPr>
-          <p:nvPr>
-            <p:ph type="title"/>
-          </p:nvPr>
-        </p:nvSpPr>
-        <p:spPr/>
-        <p:txBody>
-          <a:bodyPr/>
-          <a:lstStyle/>
-          <a:p>
-            <a:r>
-              <a:rPr lang="en-GB" noProof="0" dirty="0"/>
-              <a:t>Similarity-based Detection</a:t>
-            </a:r>
-          </a:p>
-        </p:txBody>
-      </p:sp>
-      <p:sp>
-        <p:nvSpPr>
-          <p:cNvPr id="3" name="Textplatzhalter 2">
-            <a:extLst>
-              <a:ext uri="{FF2B5EF4-FFF2-40B4-BE49-F238E27FC236}">
-                <a16:creationId xmlns:a16="http://schemas.microsoft.com/office/drawing/2014/main" id="{D069624F-879D-E669-2B6A-9A7EA31E1A16}"/>
-              </a:ext>
-            </a:extLst>
-          </p:cNvPr>
-          <p:cNvSpPr>
-            <a:spLocks noGrp="1"/>
-          </p:cNvSpPr>
-          <p:nvPr>
-            <p:ph type="body" idx="1"/>
-          </p:nvPr>
-        </p:nvSpPr>
-        <p:spPr/>
-        <p:txBody>
-          <a:bodyPr>
-            <a:normAutofit/>
-          </a:bodyPr>
-          <a:lstStyle/>
-          <a:p>
-            <a:pPr>
-              <a:buFontTx/>
-              <a:buChar char="-"/>
-            </a:pPr>
-            <a:endParaRPr lang="en-GB" noProof="0" dirty="0"/>
-          </a:p>
-          <a:p>
-            <a:pPr>
-              <a:buFontTx/>
-              <a:buChar char="-"/>
-            </a:pPr>
-            <a:endParaRPr lang="en-GB" noProof="0" dirty="0"/>
-          </a:p>
-        </p:txBody>
-      </p:sp>
-      <p:sp>
-        <p:nvSpPr>
-          <p:cNvPr id="7" name="Rechteck 2">
-            <a:extLst>
-              <a:ext uri="{FF2B5EF4-FFF2-40B4-BE49-F238E27FC236}">
-                <a16:creationId xmlns:a16="http://schemas.microsoft.com/office/drawing/2014/main" id="{8B259E80-764E-08C9-1206-E488BD4CED2F}"/>
-              </a:ext>
-            </a:extLst>
-          </p:cNvPr>
-          <p:cNvSpPr txBox="1"/>
-          <p:nvPr/>
-        </p:nvSpPr>
-        <p:spPr>
-          <a:xfrm>
-            <a:off x="502379" y="4989250"/>
-            <a:ext cx="6466592" cy="123111"/>
-          </a:xfrm>
-          <a:prstGeom prst="rect">
-            <a:avLst/>
-          </a:prstGeom>
-          <a:ln w="12700">
-            <a:miter lim="400000"/>
-          </a:ln>
-          <a:extLst>
-            <a:ext uri="{C572A759-6A51-4108-AA02-DFA0A04FC94B}">
-              <ma14:wrappingTextBoxFlag xmlns="" xmlns:m="http://schemas.openxmlformats.org/officeDocument/2006/math" xmlns:a14="http://schemas.microsoft.com/office/drawing/2010/main" xmlns:ma14="http://schemas.microsoft.com/office/mac/drawingml/2011/main" val="1"/>
-            </a:ext>
-          </a:extLst>
-        </p:spPr>
-        <p:txBody>
-          <a:bodyPr wrap="square" lIns="0" tIns="0" rIns="0" bIns="0">
-            <a:spAutoFit/>
-          </a:bodyPr>
-          <a:lstStyle>
-            <a:lvl1pPr>
-              <a:defRPr sz="800"/>
-            </a:lvl1pPr>
-          </a:lstStyle>
-          <a:p>
-            <a:r>
-              <a:rPr lang="en-GB" noProof="0" dirty="0"/>
-              <a:t>Wu et al: </a:t>
-            </a:r>
-            <a:r>
-              <a:rPr lang="en-US" dirty="0" err="1"/>
-              <a:t>LibScan</a:t>
-            </a:r>
-            <a:r>
-              <a:rPr lang="en-US" dirty="0"/>
-              <a:t>: Towards More Precise Third-Party Library Identification for Android Applications, 2023</a:t>
-            </a:r>
-            <a:endParaRPr lang="en-GB" noProof="0" dirty="0"/>
-          </a:p>
-        </p:txBody>
-      </p:sp>
-      <p:pic>
-        <p:nvPicPr>
-          <p:cNvPr id="5" name="Grafik 4">
-            <a:extLst>
-              <a:ext uri="{FF2B5EF4-FFF2-40B4-BE49-F238E27FC236}">
-                <a16:creationId xmlns:a16="http://schemas.microsoft.com/office/drawing/2014/main" id="{48A94FF4-0804-09D2-778B-0042740D30E4}"/>
-              </a:ext>
-            </a:extLst>
-          </p:cNvPr>
-          <p:cNvPicPr>
-            <a:picLocks noChangeAspect="1"/>
-          </p:cNvPicPr>
-          <p:nvPr/>
-        </p:nvPicPr>
-        <p:blipFill>
-          <a:blip r:embed="rId3"/>
-          <a:stretch>
-            <a:fillRect/>
-          </a:stretch>
-        </p:blipFill>
-        <p:spPr>
-          <a:xfrm>
-            <a:off x="0" y="1776445"/>
-            <a:ext cx="9144000" cy="2523531"/>
-          </a:xfrm>
-          <a:prstGeom prst="rect">
-            <a:avLst/>
-          </a:prstGeom>
-        </p:spPr>
-      </p:pic>
-    </p:spTree>
-    <p:extLst>
-      <p:ext uri="{BB962C8B-B14F-4D97-AF65-F5344CB8AC3E}">
-        <p14:creationId xmlns:p14="http://schemas.microsoft.com/office/powerpoint/2010/main" val="3047920506"/>
-      </p:ext>
-    </p:extLst>
-  </p:cSld>
-  <p:clrMapOvr>
-    <a:masterClrMapping/>
-  </p:clrMapOvr>
-  <p:transition spd="med"/>
 </p:sld>
 </file>
 
